--- a/docs/plots/carbo/jx_carbo_linsubhr_ratio_hosp6.pptx
+++ b/docs/plots/carbo/jx_carbo_linsubhr_ratio_hosp6.pptx
@@ -3003,473 +3003,488 @@
           <p:spPr>
             <a:xfrm>
               <a:off x="817517" y="1896563"/>
-              <a:ext cx="7370972" cy="3648844"/>
+              <a:ext cx="7370972" cy="3651155"/>
             </a:xfrm>
             <a:custGeom>
               <a:avLst/>
               <a:pathLst>
-                <a:path w="7370972" h="3648844">
+                <a:path w="7370972" h="3651155">
                   <a:moveTo>
-                    <a:pt x="2334078" y="0"/>
+                    <a:pt x="2488999" y="0"/>
                   </a:moveTo>
                   <a:lnTo>
-                    <a:pt x="2402393" y="326786"/>
-                  </a:lnTo>
-                  <a:lnTo>
-                    <a:pt x="2480027" y="660849"/>
-                  </a:lnTo>
-                  <a:lnTo>
-                    <a:pt x="2557661" y="961357"/>
-                  </a:lnTo>
-                  <a:lnTo>
-                    <a:pt x="2635295" y="1231681"/>
-                  </a:lnTo>
-                  <a:lnTo>
-                    <a:pt x="2712930" y="1474853"/>
-                  </a:lnTo>
-                  <a:lnTo>
-                    <a:pt x="2790564" y="1693599"/>
-                  </a:lnTo>
-                  <a:lnTo>
-                    <a:pt x="2868198" y="1890374"/>
-                  </a:lnTo>
-                  <a:lnTo>
-                    <a:pt x="2945832" y="2067384"/>
-                  </a:lnTo>
-                  <a:lnTo>
-                    <a:pt x="3023466" y="2226614"/>
-                  </a:lnTo>
-                  <a:lnTo>
-                    <a:pt x="3101100" y="2369850"/>
-                  </a:lnTo>
-                  <a:lnTo>
-                    <a:pt x="3178734" y="2498699"/>
-                  </a:lnTo>
-                  <a:lnTo>
-                    <a:pt x="3256368" y="2614606"/>
-                  </a:lnTo>
-                  <a:lnTo>
-                    <a:pt x="3334002" y="2718871"/>
-                  </a:lnTo>
-                  <a:lnTo>
-                    <a:pt x="3411636" y="2773032"/>
-                  </a:lnTo>
-                  <a:lnTo>
-                    <a:pt x="3489270" y="2742062"/>
-                  </a:lnTo>
-                  <a:lnTo>
-                    <a:pt x="3566904" y="2710000"/>
-                  </a:lnTo>
-                  <a:lnTo>
-                    <a:pt x="3644538" y="2676810"/>
-                  </a:lnTo>
-                  <a:lnTo>
-                    <a:pt x="3722172" y="2642452"/>
-                  </a:lnTo>
-                  <a:lnTo>
-                    <a:pt x="3799806" y="2606883"/>
-                  </a:lnTo>
-                  <a:lnTo>
-                    <a:pt x="3877440" y="2570062"/>
-                  </a:lnTo>
-                  <a:lnTo>
-                    <a:pt x="3955074" y="2531945"/>
-                  </a:lnTo>
-                  <a:lnTo>
-                    <a:pt x="4032708" y="2492486"/>
-                  </a:lnTo>
-                  <a:lnTo>
-                    <a:pt x="4110342" y="2451637"/>
-                  </a:lnTo>
-                  <a:lnTo>
-                    <a:pt x="4187976" y="2409350"/>
-                  </a:lnTo>
-                  <a:lnTo>
-                    <a:pt x="4265610" y="2365574"/>
-                  </a:lnTo>
-                  <a:lnTo>
-                    <a:pt x="4343244" y="2320257"/>
-                  </a:lnTo>
-                  <a:lnTo>
-                    <a:pt x="4420879" y="2273344"/>
-                  </a:lnTo>
-                  <a:lnTo>
-                    <a:pt x="4498513" y="2224780"/>
-                  </a:lnTo>
-                  <a:lnTo>
-                    <a:pt x="4576147" y="2174505"/>
-                  </a:lnTo>
-                  <a:lnTo>
-                    <a:pt x="4653781" y="2122461"/>
-                  </a:lnTo>
-                  <a:lnTo>
-                    <a:pt x="4731415" y="2068584"/>
-                  </a:lnTo>
-                  <a:lnTo>
-                    <a:pt x="4809049" y="2012810"/>
-                  </a:lnTo>
-                  <a:lnTo>
-                    <a:pt x="4886683" y="1955072"/>
-                  </a:lnTo>
-                  <a:lnTo>
-                    <a:pt x="4964317" y="1895301"/>
-                  </a:lnTo>
-                  <a:lnTo>
-                    <a:pt x="5041951" y="1833426"/>
-                  </a:lnTo>
-                  <a:lnTo>
-                    <a:pt x="5119585" y="1769372"/>
-                  </a:lnTo>
-                  <a:lnTo>
-                    <a:pt x="5197219" y="1703062"/>
-                  </a:lnTo>
-                  <a:lnTo>
-                    <a:pt x="5274853" y="1634419"/>
-                  </a:lnTo>
-                  <a:lnTo>
-                    <a:pt x="5352487" y="1563358"/>
-                  </a:lnTo>
-                  <a:lnTo>
-                    <a:pt x="5430121" y="1489795"/>
-                  </a:lnTo>
-                  <a:lnTo>
-                    <a:pt x="5507755" y="1413642"/>
-                  </a:lnTo>
-                  <a:lnTo>
-                    <a:pt x="5585389" y="1334807"/>
-                  </a:lnTo>
-                  <a:lnTo>
-                    <a:pt x="5663023" y="1253197"/>
-                  </a:lnTo>
-                  <a:lnTo>
-                    <a:pt x="5740657" y="1168714"/>
-                  </a:lnTo>
-                  <a:lnTo>
-                    <a:pt x="5818291" y="1081256"/>
-                  </a:lnTo>
-                  <a:lnTo>
-                    <a:pt x="5895925" y="990718"/>
-                  </a:lnTo>
-                  <a:lnTo>
-                    <a:pt x="5973559" y="896993"/>
-                  </a:lnTo>
-                  <a:lnTo>
-                    <a:pt x="6051193" y="799968"/>
-                  </a:lnTo>
-                  <a:lnTo>
-                    <a:pt x="6128827" y="699526"/>
-                  </a:lnTo>
-                  <a:lnTo>
-                    <a:pt x="6206462" y="595548"/>
-                  </a:lnTo>
-                  <a:lnTo>
-                    <a:pt x="6284096" y="487909"/>
-                  </a:lnTo>
-                  <a:lnTo>
-                    <a:pt x="6361730" y="376480"/>
-                  </a:lnTo>
-                  <a:lnTo>
-                    <a:pt x="6439364" y="261127"/>
-                  </a:lnTo>
-                  <a:lnTo>
-                    <a:pt x="6516998" y="141714"/>
-                  </a:lnTo>
-                  <a:lnTo>
-                    <a:pt x="6594632" y="18095"/>
-                  </a:lnTo>
-                  <a:lnTo>
-                    <a:pt x="6605610" y="0"/>
+                    <a:pt x="2557661" y="382235"/>
+                  </a:lnTo>
+                  <a:lnTo>
+                    <a:pt x="2635295" y="763969"/>
+                  </a:lnTo>
+                  <a:lnTo>
+                    <a:pt x="2712930" y="1101145"/>
+                  </a:lnTo>
+                  <a:lnTo>
+                    <a:pt x="2790564" y="1398964"/>
+                  </a:lnTo>
+                  <a:lnTo>
+                    <a:pt x="2868198" y="1662021"/>
+                  </a:lnTo>
+                  <a:lnTo>
+                    <a:pt x="2945832" y="1894373"/>
+                  </a:lnTo>
+                  <a:lnTo>
+                    <a:pt x="3023466" y="2099605"/>
+                  </a:lnTo>
+                  <a:lnTo>
+                    <a:pt x="3101100" y="2280881"/>
+                  </a:lnTo>
+                  <a:lnTo>
+                    <a:pt x="3178734" y="2440997"/>
+                  </a:lnTo>
+                  <a:lnTo>
+                    <a:pt x="3256368" y="2582425"/>
+                  </a:lnTo>
+                  <a:lnTo>
+                    <a:pt x="3334002" y="2707344"/>
+                  </a:lnTo>
+                  <a:lnTo>
+                    <a:pt x="3411636" y="2774566"/>
+                  </a:lnTo>
+                  <a:lnTo>
+                    <a:pt x="3489270" y="2748471"/>
+                  </a:lnTo>
+                  <a:lnTo>
+                    <a:pt x="3566904" y="2721600"/>
+                  </a:lnTo>
+                  <a:lnTo>
+                    <a:pt x="3644538" y="2693930"/>
+                  </a:lnTo>
+                  <a:lnTo>
+                    <a:pt x="3722172" y="2665438"/>
+                  </a:lnTo>
+                  <a:lnTo>
+                    <a:pt x="3799806" y="2636099"/>
+                  </a:lnTo>
+                  <a:lnTo>
+                    <a:pt x="3877440" y="2605888"/>
+                  </a:lnTo>
+                  <a:lnTo>
+                    <a:pt x="3955074" y="2574780"/>
+                  </a:lnTo>
+                  <a:lnTo>
+                    <a:pt x="4032708" y="2542747"/>
+                  </a:lnTo>
+                  <a:lnTo>
+                    <a:pt x="4110342" y="2509762"/>
+                  </a:lnTo>
+                  <a:lnTo>
+                    <a:pt x="4187976" y="2475796"/>
+                  </a:lnTo>
+                  <a:lnTo>
+                    <a:pt x="4265610" y="2440821"/>
+                  </a:lnTo>
+                  <a:lnTo>
+                    <a:pt x="4343244" y="2404807"/>
+                  </a:lnTo>
+                  <a:lnTo>
+                    <a:pt x="4420879" y="2367723"/>
+                  </a:lnTo>
+                  <a:lnTo>
+                    <a:pt x="4498513" y="2329536"/>
+                  </a:lnTo>
+                  <a:lnTo>
+                    <a:pt x="4576147" y="2290215"/>
+                  </a:lnTo>
+                  <a:lnTo>
+                    <a:pt x="4653781" y="2249724"/>
+                  </a:lnTo>
+                  <a:lnTo>
+                    <a:pt x="4731415" y="2208031"/>
+                  </a:lnTo>
+                  <a:lnTo>
+                    <a:pt x="4809049" y="2165099"/>
+                  </a:lnTo>
+                  <a:lnTo>
+                    <a:pt x="4886683" y="2120890"/>
+                  </a:lnTo>
+                  <a:lnTo>
+                    <a:pt x="4964317" y="2075368"/>
+                  </a:lnTo>
+                  <a:lnTo>
+                    <a:pt x="5041951" y="2028493"/>
+                  </a:lnTo>
+                  <a:lnTo>
+                    <a:pt x="5119585" y="1980225"/>
+                  </a:lnTo>
+                  <a:lnTo>
+                    <a:pt x="5197219" y="1930522"/>
+                  </a:lnTo>
+                  <a:lnTo>
+                    <a:pt x="5274853" y="1879342"/>
+                  </a:lnTo>
+                  <a:lnTo>
+                    <a:pt x="5352487" y="1826641"/>
+                  </a:lnTo>
+                  <a:lnTo>
+                    <a:pt x="5430121" y="1772374"/>
+                  </a:lnTo>
+                  <a:lnTo>
+                    <a:pt x="5507755" y="1716494"/>
+                  </a:lnTo>
+                  <a:lnTo>
+                    <a:pt x="5585389" y="1658954"/>
+                  </a:lnTo>
+                  <a:lnTo>
+                    <a:pt x="5663023" y="1599703"/>
+                  </a:lnTo>
+                  <a:lnTo>
+                    <a:pt x="5740657" y="1538692"/>
+                  </a:lnTo>
+                  <a:lnTo>
+                    <a:pt x="5818291" y="1475867"/>
+                  </a:lnTo>
+                  <a:lnTo>
+                    <a:pt x="5895925" y="1411176"/>
+                  </a:lnTo>
+                  <a:lnTo>
+                    <a:pt x="5973559" y="1344561"/>
+                  </a:lnTo>
+                  <a:lnTo>
+                    <a:pt x="6051193" y="1275967"/>
+                  </a:lnTo>
+                  <a:lnTo>
+                    <a:pt x="6128827" y="1205335"/>
+                  </a:lnTo>
+                  <a:lnTo>
+                    <a:pt x="6206462" y="1132603"/>
+                  </a:lnTo>
+                  <a:lnTo>
+                    <a:pt x="6284096" y="1057710"/>
+                  </a:lnTo>
+                  <a:lnTo>
+                    <a:pt x="6361730" y="980591"/>
+                  </a:lnTo>
+                  <a:lnTo>
+                    <a:pt x="6439364" y="901180"/>
+                  </a:lnTo>
+                  <a:lnTo>
+                    <a:pt x="6516998" y="819409"/>
+                  </a:lnTo>
+                  <a:lnTo>
+                    <a:pt x="6594632" y="735208"/>
+                  </a:lnTo>
+                  <a:lnTo>
+                    <a:pt x="6672266" y="648505"/>
+                  </a:lnTo>
+                  <a:lnTo>
+                    <a:pt x="6749900" y="559224"/>
+                  </a:lnTo>
+                  <a:lnTo>
+                    <a:pt x="6827534" y="467291"/>
+                  </a:lnTo>
+                  <a:lnTo>
+                    <a:pt x="6905168" y="372625"/>
+                  </a:lnTo>
+                  <a:lnTo>
+                    <a:pt x="6982802" y="275146"/>
+                  </a:lnTo>
+                  <a:lnTo>
+                    <a:pt x="7060436" y="174770"/>
+                  </a:lnTo>
+                  <a:lnTo>
+                    <a:pt x="7138070" y="71411"/>
+                  </a:lnTo>
+                  <a:lnTo>
+                    <a:pt x="7190160" y="0"/>
                   </a:lnTo>
                   <a:lnTo>
                     <a:pt x="7370972" y="0"/>
                   </a:lnTo>
                   <a:lnTo>
-                    <a:pt x="7370972" y="3648844"/>
-                  </a:lnTo>
-                  <a:lnTo>
-                    <a:pt x="7293338" y="3648420"/>
-                  </a:lnTo>
-                  <a:lnTo>
-                    <a:pt x="7215704" y="3647948"/>
-                  </a:lnTo>
-                  <a:lnTo>
-                    <a:pt x="7138070" y="3647424"/>
-                  </a:lnTo>
-                  <a:lnTo>
-                    <a:pt x="7060436" y="3646841"/>
-                  </a:lnTo>
-                  <a:lnTo>
-                    <a:pt x="6982802" y="3646193"/>
-                  </a:lnTo>
-                  <a:lnTo>
-                    <a:pt x="6905168" y="3645473"/>
-                  </a:lnTo>
-                  <a:lnTo>
-                    <a:pt x="6827534" y="3644672"/>
-                  </a:lnTo>
-                  <a:lnTo>
-                    <a:pt x="6749900" y="3643782"/>
-                  </a:lnTo>
-                  <a:lnTo>
-                    <a:pt x="6672266" y="3642793"/>
-                  </a:lnTo>
-                  <a:lnTo>
-                    <a:pt x="6594632" y="3641693"/>
-                  </a:lnTo>
-                  <a:lnTo>
-                    <a:pt x="6516998" y="3640470"/>
-                  </a:lnTo>
-                  <a:lnTo>
-                    <a:pt x="6439364" y="3639111"/>
-                  </a:lnTo>
-                  <a:lnTo>
-                    <a:pt x="6361730" y="3637600"/>
-                  </a:lnTo>
-                  <a:lnTo>
-                    <a:pt x="6284096" y="3635920"/>
-                  </a:lnTo>
-                  <a:lnTo>
-                    <a:pt x="6206462" y="3634053"/>
-                  </a:lnTo>
-                  <a:lnTo>
-                    <a:pt x="6128827" y="3631977"/>
-                  </a:lnTo>
-                  <a:lnTo>
-                    <a:pt x="6051193" y="3629670"/>
-                  </a:lnTo>
-                  <a:lnTo>
-                    <a:pt x="5973559" y="3627105"/>
-                  </a:lnTo>
-                  <a:lnTo>
-                    <a:pt x="5895925" y="3624253"/>
-                  </a:lnTo>
-                  <a:lnTo>
-                    <a:pt x="5818291" y="3621083"/>
-                  </a:lnTo>
-                  <a:lnTo>
-                    <a:pt x="5740657" y="3617559"/>
-                  </a:lnTo>
-                  <a:lnTo>
-                    <a:pt x="5663023" y="3613642"/>
-                  </a:lnTo>
-                  <a:lnTo>
-                    <a:pt x="5585389" y="3609287"/>
-                  </a:lnTo>
-                  <a:lnTo>
-                    <a:pt x="5507755" y="3604445"/>
-                  </a:lnTo>
-                  <a:lnTo>
-                    <a:pt x="5430121" y="3599064"/>
-                  </a:lnTo>
-                  <a:lnTo>
-                    <a:pt x="5352487" y="3593081"/>
-                  </a:lnTo>
-                  <a:lnTo>
-                    <a:pt x="5274853" y="3586430"/>
-                  </a:lnTo>
-                  <a:lnTo>
-                    <a:pt x="5197219" y="3579037"/>
-                  </a:lnTo>
-                  <a:lnTo>
-                    <a:pt x="5119585" y="3570818"/>
-                  </a:lnTo>
-                  <a:lnTo>
-                    <a:pt x="5041951" y="3561681"/>
-                  </a:lnTo>
-                  <a:lnTo>
-                    <a:pt x="4964317" y="3551525"/>
-                  </a:lnTo>
-                  <a:lnTo>
-                    <a:pt x="4886683" y="3540234"/>
-                  </a:lnTo>
-                  <a:lnTo>
-                    <a:pt x="4809049" y="3527682"/>
-                  </a:lnTo>
-                  <a:lnTo>
-                    <a:pt x="4731415" y="3513729"/>
-                  </a:lnTo>
-                  <a:lnTo>
-                    <a:pt x="4653781" y="3498218"/>
-                  </a:lnTo>
-                  <a:lnTo>
-                    <a:pt x="4576147" y="3480975"/>
-                  </a:lnTo>
-                  <a:lnTo>
-                    <a:pt x="4498513" y="3461806"/>
-                  </a:lnTo>
-                  <a:lnTo>
-                    <a:pt x="4420879" y="3440497"/>
-                  </a:lnTo>
-                  <a:lnTo>
-                    <a:pt x="4343244" y="3416809"/>
-                  </a:lnTo>
-                  <a:lnTo>
-                    <a:pt x="4265610" y="3390476"/>
-                  </a:lnTo>
-                  <a:lnTo>
-                    <a:pt x="4187976" y="3361203"/>
-                  </a:lnTo>
-                  <a:lnTo>
-                    <a:pt x="4110342" y="3328660"/>
-                  </a:lnTo>
-                  <a:lnTo>
-                    <a:pt x="4032708" y="3292485"/>
-                  </a:lnTo>
-                  <a:lnTo>
-                    <a:pt x="3955074" y="3252269"/>
-                  </a:lnTo>
-                  <a:lnTo>
-                    <a:pt x="3877440" y="3207564"/>
-                  </a:lnTo>
-                  <a:lnTo>
-                    <a:pt x="3799806" y="3157866"/>
-                  </a:lnTo>
-                  <a:lnTo>
-                    <a:pt x="3722172" y="3102619"/>
-                  </a:lnTo>
-                  <a:lnTo>
-                    <a:pt x="3644538" y="3041204"/>
-                  </a:lnTo>
-                  <a:lnTo>
-                    <a:pt x="3566904" y="2972931"/>
-                  </a:lnTo>
-                  <a:lnTo>
-                    <a:pt x="3489270" y="2897034"/>
-                  </a:lnTo>
-                  <a:lnTo>
-                    <a:pt x="3411636" y="2812663"/>
-                  </a:lnTo>
-                  <a:lnTo>
-                    <a:pt x="3334002" y="2802950"/>
-                  </a:lnTo>
-                  <a:lnTo>
-                    <a:pt x="3256368" y="2831850"/>
-                  </a:lnTo>
-                  <a:lnTo>
-                    <a:pt x="3178734" y="2859766"/>
-                  </a:lnTo>
-                  <a:lnTo>
-                    <a:pt x="3101100" y="2886734"/>
-                  </a:lnTo>
-                  <a:lnTo>
-                    <a:pt x="3023466" y="2912784"/>
-                  </a:lnTo>
-                  <a:lnTo>
-                    <a:pt x="2945832" y="2937948"/>
-                  </a:lnTo>
-                  <a:lnTo>
-                    <a:pt x="2868198" y="2962256"/>
-                  </a:lnTo>
-                  <a:lnTo>
-                    <a:pt x="2790564" y="2985738"/>
-                  </a:lnTo>
-                  <a:lnTo>
-                    <a:pt x="2712930" y="3008421"/>
-                  </a:lnTo>
-                  <a:lnTo>
-                    <a:pt x="2635295" y="3030332"/>
-                  </a:lnTo>
-                  <a:lnTo>
-                    <a:pt x="2557661" y="3051498"/>
-                  </a:lnTo>
-                  <a:lnTo>
-                    <a:pt x="2480027" y="3071944"/>
-                  </a:lnTo>
-                  <a:lnTo>
-                    <a:pt x="2402393" y="3091695"/>
-                  </a:lnTo>
-                  <a:lnTo>
-                    <a:pt x="2324759" y="3110774"/>
-                  </a:lnTo>
-                  <a:lnTo>
-                    <a:pt x="2247125" y="3129204"/>
-                  </a:lnTo>
-                  <a:lnTo>
-                    <a:pt x="2169491" y="3147007"/>
-                  </a:lnTo>
-                  <a:lnTo>
-                    <a:pt x="2091857" y="3164205"/>
-                  </a:lnTo>
-                  <a:lnTo>
-                    <a:pt x="2014223" y="3180818"/>
-                  </a:lnTo>
-                  <a:lnTo>
-                    <a:pt x="1936589" y="3196866"/>
-                  </a:lnTo>
-                  <a:lnTo>
-                    <a:pt x="1858955" y="3212367"/>
-                  </a:lnTo>
-                  <a:lnTo>
-                    <a:pt x="1781321" y="3227342"/>
-                  </a:lnTo>
-                  <a:lnTo>
-                    <a:pt x="1703687" y="3241807"/>
-                  </a:lnTo>
-                  <a:lnTo>
-                    <a:pt x="1626053" y="3255781"/>
-                  </a:lnTo>
-                  <a:lnTo>
-                    <a:pt x="1548419" y="3269279"/>
-                  </a:lnTo>
-                  <a:lnTo>
-                    <a:pt x="1470785" y="3282318"/>
-                  </a:lnTo>
-                  <a:lnTo>
-                    <a:pt x="1393151" y="3294913"/>
-                  </a:lnTo>
-                  <a:lnTo>
-                    <a:pt x="1315517" y="3307081"/>
-                  </a:lnTo>
-                  <a:lnTo>
-                    <a:pt x="1237883" y="3318834"/>
-                  </a:lnTo>
-                  <a:lnTo>
-                    <a:pt x="1160249" y="3330187"/>
-                  </a:lnTo>
-                  <a:lnTo>
-                    <a:pt x="1082615" y="3341155"/>
-                  </a:lnTo>
-                  <a:lnTo>
-                    <a:pt x="1004981" y="3351749"/>
-                  </a:lnTo>
-                  <a:lnTo>
-                    <a:pt x="927346" y="3361983"/>
-                  </a:lnTo>
-                  <a:lnTo>
-                    <a:pt x="849712" y="3371869"/>
-                  </a:lnTo>
-                  <a:lnTo>
-                    <a:pt x="772078" y="3381419"/>
-                  </a:lnTo>
-                  <a:lnTo>
-                    <a:pt x="694444" y="3390644"/>
-                  </a:lnTo>
-                  <a:lnTo>
-                    <a:pt x="616810" y="3399555"/>
-                  </a:lnTo>
-                  <a:lnTo>
-                    <a:pt x="539176" y="3408163"/>
-                  </a:lnTo>
-                  <a:lnTo>
-                    <a:pt x="461542" y="3416478"/>
-                  </a:lnTo>
-                  <a:lnTo>
-                    <a:pt x="383908" y="3424511"/>
-                  </a:lnTo>
-                  <a:lnTo>
-                    <a:pt x="306274" y="3432270"/>
-                  </a:lnTo>
-                  <a:lnTo>
-                    <a:pt x="228640" y="3439765"/>
-                  </a:lnTo>
-                  <a:lnTo>
-                    <a:pt x="151006" y="3447006"/>
-                  </a:lnTo>
-                  <a:lnTo>
-                    <a:pt x="73372" y="3454000"/>
-                  </a:lnTo>
-                  <a:lnTo>
-                    <a:pt x="0" y="3460385"/>
+                    <a:pt x="7370972" y="3651155"/>
+                  </a:lnTo>
+                  <a:lnTo>
+                    <a:pt x="7293338" y="3650959"/>
+                  </a:lnTo>
+                  <a:lnTo>
+                    <a:pt x="7215704" y="3650736"/>
+                  </a:lnTo>
+                  <a:lnTo>
+                    <a:pt x="7138070" y="3650484"/>
+                  </a:lnTo>
+                  <a:lnTo>
+                    <a:pt x="7060436" y="3650199"/>
+                  </a:lnTo>
+                  <a:lnTo>
+                    <a:pt x="6982802" y="3649876"/>
+                  </a:lnTo>
+                  <a:lnTo>
+                    <a:pt x="6905168" y="3649510"/>
+                  </a:lnTo>
+                  <a:lnTo>
+                    <a:pt x="6827534" y="3649096"/>
+                  </a:lnTo>
+                  <a:lnTo>
+                    <a:pt x="6749900" y="3648627"/>
+                  </a:lnTo>
+                  <a:lnTo>
+                    <a:pt x="6672266" y="3648096"/>
+                  </a:lnTo>
+                  <a:lnTo>
+                    <a:pt x="6594632" y="3647495"/>
+                  </a:lnTo>
+                  <a:lnTo>
+                    <a:pt x="6516998" y="3646815"/>
+                  </a:lnTo>
+                  <a:lnTo>
+                    <a:pt x="6439364" y="3646045"/>
+                  </a:lnTo>
+                  <a:lnTo>
+                    <a:pt x="6361730" y="3645173"/>
+                  </a:lnTo>
+                  <a:lnTo>
+                    <a:pt x="6284096" y="3644186"/>
+                  </a:lnTo>
+                  <a:lnTo>
+                    <a:pt x="6206462" y="3643068"/>
+                  </a:lnTo>
+                  <a:lnTo>
+                    <a:pt x="6128827" y="3641803"/>
+                  </a:lnTo>
+                  <a:lnTo>
+                    <a:pt x="6051193" y="3640370"/>
+                  </a:lnTo>
+                  <a:lnTo>
+                    <a:pt x="5973559" y="3638748"/>
+                  </a:lnTo>
+                  <a:lnTo>
+                    <a:pt x="5895925" y="3636912"/>
+                  </a:lnTo>
+                  <a:lnTo>
+                    <a:pt x="5818291" y="3634833"/>
+                  </a:lnTo>
+                  <a:lnTo>
+                    <a:pt x="5740657" y="3632480"/>
+                  </a:lnTo>
+                  <a:lnTo>
+                    <a:pt x="5663023" y="3629815"/>
+                  </a:lnTo>
+                  <a:lnTo>
+                    <a:pt x="5585389" y="3626798"/>
+                  </a:lnTo>
+                  <a:lnTo>
+                    <a:pt x="5507755" y="3623383"/>
+                  </a:lnTo>
+                  <a:lnTo>
+                    <a:pt x="5430121" y="3619516"/>
+                  </a:lnTo>
+                  <a:lnTo>
+                    <a:pt x="5352487" y="3615139"/>
+                  </a:lnTo>
+                  <a:lnTo>
+                    <a:pt x="5274853" y="3610183"/>
+                  </a:lnTo>
+                  <a:lnTo>
+                    <a:pt x="5197219" y="3604571"/>
+                  </a:lnTo>
+                  <a:lnTo>
+                    <a:pt x="5119585" y="3598219"/>
+                  </a:lnTo>
+                  <a:lnTo>
+                    <a:pt x="5041951" y="3591027"/>
+                  </a:lnTo>
+                  <a:lnTo>
+                    <a:pt x="4964317" y="3582884"/>
+                  </a:lnTo>
+                  <a:lnTo>
+                    <a:pt x="4886683" y="3573666"/>
+                  </a:lnTo>
+                  <a:lnTo>
+                    <a:pt x="4809049" y="3563229"/>
+                  </a:lnTo>
+                  <a:lnTo>
+                    <a:pt x="4731415" y="3551413"/>
+                  </a:lnTo>
+                  <a:lnTo>
+                    <a:pt x="4653781" y="3538036"/>
+                  </a:lnTo>
+                  <a:lnTo>
+                    <a:pt x="4576147" y="3522891"/>
+                  </a:lnTo>
+                  <a:lnTo>
+                    <a:pt x="4498513" y="3505744"/>
+                  </a:lnTo>
+                  <a:lnTo>
+                    <a:pt x="4420879" y="3486331"/>
+                  </a:lnTo>
+                  <a:lnTo>
+                    <a:pt x="4343244" y="3464354"/>
+                  </a:lnTo>
+                  <a:lnTo>
+                    <a:pt x="4265610" y="3439471"/>
+                  </a:lnTo>
+                  <a:lnTo>
+                    <a:pt x="4187976" y="3411301"/>
+                  </a:lnTo>
+                  <a:lnTo>
+                    <a:pt x="4110342" y="3379408"/>
+                  </a:lnTo>
+                  <a:lnTo>
+                    <a:pt x="4032708" y="3343301"/>
+                  </a:lnTo>
+                  <a:lnTo>
+                    <a:pt x="3955074" y="3302422"/>
+                  </a:lnTo>
+                  <a:lnTo>
+                    <a:pt x="3877440" y="3256141"/>
+                  </a:lnTo>
+                  <a:lnTo>
+                    <a:pt x="3799806" y="3203743"/>
+                  </a:lnTo>
+                  <a:lnTo>
+                    <a:pt x="3722172" y="3144422"/>
+                  </a:lnTo>
+                  <a:lnTo>
+                    <a:pt x="3644538" y="3077262"/>
+                  </a:lnTo>
+                  <a:lnTo>
+                    <a:pt x="3566904" y="3001226"/>
+                  </a:lnTo>
+                  <a:lnTo>
+                    <a:pt x="3489270" y="2915142"/>
+                  </a:lnTo>
+                  <a:lnTo>
+                    <a:pt x="3411636" y="2817683"/>
+                  </a:lnTo>
+                  <a:lnTo>
+                    <a:pt x="3334002" y="2799909"/>
+                  </a:lnTo>
+                  <a:lnTo>
+                    <a:pt x="3256368" y="2824520"/>
+                  </a:lnTo>
+                  <a:lnTo>
+                    <a:pt x="3178734" y="2848421"/>
+                  </a:lnTo>
+                  <a:lnTo>
+                    <a:pt x="3101100" y="2871631"/>
+                  </a:lnTo>
+                  <a:lnTo>
+                    <a:pt x="3023466" y="2894173"/>
+                  </a:lnTo>
+                  <a:lnTo>
+                    <a:pt x="2945832" y="2916063"/>
+                  </a:lnTo>
+                  <a:lnTo>
+                    <a:pt x="2868198" y="2937322"/>
+                  </a:lnTo>
+                  <a:lnTo>
+                    <a:pt x="2790564" y="2957967"/>
+                  </a:lnTo>
+                  <a:lnTo>
+                    <a:pt x="2712930" y="2978016"/>
+                  </a:lnTo>
+                  <a:lnTo>
+                    <a:pt x="2635295" y="2997487"/>
+                  </a:lnTo>
+                  <a:lnTo>
+                    <a:pt x="2557661" y="3016395"/>
+                  </a:lnTo>
+                  <a:lnTo>
+                    <a:pt x="2480027" y="3034758"/>
+                  </a:lnTo>
+                  <a:lnTo>
+                    <a:pt x="2402393" y="3052591"/>
+                  </a:lnTo>
+                  <a:lnTo>
+                    <a:pt x="2324759" y="3069910"/>
+                  </a:lnTo>
+                  <a:lnTo>
+                    <a:pt x="2247125" y="3086728"/>
+                  </a:lnTo>
+                  <a:lnTo>
+                    <a:pt x="2169491" y="3103061"/>
+                  </a:lnTo>
+                  <a:lnTo>
+                    <a:pt x="2091857" y="3118923"/>
+                  </a:lnTo>
+                  <a:lnTo>
+                    <a:pt x="2014223" y="3134327"/>
+                  </a:lnTo>
+                  <a:lnTo>
+                    <a:pt x="1936589" y="3149286"/>
+                  </a:lnTo>
+                  <a:lnTo>
+                    <a:pt x="1858955" y="3163814"/>
+                  </a:lnTo>
+                  <a:lnTo>
+                    <a:pt x="1781321" y="3177922"/>
+                  </a:lnTo>
+                  <a:lnTo>
+                    <a:pt x="1703687" y="3191623"/>
+                  </a:lnTo>
+                  <a:lnTo>
+                    <a:pt x="1626053" y="3204929"/>
+                  </a:lnTo>
+                  <a:lnTo>
+                    <a:pt x="1548419" y="3217850"/>
+                  </a:lnTo>
+                  <a:lnTo>
+                    <a:pt x="1470785" y="3230399"/>
+                  </a:lnTo>
+                  <a:lnTo>
+                    <a:pt x="1393151" y="3242585"/>
+                  </a:lnTo>
+                  <a:lnTo>
+                    <a:pt x="1315517" y="3254420"/>
+                  </a:lnTo>
+                  <a:lnTo>
+                    <a:pt x="1237883" y="3265913"/>
+                  </a:lnTo>
+                  <a:lnTo>
+                    <a:pt x="1160249" y="3277075"/>
+                  </a:lnTo>
+                  <a:lnTo>
+                    <a:pt x="1082615" y="3287914"/>
+                  </a:lnTo>
+                  <a:lnTo>
+                    <a:pt x="1004981" y="3298441"/>
+                  </a:lnTo>
+                  <a:lnTo>
+                    <a:pt x="927346" y="3308664"/>
+                  </a:lnTo>
+                  <a:lnTo>
+                    <a:pt x="849712" y="3318591"/>
+                  </a:lnTo>
+                  <a:lnTo>
+                    <a:pt x="772078" y="3328233"/>
+                  </a:lnTo>
+                  <a:lnTo>
+                    <a:pt x="694444" y="3337596"/>
+                  </a:lnTo>
+                  <a:lnTo>
+                    <a:pt x="616810" y="3346688"/>
+                  </a:lnTo>
+                  <a:lnTo>
+                    <a:pt x="539176" y="3355518"/>
+                  </a:lnTo>
+                  <a:lnTo>
+                    <a:pt x="461542" y="3364094"/>
+                  </a:lnTo>
+                  <a:lnTo>
+                    <a:pt x="383908" y="3372422"/>
+                  </a:lnTo>
+                  <a:lnTo>
+                    <a:pt x="306274" y="3380509"/>
+                  </a:lnTo>
+                  <a:lnTo>
+                    <a:pt x="228640" y="3388364"/>
+                  </a:lnTo>
+                  <a:lnTo>
+                    <a:pt x="151006" y="3395991"/>
+                  </a:lnTo>
+                  <a:lnTo>
+                    <a:pt x="73372" y="3403398"/>
+                  </a:lnTo>
+                  <a:lnTo>
+                    <a:pt x="0" y="3410197"/>
                   </a:lnTo>
                   <a:close/>
                 </a:path>
@@ -3495,183 +3510,198 @@
           </p:nvSpPr>
           <p:spPr>
             <a:xfrm>
-              <a:off x="3151596" y="1896563"/>
-              <a:ext cx="4271531" cy="2773032"/>
+              <a:off x="3306517" y="1896563"/>
+              <a:ext cx="4701161" cy="2774566"/>
             </a:xfrm>
             <a:custGeom>
               <a:avLst/>
               <a:pathLst>
-                <a:path w="4271531" h="2773032">
+                <a:path w="4701161" h="2774566">
                   <a:moveTo>
                     <a:pt x="0" y="0"/>
                   </a:moveTo>
                   <a:lnTo>
-                    <a:pt x="68314" y="326786"/>
-                  </a:lnTo>
-                  <a:lnTo>
-                    <a:pt x="145948" y="660849"/>
-                  </a:lnTo>
-                  <a:lnTo>
-                    <a:pt x="223582" y="961357"/>
-                  </a:lnTo>
-                  <a:lnTo>
-                    <a:pt x="301217" y="1231681"/>
-                  </a:lnTo>
-                  <a:lnTo>
-                    <a:pt x="378851" y="1474853"/>
-                  </a:lnTo>
-                  <a:lnTo>
-                    <a:pt x="456485" y="1693599"/>
-                  </a:lnTo>
-                  <a:lnTo>
-                    <a:pt x="534119" y="1890374"/>
-                  </a:lnTo>
-                  <a:lnTo>
-                    <a:pt x="611753" y="2067384"/>
-                  </a:lnTo>
-                  <a:lnTo>
-                    <a:pt x="689387" y="2226614"/>
-                  </a:lnTo>
-                  <a:lnTo>
-                    <a:pt x="767021" y="2369850"/>
-                  </a:lnTo>
-                  <a:lnTo>
-                    <a:pt x="844655" y="2498699"/>
-                  </a:lnTo>
-                  <a:lnTo>
-                    <a:pt x="922289" y="2614606"/>
-                  </a:lnTo>
-                  <a:lnTo>
-                    <a:pt x="999923" y="2718871"/>
-                  </a:lnTo>
-                  <a:lnTo>
-                    <a:pt x="1077557" y="2773032"/>
-                  </a:lnTo>
-                  <a:lnTo>
-                    <a:pt x="1155191" y="2742062"/>
-                  </a:lnTo>
-                  <a:lnTo>
-                    <a:pt x="1232825" y="2710000"/>
-                  </a:lnTo>
-                  <a:lnTo>
-                    <a:pt x="1310459" y="2676810"/>
-                  </a:lnTo>
-                  <a:lnTo>
-                    <a:pt x="1388093" y="2642452"/>
-                  </a:lnTo>
-                  <a:lnTo>
-                    <a:pt x="1465727" y="2606883"/>
-                  </a:lnTo>
-                  <a:lnTo>
-                    <a:pt x="1543361" y="2570062"/>
-                  </a:lnTo>
-                  <a:lnTo>
-                    <a:pt x="1620995" y="2531945"/>
-                  </a:lnTo>
-                  <a:lnTo>
-                    <a:pt x="1698629" y="2492486"/>
-                  </a:lnTo>
-                  <a:lnTo>
-                    <a:pt x="1776263" y="2451637"/>
-                  </a:lnTo>
-                  <a:lnTo>
-                    <a:pt x="1853897" y="2409350"/>
-                  </a:lnTo>
-                  <a:lnTo>
-                    <a:pt x="1931531" y="2365574"/>
-                  </a:lnTo>
-                  <a:lnTo>
-                    <a:pt x="2009166" y="2320257"/>
-                  </a:lnTo>
-                  <a:lnTo>
-                    <a:pt x="2086800" y="2273344"/>
-                  </a:lnTo>
-                  <a:lnTo>
-                    <a:pt x="2164434" y="2224780"/>
-                  </a:lnTo>
-                  <a:lnTo>
-                    <a:pt x="2242068" y="2174505"/>
-                  </a:lnTo>
-                  <a:lnTo>
-                    <a:pt x="2319702" y="2122461"/>
-                  </a:lnTo>
-                  <a:lnTo>
-                    <a:pt x="2397336" y="2068584"/>
-                  </a:lnTo>
-                  <a:lnTo>
-                    <a:pt x="2474970" y="2012810"/>
-                  </a:lnTo>
-                  <a:lnTo>
-                    <a:pt x="2552604" y="1955072"/>
-                  </a:lnTo>
-                  <a:lnTo>
-                    <a:pt x="2630238" y="1895301"/>
-                  </a:lnTo>
-                  <a:lnTo>
-                    <a:pt x="2707872" y="1833426"/>
-                  </a:lnTo>
-                  <a:lnTo>
-                    <a:pt x="2785506" y="1769372"/>
-                  </a:lnTo>
-                  <a:lnTo>
-                    <a:pt x="2863140" y="1703062"/>
-                  </a:lnTo>
-                  <a:lnTo>
-                    <a:pt x="2940774" y="1634419"/>
-                  </a:lnTo>
-                  <a:lnTo>
-                    <a:pt x="3018408" y="1563358"/>
-                  </a:lnTo>
-                  <a:lnTo>
-                    <a:pt x="3096042" y="1489795"/>
-                  </a:lnTo>
-                  <a:lnTo>
-                    <a:pt x="3173676" y="1413642"/>
-                  </a:lnTo>
-                  <a:lnTo>
-                    <a:pt x="3251310" y="1334807"/>
-                  </a:lnTo>
-                  <a:lnTo>
-                    <a:pt x="3328944" y="1253197"/>
-                  </a:lnTo>
-                  <a:lnTo>
-                    <a:pt x="3406578" y="1168714"/>
-                  </a:lnTo>
-                  <a:lnTo>
-                    <a:pt x="3484212" y="1081256"/>
-                  </a:lnTo>
-                  <a:lnTo>
-                    <a:pt x="3561846" y="990718"/>
-                  </a:lnTo>
-                  <a:lnTo>
-                    <a:pt x="3639480" y="896993"/>
-                  </a:lnTo>
-                  <a:lnTo>
-                    <a:pt x="3717115" y="799968"/>
-                  </a:lnTo>
-                  <a:lnTo>
-                    <a:pt x="3794749" y="699526"/>
-                  </a:lnTo>
-                  <a:lnTo>
-                    <a:pt x="3872383" y="595548"/>
-                  </a:lnTo>
-                  <a:lnTo>
-                    <a:pt x="3950017" y="487909"/>
-                  </a:lnTo>
-                  <a:lnTo>
-                    <a:pt x="4027651" y="376480"/>
-                  </a:lnTo>
-                  <a:lnTo>
-                    <a:pt x="4105285" y="261127"/>
-                  </a:lnTo>
-                  <a:lnTo>
-                    <a:pt x="4182919" y="141714"/>
-                  </a:lnTo>
-                  <a:lnTo>
-                    <a:pt x="4260553" y="18095"/>
-                  </a:lnTo>
-                  <a:lnTo>
-                    <a:pt x="4271531" y="0"/>
+                    <a:pt x="68662" y="382235"/>
+                  </a:lnTo>
+                  <a:lnTo>
+                    <a:pt x="146296" y="763969"/>
+                  </a:lnTo>
+                  <a:lnTo>
+                    <a:pt x="223930" y="1101145"/>
+                  </a:lnTo>
+                  <a:lnTo>
+                    <a:pt x="301564" y="1398964"/>
+                  </a:lnTo>
+                  <a:lnTo>
+                    <a:pt x="379198" y="1662021"/>
+                  </a:lnTo>
+                  <a:lnTo>
+                    <a:pt x="456832" y="1894373"/>
+                  </a:lnTo>
+                  <a:lnTo>
+                    <a:pt x="534466" y="2099605"/>
+                  </a:lnTo>
+                  <a:lnTo>
+                    <a:pt x="612100" y="2280881"/>
+                  </a:lnTo>
+                  <a:lnTo>
+                    <a:pt x="689734" y="2440997"/>
+                  </a:lnTo>
+                  <a:lnTo>
+                    <a:pt x="767369" y="2582425"/>
+                  </a:lnTo>
+                  <a:lnTo>
+                    <a:pt x="845003" y="2707344"/>
+                  </a:lnTo>
+                  <a:lnTo>
+                    <a:pt x="922637" y="2774566"/>
+                  </a:lnTo>
+                  <a:lnTo>
+                    <a:pt x="1000271" y="2748471"/>
+                  </a:lnTo>
+                  <a:lnTo>
+                    <a:pt x="1077905" y="2721600"/>
+                  </a:lnTo>
+                  <a:lnTo>
+                    <a:pt x="1155539" y="2693930"/>
+                  </a:lnTo>
+                  <a:lnTo>
+                    <a:pt x="1233173" y="2665438"/>
+                  </a:lnTo>
+                  <a:lnTo>
+                    <a:pt x="1310807" y="2636099"/>
+                  </a:lnTo>
+                  <a:lnTo>
+                    <a:pt x="1388441" y="2605888"/>
+                  </a:lnTo>
+                  <a:lnTo>
+                    <a:pt x="1466075" y="2574780"/>
+                  </a:lnTo>
+                  <a:lnTo>
+                    <a:pt x="1543709" y="2542747"/>
+                  </a:lnTo>
+                  <a:lnTo>
+                    <a:pt x="1621343" y="2509762"/>
+                  </a:lnTo>
+                  <a:lnTo>
+                    <a:pt x="1698977" y="2475796"/>
+                  </a:lnTo>
+                  <a:lnTo>
+                    <a:pt x="1776611" y="2440821"/>
+                  </a:lnTo>
+                  <a:lnTo>
+                    <a:pt x="1854245" y="2404807"/>
+                  </a:lnTo>
+                  <a:lnTo>
+                    <a:pt x="1931879" y="2367723"/>
+                  </a:lnTo>
+                  <a:lnTo>
+                    <a:pt x="2009513" y="2329536"/>
+                  </a:lnTo>
+                  <a:lnTo>
+                    <a:pt x="2087147" y="2290215"/>
+                  </a:lnTo>
+                  <a:lnTo>
+                    <a:pt x="2164781" y="2249724"/>
+                  </a:lnTo>
+                  <a:lnTo>
+                    <a:pt x="2242415" y="2208031"/>
+                  </a:lnTo>
+                  <a:lnTo>
+                    <a:pt x="2320049" y="2165099"/>
+                  </a:lnTo>
+                  <a:lnTo>
+                    <a:pt x="2397683" y="2120890"/>
+                  </a:lnTo>
+                  <a:lnTo>
+                    <a:pt x="2475318" y="2075368"/>
+                  </a:lnTo>
+                  <a:lnTo>
+                    <a:pt x="2552952" y="2028493"/>
+                  </a:lnTo>
+                  <a:lnTo>
+                    <a:pt x="2630586" y="1980225"/>
+                  </a:lnTo>
+                  <a:lnTo>
+                    <a:pt x="2708220" y="1930522"/>
+                  </a:lnTo>
+                  <a:lnTo>
+                    <a:pt x="2785854" y="1879342"/>
+                  </a:lnTo>
+                  <a:lnTo>
+                    <a:pt x="2863488" y="1826641"/>
+                  </a:lnTo>
+                  <a:lnTo>
+                    <a:pt x="2941122" y="1772374"/>
+                  </a:lnTo>
+                  <a:lnTo>
+                    <a:pt x="3018756" y="1716494"/>
+                  </a:lnTo>
+                  <a:lnTo>
+                    <a:pt x="3096390" y="1658954"/>
+                  </a:lnTo>
+                  <a:lnTo>
+                    <a:pt x="3174024" y="1599703"/>
+                  </a:lnTo>
+                  <a:lnTo>
+                    <a:pt x="3251658" y="1538692"/>
+                  </a:lnTo>
+                  <a:lnTo>
+                    <a:pt x="3329292" y="1475867"/>
+                  </a:lnTo>
+                  <a:lnTo>
+                    <a:pt x="3406926" y="1411176"/>
+                  </a:lnTo>
+                  <a:lnTo>
+                    <a:pt x="3484560" y="1344561"/>
+                  </a:lnTo>
+                  <a:lnTo>
+                    <a:pt x="3562194" y="1275967"/>
+                  </a:lnTo>
+                  <a:lnTo>
+                    <a:pt x="3639828" y="1205335"/>
+                  </a:lnTo>
+                  <a:lnTo>
+                    <a:pt x="3717462" y="1132603"/>
+                  </a:lnTo>
+                  <a:lnTo>
+                    <a:pt x="3795096" y="1057710"/>
+                  </a:lnTo>
+                  <a:lnTo>
+                    <a:pt x="3872730" y="980591"/>
+                  </a:lnTo>
+                  <a:lnTo>
+                    <a:pt x="3950364" y="901180"/>
+                  </a:lnTo>
+                  <a:lnTo>
+                    <a:pt x="4027998" y="819409"/>
+                  </a:lnTo>
+                  <a:lnTo>
+                    <a:pt x="4105632" y="735208"/>
+                  </a:lnTo>
+                  <a:lnTo>
+                    <a:pt x="4183267" y="648505"/>
+                  </a:lnTo>
+                  <a:lnTo>
+                    <a:pt x="4260901" y="559224"/>
+                  </a:lnTo>
+                  <a:lnTo>
+                    <a:pt x="4338535" y="467291"/>
+                  </a:lnTo>
+                  <a:lnTo>
+                    <a:pt x="4416169" y="372625"/>
+                  </a:lnTo>
+                  <a:lnTo>
+                    <a:pt x="4493803" y="275146"/>
+                  </a:lnTo>
+                  <a:lnTo>
+                    <a:pt x="4571437" y="174770"/>
+                  </a:lnTo>
+                  <a:lnTo>
+                    <a:pt x="4649071" y="71411"/>
+                  </a:lnTo>
+                  <a:lnTo>
+                    <a:pt x="4701161" y="0"/>
                   </a:lnTo>
                 </a:path>
               </a:pathLst>
@@ -3691,300 +3721,300 @@
           </p:nvSpPr>
           <p:spPr>
             <a:xfrm>
-              <a:off x="817517" y="4699513"/>
-              <a:ext cx="7370972" cy="845894"/>
+              <a:off x="817517" y="4696472"/>
+              <a:ext cx="7370972" cy="851246"/>
             </a:xfrm>
             <a:custGeom>
               <a:avLst/>
               <a:pathLst>
-                <a:path w="7370972" h="845894">
+                <a:path w="7370972" h="851246">
                   <a:moveTo>
-                    <a:pt x="7370972" y="845894"/>
+                    <a:pt x="7370972" y="851246"/>
                   </a:moveTo>
                   <a:lnTo>
-                    <a:pt x="7293338" y="845470"/>
-                  </a:lnTo>
-                  <a:lnTo>
-                    <a:pt x="7215704" y="844998"/>
-                  </a:lnTo>
-                  <a:lnTo>
-                    <a:pt x="7138070" y="844474"/>
-                  </a:lnTo>
-                  <a:lnTo>
-                    <a:pt x="7060436" y="843891"/>
-                  </a:lnTo>
-                  <a:lnTo>
-                    <a:pt x="6982802" y="843243"/>
-                  </a:lnTo>
-                  <a:lnTo>
-                    <a:pt x="6905168" y="842523"/>
-                  </a:lnTo>
-                  <a:lnTo>
-                    <a:pt x="6827534" y="841722"/>
-                  </a:lnTo>
-                  <a:lnTo>
-                    <a:pt x="6749900" y="840832"/>
-                  </a:lnTo>
-                  <a:lnTo>
-                    <a:pt x="6672266" y="839843"/>
-                  </a:lnTo>
-                  <a:lnTo>
-                    <a:pt x="6594632" y="838743"/>
-                  </a:lnTo>
-                  <a:lnTo>
-                    <a:pt x="6516998" y="837520"/>
-                  </a:lnTo>
-                  <a:lnTo>
-                    <a:pt x="6439364" y="836161"/>
-                  </a:lnTo>
-                  <a:lnTo>
-                    <a:pt x="6361730" y="834650"/>
-                  </a:lnTo>
-                  <a:lnTo>
-                    <a:pt x="6284096" y="832970"/>
-                  </a:lnTo>
-                  <a:lnTo>
-                    <a:pt x="6206462" y="831103"/>
-                  </a:lnTo>
-                  <a:lnTo>
-                    <a:pt x="6128827" y="829027"/>
-                  </a:lnTo>
-                  <a:lnTo>
-                    <a:pt x="6051193" y="826720"/>
-                  </a:lnTo>
-                  <a:lnTo>
-                    <a:pt x="5973559" y="824155"/>
-                  </a:lnTo>
-                  <a:lnTo>
-                    <a:pt x="5895925" y="821303"/>
-                  </a:lnTo>
-                  <a:lnTo>
-                    <a:pt x="5818291" y="818133"/>
-                  </a:lnTo>
-                  <a:lnTo>
-                    <a:pt x="5740657" y="814609"/>
-                  </a:lnTo>
-                  <a:lnTo>
-                    <a:pt x="5663023" y="810691"/>
-                  </a:lnTo>
-                  <a:lnTo>
-                    <a:pt x="5585389" y="806336"/>
-                  </a:lnTo>
-                  <a:lnTo>
-                    <a:pt x="5507755" y="801495"/>
-                  </a:lnTo>
-                  <a:lnTo>
-                    <a:pt x="5430121" y="796113"/>
-                  </a:lnTo>
-                  <a:lnTo>
-                    <a:pt x="5352487" y="790131"/>
-                  </a:lnTo>
-                  <a:lnTo>
-                    <a:pt x="5274853" y="783480"/>
-                  </a:lnTo>
-                  <a:lnTo>
-                    <a:pt x="5197219" y="776087"/>
-                  </a:lnTo>
-                  <a:lnTo>
-                    <a:pt x="5119585" y="767868"/>
-                  </a:lnTo>
-                  <a:lnTo>
-                    <a:pt x="5041951" y="758731"/>
-                  </a:lnTo>
-                  <a:lnTo>
-                    <a:pt x="4964317" y="748574"/>
-                  </a:lnTo>
-                  <a:lnTo>
-                    <a:pt x="4886683" y="737284"/>
-                  </a:lnTo>
-                  <a:lnTo>
-                    <a:pt x="4809049" y="724732"/>
-                  </a:lnTo>
-                  <a:lnTo>
-                    <a:pt x="4731415" y="710779"/>
-                  </a:lnTo>
-                  <a:lnTo>
-                    <a:pt x="4653781" y="695268"/>
-                  </a:lnTo>
-                  <a:lnTo>
-                    <a:pt x="4576147" y="678025"/>
-                  </a:lnTo>
-                  <a:lnTo>
-                    <a:pt x="4498513" y="658856"/>
-                  </a:lnTo>
-                  <a:lnTo>
-                    <a:pt x="4420879" y="637547"/>
-                  </a:lnTo>
-                  <a:lnTo>
-                    <a:pt x="4343244" y="613859"/>
-                  </a:lnTo>
-                  <a:lnTo>
-                    <a:pt x="4265610" y="587526"/>
-                  </a:lnTo>
-                  <a:lnTo>
-                    <a:pt x="4187976" y="558252"/>
-                  </a:lnTo>
-                  <a:lnTo>
-                    <a:pt x="4110342" y="525710"/>
-                  </a:lnTo>
-                  <a:lnTo>
-                    <a:pt x="4032708" y="489534"/>
-                  </a:lnTo>
-                  <a:lnTo>
-                    <a:pt x="3955074" y="449319"/>
-                  </a:lnTo>
-                  <a:lnTo>
-                    <a:pt x="3877440" y="404613"/>
-                  </a:lnTo>
-                  <a:lnTo>
-                    <a:pt x="3799806" y="354916"/>
-                  </a:lnTo>
-                  <a:lnTo>
-                    <a:pt x="3722172" y="299669"/>
-                  </a:lnTo>
-                  <a:lnTo>
-                    <a:pt x="3644538" y="238254"/>
-                  </a:lnTo>
-                  <a:lnTo>
-                    <a:pt x="3566904" y="169980"/>
-                  </a:lnTo>
-                  <a:lnTo>
-                    <a:pt x="3489270" y="94084"/>
-                  </a:lnTo>
-                  <a:lnTo>
-                    <a:pt x="3411636" y="9713"/>
+                    <a:pt x="7293338" y="851049"/>
+                  </a:lnTo>
+                  <a:lnTo>
+                    <a:pt x="7215704" y="850827"/>
+                  </a:lnTo>
+                  <a:lnTo>
+                    <a:pt x="7138070" y="850575"/>
+                  </a:lnTo>
+                  <a:lnTo>
+                    <a:pt x="7060436" y="850289"/>
+                  </a:lnTo>
+                  <a:lnTo>
+                    <a:pt x="6982802" y="849966"/>
+                  </a:lnTo>
+                  <a:lnTo>
+                    <a:pt x="6905168" y="849601"/>
+                  </a:lnTo>
+                  <a:lnTo>
+                    <a:pt x="6827534" y="849187"/>
+                  </a:lnTo>
+                  <a:lnTo>
+                    <a:pt x="6749900" y="848718"/>
+                  </a:lnTo>
+                  <a:lnTo>
+                    <a:pt x="6672266" y="848187"/>
+                  </a:lnTo>
+                  <a:lnTo>
+                    <a:pt x="6594632" y="847586"/>
+                  </a:lnTo>
+                  <a:lnTo>
+                    <a:pt x="6516998" y="846906"/>
+                  </a:lnTo>
+                  <a:lnTo>
+                    <a:pt x="6439364" y="846136"/>
+                  </a:lnTo>
+                  <a:lnTo>
+                    <a:pt x="6361730" y="845264"/>
+                  </a:lnTo>
+                  <a:lnTo>
+                    <a:pt x="6284096" y="844276"/>
+                  </a:lnTo>
+                  <a:lnTo>
+                    <a:pt x="6206462" y="843159"/>
+                  </a:lnTo>
+                  <a:lnTo>
+                    <a:pt x="6128827" y="841893"/>
+                  </a:lnTo>
+                  <a:lnTo>
+                    <a:pt x="6051193" y="840461"/>
+                  </a:lnTo>
+                  <a:lnTo>
+                    <a:pt x="5973559" y="838839"/>
+                  </a:lnTo>
+                  <a:lnTo>
+                    <a:pt x="5895925" y="837003"/>
+                  </a:lnTo>
+                  <a:lnTo>
+                    <a:pt x="5818291" y="834924"/>
+                  </a:lnTo>
+                  <a:lnTo>
+                    <a:pt x="5740657" y="832570"/>
+                  </a:lnTo>
+                  <a:lnTo>
+                    <a:pt x="5663023" y="829906"/>
+                  </a:lnTo>
+                  <a:lnTo>
+                    <a:pt x="5585389" y="826889"/>
+                  </a:lnTo>
+                  <a:lnTo>
+                    <a:pt x="5507755" y="823474"/>
+                  </a:lnTo>
+                  <a:lnTo>
+                    <a:pt x="5430121" y="819607"/>
+                  </a:lnTo>
+                  <a:lnTo>
+                    <a:pt x="5352487" y="815229"/>
+                  </a:lnTo>
+                  <a:lnTo>
+                    <a:pt x="5274853" y="810273"/>
+                  </a:lnTo>
+                  <a:lnTo>
+                    <a:pt x="5197219" y="804662"/>
+                  </a:lnTo>
+                  <a:lnTo>
+                    <a:pt x="5119585" y="798310"/>
+                  </a:lnTo>
+                  <a:lnTo>
+                    <a:pt x="5041951" y="791118"/>
+                  </a:lnTo>
+                  <a:lnTo>
+                    <a:pt x="4964317" y="782975"/>
+                  </a:lnTo>
+                  <a:lnTo>
+                    <a:pt x="4886683" y="773756"/>
+                  </a:lnTo>
+                  <a:lnTo>
+                    <a:pt x="4809049" y="763320"/>
+                  </a:lnTo>
+                  <a:lnTo>
+                    <a:pt x="4731415" y="751504"/>
+                  </a:lnTo>
+                  <a:lnTo>
+                    <a:pt x="4653781" y="738126"/>
+                  </a:lnTo>
+                  <a:lnTo>
+                    <a:pt x="4576147" y="722981"/>
+                  </a:lnTo>
+                  <a:lnTo>
+                    <a:pt x="4498513" y="705835"/>
+                  </a:lnTo>
+                  <a:lnTo>
+                    <a:pt x="4420879" y="686422"/>
+                  </a:lnTo>
+                  <a:lnTo>
+                    <a:pt x="4343244" y="664444"/>
+                  </a:lnTo>
+                  <a:lnTo>
+                    <a:pt x="4265610" y="639562"/>
+                  </a:lnTo>
+                  <a:lnTo>
+                    <a:pt x="4187976" y="611392"/>
+                  </a:lnTo>
+                  <a:lnTo>
+                    <a:pt x="4110342" y="579499"/>
+                  </a:lnTo>
+                  <a:lnTo>
+                    <a:pt x="4032708" y="543392"/>
+                  </a:lnTo>
+                  <a:lnTo>
+                    <a:pt x="3955074" y="502512"/>
+                  </a:lnTo>
+                  <a:lnTo>
+                    <a:pt x="3877440" y="456231"/>
+                  </a:lnTo>
+                  <a:lnTo>
+                    <a:pt x="3799806" y="403834"/>
+                  </a:lnTo>
+                  <a:lnTo>
+                    <a:pt x="3722172" y="344513"/>
+                  </a:lnTo>
+                  <a:lnTo>
+                    <a:pt x="3644538" y="277352"/>
+                  </a:lnTo>
+                  <a:lnTo>
+                    <a:pt x="3566904" y="201317"/>
+                  </a:lnTo>
+                  <a:lnTo>
+                    <a:pt x="3489270" y="115233"/>
+                  </a:lnTo>
+                  <a:lnTo>
+                    <a:pt x="3411636" y="17774"/>
                   </a:lnTo>
                   <a:lnTo>
                     <a:pt x="3334002" y="0"/>
                   </a:lnTo>
                   <a:lnTo>
-                    <a:pt x="3256368" y="28899"/>
-                  </a:lnTo>
-                  <a:lnTo>
-                    <a:pt x="3178734" y="56816"/>
-                  </a:lnTo>
-                  <a:lnTo>
-                    <a:pt x="3101100" y="83784"/>
-                  </a:lnTo>
-                  <a:lnTo>
-                    <a:pt x="3023466" y="109834"/>
-                  </a:lnTo>
-                  <a:lnTo>
-                    <a:pt x="2945832" y="134998"/>
-                  </a:lnTo>
-                  <a:lnTo>
-                    <a:pt x="2868198" y="159306"/>
-                  </a:lnTo>
-                  <a:lnTo>
-                    <a:pt x="2790564" y="182788"/>
-                  </a:lnTo>
-                  <a:lnTo>
-                    <a:pt x="2712930" y="205470"/>
-                  </a:lnTo>
-                  <a:lnTo>
-                    <a:pt x="2635295" y="227382"/>
-                  </a:lnTo>
-                  <a:lnTo>
-                    <a:pt x="2557661" y="248548"/>
-                  </a:lnTo>
-                  <a:lnTo>
-                    <a:pt x="2480027" y="268994"/>
-                  </a:lnTo>
-                  <a:lnTo>
-                    <a:pt x="2402393" y="288745"/>
-                  </a:lnTo>
-                  <a:lnTo>
-                    <a:pt x="2324759" y="307824"/>
-                  </a:lnTo>
-                  <a:lnTo>
-                    <a:pt x="2247125" y="326254"/>
-                  </a:lnTo>
-                  <a:lnTo>
-                    <a:pt x="2169491" y="344057"/>
-                  </a:lnTo>
-                  <a:lnTo>
-                    <a:pt x="2091857" y="361255"/>
-                  </a:lnTo>
-                  <a:lnTo>
-                    <a:pt x="2014223" y="377868"/>
-                  </a:lnTo>
-                  <a:lnTo>
-                    <a:pt x="1936589" y="393915"/>
-                  </a:lnTo>
-                  <a:lnTo>
-                    <a:pt x="1858955" y="409417"/>
-                  </a:lnTo>
-                  <a:lnTo>
-                    <a:pt x="1781321" y="424392"/>
-                  </a:lnTo>
-                  <a:lnTo>
-                    <a:pt x="1703687" y="438857"/>
-                  </a:lnTo>
-                  <a:lnTo>
-                    <a:pt x="1626053" y="452831"/>
-                  </a:lnTo>
-                  <a:lnTo>
-                    <a:pt x="1548419" y="466329"/>
-                  </a:lnTo>
-                  <a:lnTo>
-                    <a:pt x="1470785" y="479368"/>
-                  </a:lnTo>
-                  <a:lnTo>
-                    <a:pt x="1393151" y="491963"/>
-                  </a:lnTo>
-                  <a:lnTo>
-                    <a:pt x="1315517" y="504130"/>
-                  </a:lnTo>
-                  <a:lnTo>
-                    <a:pt x="1237883" y="515884"/>
-                  </a:lnTo>
-                  <a:lnTo>
-                    <a:pt x="1160249" y="527237"/>
-                  </a:lnTo>
-                  <a:lnTo>
-                    <a:pt x="1082615" y="538205"/>
-                  </a:lnTo>
-                  <a:lnTo>
-                    <a:pt x="1004981" y="548799"/>
-                  </a:lnTo>
-                  <a:lnTo>
-                    <a:pt x="927346" y="559033"/>
-                  </a:lnTo>
-                  <a:lnTo>
-                    <a:pt x="849712" y="568919"/>
-                  </a:lnTo>
-                  <a:lnTo>
-                    <a:pt x="772078" y="578469"/>
-                  </a:lnTo>
-                  <a:lnTo>
-                    <a:pt x="694444" y="587694"/>
-                  </a:lnTo>
-                  <a:lnTo>
-                    <a:pt x="616810" y="596605"/>
-                  </a:lnTo>
-                  <a:lnTo>
-                    <a:pt x="539176" y="605213"/>
-                  </a:lnTo>
-                  <a:lnTo>
-                    <a:pt x="461542" y="613528"/>
-                  </a:lnTo>
-                  <a:lnTo>
-                    <a:pt x="383908" y="621560"/>
-                  </a:lnTo>
-                  <a:lnTo>
-                    <a:pt x="306274" y="629320"/>
-                  </a:lnTo>
-                  <a:lnTo>
-                    <a:pt x="228640" y="636815"/>
-                  </a:lnTo>
-                  <a:lnTo>
-                    <a:pt x="151006" y="644055"/>
-                  </a:lnTo>
-                  <a:lnTo>
-                    <a:pt x="73372" y="651050"/>
-                  </a:lnTo>
-                  <a:lnTo>
-                    <a:pt x="0" y="657435"/>
+                    <a:pt x="3256368" y="24611"/>
+                  </a:lnTo>
+                  <a:lnTo>
+                    <a:pt x="3178734" y="48511"/>
+                  </a:lnTo>
+                  <a:lnTo>
+                    <a:pt x="3101100" y="71722"/>
+                  </a:lnTo>
+                  <a:lnTo>
+                    <a:pt x="3023466" y="94263"/>
+                  </a:lnTo>
+                  <a:lnTo>
+                    <a:pt x="2945832" y="116154"/>
+                  </a:lnTo>
+                  <a:lnTo>
+                    <a:pt x="2868198" y="137412"/>
+                  </a:lnTo>
+                  <a:lnTo>
+                    <a:pt x="2790564" y="158058"/>
+                  </a:lnTo>
+                  <a:lnTo>
+                    <a:pt x="2712930" y="178107"/>
+                  </a:lnTo>
+                  <a:lnTo>
+                    <a:pt x="2635295" y="197577"/>
+                  </a:lnTo>
+                  <a:lnTo>
+                    <a:pt x="2557661" y="216486"/>
+                  </a:lnTo>
+                  <a:lnTo>
+                    <a:pt x="2480027" y="234849"/>
+                  </a:lnTo>
+                  <a:lnTo>
+                    <a:pt x="2402393" y="252682"/>
+                  </a:lnTo>
+                  <a:lnTo>
+                    <a:pt x="2324759" y="270000"/>
+                  </a:lnTo>
+                  <a:lnTo>
+                    <a:pt x="2247125" y="286819"/>
+                  </a:lnTo>
+                  <a:lnTo>
+                    <a:pt x="2169491" y="303152"/>
+                  </a:lnTo>
+                  <a:lnTo>
+                    <a:pt x="2091857" y="319014"/>
+                  </a:lnTo>
+                  <a:lnTo>
+                    <a:pt x="2014223" y="334417"/>
+                  </a:lnTo>
+                  <a:lnTo>
+                    <a:pt x="1936589" y="349377"/>
+                  </a:lnTo>
+                  <a:lnTo>
+                    <a:pt x="1858955" y="363904"/>
+                  </a:lnTo>
+                  <a:lnTo>
+                    <a:pt x="1781321" y="378013"/>
+                  </a:lnTo>
+                  <a:lnTo>
+                    <a:pt x="1703687" y="391714"/>
+                  </a:lnTo>
+                  <a:lnTo>
+                    <a:pt x="1626053" y="405019"/>
+                  </a:lnTo>
+                  <a:lnTo>
+                    <a:pt x="1548419" y="417941"/>
+                  </a:lnTo>
+                  <a:lnTo>
+                    <a:pt x="1470785" y="430490"/>
+                  </a:lnTo>
+                  <a:lnTo>
+                    <a:pt x="1393151" y="442676"/>
+                  </a:lnTo>
+                  <a:lnTo>
+                    <a:pt x="1315517" y="454511"/>
+                  </a:lnTo>
+                  <a:lnTo>
+                    <a:pt x="1237883" y="466004"/>
+                  </a:lnTo>
+                  <a:lnTo>
+                    <a:pt x="1160249" y="477166"/>
+                  </a:lnTo>
+                  <a:lnTo>
+                    <a:pt x="1082615" y="488005"/>
+                  </a:lnTo>
+                  <a:lnTo>
+                    <a:pt x="1004981" y="498532"/>
+                  </a:lnTo>
+                  <a:lnTo>
+                    <a:pt x="927346" y="508754"/>
+                  </a:lnTo>
+                  <a:lnTo>
+                    <a:pt x="849712" y="518682"/>
+                  </a:lnTo>
+                  <a:lnTo>
+                    <a:pt x="772078" y="528323"/>
+                  </a:lnTo>
+                  <a:lnTo>
+                    <a:pt x="694444" y="537686"/>
+                  </a:lnTo>
+                  <a:lnTo>
+                    <a:pt x="616810" y="546779"/>
+                  </a:lnTo>
+                  <a:lnTo>
+                    <a:pt x="539176" y="555609"/>
+                  </a:lnTo>
+                  <a:lnTo>
+                    <a:pt x="461542" y="564185"/>
+                  </a:lnTo>
+                  <a:lnTo>
+                    <a:pt x="383908" y="572513"/>
+                  </a:lnTo>
+                  <a:lnTo>
+                    <a:pt x="306274" y="580600"/>
+                  </a:lnTo>
+                  <a:lnTo>
+                    <a:pt x="228640" y="588454"/>
+                  </a:lnTo>
+                  <a:lnTo>
+                    <a:pt x="151006" y="596082"/>
+                  </a:lnTo>
+                  <a:lnTo>
+                    <a:pt x="73372" y="603489"/>
+                  </a:lnTo>
+                  <a:lnTo>
+                    <a:pt x="0" y="610288"/>
                   </a:lnTo>
                 </a:path>
               </a:pathLst>
@@ -4004,291 +4034,261 @@
           </p:nvSpPr>
           <p:spPr>
             <a:xfrm>
-              <a:off x="1076676" y="1896563"/>
-              <a:ext cx="7111814" cy="3512936"/>
+              <a:off x="1854431" y="1896563"/>
+              <a:ext cx="6334059" cy="3576366"/>
             </a:xfrm>
             <a:custGeom>
               <a:avLst/>
               <a:pathLst>
-                <a:path w="7111814" h="3512936">
+                <a:path w="6334059" h="3576366">
                   <a:moveTo>
                     <a:pt x="0" y="0"/>
                   </a:moveTo>
                   <a:lnTo>
-                    <a:pt x="47116" y="78665"/>
-                  </a:lnTo>
-                  <a:lnTo>
-                    <a:pt x="124750" y="203747"/>
-                  </a:lnTo>
-                  <a:lnTo>
-                    <a:pt x="202384" y="324452"/>
-                  </a:lnTo>
-                  <a:lnTo>
-                    <a:pt x="280018" y="440932"/>
-                  </a:lnTo>
-                  <a:lnTo>
-                    <a:pt x="357652" y="553336"/>
-                  </a:lnTo>
-                  <a:lnTo>
-                    <a:pt x="435286" y="661805"/>
-                  </a:lnTo>
-                  <a:lnTo>
-                    <a:pt x="512920" y="766479"/>
-                  </a:lnTo>
-                  <a:lnTo>
-                    <a:pt x="590554" y="867489"/>
-                  </a:lnTo>
-                  <a:lnTo>
-                    <a:pt x="668188" y="964964"/>
-                  </a:lnTo>
-                  <a:lnTo>
-                    <a:pt x="745822" y="1059027"/>
-                  </a:lnTo>
-                  <a:lnTo>
-                    <a:pt x="823456" y="1149799"/>
-                  </a:lnTo>
-                  <a:lnTo>
-                    <a:pt x="901090" y="1237393"/>
-                  </a:lnTo>
-                  <a:lnTo>
-                    <a:pt x="978724" y="1321922"/>
-                  </a:lnTo>
-                  <a:lnTo>
-                    <a:pt x="1056358" y="1403493"/>
-                  </a:lnTo>
-                  <a:lnTo>
-                    <a:pt x="1133992" y="1482209"/>
-                  </a:lnTo>
-                  <a:lnTo>
-                    <a:pt x="1211626" y="1558170"/>
-                  </a:lnTo>
-                  <a:lnTo>
-                    <a:pt x="1289260" y="1631472"/>
-                  </a:lnTo>
-                  <a:lnTo>
-                    <a:pt x="1366894" y="1702209"/>
-                  </a:lnTo>
-                  <a:lnTo>
-                    <a:pt x="1444528" y="1770471"/>
-                  </a:lnTo>
-                  <a:lnTo>
-                    <a:pt x="1522163" y="1836343"/>
-                  </a:lnTo>
-                  <a:lnTo>
-                    <a:pt x="1599797" y="1899910"/>
-                  </a:lnTo>
-                  <a:lnTo>
-                    <a:pt x="1677431" y="1961252"/>
-                  </a:lnTo>
-                  <a:lnTo>
-                    <a:pt x="1755065" y="2020447"/>
-                  </a:lnTo>
-                  <a:lnTo>
-                    <a:pt x="1832699" y="2077571"/>
-                  </a:lnTo>
-                  <a:lnTo>
-                    <a:pt x="1910333" y="2132695"/>
-                  </a:lnTo>
-                  <a:lnTo>
-                    <a:pt x="1987967" y="2185891"/>
-                  </a:lnTo>
-                  <a:lnTo>
-                    <a:pt x="2065601" y="2237224"/>
-                  </a:lnTo>
-                  <a:lnTo>
-                    <a:pt x="2143235" y="2286761"/>
-                  </a:lnTo>
-                  <a:lnTo>
-                    <a:pt x="2220869" y="2334564"/>
-                  </a:lnTo>
-                  <a:lnTo>
-                    <a:pt x="2298503" y="2380694"/>
-                  </a:lnTo>
-                  <a:lnTo>
-                    <a:pt x="2376137" y="2425210"/>
-                  </a:lnTo>
-                  <a:lnTo>
-                    <a:pt x="2453771" y="2468168"/>
-                  </a:lnTo>
-                  <a:lnTo>
-                    <a:pt x="2531405" y="2509622"/>
-                  </a:lnTo>
-                  <a:lnTo>
-                    <a:pt x="2609039" y="2549626"/>
-                  </a:lnTo>
-                  <a:lnTo>
-                    <a:pt x="2686673" y="2588229"/>
-                  </a:lnTo>
-                  <a:lnTo>
-                    <a:pt x="2764307" y="2625481"/>
-                  </a:lnTo>
-                  <a:lnTo>
-                    <a:pt x="2841941" y="2661430"/>
-                  </a:lnTo>
-                  <a:lnTo>
-                    <a:pt x="2919575" y="2696121"/>
-                  </a:lnTo>
-                  <a:lnTo>
-                    <a:pt x="2997209" y="2729597"/>
-                  </a:lnTo>
-                  <a:lnTo>
-                    <a:pt x="3074843" y="2761902"/>
-                  </a:lnTo>
-                  <a:lnTo>
-                    <a:pt x="3152477" y="2793076"/>
-                  </a:lnTo>
-                  <a:lnTo>
-                    <a:pt x="3230112" y="2823159"/>
-                  </a:lnTo>
-                  <a:lnTo>
-                    <a:pt x="3307746" y="2852190"/>
-                  </a:lnTo>
-                  <a:lnTo>
-                    <a:pt x="3385380" y="2880204"/>
-                  </a:lnTo>
-                  <a:lnTo>
-                    <a:pt x="3463014" y="2907238"/>
-                  </a:lnTo>
-                  <a:lnTo>
-                    <a:pt x="3540648" y="2933325"/>
-                  </a:lnTo>
-                  <a:lnTo>
-                    <a:pt x="3618282" y="2958500"/>
-                  </a:lnTo>
-                  <a:lnTo>
-                    <a:pt x="3695916" y="2982794"/>
-                  </a:lnTo>
-                  <a:lnTo>
-                    <a:pt x="3773550" y="3006237"/>
-                  </a:lnTo>
-                  <a:lnTo>
-                    <a:pt x="3851184" y="3028860"/>
-                  </a:lnTo>
-                  <a:lnTo>
-                    <a:pt x="3928818" y="3050691"/>
-                  </a:lnTo>
-                  <a:lnTo>
-                    <a:pt x="4006452" y="3071758"/>
-                  </a:lnTo>
-                  <a:lnTo>
-                    <a:pt x="4084086" y="3092088"/>
-                  </a:lnTo>
-                  <a:lnTo>
-                    <a:pt x="4161720" y="3111707"/>
-                  </a:lnTo>
-                  <a:lnTo>
-                    <a:pt x="4239354" y="3130638"/>
-                  </a:lnTo>
-                  <a:lnTo>
-                    <a:pt x="4316988" y="3148907"/>
-                  </a:lnTo>
-                  <a:lnTo>
-                    <a:pt x="4394622" y="3166537"/>
-                  </a:lnTo>
-                  <a:lnTo>
-                    <a:pt x="4472256" y="3183550"/>
-                  </a:lnTo>
-                  <a:lnTo>
-                    <a:pt x="4549890" y="3199967"/>
-                  </a:lnTo>
-                  <a:lnTo>
-                    <a:pt x="4627524" y="3215810"/>
-                  </a:lnTo>
-                  <a:lnTo>
-                    <a:pt x="4705158" y="3231098"/>
-                  </a:lnTo>
-                  <a:lnTo>
-                    <a:pt x="4782792" y="3245852"/>
-                  </a:lnTo>
-                  <a:lnTo>
-                    <a:pt x="4860426" y="3260089"/>
-                  </a:lnTo>
-                  <a:lnTo>
-                    <a:pt x="4938061" y="3273827"/>
-                  </a:lnTo>
-                  <a:lnTo>
-                    <a:pt x="5015695" y="3287085"/>
-                  </a:lnTo>
-                  <a:lnTo>
-                    <a:pt x="5093329" y="3299879"/>
-                  </a:lnTo>
-                  <a:lnTo>
-                    <a:pt x="5170963" y="3312225"/>
-                  </a:lnTo>
-                  <a:lnTo>
-                    <a:pt x="5248597" y="3324139"/>
-                  </a:lnTo>
-                  <a:lnTo>
-                    <a:pt x="5326231" y="3335636"/>
-                  </a:lnTo>
-                  <a:lnTo>
-                    <a:pt x="5403865" y="3346731"/>
-                  </a:lnTo>
-                  <a:lnTo>
-                    <a:pt x="5481499" y="3357437"/>
-                  </a:lnTo>
-                  <a:lnTo>
-                    <a:pt x="5559133" y="3367768"/>
-                  </a:lnTo>
-                  <a:lnTo>
-                    <a:pt x="5636767" y="3377739"/>
-                  </a:lnTo>
-                  <a:lnTo>
-                    <a:pt x="5714401" y="3387360"/>
-                  </a:lnTo>
-                  <a:lnTo>
-                    <a:pt x="5792035" y="3396644"/>
-                  </a:lnTo>
-                  <a:lnTo>
-                    <a:pt x="5869669" y="3405604"/>
-                  </a:lnTo>
-                  <a:lnTo>
-                    <a:pt x="5947303" y="3414249"/>
-                  </a:lnTo>
-                  <a:lnTo>
-                    <a:pt x="6024937" y="3422593"/>
-                  </a:lnTo>
-                  <a:lnTo>
-                    <a:pt x="6102571" y="3430644"/>
-                  </a:lnTo>
-                  <a:lnTo>
-                    <a:pt x="6180205" y="3438414"/>
-                  </a:lnTo>
-                  <a:lnTo>
-                    <a:pt x="6257839" y="3445911"/>
-                  </a:lnTo>
-                  <a:lnTo>
-                    <a:pt x="6335473" y="3453146"/>
-                  </a:lnTo>
-                  <a:lnTo>
-                    <a:pt x="6413107" y="3460128"/>
-                  </a:lnTo>
-                  <a:lnTo>
-                    <a:pt x="6490741" y="3466866"/>
-                  </a:lnTo>
-                  <a:lnTo>
-                    <a:pt x="6568375" y="3473368"/>
-                  </a:lnTo>
-                  <a:lnTo>
-                    <a:pt x="6646010" y="3479642"/>
-                  </a:lnTo>
-                  <a:lnTo>
-                    <a:pt x="6723644" y="3485697"/>
-                  </a:lnTo>
-                  <a:lnTo>
-                    <a:pt x="6801278" y="3491540"/>
-                  </a:lnTo>
-                  <a:lnTo>
-                    <a:pt x="6878912" y="3497178"/>
-                  </a:lnTo>
-                  <a:lnTo>
-                    <a:pt x="6956546" y="3502619"/>
-                  </a:lnTo>
-                  <a:lnTo>
-                    <a:pt x="7034180" y="3507870"/>
-                  </a:lnTo>
-                  <a:lnTo>
-                    <a:pt x="7111814" y="3512936"/>
+                    <a:pt x="45701" y="101508"/>
+                  </a:lnTo>
+                  <a:lnTo>
+                    <a:pt x="123335" y="265957"/>
+                  </a:lnTo>
+                  <a:lnTo>
+                    <a:pt x="200969" y="422791"/>
+                  </a:lnTo>
+                  <a:lnTo>
+                    <a:pt x="278603" y="572362"/>
+                  </a:lnTo>
+                  <a:lnTo>
+                    <a:pt x="356237" y="715006"/>
+                  </a:lnTo>
+                  <a:lnTo>
+                    <a:pt x="433871" y="851045"/>
+                  </a:lnTo>
+                  <a:lnTo>
+                    <a:pt x="511505" y="980784"/>
+                  </a:lnTo>
+                  <a:lnTo>
+                    <a:pt x="589139" y="1104515"/>
+                  </a:lnTo>
+                  <a:lnTo>
+                    <a:pt x="666773" y="1222516"/>
+                  </a:lnTo>
+                  <a:lnTo>
+                    <a:pt x="744407" y="1335052"/>
+                  </a:lnTo>
+                  <a:lnTo>
+                    <a:pt x="822042" y="1442377"/>
+                  </a:lnTo>
+                  <a:lnTo>
+                    <a:pt x="899676" y="1544732"/>
+                  </a:lnTo>
+                  <a:lnTo>
+                    <a:pt x="977310" y="1642347"/>
+                  </a:lnTo>
+                  <a:lnTo>
+                    <a:pt x="1054944" y="1735442"/>
+                  </a:lnTo>
+                  <a:lnTo>
+                    <a:pt x="1132578" y="1824225"/>
+                  </a:lnTo>
+                  <a:lnTo>
+                    <a:pt x="1210212" y="1908897"/>
+                  </a:lnTo>
+                  <a:lnTo>
+                    <a:pt x="1287846" y="1989648"/>
+                  </a:lnTo>
+                  <a:lnTo>
+                    <a:pt x="1365480" y="2066660"/>
+                  </a:lnTo>
+                  <a:lnTo>
+                    <a:pt x="1443114" y="2140105"/>
+                  </a:lnTo>
+                  <a:lnTo>
+                    <a:pt x="1520748" y="2210149"/>
+                  </a:lnTo>
+                  <a:lnTo>
+                    <a:pt x="1598382" y="2276949"/>
+                  </a:lnTo>
+                  <a:lnTo>
+                    <a:pt x="1676016" y="2340656"/>
+                  </a:lnTo>
+                  <a:lnTo>
+                    <a:pt x="1753650" y="2401413"/>
+                  </a:lnTo>
+                  <a:lnTo>
+                    <a:pt x="1831284" y="2459356"/>
+                  </a:lnTo>
+                  <a:lnTo>
+                    <a:pt x="1908918" y="2514616"/>
+                  </a:lnTo>
+                  <a:lnTo>
+                    <a:pt x="1986552" y="2567316"/>
+                  </a:lnTo>
+                  <a:lnTo>
+                    <a:pt x="2064186" y="2617577"/>
+                  </a:lnTo>
+                  <a:lnTo>
+                    <a:pt x="2141820" y="2665510"/>
+                  </a:lnTo>
+                  <a:lnTo>
+                    <a:pt x="2219454" y="2711223"/>
+                  </a:lnTo>
+                  <a:lnTo>
+                    <a:pt x="2297088" y="2754819"/>
+                  </a:lnTo>
+                  <a:lnTo>
+                    <a:pt x="2374722" y="2796396"/>
+                  </a:lnTo>
+                  <a:lnTo>
+                    <a:pt x="2452356" y="2836048"/>
+                  </a:lnTo>
+                  <a:lnTo>
+                    <a:pt x="2529991" y="2873863"/>
+                  </a:lnTo>
+                  <a:lnTo>
+                    <a:pt x="2607625" y="2909928"/>
+                  </a:lnTo>
+                  <a:lnTo>
+                    <a:pt x="2685259" y="2944322"/>
+                  </a:lnTo>
+                  <a:lnTo>
+                    <a:pt x="2762893" y="2977124"/>
+                  </a:lnTo>
+                  <a:lnTo>
+                    <a:pt x="2840527" y="3008406"/>
+                  </a:lnTo>
+                  <a:lnTo>
+                    <a:pt x="2918161" y="3038240"/>
+                  </a:lnTo>
+                  <a:lnTo>
+                    <a:pt x="2995795" y="3066693"/>
+                  </a:lnTo>
+                  <a:lnTo>
+                    <a:pt x="3073429" y="3093827"/>
+                  </a:lnTo>
+                  <a:lnTo>
+                    <a:pt x="3151063" y="3119705"/>
+                  </a:lnTo>
+                  <a:lnTo>
+                    <a:pt x="3228697" y="3144385"/>
+                  </a:lnTo>
+                  <a:lnTo>
+                    <a:pt x="3306331" y="3167922"/>
+                  </a:lnTo>
+                  <a:lnTo>
+                    <a:pt x="3383965" y="3190369"/>
+                  </a:lnTo>
+                  <a:lnTo>
+                    <a:pt x="3461599" y="3211776"/>
+                  </a:lnTo>
+                  <a:lnTo>
+                    <a:pt x="3539233" y="3232192"/>
+                  </a:lnTo>
+                  <a:lnTo>
+                    <a:pt x="3616867" y="3251663"/>
+                  </a:lnTo>
+                  <a:lnTo>
+                    <a:pt x="3694501" y="3270232"/>
+                  </a:lnTo>
+                  <a:lnTo>
+                    <a:pt x="3772135" y="3287941"/>
+                  </a:lnTo>
+                  <a:lnTo>
+                    <a:pt x="3849769" y="3304830"/>
+                  </a:lnTo>
+                  <a:lnTo>
+                    <a:pt x="3927403" y="3320937"/>
+                  </a:lnTo>
+                  <a:lnTo>
+                    <a:pt x="4005037" y="3336298"/>
+                  </a:lnTo>
+                  <a:lnTo>
+                    <a:pt x="4082671" y="3350947"/>
+                  </a:lnTo>
+                  <a:lnTo>
+                    <a:pt x="4160305" y="3364919"/>
+                  </a:lnTo>
+                  <a:lnTo>
+                    <a:pt x="4237940" y="3378243"/>
+                  </a:lnTo>
+                  <a:lnTo>
+                    <a:pt x="4315574" y="3390950"/>
+                  </a:lnTo>
+                  <a:lnTo>
+                    <a:pt x="4393208" y="3403069"/>
+                  </a:lnTo>
+                  <a:lnTo>
+                    <a:pt x="4470842" y="3414626"/>
+                  </a:lnTo>
+                  <a:lnTo>
+                    <a:pt x="4548476" y="3425649"/>
+                  </a:lnTo>
+                  <a:lnTo>
+                    <a:pt x="4626110" y="3436160"/>
+                  </a:lnTo>
+                  <a:lnTo>
+                    <a:pt x="4703744" y="3446186"/>
+                  </a:lnTo>
+                  <a:lnTo>
+                    <a:pt x="4781378" y="3455746"/>
+                  </a:lnTo>
+                  <a:lnTo>
+                    <a:pt x="4859012" y="3464864"/>
+                  </a:lnTo>
+                  <a:lnTo>
+                    <a:pt x="4936646" y="3473560"/>
+                  </a:lnTo>
+                  <a:lnTo>
+                    <a:pt x="5014280" y="3481853"/>
+                  </a:lnTo>
+                  <a:lnTo>
+                    <a:pt x="5091914" y="3489762"/>
+                  </a:lnTo>
+                  <a:lnTo>
+                    <a:pt x="5169548" y="3497305"/>
+                  </a:lnTo>
+                  <a:lnTo>
+                    <a:pt x="5247182" y="3504499"/>
+                  </a:lnTo>
+                  <a:lnTo>
+                    <a:pt x="5324816" y="3511359"/>
+                  </a:lnTo>
+                  <a:lnTo>
+                    <a:pt x="5402450" y="3517902"/>
+                  </a:lnTo>
+                  <a:lnTo>
+                    <a:pt x="5480084" y="3524142"/>
+                  </a:lnTo>
+                  <a:lnTo>
+                    <a:pt x="5557718" y="3530092"/>
+                  </a:lnTo>
+                  <a:lnTo>
+                    <a:pt x="5635352" y="3535768"/>
+                  </a:lnTo>
+                  <a:lnTo>
+                    <a:pt x="5712986" y="3541180"/>
+                  </a:lnTo>
+                  <a:lnTo>
+                    <a:pt x="5790620" y="3546342"/>
+                  </a:lnTo>
+                  <a:lnTo>
+                    <a:pt x="5868254" y="3551264"/>
+                  </a:lnTo>
+                  <a:lnTo>
+                    <a:pt x="5945888" y="3555959"/>
+                  </a:lnTo>
+                  <a:lnTo>
+                    <a:pt x="6023523" y="3560437"/>
+                  </a:lnTo>
+                  <a:lnTo>
+                    <a:pt x="6101157" y="3564707"/>
+                  </a:lnTo>
+                  <a:lnTo>
+                    <a:pt x="6178791" y="3568779"/>
+                  </a:lnTo>
+                  <a:lnTo>
+                    <a:pt x="6256425" y="3572662"/>
+                  </a:lnTo>
+                  <a:lnTo>
+                    <a:pt x="6334059" y="3576366"/>
                   </a:lnTo>
                 </a:path>
               </a:pathLst>

--- a/docs/plots/carbo/jx_carbo_linsubhr_ratio_hosp6.pptx
+++ b/docs/plots/carbo/jx_carbo_linsubhr_ratio_hosp6.pptx
@@ -3003,488 +3003,452 @@
           <p:spPr>
             <a:xfrm>
               <a:off x="817517" y="1896563"/>
-              <a:ext cx="7370972" cy="3651155"/>
+              <a:ext cx="7370972" cy="3648190"/>
             </a:xfrm>
             <a:custGeom>
               <a:avLst/>
               <a:pathLst>
-                <a:path w="7370972" h="3651155">
+                <a:path w="7370972" h="3648190">
                   <a:moveTo>
-                    <a:pt x="2488999" y="0"/>
+                    <a:pt x="2302791" y="0"/>
                   </a:moveTo>
                   <a:lnTo>
-                    <a:pt x="2557661" y="382235"/>
-                  </a:lnTo>
-                  <a:lnTo>
-                    <a:pt x="2635295" y="763969"/>
-                  </a:lnTo>
-                  <a:lnTo>
-                    <a:pt x="2712930" y="1101145"/>
-                  </a:lnTo>
-                  <a:lnTo>
-                    <a:pt x="2790564" y="1398964"/>
-                  </a:lnTo>
-                  <a:lnTo>
-                    <a:pt x="2868198" y="1662021"/>
-                  </a:lnTo>
-                  <a:lnTo>
-                    <a:pt x="2945832" y="1894373"/>
-                  </a:lnTo>
-                  <a:lnTo>
-                    <a:pt x="3023466" y="2099605"/>
-                  </a:lnTo>
-                  <a:lnTo>
-                    <a:pt x="3101100" y="2280881"/>
-                  </a:lnTo>
-                  <a:lnTo>
-                    <a:pt x="3178734" y="2440997"/>
-                  </a:lnTo>
-                  <a:lnTo>
-                    <a:pt x="3256368" y="2582425"/>
-                  </a:lnTo>
-                  <a:lnTo>
-                    <a:pt x="3334002" y="2707344"/>
-                  </a:lnTo>
-                  <a:lnTo>
-                    <a:pt x="3411636" y="2774566"/>
-                  </a:lnTo>
-                  <a:lnTo>
-                    <a:pt x="3489270" y="2748471"/>
-                  </a:lnTo>
-                  <a:lnTo>
-                    <a:pt x="3566904" y="2721600"/>
-                  </a:lnTo>
-                  <a:lnTo>
-                    <a:pt x="3644538" y="2693930"/>
-                  </a:lnTo>
-                  <a:lnTo>
-                    <a:pt x="3722172" y="2665438"/>
-                  </a:lnTo>
-                  <a:lnTo>
-                    <a:pt x="3799806" y="2636099"/>
-                  </a:lnTo>
-                  <a:lnTo>
-                    <a:pt x="3877440" y="2605888"/>
-                  </a:lnTo>
-                  <a:lnTo>
-                    <a:pt x="3955074" y="2574780"/>
-                  </a:lnTo>
-                  <a:lnTo>
-                    <a:pt x="4032708" y="2542747"/>
-                  </a:lnTo>
-                  <a:lnTo>
-                    <a:pt x="4110342" y="2509762"/>
-                  </a:lnTo>
-                  <a:lnTo>
-                    <a:pt x="4187976" y="2475796"/>
-                  </a:lnTo>
-                  <a:lnTo>
-                    <a:pt x="4265610" y="2440821"/>
-                  </a:lnTo>
-                  <a:lnTo>
-                    <a:pt x="4343244" y="2404807"/>
-                  </a:lnTo>
-                  <a:lnTo>
-                    <a:pt x="4420879" y="2367723"/>
-                  </a:lnTo>
-                  <a:lnTo>
-                    <a:pt x="4498513" y="2329536"/>
-                  </a:lnTo>
-                  <a:lnTo>
-                    <a:pt x="4576147" y="2290215"/>
-                  </a:lnTo>
-                  <a:lnTo>
-                    <a:pt x="4653781" y="2249724"/>
-                  </a:lnTo>
-                  <a:lnTo>
-                    <a:pt x="4731415" y="2208031"/>
-                  </a:lnTo>
-                  <a:lnTo>
-                    <a:pt x="4809049" y="2165099"/>
-                  </a:lnTo>
-                  <a:lnTo>
-                    <a:pt x="4886683" y="2120890"/>
-                  </a:lnTo>
-                  <a:lnTo>
-                    <a:pt x="4964317" y="2075368"/>
-                  </a:lnTo>
-                  <a:lnTo>
-                    <a:pt x="5041951" y="2028493"/>
-                  </a:lnTo>
-                  <a:lnTo>
-                    <a:pt x="5119585" y="1980225"/>
-                  </a:lnTo>
-                  <a:lnTo>
-                    <a:pt x="5197219" y="1930522"/>
-                  </a:lnTo>
-                  <a:lnTo>
-                    <a:pt x="5274853" y="1879342"/>
-                  </a:lnTo>
-                  <a:lnTo>
-                    <a:pt x="5352487" y="1826641"/>
-                  </a:lnTo>
-                  <a:lnTo>
-                    <a:pt x="5430121" y="1772374"/>
-                  </a:lnTo>
-                  <a:lnTo>
-                    <a:pt x="5507755" y="1716494"/>
-                  </a:lnTo>
-                  <a:lnTo>
-                    <a:pt x="5585389" y="1658954"/>
-                  </a:lnTo>
-                  <a:lnTo>
-                    <a:pt x="5663023" y="1599703"/>
-                  </a:lnTo>
-                  <a:lnTo>
-                    <a:pt x="5740657" y="1538692"/>
-                  </a:lnTo>
-                  <a:lnTo>
-                    <a:pt x="5818291" y="1475867"/>
-                  </a:lnTo>
-                  <a:lnTo>
-                    <a:pt x="5895925" y="1411176"/>
-                  </a:lnTo>
-                  <a:lnTo>
-                    <a:pt x="5973559" y="1344561"/>
-                  </a:lnTo>
-                  <a:lnTo>
-                    <a:pt x="6051193" y="1275967"/>
-                  </a:lnTo>
-                  <a:lnTo>
-                    <a:pt x="6128827" y="1205335"/>
-                  </a:lnTo>
-                  <a:lnTo>
-                    <a:pt x="6206462" y="1132603"/>
-                  </a:lnTo>
-                  <a:lnTo>
-                    <a:pt x="6284096" y="1057710"/>
-                  </a:lnTo>
-                  <a:lnTo>
-                    <a:pt x="6361730" y="980591"/>
-                  </a:lnTo>
-                  <a:lnTo>
-                    <a:pt x="6439364" y="901180"/>
-                  </a:lnTo>
-                  <a:lnTo>
-                    <a:pt x="6516998" y="819409"/>
-                  </a:lnTo>
-                  <a:lnTo>
-                    <a:pt x="6594632" y="735208"/>
-                  </a:lnTo>
-                  <a:lnTo>
-                    <a:pt x="6672266" y="648505"/>
-                  </a:lnTo>
-                  <a:lnTo>
-                    <a:pt x="6749900" y="559224"/>
-                  </a:lnTo>
-                  <a:lnTo>
-                    <a:pt x="6827534" y="467291"/>
-                  </a:lnTo>
-                  <a:lnTo>
-                    <a:pt x="6905168" y="372625"/>
-                  </a:lnTo>
-                  <a:lnTo>
-                    <a:pt x="6982802" y="275146"/>
-                  </a:lnTo>
-                  <a:lnTo>
-                    <a:pt x="7060436" y="174770"/>
-                  </a:lnTo>
-                  <a:lnTo>
-                    <a:pt x="7138070" y="71411"/>
-                  </a:lnTo>
-                  <a:lnTo>
-                    <a:pt x="7190160" y="0"/>
+                    <a:pt x="2324759" y="108538"/>
+                  </a:lnTo>
+                  <a:lnTo>
+                    <a:pt x="2402393" y="454645"/>
+                  </a:lnTo>
+                  <a:lnTo>
+                    <a:pt x="2480027" y="766951"/>
+                  </a:lnTo>
+                  <a:lnTo>
+                    <a:pt x="2557661" y="1048759"/>
+                  </a:lnTo>
+                  <a:lnTo>
+                    <a:pt x="2635295" y="1303047"/>
+                  </a:lnTo>
+                  <a:lnTo>
+                    <a:pt x="2712930" y="1532501"/>
+                  </a:lnTo>
+                  <a:lnTo>
+                    <a:pt x="2790564" y="1739548"/>
+                  </a:lnTo>
+                  <a:lnTo>
+                    <a:pt x="2868198" y="1926375"/>
+                  </a:lnTo>
+                  <a:lnTo>
+                    <a:pt x="2945832" y="2094957"/>
+                  </a:lnTo>
+                  <a:lnTo>
+                    <a:pt x="3023466" y="2247076"/>
+                  </a:lnTo>
+                  <a:lnTo>
+                    <a:pt x="3101100" y="2384339"/>
+                  </a:lnTo>
+                  <a:lnTo>
+                    <a:pt x="3178734" y="2508198"/>
+                  </a:lnTo>
+                  <a:lnTo>
+                    <a:pt x="3256368" y="2619961"/>
+                  </a:lnTo>
+                  <a:lnTo>
+                    <a:pt x="3334002" y="2720810"/>
+                  </a:lnTo>
+                  <a:lnTo>
+                    <a:pt x="3411636" y="2770894"/>
+                  </a:lnTo>
+                  <a:lnTo>
+                    <a:pt x="3489270" y="2733071"/>
+                  </a:lnTo>
+                  <a:lnTo>
+                    <a:pt x="3566904" y="2693625"/>
+                  </a:lnTo>
+                  <a:lnTo>
+                    <a:pt x="3644538" y="2652487"/>
+                  </a:lnTo>
+                  <a:lnTo>
+                    <a:pt x="3722172" y="2609584"/>
+                  </a:lnTo>
+                  <a:lnTo>
+                    <a:pt x="3799806" y="2564841"/>
+                  </a:lnTo>
+                  <a:lnTo>
+                    <a:pt x="3877440" y="2518179"/>
+                  </a:lnTo>
+                  <a:lnTo>
+                    <a:pt x="3955074" y="2469515"/>
+                  </a:lnTo>
+                  <a:lnTo>
+                    <a:pt x="4032708" y="2418764"/>
+                  </a:lnTo>
+                  <a:lnTo>
+                    <a:pt x="4110342" y="2365836"/>
+                  </a:lnTo>
+                  <a:lnTo>
+                    <a:pt x="4187976" y="2310637"/>
+                  </a:lnTo>
+                  <a:lnTo>
+                    <a:pt x="4265610" y="2253070"/>
+                  </a:lnTo>
+                  <a:lnTo>
+                    <a:pt x="4343244" y="2193035"/>
+                  </a:lnTo>
+                  <a:lnTo>
+                    <a:pt x="4420879" y="2130423"/>
+                  </a:lnTo>
+                  <a:lnTo>
+                    <a:pt x="4498513" y="2065126"/>
+                  </a:lnTo>
+                  <a:lnTo>
+                    <a:pt x="4576147" y="1997029"/>
+                  </a:lnTo>
+                  <a:lnTo>
+                    <a:pt x="4653781" y="1926010"/>
+                  </a:lnTo>
+                  <a:lnTo>
+                    <a:pt x="4731415" y="1851944"/>
+                  </a:lnTo>
+                  <a:lnTo>
+                    <a:pt x="4809049" y="1774702"/>
+                  </a:lnTo>
+                  <a:lnTo>
+                    <a:pt x="4886683" y="1694146"/>
+                  </a:lnTo>
+                  <a:lnTo>
+                    <a:pt x="4964317" y="1610134"/>
+                  </a:lnTo>
+                  <a:lnTo>
+                    <a:pt x="5041951" y="1522519"/>
+                  </a:lnTo>
+                  <a:lnTo>
+                    <a:pt x="5119585" y="1431145"/>
+                  </a:lnTo>
+                  <a:lnTo>
+                    <a:pt x="5197219" y="1335852"/>
+                  </a:lnTo>
+                  <a:lnTo>
+                    <a:pt x="5274853" y="1236472"/>
+                  </a:lnTo>
+                  <a:lnTo>
+                    <a:pt x="5352487" y="1132828"/>
+                  </a:lnTo>
+                  <a:lnTo>
+                    <a:pt x="5430121" y="1024738"/>
+                  </a:lnTo>
+                  <a:lnTo>
+                    <a:pt x="5507755" y="912012"/>
+                  </a:lnTo>
+                  <a:lnTo>
+                    <a:pt x="5585389" y="794450"/>
+                  </a:lnTo>
+                  <a:lnTo>
+                    <a:pt x="5663023" y="671845"/>
+                  </a:lnTo>
+                  <a:lnTo>
+                    <a:pt x="5740657" y="543981"/>
+                  </a:lnTo>
+                  <a:lnTo>
+                    <a:pt x="5818291" y="410633"/>
+                  </a:lnTo>
+                  <a:lnTo>
+                    <a:pt x="5895925" y="271564"/>
+                  </a:lnTo>
+                  <a:lnTo>
+                    <a:pt x="5973559" y="126529"/>
+                  </a:lnTo>
+                  <a:lnTo>
+                    <a:pt x="6038503" y="0"/>
                   </a:lnTo>
                   <a:lnTo>
                     <a:pt x="7370972" y="0"/>
                   </a:lnTo>
                   <a:lnTo>
-                    <a:pt x="7370972" y="3651155"/>
-                  </a:lnTo>
-                  <a:lnTo>
-                    <a:pt x="7293338" y="3650959"/>
-                  </a:lnTo>
-                  <a:lnTo>
-                    <a:pt x="7215704" y="3650736"/>
-                  </a:lnTo>
-                  <a:lnTo>
-                    <a:pt x="7138070" y="3650484"/>
-                  </a:lnTo>
-                  <a:lnTo>
-                    <a:pt x="7060436" y="3650199"/>
-                  </a:lnTo>
-                  <a:lnTo>
-                    <a:pt x="6982802" y="3649876"/>
-                  </a:lnTo>
-                  <a:lnTo>
-                    <a:pt x="6905168" y="3649510"/>
-                  </a:lnTo>
-                  <a:lnTo>
-                    <a:pt x="6827534" y="3649096"/>
-                  </a:lnTo>
-                  <a:lnTo>
-                    <a:pt x="6749900" y="3648627"/>
-                  </a:lnTo>
-                  <a:lnTo>
-                    <a:pt x="6672266" y="3648096"/>
-                  </a:lnTo>
-                  <a:lnTo>
-                    <a:pt x="6594632" y="3647495"/>
-                  </a:lnTo>
-                  <a:lnTo>
-                    <a:pt x="6516998" y="3646815"/>
-                  </a:lnTo>
-                  <a:lnTo>
-                    <a:pt x="6439364" y="3646045"/>
-                  </a:lnTo>
-                  <a:lnTo>
-                    <a:pt x="6361730" y="3645173"/>
-                  </a:lnTo>
-                  <a:lnTo>
-                    <a:pt x="6284096" y="3644186"/>
-                  </a:lnTo>
-                  <a:lnTo>
-                    <a:pt x="6206462" y="3643068"/>
-                  </a:lnTo>
-                  <a:lnTo>
-                    <a:pt x="6128827" y="3641803"/>
-                  </a:lnTo>
-                  <a:lnTo>
-                    <a:pt x="6051193" y="3640370"/>
-                  </a:lnTo>
-                  <a:lnTo>
-                    <a:pt x="5973559" y="3638748"/>
-                  </a:lnTo>
-                  <a:lnTo>
-                    <a:pt x="5895925" y="3636912"/>
-                  </a:lnTo>
-                  <a:lnTo>
-                    <a:pt x="5818291" y="3634833"/>
-                  </a:lnTo>
-                  <a:lnTo>
-                    <a:pt x="5740657" y="3632480"/>
-                  </a:lnTo>
-                  <a:lnTo>
-                    <a:pt x="5663023" y="3629815"/>
-                  </a:lnTo>
-                  <a:lnTo>
-                    <a:pt x="5585389" y="3626798"/>
-                  </a:lnTo>
-                  <a:lnTo>
-                    <a:pt x="5507755" y="3623383"/>
-                  </a:lnTo>
-                  <a:lnTo>
-                    <a:pt x="5430121" y="3619516"/>
-                  </a:lnTo>
-                  <a:lnTo>
-                    <a:pt x="5352487" y="3615139"/>
-                  </a:lnTo>
-                  <a:lnTo>
-                    <a:pt x="5274853" y="3610183"/>
-                  </a:lnTo>
-                  <a:lnTo>
-                    <a:pt x="5197219" y="3604571"/>
-                  </a:lnTo>
-                  <a:lnTo>
-                    <a:pt x="5119585" y="3598219"/>
-                  </a:lnTo>
-                  <a:lnTo>
-                    <a:pt x="5041951" y="3591027"/>
-                  </a:lnTo>
-                  <a:lnTo>
-                    <a:pt x="4964317" y="3582884"/>
-                  </a:lnTo>
-                  <a:lnTo>
-                    <a:pt x="4886683" y="3573666"/>
-                  </a:lnTo>
-                  <a:lnTo>
-                    <a:pt x="4809049" y="3563229"/>
-                  </a:lnTo>
-                  <a:lnTo>
-                    <a:pt x="4731415" y="3551413"/>
-                  </a:lnTo>
-                  <a:lnTo>
-                    <a:pt x="4653781" y="3538036"/>
-                  </a:lnTo>
-                  <a:lnTo>
-                    <a:pt x="4576147" y="3522891"/>
-                  </a:lnTo>
-                  <a:lnTo>
-                    <a:pt x="4498513" y="3505744"/>
-                  </a:lnTo>
-                  <a:lnTo>
-                    <a:pt x="4420879" y="3486331"/>
-                  </a:lnTo>
-                  <a:lnTo>
-                    <a:pt x="4343244" y="3464354"/>
-                  </a:lnTo>
-                  <a:lnTo>
-                    <a:pt x="4265610" y="3439471"/>
-                  </a:lnTo>
-                  <a:lnTo>
-                    <a:pt x="4187976" y="3411301"/>
-                  </a:lnTo>
-                  <a:lnTo>
-                    <a:pt x="4110342" y="3379408"/>
-                  </a:lnTo>
-                  <a:lnTo>
-                    <a:pt x="4032708" y="3343301"/>
-                  </a:lnTo>
-                  <a:lnTo>
-                    <a:pt x="3955074" y="3302422"/>
-                  </a:lnTo>
-                  <a:lnTo>
-                    <a:pt x="3877440" y="3256141"/>
-                  </a:lnTo>
-                  <a:lnTo>
-                    <a:pt x="3799806" y="3203743"/>
-                  </a:lnTo>
-                  <a:lnTo>
-                    <a:pt x="3722172" y="3144422"/>
-                  </a:lnTo>
-                  <a:lnTo>
-                    <a:pt x="3644538" y="3077262"/>
-                  </a:lnTo>
-                  <a:lnTo>
-                    <a:pt x="3566904" y="3001226"/>
-                  </a:lnTo>
-                  <a:lnTo>
-                    <a:pt x="3489270" y="2915142"/>
-                  </a:lnTo>
-                  <a:lnTo>
-                    <a:pt x="3411636" y="2817683"/>
-                  </a:lnTo>
-                  <a:lnTo>
-                    <a:pt x="3334002" y="2799909"/>
-                  </a:lnTo>
-                  <a:lnTo>
-                    <a:pt x="3256368" y="2824520"/>
-                  </a:lnTo>
-                  <a:lnTo>
-                    <a:pt x="3178734" y="2848421"/>
-                  </a:lnTo>
-                  <a:lnTo>
-                    <a:pt x="3101100" y="2871631"/>
-                  </a:lnTo>
-                  <a:lnTo>
-                    <a:pt x="3023466" y="2894173"/>
-                  </a:lnTo>
-                  <a:lnTo>
-                    <a:pt x="2945832" y="2916063"/>
-                  </a:lnTo>
-                  <a:lnTo>
-                    <a:pt x="2868198" y="2937322"/>
-                  </a:lnTo>
-                  <a:lnTo>
-                    <a:pt x="2790564" y="2957967"/>
-                  </a:lnTo>
-                  <a:lnTo>
-                    <a:pt x="2712930" y="2978016"/>
-                  </a:lnTo>
-                  <a:lnTo>
-                    <a:pt x="2635295" y="2997487"/>
-                  </a:lnTo>
-                  <a:lnTo>
-                    <a:pt x="2557661" y="3016395"/>
-                  </a:lnTo>
-                  <a:lnTo>
-                    <a:pt x="2480027" y="3034758"/>
-                  </a:lnTo>
-                  <a:lnTo>
-                    <a:pt x="2402393" y="3052591"/>
-                  </a:lnTo>
-                  <a:lnTo>
-                    <a:pt x="2324759" y="3069910"/>
-                  </a:lnTo>
-                  <a:lnTo>
-                    <a:pt x="2247125" y="3086728"/>
-                  </a:lnTo>
-                  <a:lnTo>
-                    <a:pt x="2169491" y="3103061"/>
-                  </a:lnTo>
-                  <a:lnTo>
-                    <a:pt x="2091857" y="3118923"/>
-                  </a:lnTo>
-                  <a:lnTo>
-                    <a:pt x="2014223" y="3134327"/>
-                  </a:lnTo>
-                  <a:lnTo>
-                    <a:pt x="1936589" y="3149286"/>
-                  </a:lnTo>
-                  <a:lnTo>
-                    <a:pt x="1858955" y="3163814"/>
-                  </a:lnTo>
-                  <a:lnTo>
-                    <a:pt x="1781321" y="3177922"/>
-                  </a:lnTo>
-                  <a:lnTo>
-                    <a:pt x="1703687" y="3191623"/>
-                  </a:lnTo>
-                  <a:lnTo>
-                    <a:pt x="1626053" y="3204929"/>
-                  </a:lnTo>
-                  <a:lnTo>
-                    <a:pt x="1548419" y="3217850"/>
-                  </a:lnTo>
-                  <a:lnTo>
-                    <a:pt x="1470785" y="3230399"/>
-                  </a:lnTo>
-                  <a:lnTo>
-                    <a:pt x="1393151" y="3242585"/>
-                  </a:lnTo>
-                  <a:lnTo>
-                    <a:pt x="1315517" y="3254420"/>
-                  </a:lnTo>
-                  <a:lnTo>
-                    <a:pt x="1237883" y="3265913"/>
-                  </a:lnTo>
-                  <a:lnTo>
-                    <a:pt x="1160249" y="3277075"/>
-                  </a:lnTo>
-                  <a:lnTo>
-                    <a:pt x="1082615" y="3287914"/>
-                  </a:lnTo>
-                  <a:lnTo>
-                    <a:pt x="1004981" y="3298441"/>
-                  </a:lnTo>
-                  <a:lnTo>
-                    <a:pt x="927346" y="3308664"/>
-                  </a:lnTo>
-                  <a:lnTo>
-                    <a:pt x="849712" y="3318591"/>
-                  </a:lnTo>
-                  <a:lnTo>
-                    <a:pt x="772078" y="3328233"/>
-                  </a:lnTo>
-                  <a:lnTo>
-                    <a:pt x="694444" y="3337596"/>
-                  </a:lnTo>
-                  <a:lnTo>
-                    <a:pt x="616810" y="3346688"/>
-                  </a:lnTo>
-                  <a:lnTo>
-                    <a:pt x="539176" y="3355518"/>
-                  </a:lnTo>
-                  <a:lnTo>
-                    <a:pt x="461542" y="3364094"/>
-                  </a:lnTo>
-                  <a:lnTo>
-                    <a:pt x="383908" y="3372422"/>
-                  </a:lnTo>
-                  <a:lnTo>
-                    <a:pt x="306274" y="3380509"/>
-                  </a:lnTo>
-                  <a:lnTo>
-                    <a:pt x="228640" y="3388364"/>
-                  </a:lnTo>
-                  <a:lnTo>
-                    <a:pt x="151006" y="3395991"/>
-                  </a:lnTo>
-                  <a:lnTo>
-                    <a:pt x="73372" y="3403398"/>
-                  </a:lnTo>
-                  <a:lnTo>
-                    <a:pt x="0" y="3410197"/>
+                    <a:pt x="7370972" y="3648190"/>
+                  </a:lnTo>
+                  <a:lnTo>
+                    <a:pt x="7293338" y="3647708"/>
+                  </a:lnTo>
+                  <a:lnTo>
+                    <a:pt x="7215704" y="3647174"/>
+                  </a:lnTo>
+                  <a:lnTo>
+                    <a:pt x="7138070" y="3646582"/>
+                  </a:lnTo>
+                  <a:lnTo>
+                    <a:pt x="7060436" y="3645926"/>
+                  </a:lnTo>
+                  <a:lnTo>
+                    <a:pt x="6982802" y="3645199"/>
+                  </a:lnTo>
+                  <a:lnTo>
+                    <a:pt x="6905168" y="3644394"/>
+                  </a:lnTo>
+                  <a:lnTo>
+                    <a:pt x="6827534" y="3643501"/>
+                  </a:lnTo>
+                  <a:lnTo>
+                    <a:pt x="6749900" y="3642511"/>
+                  </a:lnTo>
+                  <a:lnTo>
+                    <a:pt x="6672266" y="3641415"/>
+                  </a:lnTo>
+                  <a:lnTo>
+                    <a:pt x="6594632" y="3640200"/>
+                  </a:lnTo>
+                  <a:lnTo>
+                    <a:pt x="6516998" y="3638853"/>
+                  </a:lnTo>
+                  <a:lnTo>
+                    <a:pt x="6439364" y="3637360"/>
+                  </a:lnTo>
+                  <a:lnTo>
+                    <a:pt x="6361730" y="3635706"/>
+                  </a:lnTo>
+                  <a:lnTo>
+                    <a:pt x="6284096" y="3633873"/>
+                  </a:lnTo>
+                  <a:lnTo>
+                    <a:pt x="6206462" y="3631842"/>
+                  </a:lnTo>
+                  <a:lnTo>
+                    <a:pt x="6128827" y="3629591"/>
+                  </a:lnTo>
+                  <a:lnTo>
+                    <a:pt x="6051193" y="3627096"/>
+                  </a:lnTo>
+                  <a:lnTo>
+                    <a:pt x="5973559" y="3624331"/>
+                  </a:lnTo>
+                  <a:lnTo>
+                    <a:pt x="5895925" y="3621267"/>
+                  </a:lnTo>
+                  <a:lnTo>
+                    <a:pt x="5818291" y="3617871"/>
+                  </a:lnTo>
+                  <a:lnTo>
+                    <a:pt x="5740657" y="3614108"/>
+                  </a:lnTo>
+                  <a:lnTo>
+                    <a:pt x="5663023" y="3609937"/>
+                  </a:lnTo>
+                  <a:lnTo>
+                    <a:pt x="5585389" y="3605315"/>
+                  </a:lnTo>
+                  <a:lnTo>
+                    <a:pt x="5507755" y="3600193"/>
+                  </a:lnTo>
+                  <a:lnTo>
+                    <a:pt x="5430121" y="3594517"/>
+                  </a:lnTo>
+                  <a:lnTo>
+                    <a:pt x="5352487" y="3588226"/>
+                  </a:lnTo>
+                  <a:lnTo>
+                    <a:pt x="5274853" y="3581254"/>
+                  </a:lnTo>
+                  <a:lnTo>
+                    <a:pt x="5197219" y="3573528"/>
+                  </a:lnTo>
+                  <a:lnTo>
+                    <a:pt x="5119585" y="3564966"/>
+                  </a:lnTo>
+                  <a:lnTo>
+                    <a:pt x="5041951" y="3555477"/>
+                  </a:lnTo>
+                  <a:lnTo>
+                    <a:pt x="4964317" y="3544961"/>
+                  </a:lnTo>
+                  <a:lnTo>
+                    <a:pt x="4886683" y="3533307"/>
+                  </a:lnTo>
+                  <a:lnTo>
+                    <a:pt x="4809049" y="3520392"/>
+                  </a:lnTo>
+                  <a:lnTo>
+                    <a:pt x="4731415" y="3506079"/>
+                  </a:lnTo>
+                  <a:lnTo>
+                    <a:pt x="4653781" y="3490217"/>
+                  </a:lnTo>
+                  <a:lnTo>
+                    <a:pt x="4576147" y="3472638"/>
+                  </a:lnTo>
+                  <a:lnTo>
+                    <a:pt x="4498513" y="3453157"/>
+                  </a:lnTo>
+                  <a:lnTo>
+                    <a:pt x="4420879" y="3431567"/>
+                  </a:lnTo>
+                  <a:lnTo>
+                    <a:pt x="4343244" y="3407641"/>
+                  </a:lnTo>
+                  <a:lnTo>
+                    <a:pt x="4265610" y="3381125"/>
+                  </a:lnTo>
+                  <a:lnTo>
+                    <a:pt x="4187976" y="3351740"/>
+                  </a:lnTo>
+                  <a:lnTo>
+                    <a:pt x="4110342" y="3319175"/>
+                  </a:lnTo>
+                  <a:lnTo>
+                    <a:pt x="4032708" y="3283085"/>
+                  </a:lnTo>
+                  <a:lnTo>
+                    <a:pt x="3955074" y="3243089"/>
+                  </a:lnTo>
+                  <a:lnTo>
+                    <a:pt x="3877440" y="3198764"/>
+                  </a:lnTo>
+                  <a:lnTo>
+                    <a:pt x="3799806" y="3149643"/>
+                  </a:lnTo>
+                  <a:lnTo>
+                    <a:pt x="3722172" y="3095205"/>
+                  </a:lnTo>
+                  <a:lnTo>
+                    <a:pt x="3644538" y="3034876"/>
+                  </a:lnTo>
+                  <a:lnTo>
+                    <a:pt x="3566904" y="2968017"/>
+                  </a:lnTo>
+                  <a:lnTo>
+                    <a:pt x="3489270" y="2893923"/>
+                  </a:lnTo>
+                  <a:lnTo>
+                    <a:pt x="3411636" y="2811810"/>
+                  </a:lnTo>
+                  <a:lnTo>
+                    <a:pt x="3334002" y="2807162"/>
+                  </a:lnTo>
+                  <a:lnTo>
+                    <a:pt x="3256368" y="2841938"/>
+                  </a:lnTo>
+                  <a:lnTo>
+                    <a:pt x="3178734" y="2875283"/>
+                  </a:lnTo>
+                  <a:lnTo>
+                    <a:pt x="3101100" y="2907257"/>
+                  </a:lnTo>
+                  <a:lnTo>
+                    <a:pt x="3023466" y="2937916"/>
+                  </a:lnTo>
+                  <a:lnTo>
+                    <a:pt x="2945832" y="2967314"/>
+                  </a:lnTo>
+                  <a:lnTo>
+                    <a:pt x="2868198" y="2995502"/>
+                  </a:lnTo>
+                  <a:lnTo>
+                    <a:pt x="2790564" y="3022532"/>
+                  </a:lnTo>
+                  <a:lnTo>
+                    <a:pt x="2712930" y="3048449"/>
+                  </a:lnTo>
+                  <a:lnTo>
+                    <a:pt x="2635295" y="3073300"/>
+                  </a:lnTo>
+                  <a:lnTo>
+                    <a:pt x="2557661" y="3097130"/>
+                  </a:lnTo>
+                  <a:lnTo>
+                    <a:pt x="2480027" y="3119979"/>
+                  </a:lnTo>
+                  <a:lnTo>
+                    <a:pt x="2402393" y="3141888"/>
+                  </a:lnTo>
+                  <a:lnTo>
+                    <a:pt x="2324759" y="3162896"/>
+                  </a:lnTo>
+                  <a:lnTo>
+                    <a:pt x="2247125" y="3183040"/>
+                  </a:lnTo>
+                  <a:lnTo>
+                    <a:pt x="2169491" y="3202356"/>
+                  </a:lnTo>
+                  <a:lnTo>
+                    <a:pt x="2091857" y="3220877"/>
+                  </a:lnTo>
+                  <a:lnTo>
+                    <a:pt x="2014223" y="3238636"/>
+                  </a:lnTo>
+                  <a:lnTo>
+                    <a:pt x="1936589" y="3255665"/>
+                  </a:lnTo>
+                  <a:lnTo>
+                    <a:pt x="1858955" y="3271993"/>
+                  </a:lnTo>
+                  <a:lnTo>
+                    <a:pt x="1781321" y="3287650"/>
+                  </a:lnTo>
+                  <a:lnTo>
+                    <a:pt x="1703687" y="3302662"/>
+                  </a:lnTo>
+                  <a:lnTo>
+                    <a:pt x="1626053" y="3317058"/>
+                  </a:lnTo>
+                  <a:lnTo>
+                    <a:pt x="1548419" y="3330861"/>
+                  </a:lnTo>
+                  <a:lnTo>
+                    <a:pt x="1470785" y="3344096"/>
+                  </a:lnTo>
+                  <a:lnTo>
+                    <a:pt x="1393151" y="3356787"/>
+                  </a:lnTo>
+                  <a:lnTo>
+                    <a:pt x="1315517" y="3368956"/>
+                  </a:lnTo>
+                  <a:lnTo>
+                    <a:pt x="1237883" y="3380625"/>
+                  </a:lnTo>
+                  <a:lnTo>
+                    <a:pt x="1160249" y="3391813"/>
+                  </a:lnTo>
+                  <a:lnTo>
+                    <a:pt x="1082615" y="3402542"/>
+                  </a:lnTo>
+                  <a:lnTo>
+                    <a:pt x="1004981" y="3412829"/>
+                  </a:lnTo>
+                  <a:lnTo>
+                    <a:pt x="927346" y="3422693"/>
+                  </a:lnTo>
+                  <a:lnTo>
+                    <a:pt x="849712" y="3432151"/>
+                  </a:lnTo>
+                  <a:lnTo>
+                    <a:pt x="772078" y="3441220"/>
+                  </a:lnTo>
+                  <a:lnTo>
+                    <a:pt x="694444" y="3449916"/>
+                  </a:lnTo>
+                  <a:lnTo>
+                    <a:pt x="616810" y="3458255"/>
+                  </a:lnTo>
+                  <a:lnTo>
+                    <a:pt x="539176" y="3466250"/>
+                  </a:lnTo>
+                  <a:lnTo>
+                    <a:pt x="461542" y="3473917"/>
+                  </a:lnTo>
+                  <a:lnTo>
+                    <a:pt x="383908" y="3481268"/>
+                  </a:lnTo>
+                  <a:lnTo>
+                    <a:pt x="306274" y="3488317"/>
+                  </a:lnTo>
+                  <a:lnTo>
+                    <a:pt x="228640" y="3495076"/>
+                  </a:lnTo>
+                  <a:lnTo>
+                    <a:pt x="151006" y="3501557"/>
+                  </a:lnTo>
+                  <a:lnTo>
+                    <a:pt x="73372" y="3507771"/>
+                  </a:lnTo>
+                  <a:lnTo>
+                    <a:pt x="0" y="3513403"/>
                   </a:lnTo>
                   <a:close/>
                 </a:path>
@@ -3510,198 +3474,162 @@
           </p:nvSpPr>
           <p:spPr>
             <a:xfrm>
-              <a:off x="3306517" y="1896563"/>
-              <a:ext cx="4701161" cy="2774566"/>
+              <a:off x="3120309" y="1896563"/>
+              <a:ext cx="3735711" cy="2770894"/>
             </a:xfrm>
             <a:custGeom>
               <a:avLst/>
               <a:pathLst>
-                <a:path w="4701161" h="2774566">
+                <a:path w="3735711" h="2770894">
                   <a:moveTo>
                     <a:pt x="0" y="0"/>
                   </a:moveTo>
                   <a:lnTo>
-                    <a:pt x="68662" y="382235"/>
-                  </a:lnTo>
-                  <a:lnTo>
-                    <a:pt x="146296" y="763969"/>
-                  </a:lnTo>
-                  <a:lnTo>
-                    <a:pt x="223930" y="1101145"/>
-                  </a:lnTo>
-                  <a:lnTo>
-                    <a:pt x="301564" y="1398964"/>
-                  </a:lnTo>
-                  <a:lnTo>
-                    <a:pt x="379198" y="1662021"/>
-                  </a:lnTo>
-                  <a:lnTo>
-                    <a:pt x="456832" y="1894373"/>
-                  </a:lnTo>
-                  <a:lnTo>
-                    <a:pt x="534466" y="2099605"/>
-                  </a:lnTo>
-                  <a:lnTo>
-                    <a:pt x="612100" y="2280881"/>
-                  </a:lnTo>
-                  <a:lnTo>
-                    <a:pt x="689734" y="2440997"/>
-                  </a:lnTo>
-                  <a:lnTo>
-                    <a:pt x="767369" y="2582425"/>
-                  </a:lnTo>
-                  <a:lnTo>
-                    <a:pt x="845003" y="2707344"/>
-                  </a:lnTo>
-                  <a:lnTo>
-                    <a:pt x="922637" y="2774566"/>
-                  </a:lnTo>
-                  <a:lnTo>
-                    <a:pt x="1000271" y="2748471"/>
-                  </a:lnTo>
-                  <a:lnTo>
-                    <a:pt x="1077905" y="2721600"/>
-                  </a:lnTo>
-                  <a:lnTo>
-                    <a:pt x="1155539" y="2693930"/>
-                  </a:lnTo>
-                  <a:lnTo>
-                    <a:pt x="1233173" y="2665438"/>
-                  </a:lnTo>
-                  <a:lnTo>
-                    <a:pt x="1310807" y="2636099"/>
-                  </a:lnTo>
-                  <a:lnTo>
-                    <a:pt x="1388441" y="2605888"/>
-                  </a:lnTo>
-                  <a:lnTo>
-                    <a:pt x="1466075" y="2574780"/>
-                  </a:lnTo>
-                  <a:lnTo>
-                    <a:pt x="1543709" y="2542747"/>
-                  </a:lnTo>
-                  <a:lnTo>
-                    <a:pt x="1621343" y="2509762"/>
-                  </a:lnTo>
-                  <a:lnTo>
-                    <a:pt x="1698977" y="2475796"/>
-                  </a:lnTo>
-                  <a:lnTo>
-                    <a:pt x="1776611" y="2440821"/>
-                  </a:lnTo>
-                  <a:lnTo>
-                    <a:pt x="1854245" y="2404807"/>
-                  </a:lnTo>
-                  <a:lnTo>
-                    <a:pt x="1931879" y="2367723"/>
-                  </a:lnTo>
-                  <a:lnTo>
-                    <a:pt x="2009513" y="2329536"/>
-                  </a:lnTo>
-                  <a:lnTo>
-                    <a:pt x="2087147" y="2290215"/>
-                  </a:lnTo>
-                  <a:lnTo>
-                    <a:pt x="2164781" y="2249724"/>
-                  </a:lnTo>
-                  <a:lnTo>
-                    <a:pt x="2242415" y="2208031"/>
-                  </a:lnTo>
-                  <a:lnTo>
-                    <a:pt x="2320049" y="2165099"/>
-                  </a:lnTo>
-                  <a:lnTo>
-                    <a:pt x="2397683" y="2120890"/>
-                  </a:lnTo>
-                  <a:lnTo>
-                    <a:pt x="2475318" y="2075368"/>
-                  </a:lnTo>
-                  <a:lnTo>
-                    <a:pt x="2552952" y="2028493"/>
-                  </a:lnTo>
-                  <a:lnTo>
-                    <a:pt x="2630586" y="1980225"/>
-                  </a:lnTo>
-                  <a:lnTo>
-                    <a:pt x="2708220" y="1930522"/>
-                  </a:lnTo>
-                  <a:lnTo>
-                    <a:pt x="2785854" y="1879342"/>
-                  </a:lnTo>
-                  <a:lnTo>
-                    <a:pt x="2863488" y="1826641"/>
-                  </a:lnTo>
-                  <a:lnTo>
-                    <a:pt x="2941122" y="1772374"/>
-                  </a:lnTo>
-                  <a:lnTo>
-                    <a:pt x="3018756" y="1716494"/>
-                  </a:lnTo>
-                  <a:lnTo>
-                    <a:pt x="3096390" y="1658954"/>
-                  </a:lnTo>
-                  <a:lnTo>
-                    <a:pt x="3174024" y="1599703"/>
-                  </a:lnTo>
-                  <a:lnTo>
-                    <a:pt x="3251658" y="1538692"/>
-                  </a:lnTo>
-                  <a:lnTo>
-                    <a:pt x="3329292" y="1475867"/>
-                  </a:lnTo>
-                  <a:lnTo>
-                    <a:pt x="3406926" y="1411176"/>
-                  </a:lnTo>
-                  <a:lnTo>
-                    <a:pt x="3484560" y="1344561"/>
-                  </a:lnTo>
-                  <a:lnTo>
-                    <a:pt x="3562194" y="1275967"/>
-                  </a:lnTo>
-                  <a:lnTo>
-                    <a:pt x="3639828" y="1205335"/>
-                  </a:lnTo>
-                  <a:lnTo>
-                    <a:pt x="3717462" y="1132603"/>
-                  </a:lnTo>
-                  <a:lnTo>
-                    <a:pt x="3795096" y="1057710"/>
-                  </a:lnTo>
-                  <a:lnTo>
-                    <a:pt x="3872730" y="980591"/>
-                  </a:lnTo>
-                  <a:lnTo>
-                    <a:pt x="3950364" y="901180"/>
-                  </a:lnTo>
-                  <a:lnTo>
-                    <a:pt x="4027998" y="819409"/>
-                  </a:lnTo>
-                  <a:lnTo>
-                    <a:pt x="4105632" y="735208"/>
-                  </a:lnTo>
-                  <a:lnTo>
-                    <a:pt x="4183267" y="648505"/>
-                  </a:lnTo>
-                  <a:lnTo>
-                    <a:pt x="4260901" y="559224"/>
-                  </a:lnTo>
-                  <a:lnTo>
-                    <a:pt x="4338535" y="467291"/>
-                  </a:lnTo>
-                  <a:lnTo>
-                    <a:pt x="4416169" y="372625"/>
-                  </a:lnTo>
-                  <a:lnTo>
-                    <a:pt x="4493803" y="275146"/>
-                  </a:lnTo>
-                  <a:lnTo>
-                    <a:pt x="4571437" y="174770"/>
-                  </a:lnTo>
-                  <a:lnTo>
-                    <a:pt x="4649071" y="71411"/>
-                  </a:lnTo>
-                  <a:lnTo>
-                    <a:pt x="4701161" y="0"/>
+                    <a:pt x="21968" y="108538"/>
+                  </a:lnTo>
+                  <a:lnTo>
+                    <a:pt x="99602" y="454645"/>
+                  </a:lnTo>
+                  <a:lnTo>
+                    <a:pt x="177236" y="766951"/>
+                  </a:lnTo>
+                  <a:lnTo>
+                    <a:pt x="254870" y="1048759"/>
+                  </a:lnTo>
+                  <a:lnTo>
+                    <a:pt x="332504" y="1303047"/>
+                  </a:lnTo>
+                  <a:lnTo>
+                    <a:pt x="410138" y="1532501"/>
+                  </a:lnTo>
+                  <a:lnTo>
+                    <a:pt x="487772" y="1739548"/>
+                  </a:lnTo>
+                  <a:lnTo>
+                    <a:pt x="565406" y="1926375"/>
+                  </a:lnTo>
+                  <a:lnTo>
+                    <a:pt x="643040" y="2094957"/>
+                  </a:lnTo>
+                  <a:lnTo>
+                    <a:pt x="720674" y="2247076"/>
+                  </a:lnTo>
+                  <a:lnTo>
+                    <a:pt x="798308" y="2384339"/>
+                  </a:lnTo>
+                  <a:lnTo>
+                    <a:pt x="875942" y="2508198"/>
+                  </a:lnTo>
+                  <a:lnTo>
+                    <a:pt x="953576" y="2619961"/>
+                  </a:lnTo>
+                  <a:lnTo>
+                    <a:pt x="1031210" y="2720810"/>
+                  </a:lnTo>
+                  <a:lnTo>
+                    <a:pt x="1108845" y="2770894"/>
+                  </a:lnTo>
+                  <a:lnTo>
+                    <a:pt x="1186479" y="2733071"/>
+                  </a:lnTo>
+                  <a:lnTo>
+                    <a:pt x="1264113" y="2693625"/>
+                  </a:lnTo>
+                  <a:lnTo>
+                    <a:pt x="1341747" y="2652487"/>
+                  </a:lnTo>
+                  <a:lnTo>
+                    <a:pt x="1419381" y="2609584"/>
+                  </a:lnTo>
+                  <a:lnTo>
+                    <a:pt x="1497015" y="2564841"/>
+                  </a:lnTo>
+                  <a:lnTo>
+                    <a:pt x="1574649" y="2518179"/>
+                  </a:lnTo>
+                  <a:lnTo>
+                    <a:pt x="1652283" y="2469515"/>
+                  </a:lnTo>
+                  <a:lnTo>
+                    <a:pt x="1729917" y="2418764"/>
+                  </a:lnTo>
+                  <a:lnTo>
+                    <a:pt x="1807551" y="2365836"/>
+                  </a:lnTo>
+                  <a:lnTo>
+                    <a:pt x="1885185" y="2310637"/>
+                  </a:lnTo>
+                  <a:lnTo>
+                    <a:pt x="1962819" y="2253070"/>
+                  </a:lnTo>
+                  <a:lnTo>
+                    <a:pt x="2040453" y="2193035"/>
+                  </a:lnTo>
+                  <a:lnTo>
+                    <a:pt x="2118087" y="2130423"/>
+                  </a:lnTo>
+                  <a:lnTo>
+                    <a:pt x="2195721" y="2065126"/>
+                  </a:lnTo>
+                  <a:lnTo>
+                    <a:pt x="2273355" y="1997029"/>
+                  </a:lnTo>
+                  <a:lnTo>
+                    <a:pt x="2350989" y="1926010"/>
+                  </a:lnTo>
+                  <a:lnTo>
+                    <a:pt x="2428623" y="1851944"/>
+                  </a:lnTo>
+                  <a:lnTo>
+                    <a:pt x="2506257" y="1774702"/>
+                  </a:lnTo>
+                  <a:lnTo>
+                    <a:pt x="2583891" y="1694146"/>
+                  </a:lnTo>
+                  <a:lnTo>
+                    <a:pt x="2661525" y="1610134"/>
+                  </a:lnTo>
+                  <a:lnTo>
+                    <a:pt x="2739159" y="1522519"/>
+                  </a:lnTo>
+                  <a:lnTo>
+                    <a:pt x="2816793" y="1431145"/>
+                  </a:lnTo>
+                  <a:lnTo>
+                    <a:pt x="2894428" y="1335852"/>
+                  </a:lnTo>
+                  <a:lnTo>
+                    <a:pt x="2972062" y="1236472"/>
+                  </a:lnTo>
+                  <a:lnTo>
+                    <a:pt x="3049696" y="1132828"/>
+                  </a:lnTo>
+                  <a:lnTo>
+                    <a:pt x="3127330" y="1024738"/>
+                  </a:lnTo>
+                  <a:lnTo>
+                    <a:pt x="3204964" y="912012"/>
+                  </a:lnTo>
+                  <a:lnTo>
+                    <a:pt x="3282598" y="794450"/>
+                  </a:lnTo>
+                  <a:lnTo>
+                    <a:pt x="3360232" y="671845"/>
+                  </a:lnTo>
+                  <a:lnTo>
+                    <a:pt x="3437866" y="543981"/>
+                  </a:lnTo>
+                  <a:lnTo>
+                    <a:pt x="3515500" y="410633"/>
+                  </a:lnTo>
+                  <a:lnTo>
+                    <a:pt x="3593134" y="271564"/>
+                  </a:lnTo>
+                  <a:lnTo>
+                    <a:pt x="3670768" y="126529"/>
+                  </a:lnTo>
+                  <a:lnTo>
+                    <a:pt x="3735711" y="0"/>
                   </a:lnTo>
                 </a:path>
               </a:pathLst>
@@ -3721,300 +3649,300 @@
           </p:nvSpPr>
           <p:spPr>
             <a:xfrm>
-              <a:off x="817517" y="4696472"/>
-              <a:ext cx="7370972" cy="851246"/>
+              <a:off x="817517" y="4703725"/>
+              <a:ext cx="7370972" cy="841028"/>
             </a:xfrm>
             <a:custGeom>
               <a:avLst/>
               <a:pathLst>
-                <a:path w="7370972" h="851246">
+                <a:path w="7370972" h="841028">
                   <a:moveTo>
-                    <a:pt x="7370972" y="851246"/>
+                    <a:pt x="7370972" y="841028"/>
                   </a:moveTo>
                   <a:lnTo>
-                    <a:pt x="7293338" y="851049"/>
-                  </a:lnTo>
-                  <a:lnTo>
-                    <a:pt x="7215704" y="850827"/>
-                  </a:lnTo>
-                  <a:lnTo>
-                    <a:pt x="7138070" y="850575"/>
-                  </a:lnTo>
-                  <a:lnTo>
-                    <a:pt x="7060436" y="850289"/>
-                  </a:lnTo>
-                  <a:lnTo>
-                    <a:pt x="6982802" y="849966"/>
-                  </a:lnTo>
-                  <a:lnTo>
-                    <a:pt x="6905168" y="849601"/>
-                  </a:lnTo>
-                  <a:lnTo>
-                    <a:pt x="6827534" y="849187"/>
-                  </a:lnTo>
-                  <a:lnTo>
-                    <a:pt x="6749900" y="848718"/>
-                  </a:lnTo>
-                  <a:lnTo>
-                    <a:pt x="6672266" y="848187"/>
-                  </a:lnTo>
-                  <a:lnTo>
-                    <a:pt x="6594632" y="847586"/>
-                  </a:lnTo>
-                  <a:lnTo>
-                    <a:pt x="6516998" y="846906"/>
-                  </a:lnTo>
-                  <a:lnTo>
-                    <a:pt x="6439364" y="846136"/>
-                  </a:lnTo>
-                  <a:lnTo>
-                    <a:pt x="6361730" y="845264"/>
-                  </a:lnTo>
-                  <a:lnTo>
-                    <a:pt x="6284096" y="844276"/>
-                  </a:lnTo>
-                  <a:lnTo>
-                    <a:pt x="6206462" y="843159"/>
-                  </a:lnTo>
-                  <a:lnTo>
-                    <a:pt x="6128827" y="841893"/>
-                  </a:lnTo>
-                  <a:lnTo>
-                    <a:pt x="6051193" y="840461"/>
-                  </a:lnTo>
-                  <a:lnTo>
-                    <a:pt x="5973559" y="838839"/>
-                  </a:lnTo>
-                  <a:lnTo>
-                    <a:pt x="5895925" y="837003"/>
-                  </a:lnTo>
-                  <a:lnTo>
-                    <a:pt x="5818291" y="834924"/>
-                  </a:lnTo>
-                  <a:lnTo>
-                    <a:pt x="5740657" y="832570"/>
-                  </a:lnTo>
-                  <a:lnTo>
-                    <a:pt x="5663023" y="829906"/>
-                  </a:lnTo>
-                  <a:lnTo>
-                    <a:pt x="5585389" y="826889"/>
-                  </a:lnTo>
-                  <a:lnTo>
-                    <a:pt x="5507755" y="823474"/>
-                  </a:lnTo>
-                  <a:lnTo>
-                    <a:pt x="5430121" y="819607"/>
-                  </a:lnTo>
-                  <a:lnTo>
-                    <a:pt x="5352487" y="815229"/>
-                  </a:lnTo>
-                  <a:lnTo>
-                    <a:pt x="5274853" y="810273"/>
-                  </a:lnTo>
-                  <a:lnTo>
-                    <a:pt x="5197219" y="804662"/>
-                  </a:lnTo>
-                  <a:lnTo>
-                    <a:pt x="5119585" y="798310"/>
-                  </a:lnTo>
-                  <a:lnTo>
-                    <a:pt x="5041951" y="791118"/>
-                  </a:lnTo>
-                  <a:lnTo>
-                    <a:pt x="4964317" y="782975"/>
-                  </a:lnTo>
-                  <a:lnTo>
-                    <a:pt x="4886683" y="773756"/>
-                  </a:lnTo>
-                  <a:lnTo>
-                    <a:pt x="4809049" y="763320"/>
-                  </a:lnTo>
-                  <a:lnTo>
-                    <a:pt x="4731415" y="751504"/>
-                  </a:lnTo>
-                  <a:lnTo>
-                    <a:pt x="4653781" y="738126"/>
-                  </a:lnTo>
-                  <a:lnTo>
-                    <a:pt x="4576147" y="722981"/>
-                  </a:lnTo>
-                  <a:lnTo>
-                    <a:pt x="4498513" y="705835"/>
-                  </a:lnTo>
-                  <a:lnTo>
-                    <a:pt x="4420879" y="686422"/>
-                  </a:lnTo>
-                  <a:lnTo>
-                    <a:pt x="4343244" y="664444"/>
-                  </a:lnTo>
-                  <a:lnTo>
-                    <a:pt x="4265610" y="639562"/>
-                  </a:lnTo>
-                  <a:lnTo>
-                    <a:pt x="4187976" y="611392"/>
-                  </a:lnTo>
-                  <a:lnTo>
-                    <a:pt x="4110342" y="579499"/>
-                  </a:lnTo>
-                  <a:lnTo>
-                    <a:pt x="4032708" y="543392"/>
-                  </a:lnTo>
-                  <a:lnTo>
-                    <a:pt x="3955074" y="502512"/>
-                  </a:lnTo>
-                  <a:lnTo>
-                    <a:pt x="3877440" y="456231"/>
-                  </a:lnTo>
-                  <a:lnTo>
-                    <a:pt x="3799806" y="403834"/>
-                  </a:lnTo>
-                  <a:lnTo>
-                    <a:pt x="3722172" y="344513"/>
-                  </a:lnTo>
-                  <a:lnTo>
-                    <a:pt x="3644538" y="277352"/>
-                  </a:lnTo>
-                  <a:lnTo>
-                    <a:pt x="3566904" y="201317"/>
-                  </a:lnTo>
-                  <a:lnTo>
-                    <a:pt x="3489270" y="115233"/>
-                  </a:lnTo>
-                  <a:lnTo>
-                    <a:pt x="3411636" y="17774"/>
+                    <a:pt x="7293338" y="840546"/>
+                  </a:lnTo>
+                  <a:lnTo>
+                    <a:pt x="7215704" y="840012"/>
+                  </a:lnTo>
+                  <a:lnTo>
+                    <a:pt x="7138070" y="839420"/>
+                  </a:lnTo>
+                  <a:lnTo>
+                    <a:pt x="7060436" y="838764"/>
+                  </a:lnTo>
+                  <a:lnTo>
+                    <a:pt x="6982802" y="838037"/>
+                  </a:lnTo>
+                  <a:lnTo>
+                    <a:pt x="6905168" y="837231"/>
+                  </a:lnTo>
+                  <a:lnTo>
+                    <a:pt x="6827534" y="836339"/>
+                  </a:lnTo>
+                  <a:lnTo>
+                    <a:pt x="6749900" y="835349"/>
+                  </a:lnTo>
+                  <a:lnTo>
+                    <a:pt x="6672266" y="834253"/>
+                  </a:lnTo>
+                  <a:lnTo>
+                    <a:pt x="6594632" y="833037"/>
+                  </a:lnTo>
+                  <a:lnTo>
+                    <a:pt x="6516998" y="831691"/>
+                  </a:lnTo>
+                  <a:lnTo>
+                    <a:pt x="6439364" y="830198"/>
+                  </a:lnTo>
+                  <a:lnTo>
+                    <a:pt x="6361730" y="828544"/>
+                  </a:lnTo>
+                  <a:lnTo>
+                    <a:pt x="6284096" y="826711"/>
+                  </a:lnTo>
+                  <a:lnTo>
+                    <a:pt x="6206462" y="824680"/>
+                  </a:lnTo>
+                  <a:lnTo>
+                    <a:pt x="6128827" y="822429"/>
+                  </a:lnTo>
+                  <a:lnTo>
+                    <a:pt x="6051193" y="819934"/>
+                  </a:lnTo>
+                  <a:lnTo>
+                    <a:pt x="5973559" y="817169"/>
+                  </a:lnTo>
+                  <a:lnTo>
+                    <a:pt x="5895925" y="814105"/>
+                  </a:lnTo>
+                  <a:lnTo>
+                    <a:pt x="5818291" y="810709"/>
+                  </a:lnTo>
+                  <a:lnTo>
+                    <a:pt x="5740657" y="806946"/>
+                  </a:lnTo>
+                  <a:lnTo>
+                    <a:pt x="5663023" y="802775"/>
+                  </a:lnTo>
+                  <a:lnTo>
+                    <a:pt x="5585389" y="798153"/>
+                  </a:lnTo>
+                  <a:lnTo>
+                    <a:pt x="5507755" y="793031"/>
+                  </a:lnTo>
+                  <a:lnTo>
+                    <a:pt x="5430121" y="787355"/>
+                  </a:lnTo>
+                  <a:lnTo>
+                    <a:pt x="5352487" y="781064"/>
+                  </a:lnTo>
+                  <a:lnTo>
+                    <a:pt x="5274853" y="774092"/>
+                  </a:lnTo>
+                  <a:lnTo>
+                    <a:pt x="5197219" y="766366"/>
+                  </a:lnTo>
+                  <a:lnTo>
+                    <a:pt x="5119585" y="757804"/>
+                  </a:lnTo>
+                  <a:lnTo>
+                    <a:pt x="5041951" y="748315"/>
+                  </a:lnTo>
+                  <a:lnTo>
+                    <a:pt x="4964317" y="737799"/>
+                  </a:lnTo>
+                  <a:lnTo>
+                    <a:pt x="4886683" y="726145"/>
+                  </a:lnTo>
+                  <a:lnTo>
+                    <a:pt x="4809049" y="713230"/>
+                  </a:lnTo>
+                  <a:lnTo>
+                    <a:pt x="4731415" y="698917"/>
+                  </a:lnTo>
+                  <a:lnTo>
+                    <a:pt x="4653781" y="683055"/>
+                  </a:lnTo>
+                  <a:lnTo>
+                    <a:pt x="4576147" y="665476"/>
+                  </a:lnTo>
+                  <a:lnTo>
+                    <a:pt x="4498513" y="645995"/>
+                  </a:lnTo>
+                  <a:lnTo>
+                    <a:pt x="4420879" y="624405"/>
+                  </a:lnTo>
+                  <a:lnTo>
+                    <a:pt x="4343244" y="600479"/>
+                  </a:lnTo>
+                  <a:lnTo>
+                    <a:pt x="4265610" y="573963"/>
+                  </a:lnTo>
+                  <a:lnTo>
+                    <a:pt x="4187976" y="544578"/>
+                  </a:lnTo>
+                  <a:lnTo>
+                    <a:pt x="4110342" y="512012"/>
+                  </a:lnTo>
+                  <a:lnTo>
+                    <a:pt x="4032708" y="475922"/>
+                  </a:lnTo>
+                  <a:lnTo>
+                    <a:pt x="3955074" y="435926"/>
+                  </a:lnTo>
+                  <a:lnTo>
+                    <a:pt x="3877440" y="391602"/>
+                  </a:lnTo>
+                  <a:lnTo>
+                    <a:pt x="3799806" y="342481"/>
+                  </a:lnTo>
+                  <a:lnTo>
+                    <a:pt x="3722172" y="288043"/>
+                  </a:lnTo>
+                  <a:lnTo>
+                    <a:pt x="3644538" y="227713"/>
+                  </a:lnTo>
+                  <a:lnTo>
+                    <a:pt x="3566904" y="160855"/>
+                  </a:lnTo>
+                  <a:lnTo>
+                    <a:pt x="3489270" y="86761"/>
+                  </a:lnTo>
+                  <a:lnTo>
+                    <a:pt x="3411636" y="4647"/>
                   </a:lnTo>
                   <a:lnTo>
                     <a:pt x="3334002" y="0"/>
                   </a:lnTo>
                   <a:lnTo>
-                    <a:pt x="3256368" y="24611"/>
-                  </a:lnTo>
-                  <a:lnTo>
-                    <a:pt x="3178734" y="48511"/>
-                  </a:lnTo>
-                  <a:lnTo>
-                    <a:pt x="3101100" y="71722"/>
-                  </a:lnTo>
-                  <a:lnTo>
-                    <a:pt x="3023466" y="94263"/>
-                  </a:lnTo>
-                  <a:lnTo>
-                    <a:pt x="2945832" y="116154"/>
-                  </a:lnTo>
-                  <a:lnTo>
-                    <a:pt x="2868198" y="137412"/>
-                  </a:lnTo>
-                  <a:lnTo>
-                    <a:pt x="2790564" y="158058"/>
-                  </a:lnTo>
-                  <a:lnTo>
-                    <a:pt x="2712930" y="178107"/>
-                  </a:lnTo>
-                  <a:lnTo>
-                    <a:pt x="2635295" y="197577"/>
-                  </a:lnTo>
-                  <a:lnTo>
-                    <a:pt x="2557661" y="216486"/>
-                  </a:lnTo>
-                  <a:lnTo>
-                    <a:pt x="2480027" y="234849"/>
-                  </a:lnTo>
-                  <a:lnTo>
-                    <a:pt x="2402393" y="252682"/>
-                  </a:lnTo>
-                  <a:lnTo>
-                    <a:pt x="2324759" y="270000"/>
-                  </a:lnTo>
-                  <a:lnTo>
-                    <a:pt x="2247125" y="286819"/>
-                  </a:lnTo>
-                  <a:lnTo>
-                    <a:pt x="2169491" y="303152"/>
-                  </a:lnTo>
-                  <a:lnTo>
-                    <a:pt x="2091857" y="319014"/>
-                  </a:lnTo>
-                  <a:lnTo>
-                    <a:pt x="2014223" y="334417"/>
-                  </a:lnTo>
-                  <a:lnTo>
-                    <a:pt x="1936589" y="349377"/>
-                  </a:lnTo>
-                  <a:lnTo>
-                    <a:pt x="1858955" y="363904"/>
-                  </a:lnTo>
-                  <a:lnTo>
-                    <a:pt x="1781321" y="378013"/>
-                  </a:lnTo>
-                  <a:lnTo>
-                    <a:pt x="1703687" y="391714"/>
-                  </a:lnTo>
-                  <a:lnTo>
-                    <a:pt x="1626053" y="405019"/>
-                  </a:lnTo>
-                  <a:lnTo>
-                    <a:pt x="1548419" y="417941"/>
-                  </a:lnTo>
-                  <a:lnTo>
-                    <a:pt x="1470785" y="430490"/>
-                  </a:lnTo>
-                  <a:lnTo>
-                    <a:pt x="1393151" y="442676"/>
-                  </a:lnTo>
-                  <a:lnTo>
-                    <a:pt x="1315517" y="454511"/>
-                  </a:lnTo>
-                  <a:lnTo>
-                    <a:pt x="1237883" y="466004"/>
-                  </a:lnTo>
-                  <a:lnTo>
-                    <a:pt x="1160249" y="477166"/>
-                  </a:lnTo>
-                  <a:lnTo>
-                    <a:pt x="1082615" y="488005"/>
-                  </a:lnTo>
-                  <a:lnTo>
-                    <a:pt x="1004981" y="498532"/>
-                  </a:lnTo>
-                  <a:lnTo>
-                    <a:pt x="927346" y="508754"/>
-                  </a:lnTo>
-                  <a:lnTo>
-                    <a:pt x="849712" y="518682"/>
-                  </a:lnTo>
-                  <a:lnTo>
-                    <a:pt x="772078" y="528323"/>
-                  </a:lnTo>
-                  <a:lnTo>
-                    <a:pt x="694444" y="537686"/>
-                  </a:lnTo>
-                  <a:lnTo>
-                    <a:pt x="616810" y="546779"/>
-                  </a:lnTo>
-                  <a:lnTo>
-                    <a:pt x="539176" y="555609"/>
-                  </a:lnTo>
-                  <a:lnTo>
-                    <a:pt x="461542" y="564185"/>
-                  </a:lnTo>
-                  <a:lnTo>
-                    <a:pt x="383908" y="572513"/>
-                  </a:lnTo>
-                  <a:lnTo>
-                    <a:pt x="306274" y="580600"/>
-                  </a:lnTo>
-                  <a:lnTo>
-                    <a:pt x="228640" y="588454"/>
-                  </a:lnTo>
-                  <a:lnTo>
-                    <a:pt x="151006" y="596082"/>
-                  </a:lnTo>
-                  <a:lnTo>
-                    <a:pt x="73372" y="603489"/>
-                  </a:lnTo>
-                  <a:lnTo>
-                    <a:pt x="0" y="610288"/>
+                    <a:pt x="3256368" y="34775"/>
+                  </a:lnTo>
+                  <a:lnTo>
+                    <a:pt x="3178734" y="68121"/>
+                  </a:lnTo>
+                  <a:lnTo>
+                    <a:pt x="3101100" y="100095"/>
+                  </a:lnTo>
+                  <a:lnTo>
+                    <a:pt x="3023466" y="130754"/>
+                  </a:lnTo>
+                  <a:lnTo>
+                    <a:pt x="2945832" y="160152"/>
+                  </a:lnTo>
+                  <a:lnTo>
+                    <a:pt x="2868198" y="188340"/>
+                  </a:lnTo>
+                  <a:lnTo>
+                    <a:pt x="2790564" y="215369"/>
+                  </a:lnTo>
+                  <a:lnTo>
+                    <a:pt x="2712930" y="241287"/>
+                  </a:lnTo>
+                  <a:lnTo>
+                    <a:pt x="2635295" y="266138"/>
+                  </a:lnTo>
+                  <a:lnTo>
+                    <a:pt x="2557661" y="289967"/>
+                  </a:lnTo>
+                  <a:lnTo>
+                    <a:pt x="2480027" y="312817"/>
+                  </a:lnTo>
+                  <a:lnTo>
+                    <a:pt x="2402393" y="334726"/>
+                  </a:lnTo>
+                  <a:lnTo>
+                    <a:pt x="2324759" y="355734"/>
+                  </a:lnTo>
+                  <a:lnTo>
+                    <a:pt x="2247125" y="375878"/>
+                  </a:lnTo>
+                  <a:lnTo>
+                    <a:pt x="2169491" y="395194"/>
+                  </a:lnTo>
+                  <a:lnTo>
+                    <a:pt x="2091857" y="413715"/>
+                  </a:lnTo>
+                  <a:lnTo>
+                    <a:pt x="2014223" y="431474"/>
+                  </a:lnTo>
+                  <a:lnTo>
+                    <a:pt x="1936589" y="448502"/>
+                  </a:lnTo>
+                  <a:lnTo>
+                    <a:pt x="1858955" y="464831"/>
+                  </a:lnTo>
+                  <a:lnTo>
+                    <a:pt x="1781321" y="480487"/>
+                  </a:lnTo>
+                  <a:lnTo>
+                    <a:pt x="1703687" y="495500"/>
+                  </a:lnTo>
+                  <a:lnTo>
+                    <a:pt x="1626053" y="509895"/>
+                  </a:lnTo>
+                  <a:lnTo>
+                    <a:pt x="1548419" y="523699"/>
+                  </a:lnTo>
+                  <a:lnTo>
+                    <a:pt x="1470785" y="536934"/>
+                  </a:lnTo>
+                  <a:lnTo>
+                    <a:pt x="1393151" y="549625"/>
+                  </a:lnTo>
+                  <a:lnTo>
+                    <a:pt x="1315517" y="561794"/>
+                  </a:lnTo>
+                  <a:lnTo>
+                    <a:pt x="1237883" y="573462"/>
+                  </a:lnTo>
+                  <a:lnTo>
+                    <a:pt x="1160249" y="584651"/>
+                  </a:lnTo>
+                  <a:lnTo>
+                    <a:pt x="1082615" y="595379"/>
+                  </a:lnTo>
+                  <a:lnTo>
+                    <a:pt x="1004981" y="605666"/>
+                  </a:lnTo>
+                  <a:lnTo>
+                    <a:pt x="927346" y="615530"/>
+                  </a:lnTo>
+                  <a:lnTo>
+                    <a:pt x="849712" y="624989"/>
+                  </a:lnTo>
+                  <a:lnTo>
+                    <a:pt x="772078" y="634058"/>
+                  </a:lnTo>
+                  <a:lnTo>
+                    <a:pt x="694444" y="642754"/>
+                  </a:lnTo>
+                  <a:lnTo>
+                    <a:pt x="616810" y="651092"/>
+                  </a:lnTo>
+                  <a:lnTo>
+                    <a:pt x="539176" y="659088"/>
+                  </a:lnTo>
+                  <a:lnTo>
+                    <a:pt x="461542" y="666754"/>
+                  </a:lnTo>
+                  <a:lnTo>
+                    <a:pt x="383908" y="674106"/>
+                  </a:lnTo>
+                  <a:lnTo>
+                    <a:pt x="306274" y="681155"/>
+                  </a:lnTo>
+                  <a:lnTo>
+                    <a:pt x="228640" y="687914"/>
+                  </a:lnTo>
+                  <a:lnTo>
+                    <a:pt x="151006" y="694395"/>
+                  </a:lnTo>
+                  <a:lnTo>
+                    <a:pt x="73372" y="700609"/>
+                  </a:lnTo>
+                  <a:lnTo>
+                    <a:pt x="0" y="706241"/>
                   </a:lnTo>
                 </a:path>
               </a:pathLst>
@@ -4034,261 +3962,300 @@
           </p:nvSpPr>
           <p:spPr>
             <a:xfrm>
-              <a:off x="1854431" y="1896563"/>
-              <a:ext cx="6334059" cy="3576366"/>
+              <a:off x="817517" y="2277036"/>
+              <a:ext cx="7370972" cy="3089297"/>
             </a:xfrm>
             <a:custGeom>
               <a:avLst/>
               <a:pathLst>
-                <a:path w="6334059" h="3576366">
+                <a:path w="7370972" h="3089297">
                   <a:moveTo>
                     <a:pt x="0" y="0"/>
                   </a:moveTo>
                   <a:lnTo>
-                    <a:pt x="45701" y="101508"/>
-                  </a:lnTo>
-                  <a:lnTo>
-                    <a:pt x="123335" y="265957"/>
-                  </a:lnTo>
-                  <a:lnTo>
-                    <a:pt x="200969" y="422791"/>
-                  </a:lnTo>
-                  <a:lnTo>
-                    <a:pt x="278603" y="572362"/>
-                  </a:lnTo>
-                  <a:lnTo>
-                    <a:pt x="356237" y="715006"/>
-                  </a:lnTo>
-                  <a:lnTo>
-                    <a:pt x="433871" y="851045"/>
-                  </a:lnTo>
-                  <a:lnTo>
-                    <a:pt x="511505" y="980784"/>
-                  </a:lnTo>
-                  <a:lnTo>
-                    <a:pt x="589139" y="1104515"/>
-                  </a:lnTo>
-                  <a:lnTo>
-                    <a:pt x="666773" y="1222516"/>
-                  </a:lnTo>
-                  <a:lnTo>
-                    <a:pt x="744407" y="1335052"/>
-                  </a:lnTo>
-                  <a:lnTo>
-                    <a:pt x="822042" y="1442377"/>
-                  </a:lnTo>
-                  <a:lnTo>
-                    <a:pt x="899676" y="1544732"/>
-                  </a:lnTo>
-                  <a:lnTo>
-                    <a:pt x="977310" y="1642347"/>
-                  </a:lnTo>
-                  <a:lnTo>
-                    <a:pt x="1054944" y="1735442"/>
-                  </a:lnTo>
-                  <a:lnTo>
-                    <a:pt x="1132578" y="1824225"/>
-                  </a:lnTo>
-                  <a:lnTo>
-                    <a:pt x="1210212" y="1908897"/>
-                  </a:lnTo>
-                  <a:lnTo>
-                    <a:pt x="1287846" y="1989648"/>
-                  </a:lnTo>
-                  <a:lnTo>
-                    <a:pt x="1365480" y="2066660"/>
-                  </a:lnTo>
-                  <a:lnTo>
-                    <a:pt x="1443114" y="2140105"/>
-                  </a:lnTo>
-                  <a:lnTo>
-                    <a:pt x="1520748" y="2210149"/>
-                  </a:lnTo>
-                  <a:lnTo>
-                    <a:pt x="1598382" y="2276949"/>
-                  </a:lnTo>
-                  <a:lnTo>
-                    <a:pt x="1676016" y="2340656"/>
-                  </a:lnTo>
-                  <a:lnTo>
-                    <a:pt x="1753650" y="2401413"/>
-                  </a:lnTo>
-                  <a:lnTo>
-                    <a:pt x="1831284" y="2459356"/>
-                  </a:lnTo>
-                  <a:lnTo>
-                    <a:pt x="1908918" y="2514616"/>
-                  </a:lnTo>
-                  <a:lnTo>
-                    <a:pt x="1986552" y="2567316"/>
-                  </a:lnTo>
-                  <a:lnTo>
-                    <a:pt x="2064186" y="2617577"/>
-                  </a:lnTo>
-                  <a:lnTo>
-                    <a:pt x="2141820" y="2665510"/>
-                  </a:lnTo>
-                  <a:lnTo>
-                    <a:pt x="2219454" y="2711223"/>
-                  </a:lnTo>
-                  <a:lnTo>
-                    <a:pt x="2297088" y="2754819"/>
-                  </a:lnTo>
-                  <a:lnTo>
-                    <a:pt x="2374722" y="2796396"/>
-                  </a:lnTo>
-                  <a:lnTo>
-                    <a:pt x="2452356" y="2836048"/>
-                  </a:lnTo>
-                  <a:lnTo>
-                    <a:pt x="2529991" y="2873863"/>
-                  </a:lnTo>
-                  <a:lnTo>
-                    <a:pt x="2607625" y="2909928"/>
-                  </a:lnTo>
-                  <a:lnTo>
-                    <a:pt x="2685259" y="2944322"/>
-                  </a:lnTo>
-                  <a:lnTo>
-                    <a:pt x="2762893" y="2977124"/>
-                  </a:lnTo>
-                  <a:lnTo>
-                    <a:pt x="2840527" y="3008406"/>
-                  </a:lnTo>
-                  <a:lnTo>
-                    <a:pt x="2918161" y="3038240"/>
-                  </a:lnTo>
-                  <a:lnTo>
-                    <a:pt x="2995795" y="3066693"/>
-                  </a:lnTo>
-                  <a:lnTo>
-                    <a:pt x="3073429" y="3093827"/>
-                  </a:lnTo>
-                  <a:lnTo>
-                    <a:pt x="3151063" y="3119705"/>
-                  </a:lnTo>
-                  <a:lnTo>
-                    <a:pt x="3228697" y="3144385"/>
-                  </a:lnTo>
-                  <a:lnTo>
-                    <a:pt x="3306331" y="3167922"/>
-                  </a:lnTo>
-                  <a:lnTo>
-                    <a:pt x="3383965" y="3190369"/>
-                  </a:lnTo>
-                  <a:lnTo>
-                    <a:pt x="3461599" y="3211776"/>
-                  </a:lnTo>
-                  <a:lnTo>
-                    <a:pt x="3539233" y="3232192"/>
-                  </a:lnTo>
-                  <a:lnTo>
-                    <a:pt x="3616867" y="3251663"/>
-                  </a:lnTo>
-                  <a:lnTo>
-                    <a:pt x="3694501" y="3270232"/>
-                  </a:lnTo>
-                  <a:lnTo>
-                    <a:pt x="3772135" y="3287941"/>
-                  </a:lnTo>
-                  <a:lnTo>
-                    <a:pt x="3849769" y="3304830"/>
-                  </a:lnTo>
-                  <a:lnTo>
-                    <a:pt x="3927403" y="3320937"/>
-                  </a:lnTo>
-                  <a:lnTo>
-                    <a:pt x="4005037" y="3336298"/>
-                  </a:lnTo>
-                  <a:lnTo>
-                    <a:pt x="4082671" y="3350947"/>
-                  </a:lnTo>
-                  <a:lnTo>
-                    <a:pt x="4160305" y="3364919"/>
-                  </a:lnTo>
-                  <a:lnTo>
-                    <a:pt x="4237940" y="3378243"/>
-                  </a:lnTo>
-                  <a:lnTo>
-                    <a:pt x="4315574" y="3390950"/>
-                  </a:lnTo>
-                  <a:lnTo>
-                    <a:pt x="4393208" y="3403069"/>
-                  </a:lnTo>
-                  <a:lnTo>
-                    <a:pt x="4470842" y="3414626"/>
-                  </a:lnTo>
-                  <a:lnTo>
-                    <a:pt x="4548476" y="3425649"/>
-                  </a:lnTo>
-                  <a:lnTo>
-                    <a:pt x="4626110" y="3436160"/>
-                  </a:lnTo>
-                  <a:lnTo>
-                    <a:pt x="4703744" y="3446186"/>
-                  </a:lnTo>
-                  <a:lnTo>
-                    <a:pt x="4781378" y="3455746"/>
-                  </a:lnTo>
-                  <a:lnTo>
-                    <a:pt x="4859012" y="3464864"/>
-                  </a:lnTo>
-                  <a:lnTo>
-                    <a:pt x="4936646" y="3473560"/>
-                  </a:lnTo>
-                  <a:lnTo>
-                    <a:pt x="5014280" y="3481853"/>
-                  </a:lnTo>
-                  <a:lnTo>
-                    <a:pt x="5091914" y="3489762"/>
-                  </a:lnTo>
-                  <a:lnTo>
-                    <a:pt x="5169548" y="3497305"/>
-                  </a:lnTo>
-                  <a:lnTo>
-                    <a:pt x="5247182" y="3504499"/>
-                  </a:lnTo>
-                  <a:lnTo>
-                    <a:pt x="5324816" y="3511359"/>
-                  </a:lnTo>
-                  <a:lnTo>
-                    <a:pt x="5402450" y="3517902"/>
-                  </a:lnTo>
-                  <a:lnTo>
-                    <a:pt x="5480084" y="3524142"/>
-                  </a:lnTo>
-                  <a:lnTo>
-                    <a:pt x="5557718" y="3530092"/>
-                  </a:lnTo>
-                  <a:lnTo>
-                    <a:pt x="5635352" y="3535768"/>
-                  </a:lnTo>
-                  <a:lnTo>
-                    <a:pt x="5712986" y="3541180"/>
-                  </a:lnTo>
-                  <a:lnTo>
-                    <a:pt x="5790620" y="3546342"/>
-                  </a:lnTo>
-                  <a:lnTo>
-                    <a:pt x="5868254" y="3551264"/>
-                  </a:lnTo>
-                  <a:lnTo>
-                    <a:pt x="5945888" y="3555959"/>
-                  </a:lnTo>
-                  <a:lnTo>
-                    <a:pt x="6023523" y="3560437"/>
-                  </a:lnTo>
-                  <a:lnTo>
-                    <a:pt x="6101157" y="3564707"/>
-                  </a:lnTo>
-                  <a:lnTo>
-                    <a:pt x="6178791" y="3568779"/>
-                  </a:lnTo>
-                  <a:lnTo>
-                    <a:pt x="6256425" y="3572662"/>
-                  </a:lnTo>
-                  <a:lnTo>
-                    <a:pt x="6334059" y="3576366"/>
+                    <a:pt x="73372" y="92689"/>
+                  </a:lnTo>
+                  <a:lnTo>
+                    <a:pt x="151006" y="187828"/>
+                  </a:lnTo>
+                  <a:lnTo>
+                    <a:pt x="228640" y="280120"/>
+                  </a:lnTo>
+                  <a:lnTo>
+                    <a:pt x="306274" y="369651"/>
+                  </a:lnTo>
+                  <a:lnTo>
+                    <a:pt x="383908" y="456502"/>
+                  </a:lnTo>
+                  <a:lnTo>
+                    <a:pt x="461542" y="540755"/>
+                  </a:lnTo>
+                  <a:lnTo>
+                    <a:pt x="539176" y="622486"/>
+                  </a:lnTo>
+                  <a:lnTo>
+                    <a:pt x="616810" y="701772"/>
+                  </a:lnTo>
+                  <a:lnTo>
+                    <a:pt x="694444" y="778686"/>
+                  </a:lnTo>
+                  <a:lnTo>
+                    <a:pt x="772078" y="853298"/>
+                  </a:lnTo>
+                  <a:lnTo>
+                    <a:pt x="849712" y="925677"/>
+                  </a:lnTo>
+                  <a:lnTo>
+                    <a:pt x="927346" y="995891"/>
+                  </a:lnTo>
+                  <a:lnTo>
+                    <a:pt x="1004981" y="1064003"/>
+                  </a:lnTo>
+                  <a:lnTo>
+                    <a:pt x="1082615" y="1130078"/>
+                  </a:lnTo>
+                  <a:lnTo>
+                    <a:pt x="1160249" y="1194175"/>
+                  </a:lnTo>
+                  <a:lnTo>
+                    <a:pt x="1237883" y="1256354"/>
+                  </a:lnTo>
+                  <a:lnTo>
+                    <a:pt x="1315517" y="1316673"/>
+                  </a:lnTo>
+                  <a:lnTo>
+                    <a:pt x="1393151" y="1375187"/>
+                  </a:lnTo>
+                  <a:lnTo>
+                    <a:pt x="1470785" y="1431950"/>
+                  </a:lnTo>
+                  <a:lnTo>
+                    <a:pt x="1548419" y="1487014"/>
+                  </a:lnTo>
+                  <a:lnTo>
+                    <a:pt x="1626053" y="1540431"/>
+                  </a:lnTo>
+                  <a:lnTo>
+                    <a:pt x="1703687" y="1592250"/>
+                  </a:lnTo>
+                  <a:lnTo>
+                    <a:pt x="1781321" y="1642518"/>
+                  </a:lnTo>
+                  <a:lnTo>
+                    <a:pt x="1858955" y="1691281"/>
+                  </a:lnTo>
+                  <a:lnTo>
+                    <a:pt x="1936589" y="1738586"/>
+                  </a:lnTo>
+                  <a:lnTo>
+                    <a:pt x="2014223" y="1784475"/>
+                  </a:lnTo>
+                  <a:lnTo>
+                    <a:pt x="2091857" y="1828991"/>
+                  </a:lnTo>
+                  <a:lnTo>
+                    <a:pt x="2169491" y="1872175"/>
+                  </a:lnTo>
+                  <a:lnTo>
+                    <a:pt x="2247125" y="1914067"/>
+                  </a:lnTo>
+                  <a:lnTo>
+                    <a:pt x="2324759" y="1954705"/>
+                  </a:lnTo>
+                  <a:lnTo>
+                    <a:pt x="2402393" y="1994127"/>
+                  </a:lnTo>
+                  <a:lnTo>
+                    <a:pt x="2480027" y="2032370"/>
+                  </a:lnTo>
+                  <a:lnTo>
+                    <a:pt x="2557661" y="2069468"/>
+                  </a:lnTo>
+                  <a:lnTo>
+                    <a:pt x="2635295" y="2105456"/>
+                  </a:lnTo>
+                  <a:lnTo>
+                    <a:pt x="2712930" y="2140367"/>
+                  </a:lnTo>
+                  <a:lnTo>
+                    <a:pt x="2790564" y="2174234"/>
+                  </a:lnTo>
+                  <a:lnTo>
+                    <a:pt x="2868198" y="2207087"/>
+                  </a:lnTo>
+                  <a:lnTo>
+                    <a:pt x="2945832" y="2238958"/>
+                  </a:lnTo>
+                  <a:lnTo>
+                    <a:pt x="3023466" y="2269874"/>
+                  </a:lnTo>
+                  <a:lnTo>
+                    <a:pt x="3101100" y="2299866"/>
+                  </a:lnTo>
+                  <a:lnTo>
+                    <a:pt x="3178734" y="2328960"/>
+                  </a:lnTo>
+                  <a:lnTo>
+                    <a:pt x="3256368" y="2357183"/>
+                  </a:lnTo>
+                  <a:lnTo>
+                    <a:pt x="3334002" y="2384562"/>
+                  </a:lnTo>
+                  <a:lnTo>
+                    <a:pt x="3411636" y="2411122"/>
+                  </a:lnTo>
+                  <a:lnTo>
+                    <a:pt x="3489270" y="2436887"/>
+                  </a:lnTo>
+                  <a:lnTo>
+                    <a:pt x="3566904" y="2461881"/>
+                  </a:lnTo>
+                  <a:lnTo>
+                    <a:pt x="3644538" y="2486127"/>
+                  </a:lnTo>
+                  <a:lnTo>
+                    <a:pt x="3722172" y="2509647"/>
+                  </a:lnTo>
+                  <a:lnTo>
+                    <a:pt x="3799806" y="2532464"/>
+                  </a:lnTo>
+                  <a:lnTo>
+                    <a:pt x="3877440" y="2554598"/>
+                  </a:lnTo>
+                  <a:lnTo>
+                    <a:pt x="3955074" y="2576070"/>
+                  </a:lnTo>
+                  <a:lnTo>
+                    <a:pt x="4032708" y="2596899"/>
+                  </a:lnTo>
+                  <a:lnTo>
+                    <a:pt x="4110342" y="2617105"/>
+                  </a:lnTo>
+                  <a:lnTo>
+                    <a:pt x="4187976" y="2636707"/>
+                  </a:lnTo>
+                  <a:lnTo>
+                    <a:pt x="4265610" y="2655721"/>
+                  </a:lnTo>
+                  <a:lnTo>
+                    <a:pt x="4343244" y="2674167"/>
+                  </a:lnTo>
+                  <a:lnTo>
+                    <a:pt x="4420879" y="2692061"/>
+                  </a:lnTo>
+                  <a:lnTo>
+                    <a:pt x="4498513" y="2709420"/>
+                  </a:lnTo>
+                  <a:lnTo>
+                    <a:pt x="4576147" y="2726259"/>
+                  </a:lnTo>
+                  <a:lnTo>
+                    <a:pt x="4653781" y="2742594"/>
+                  </a:lnTo>
+                  <a:lnTo>
+                    <a:pt x="4731415" y="2758440"/>
+                  </a:lnTo>
+                  <a:lnTo>
+                    <a:pt x="4809049" y="2773812"/>
+                  </a:lnTo>
+                  <a:lnTo>
+                    <a:pt x="4886683" y="2788725"/>
+                  </a:lnTo>
+                  <a:lnTo>
+                    <a:pt x="4964317" y="2803191"/>
+                  </a:lnTo>
+                  <a:lnTo>
+                    <a:pt x="5041951" y="2817224"/>
+                  </a:lnTo>
+                  <a:lnTo>
+                    <a:pt x="5119585" y="2830837"/>
+                  </a:lnTo>
+                  <a:lnTo>
+                    <a:pt x="5197219" y="2844043"/>
+                  </a:lnTo>
+                  <a:lnTo>
+                    <a:pt x="5274853" y="2856854"/>
+                  </a:lnTo>
+                  <a:lnTo>
+                    <a:pt x="5352487" y="2869281"/>
+                  </a:lnTo>
+                  <a:lnTo>
+                    <a:pt x="5430121" y="2881337"/>
+                  </a:lnTo>
+                  <a:lnTo>
+                    <a:pt x="5507755" y="2893032"/>
+                  </a:lnTo>
+                  <a:lnTo>
+                    <a:pt x="5585389" y="2904376"/>
+                  </a:lnTo>
+                  <a:lnTo>
+                    <a:pt x="5663023" y="2915382"/>
+                  </a:lnTo>
+                  <a:lnTo>
+                    <a:pt x="5740657" y="2926058"/>
+                  </a:lnTo>
+                  <a:lnTo>
+                    <a:pt x="5818291" y="2936415"/>
+                  </a:lnTo>
+                  <a:lnTo>
+                    <a:pt x="5895925" y="2946461"/>
+                  </a:lnTo>
+                  <a:lnTo>
+                    <a:pt x="5973559" y="2956207"/>
+                  </a:lnTo>
+                  <a:lnTo>
+                    <a:pt x="6051193" y="2965662"/>
+                  </a:lnTo>
+                  <a:lnTo>
+                    <a:pt x="6128827" y="2974833"/>
+                  </a:lnTo>
+                  <a:lnTo>
+                    <a:pt x="6206462" y="2983731"/>
+                  </a:lnTo>
+                  <a:lnTo>
+                    <a:pt x="6284096" y="2992362"/>
+                  </a:lnTo>
+                  <a:lnTo>
+                    <a:pt x="6361730" y="3000734"/>
+                  </a:lnTo>
+                  <a:lnTo>
+                    <a:pt x="6439364" y="3008856"/>
+                  </a:lnTo>
+                  <a:lnTo>
+                    <a:pt x="6516998" y="3016735"/>
+                  </a:lnTo>
+                  <a:lnTo>
+                    <a:pt x="6594632" y="3024379"/>
+                  </a:lnTo>
+                  <a:lnTo>
+                    <a:pt x="6672266" y="3031793"/>
+                  </a:lnTo>
+                  <a:lnTo>
+                    <a:pt x="6749900" y="3038986"/>
+                  </a:lnTo>
+                  <a:lnTo>
+                    <a:pt x="6827534" y="3045964"/>
+                  </a:lnTo>
+                  <a:lnTo>
+                    <a:pt x="6905168" y="3052732"/>
+                  </a:lnTo>
+                  <a:lnTo>
+                    <a:pt x="6982802" y="3059298"/>
+                  </a:lnTo>
+                  <a:lnTo>
+                    <a:pt x="7060436" y="3065668"/>
+                  </a:lnTo>
+                  <a:lnTo>
+                    <a:pt x="7138070" y="3071847"/>
+                  </a:lnTo>
+                  <a:lnTo>
+                    <a:pt x="7215704" y="3077842"/>
+                  </a:lnTo>
+                  <a:lnTo>
+                    <a:pt x="7293338" y="3083656"/>
+                  </a:lnTo>
+                  <a:lnTo>
+                    <a:pt x="7370972" y="3089297"/>
                   </a:lnTo>
                 </a:path>
               </a:pathLst>

--- a/docs/plots/carbo/jx_carbo_linsubhr_ratio_hosp6.pptx
+++ b/docs/plots/carbo/jx_carbo_linsubhr_ratio_hosp6.pptx
@@ -3003,452 +3003,488 @@
           <p:spPr>
             <a:xfrm>
               <a:off x="817517" y="1896563"/>
-              <a:ext cx="7370972" cy="3648190"/>
+              <a:ext cx="7370972" cy="3651155"/>
             </a:xfrm>
             <a:custGeom>
               <a:avLst/>
               <a:pathLst>
-                <a:path w="7370972" h="3648190">
+                <a:path w="7370972" h="3651155">
                   <a:moveTo>
-                    <a:pt x="2302791" y="0"/>
+                    <a:pt x="2488999" y="0"/>
                   </a:moveTo>
                   <a:lnTo>
-                    <a:pt x="2324759" y="108538"/>
-                  </a:lnTo>
-                  <a:lnTo>
-                    <a:pt x="2402393" y="454645"/>
-                  </a:lnTo>
-                  <a:lnTo>
-                    <a:pt x="2480027" y="766951"/>
-                  </a:lnTo>
-                  <a:lnTo>
-                    <a:pt x="2557661" y="1048759"/>
-                  </a:lnTo>
-                  <a:lnTo>
-                    <a:pt x="2635295" y="1303047"/>
-                  </a:lnTo>
-                  <a:lnTo>
-                    <a:pt x="2712930" y="1532501"/>
-                  </a:lnTo>
-                  <a:lnTo>
-                    <a:pt x="2790564" y="1739548"/>
-                  </a:lnTo>
-                  <a:lnTo>
-                    <a:pt x="2868198" y="1926375"/>
-                  </a:lnTo>
-                  <a:lnTo>
-                    <a:pt x="2945832" y="2094957"/>
-                  </a:lnTo>
-                  <a:lnTo>
-                    <a:pt x="3023466" y="2247076"/>
-                  </a:lnTo>
-                  <a:lnTo>
-                    <a:pt x="3101100" y="2384339"/>
-                  </a:lnTo>
-                  <a:lnTo>
-                    <a:pt x="3178734" y="2508198"/>
-                  </a:lnTo>
-                  <a:lnTo>
-                    <a:pt x="3256368" y="2619961"/>
-                  </a:lnTo>
-                  <a:lnTo>
-                    <a:pt x="3334002" y="2720810"/>
-                  </a:lnTo>
-                  <a:lnTo>
-                    <a:pt x="3411636" y="2770894"/>
-                  </a:lnTo>
-                  <a:lnTo>
-                    <a:pt x="3489270" y="2733071"/>
-                  </a:lnTo>
-                  <a:lnTo>
-                    <a:pt x="3566904" y="2693625"/>
-                  </a:lnTo>
-                  <a:lnTo>
-                    <a:pt x="3644538" y="2652487"/>
-                  </a:lnTo>
-                  <a:lnTo>
-                    <a:pt x="3722172" y="2609584"/>
-                  </a:lnTo>
-                  <a:lnTo>
-                    <a:pt x="3799806" y="2564841"/>
-                  </a:lnTo>
-                  <a:lnTo>
-                    <a:pt x="3877440" y="2518179"/>
-                  </a:lnTo>
-                  <a:lnTo>
-                    <a:pt x="3955074" y="2469515"/>
-                  </a:lnTo>
-                  <a:lnTo>
-                    <a:pt x="4032708" y="2418764"/>
-                  </a:lnTo>
-                  <a:lnTo>
-                    <a:pt x="4110342" y="2365836"/>
-                  </a:lnTo>
-                  <a:lnTo>
-                    <a:pt x="4187976" y="2310637"/>
-                  </a:lnTo>
-                  <a:lnTo>
-                    <a:pt x="4265610" y="2253070"/>
-                  </a:lnTo>
-                  <a:lnTo>
-                    <a:pt x="4343244" y="2193035"/>
-                  </a:lnTo>
-                  <a:lnTo>
-                    <a:pt x="4420879" y="2130423"/>
-                  </a:lnTo>
-                  <a:lnTo>
-                    <a:pt x="4498513" y="2065126"/>
-                  </a:lnTo>
-                  <a:lnTo>
-                    <a:pt x="4576147" y="1997029"/>
-                  </a:lnTo>
-                  <a:lnTo>
-                    <a:pt x="4653781" y="1926010"/>
-                  </a:lnTo>
-                  <a:lnTo>
-                    <a:pt x="4731415" y="1851944"/>
-                  </a:lnTo>
-                  <a:lnTo>
-                    <a:pt x="4809049" y="1774702"/>
-                  </a:lnTo>
-                  <a:lnTo>
-                    <a:pt x="4886683" y="1694146"/>
-                  </a:lnTo>
-                  <a:lnTo>
-                    <a:pt x="4964317" y="1610134"/>
-                  </a:lnTo>
-                  <a:lnTo>
-                    <a:pt x="5041951" y="1522519"/>
-                  </a:lnTo>
-                  <a:lnTo>
-                    <a:pt x="5119585" y="1431145"/>
-                  </a:lnTo>
-                  <a:lnTo>
-                    <a:pt x="5197219" y="1335852"/>
-                  </a:lnTo>
-                  <a:lnTo>
-                    <a:pt x="5274853" y="1236472"/>
-                  </a:lnTo>
-                  <a:lnTo>
-                    <a:pt x="5352487" y="1132828"/>
-                  </a:lnTo>
-                  <a:lnTo>
-                    <a:pt x="5430121" y="1024738"/>
-                  </a:lnTo>
-                  <a:lnTo>
-                    <a:pt x="5507755" y="912012"/>
-                  </a:lnTo>
-                  <a:lnTo>
-                    <a:pt x="5585389" y="794450"/>
-                  </a:lnTo>
-                  <a:lnTo>
-                    <a:pt x="5663023" y="671845"/>
-                  </a:lnTo>
-                  <a:lnTo>
-                    <a:pt x="5740657" y="543981"/>
-                  </a:lnTo>
-                  <a:lnTo>
-                    <a:pt x="5818291" y="410633"/>
-                  </a:lnTo>
-                  <a:lnTo>
-                    <a:pt x="5895925" y="271564"/>
-                  </a:lnTo>
-                  <a:lnTo>
-                    <a:pt x="5973559" y="126529"/>
-                  </a:lnTo>
-                  <a:lnTo>
-                    <a:pt x="6038503" y="0"/>
+                    <a:pt x="2557661" y="382235"/>
+                  </a:lnTo>
+                  <a:lnTo>
+                    <a:pt x="2635295" y="763969"/>
+                  </a:lnTo>
+                  <a:lnTo>
+                    <a:pt x="2712930" y="1101145"/>
+                  </a:lnTo>
+                  <a:lnTo>
+                    <a:pt x="2790564" y="1398964"/>
+                  </a:lnTo>
+                  <a:lnTo>
+                    <a:pt x="2868198" y="1662021"/>
+                  </a:lnTo>
+                  <a:lnTo>
+                    <a:pt x="2945832" y="1894373"/>
+                  </a:lnTo>
+                  <a:lnTo>
+                    <a:pt x="3023466" y="2099605"/>
+                  </a:lnTo>
+                  <a:lnTo>
+                    <a:pt x="3101100" y="2280881"/>
+                  </a:lnTo>
+                  <a:lnTo>
+                    <a:pt x="3178734" y="2440997"/>
+                  </a:lnTo>
+                  <a:lnTo>
+                    <a:pt x="3256368" y="2582425"/>
+                  </a:lnTo>
+                  <a:lnTo>
+                    <a:pt x="3334002" y="2707344"/>
+                  </a:lnTo>
+                  <a:lnTo>
+                    <a:pt x="3411636" y="2774566"/>
+                  </a:lnTo>
+                  <a:lnTo>
+                    <a:pt x="3489270" y="2748471"/>
+                  </a:lnTo>
+                  <a:lnTo>
+                    <a:pt x="3566904" y="2721600"/>
+                  </a:lnTo>
+                  <a:lnTo>
+                    <a:pt x="3644538" y="2693930"/>
+                  </a:lnTo>
+                  <a:lnTo>
+                    <a:pt x="3722172" y="2665438"/>
+                  </a:lnTo>
+                  <a:lnTo>
+                    <a:pt x="3799806" y="2636099"/>
+                  </a:lnTo>
+                  <a:lnTo>
+                    <a:pt x="3877440" y="2605888"/>
+                  </a:lnTo>
+                  <a:lnTo>
+                    <a:pt x="3955074" y="2574780"/>
+                  </a:lnTo>
+                  <a:lnTo>
+                    <a:pt x="4032708" y="2542747"/>
+                  </a:lnTo>
+                  <a:lnTo>
+                    <a:pt x="4110342" y="2509762"/>
+                  </a:lnTo>
+                  <a:lnTo>
+                    <a:pt x="4187976" y="2475796"/>
+                  </a:lnTo>
+                  <a:lnTo>
+                    <a:pt x="4265610" y="2440821"/>
+                  </a:lnTo>
+                  <a:lnTo>
+                    <a:pt x="4343244" y="2404807"/>
+                  </a:lnTo>
+                  <a:lnTo>
+                    <a:pt x="4420879" y="2367723"/>
+                  </a:lnTo>
+                  <a:lnTo>
+                    <a:pt x="4498513" y="2329536"/>
+                  </a:lnTo>
+                  <a:lnTo>
+                    <a:pt x="4576147" y="2290215"/>
+                  </a:lnTo>
+                  <a:lnTo>
+                    <a:pt x="4653781" y="2249724"/>
+                  </a:lnTo>
+                  <a:lnTo>
+                    <a:pt x="4731415" y="2208031"/>
+                  </a:lnTo>
+                  <a:lnTo>
+                    <a:pt x="4809049" y="2165099"/>
+                  </a:lnTo>
+                  <a:lnTo>
+                    <a:pt x="4886683" y="2120890"/>
+                  </a:lnTo>
+                  <a:lnTo>
+                    <a:pt x="4964317" y="2075368"/>
+                  </a:lnTo>
+                  <a:lnTo>
+                    <a:pt x="5041951" y="2028493"/>
+                  </a:lnTo>
+                  <a:lnTo>
+                    <a:pt x="5119585" y="1980225"/>
+                  </a:lnTo>
+                  <a:lnTo>
+                    <a:pt x="5197219" y="1930522"/>
+                  </a:lnTo>
+                  <a:lnTo>
+                    <a:pt x="5274853" y="1879342"/>
+                  </a:lnTo>
+                  <a:lnTo>
+                    <a:pt x="5352487" y="1826641"/>
+                  </a:lnTo>
+                  <a:lnTo>
+                    <a:pt x="5430121" y="1772374"/>
+                  </a:lnTo>
+                  <a:lnTo>
+                    <a:pt x="5507755" y="1716494"/>
+                  </a:lnTo>
+                  <a:lnTo>
+                    <a:pt x="5585389" y="1658954"/>
+                  </a:lnTo>
+                  <a:lnTo>
+                    <a:pt x="5663023" y="1599703"/>
+                  </a:lnTo>
+                  <a:lnTo>
+                    <a:pt x="5740657" y="1538692"/>
+                  </a:lnTo>
+                  <a:lnTo>
+                    <a:pt x="5818291" y="1475867"/>
+                  </a:lnTo>
+                  <a:lnTo>
+                    <a:pt x="5895925" y="1411176"/>
+                  </a:lnTo>
+                  <a:lnTo>
+                    <a:pt x="5973559" y="1344561"/>
+                  </a:lnTo>
+                  <a:lnTo>
+                    <a:pt x="6051193" y="1275967"/>
+                  </a:lnTo>
+                  <a:lnTo>
+                    <a:pt x="6128827" y="1205335"/>
+                  </a:lnTo>
+                  <a:lnTo>
+                    <a:pt x="6206462" y="1132603"/>
+                  </a:lnTo>
+                  <a:lnTo>
+                    <a:pt x="6284096" y="1057710"/>
+                  </a:lnTo>
+                  <a:lnTo>
+                    <a:pt x="6361730" y="980591"/>
+                  </a:lnTo>
+                  <a:lnTo>
+                    <a:pt x="6439364" y="901180"/>
+                  </a:lnTo>
+                  <a:lnTo>
+                    <a:pt x="6516998" y="819409"/>
+                  </a:lnTo>
+                  <a:lnTo>
+                    <a:pt x="6594632" y="735208"/>
+                  </a:lnTo>
+                  <a:lnTo>
+                    <a:pt x="6672266" y="648505"/>
+                  </a:lnTo>
+                  <a:lnTo>
+                    <a:pt x="6749900" y="559224"/>
+                  </a:lnTo>
+                  <a:lnTo>
+                    <a:pt x="6827534" y="467291"/>
+                  </a:lnTo>
+                  <a:lnTo>
+                    <a:pt x="6905168" y="372625"/>
+                  </a:lnTo>
+                  <a:lnTo>
+                    <a:pt x="6982802" y="275146"/>
+                  </a:lnTo>
+                  <a:lnTo>
+                    <a:pt x="7060436" y="174770"/>
+                  </a:lnTo>
+                  <a:lnTo>
+                    <a:pt x="7138070" y="71411"/>
+                  </a:lnTo>
+                  <a:lnTo>
+                    <a:pt x="7190160" y="0"/>
                   </a:lnTo>
                   <a:lnTo>
                     <a:pt x="7370972" y="0"/>
                   </a:lnTo>
                   <a:lnTo>
-                    <a:pt x="7370972" y="3648190"/>
-                  </a:lnTo>
-                  <a:lnTo>
-                    <a:pt x="7293338" y="3647708"/>
-                  </a:lnTo>
-                  <a:lnTo>
-                    <a:pt x="7215704" y="3647174"/>
-                  </a:lnTo>
-                  <a:lnTo>
-                    <a:pt x="7138070" y="3646582"/>
-                  </a:lnTo>
-                  <a:lnTo>
-                    <a:pt x="7060436" y="3645926"/>
-                  </a:lnTo>
-                  <a:lnTo>
-                    <a:pt x="6982802" y="3645199"/>
-                  </a:lnTo>
-                  <a:lnTo>
-                    <a:pt x="6905168" y="3644394"/>
-                  </a:lnTo>
-                  <a:lnTo>
-                    <a:pt x="6827534" y="3643501"/>
-                  </a:lnTo>
-                  <a:lnTo>
-                    <a:pt x="6749900" y="3642511"/>
-                  </a:lnTo>
-                  <a:lnTo>
-                    <a:pt x="6672266" y="3641415"/>
-                  </a:lnTo>
-                  <a:lnTo>
-                    <a:pt x="6594632" y="3640200"/>
-                  </a:lnTo>
-                  <a:lnTo>
-                    <a:pt x="6516998" y="3638853"/>
-                  </a:lnTo>
-                  <a:lnTo>
-                    <a:pt x="6439364" y="3637360"/>
-                  </a:lnTo>
-                  <a:lnTo>
-                    <a:pt x="6361730" y="3635706"/>
-                  </a:lnTo>
-                  <a:lnTo>
-                    <a:pt x="6284096" y="3633873"/>
-                  </a:lnTo>
-                  <a:lnTo>
-                    <a:pt x="6206462" y="3631842"/>
-                  </a:lnTo>
-                  <a:lnTo>
-                    <a:pt x="6128827" y="3629591"/>
-                  </a:lnTo>
-                  <a:lnTo>
-                    <a:pt x="6051193" y="3627096"/>
-                  </a:lnTo>
-                  <a:lnTo>
-                    <a:pt x="5973559" y="3624331"/>
-                  </a:lnTo>
-                  <a:lnTo>
-                    <a:pt x="5895925" y="3621267"/>
-                  </a:lnTo>
-                  <a:lnTo>
-                    <a:pt x="5818291" y="3617871"/>
-                  </a:lnTo>
-                  <a:lnTo>
-                    <a:pt x="5740657" y="3614108"/>
-                  </a:lnTo>
-                  <a:lnTo>
-                    <a:pt x="5663023" y="3609937"/>
-                  </a:lnTo>
-                  <a:lnTo>
-                    <a:pt x="5585389" y="3605315"/>
-                  </a:lnTo>
-                  <a:lnTo>
-                    <a:pt x="5507755" y="3600193"/>
-                  </a:lnTo>
-                  <a:lnTo>
-                    <a:pt x="5430121" y="3594517"/>
-                  </a:lnTo>
-                  <a:lnTo>
-                    <a:pt x="5352487" y="3588226"/>
-                  </a:lnTo>
-                  <a:lnTo>
-                    <a:pt x="5274853" y="3581254"/>
-                  </a:lnTo>
-                  <a:lnTo>
-                    <a:pt x="5197219" y="3573528"/>
-                  </a:lnTo>
-                  <a:lnTo>
-                    <a:pt x="5119585" y="3564966"/>
-                  </a:lnTo>
-                  <a:lnTo>
-                    <a:pt x="5041951" y="3555477"/>
-                  </a:lnTo>
-                  <a:lnTo>
-                    <a:pt x="4964317" y="3544961"/>
-                  </a:lnTo>
-                  <a:lnTo>
-                    <a:pt x="4886683" y="3533307"/>
-                  </a:lnTo>
-                  <a:lnTo>
-                    <a:pt x="4809049" y="3520392"/>
-                  </a:lnTo>
-                  <a:lnTo>
-                    <a:pt x="4731415" y="3506079"/>
-                  </a:lnTo>
-                  <a:lnTo>
-                    <a:pt x="4653781" y="3490217"/>
-                  </a:lnTo>
-                  <a:lnTo>
-                    <a:pt x="4576147" y="3472638"/>
-                  </a:lnTo>
-                  <a:lnTo>
-                    <a:pt x="4498513" y="3453157"/>
-                  </a:lnTo>
-                  <a:lnTo>
-                    <a:pt x="4420879" y="3431567"/>
-                  </a:lnTo>
-                  <a:lnTo>
-                    <a:pt x="4343244" y="3407641"/>
-                  </a:lnTo>
-                  <a:lnTo>
-                    <a:pt x="4265610" y="3381125"/>
-                  </a:lnTo>
-                  <a:lnTo>
-                    <a:pt x="4187976" y="3351740"/>
-                  </a:lnTo>
-                  <a:lnTo>
-                    <a:pt x="4110342" y="3319175"/>
-                  </a:lnTo>
-                  <a:lnTo>
-                    <a:pt x="4032708" y="3283085"/>
-                  </a:lnTo>
-                  <a:lnTo>
-                    <a:pt x="3955074" y="3243089"/>
-                  </a:lnTo>
-                  <a:lnTo>
-                    <a:pt x="3877440" y="3198764"/>
-                  </a:lnTo>
-                  <a:lnTo>
-                    <a:pt x="3799806" y="3149643"/>
-                  </a:lnTo>
-                  <a:lnTo>
-                    <a:pt x="3722172" y="3095205"/>
-                  </a:lnTo>
-                  <a:lnTo>
-                    <a:pt x="3644538" y="3034876"/>
-                  </a:lnTo>
-                  <a:lnTo>
-                    <a:pt x="3566904" y="2968017"/>
-                  </a:lnTo>
-                  <a:lnTo>
-                    <a:pt x="3489270" y="2893923"/>
-                  </a:lnTo>
-                  <a:lnTo>
-                    <a:pt x="3411636" y="2811810"/>
-                  </a:lnTo>
-                  <a:lnTo>
-                    <a:pt x="3334002" y="2807162"/>
-                  </a:lnTo>
-                  <a:lnTo>
-                    <a:pt x="3256368" y="2841938"/>
-                  </a:lnTo>
-                  <a:lnTo>
-                    <a:pt x="3178734" y="2875283"/>
-                  </a:lnTo>
-                  <a:lnTo>
-                    <a:pt x="3101100" y="2907257"/>
-                  </a:lnTo>
-                  <a:lnTo>
-                    <a:pt x="3023466" y="2937916"/>
-                  </a:lnTo>
-                  <a:lnTo>
-                    <a:pt x="2945832" y="2967314"/>
-                  </a:lnTo>
-                  <a:lnTo>
-                    <a:pt x="2868198" y="2995502"/>
-                  </a:lnTo>
-                  <a:lnTo>
-                    <a:pt x="2790564" y="3022532"/>
-                  </a:lnTo>
-                  <a:lnTo>
-                    <a:pt x="2712930" y="3048449"/>
-                  </a:lnTo>
-                  <a:lnTo>
-                    <a:pt x="2635295" y="3073300"/>
-                  </a:lnTo>
-                  <a:lnTo>
-                    <a:pt x="2557661" y="3097130"/>
-                  </a:lnTo>
-                  <a:lnTo>
-                    <a:pt x="2480027" y="3119979"/>
-                  </a:lnTo>
-                  <a:lnTo>
-                    <a:pt x="2402393" y="3141888"/>
-                  </a:lnTo>
-                  <a:lnTo>
-                    <a:pt x="2324759" y="3162896"/>
-                  </a:lnTo>
-                  <a:lnTo>
-                    <a:pt x="2247125" y="3183040"/>
-                  </a:lnTo>
-                  <a:lnTo>
-                    <a:pt x="2169491" y="3202356"/>
-                  </a:lnTo>
-                  <a:lnTo>
-                    <a:pt x="2091857" y="3220877"/>
-                  </a:lnTo>
-                  <a:lnTo>
-                    <a:pt x="2014223" y="3238636"/>
-                  </a:lnTo>
-                  <a:lnTo>
-                    <a:pt x="1936589" y="3255665"/>
-                  </a:lnTo>
-                  <a:lnTo>
-                    <a:pt x="1858955" y="3271993"/>
-                  </a:lnTo>
-                  <a:lnTo>
-                    <a:pt x="1781321" y="3287650"/>
-                  </a:lnTo>
-                  <a:lnTo>
-                    <a:pt x="1703687" y="3302662"/>
-                  </a:lnTo>
-                  <a:lnTo>
-                    <a:pt x="1626053" y="3317058"/>
-                  </a:lnTo>
-                  <a:lnTo>
-                    <a:pt x="1548419" y="3330861"/>
-                  </a:lnTo>
-                  <a:lnTo>
-                    <a:pt x="1470785" y="3344096"/>
-                  </a:lnTo>
-                  <a:lnTo>
-                    <a:pt x="1393151" y="3356787"/>
-                  </a:lnTo>
-                  <a:lnTo>
-                    <a:pt x="1315517" y="3368956"/>
-                  </a:lnTo>
-                  <a:lnTo>
-                    <a:pt x="1237883" y="3380625"/>
-                  </a:lnTo>
-                  <a:lnTo>
-                    <a:pt x="1160249" y="3391813"/>
-                  </a:lnTo>
-                  <a:lnTo>
-                    <a:pt x="1082615" y="3402542"/>
-                  </a:lnTo>
-                  <a:lnTo>
-                    <a:pt x="1004981" y="3412829"/>
-                  </a:lnTo>
-                  <a:lnTo>
-                    <a:pt x="927346" y="3422693"/>
-                  </a:lnTo>
-                  <a:lnTo>
-                    <a:pt x="849712" y="3432151"/>
-                  </a:lnTo>
-                  <a:lnTo>
-                    <a:pt x="772078" y="3441220"/>
-                  </a:lnTo>
-                  <a:lnTo>
-                    <a:pt x="694444" y="3449916"/>
-                  </a:lnTo>
-                  <a:lnTo>
-                    <a:pt x="616810" y="3458255"/>
-                  </a:lnTo>
-                  <a:lnTo>
-                    <a:pt x="539176" y="3466250"/>
-                  </a:lnTo>
-                  <a:lnTo>
-                    <a:pt x="461542" y="3473917"/>
-                  </a:lnTo>
-                  <a:lnTo>
-                    <a:pt x="383908" y="3481268"/>
-                  </a:lnTo>
-                  <a:lnTo>
-                    <a:pt x="306274" y="3488317"/>
-                  </a:lnTo>
-                  <a:lnTo>
-                    <a:pt x="228640" y="3495076"/>
-                  </a:lnTo>
-                  <a:lnTo>
-                    <a:pt x="151006" y="3501557"/>
-                  </a:lnTo>
-                  <a:lnTo>
-                    <a:pt x="73372" y="3507771"/>
-                  </a:lnTo>
-                  <a:lnTo>
-                    <a:pt x="0" y="3513403"/>
+                    <a:pt x="7370972" y="3651155"/>
+                  </a:lnTo>
+                  <a:lnTo>
+                    <a:pt x="7293338" y="3650959"/>
+                  </a:lnTo>
+                  <a:lnTo>
+                    <a:pt x="7215704" y="3650736"/>
+                  </a:lnTo>
+                  <a:lnTo>
+                    <a:pt x="7138070" y="3650484"/>
+                  </a:lnTo>
+                  <a:lnTo>
+                    <a:pt x="7060436" y="3650199"/>
+                  </a:lnTo>
+                  <a:lnTo>
+                    <a:pt x="6982802" y="3649876"/>
+                  </a:lnTo>
+                  <a:lnTo>
+                    <a:pt x="6905168" y="3649510"/>
+                  </a:lnTo>
+                  <a:lnTo>
+                    <a:pt x="6827534" y="3649096"/>
+                  </a:lnTo>
+                  <a:lnTo>
+                    <a:pt x="6749900" y="3648627"/>
+                  </a:lnTo>
+                  <a:lnTo>
+                    <a:pt x="6672266" y="3648096"/>
+                  </a:lnTo>
+                  <a:lnTo>
+                    <a:pt x="6594632" y="3647495"/>
+                  </a:lnTo>
+                  <a:lnTo>
+                    <a:pt x="6516998" y="3646815"/>
+                  </a:lnTo>
+                  <a:lnTo>
+                    <a:pt x="6439364" y="3646045"/>
+                  </a:lnTo>
+                  <a:lnTo>
+                    <a:pt x="6361730" y="3645173"/>
+                  </a:lnTo>
+                  <a:lnTo>
+                    <a:pt x="6284096" y="3644186"/>
+                  </a:lnTo>
+                  <a:lnTo>
+                    <a:pt x="6206462" y="3643068"/>
+                  </a:lnTo>
+                  <a:lnTo>
+                    <a:pt x="6128827" y="3641803"/>
+                  </a:lnTo>
+                  <a:lnTo>
+                    <a:pt x="6051193" y="3640370"/>
+                  </a:lnTo>
+                  <a:lnTo>
+                    <a:pt x="5973559" y="3638748"/>
+                  </a:lnTo>
+                  <a:lnTo>
+                    <a:pt x="5895925" y="3636912"/>
+                  </a:lnTo>
+                  <a:lnTo>
+                    <a:pt x="5818291" y="3634833"/>
+                  </a:lnTo>
+                  <a:lnTo>
+                    <a:pt x="5740657" y="3632480"/>
+                  </a:lnTo>
+                  <a:lnTo>
+                    <a:pt x="5663023" y="3629815"/>
+                  </a:lnTo>
+                  <a:lnTo>
+                    <a:pt x="5585389" y="3626798"/>
+                  </a:lnTo>
+                  <a:lnTo>
+                    <a:pt x="5507755" y="3623383"/>
+                  </a:lnTo>
+                  <a:lnTo>
+                    <a:pt x="5430121" y="3619516"/>
+                  </a:lnTo>
+                  <a:lnTo>
+                    <a:pt x="5352487" y="3615139"/>
+                  </a:lnTo>
+                  <a:lnTo>
+                    <a:pt x="5274853" y="3610183"/>
+                  </a:lnTo>
+                  <a:lnTo>
+                    <a:pt x="5197219" y="3604571"/>
+                  </a:lnTo>
+                  <a:lnTo>
+                    <a:pt x="5119585" y="3598219"/>
+                  </a:lnTo>
+                  <a:lnTo>
+                    <a:pt x="5041951" y="3591027"/>
+                  </a:lnTo>
+                  <a:lnTo>
+                    <a:pt x="4964317" y="3582884"/>
+                  </a:lnTo>
+                  <a:lnTo>
+                    <a:pt x="4886683" y="3573666"/>
+                  </a:lnTo>
+                  <a:lnTo>
+                    <a:pt x="4809049" y="3563229"/>
+                  </a:lnTo>
+                  <a:lnTo>
+                    <a:pt x="4731415" y="3551413"/>
+                  </a:lnTo>
+                  <a:lnTo>
+                    <a:pt x="4653781" y="3538036"/>
+                  </a:lnTo>
+                  <a:lnTo>
+                    <a:pt x="4576147" y="3522891"/>
+                  </a:lnTo>
+                  <a:lnTo>
+                    <a:pt x="4498513" y="3505744"/>
+                  </a:lnTo>
+                  <a:lnTo>
+                    <a:pt x="4420879" y="3486331"/>
+                  </a:lnTo>
+                  <a:lnTo>
+                    <a:pt x="4343244" y="3464354"/>
+                  </a:lnTo>
+                  <a:lnTo>
+                    <a:pt x="4265610" y="3439471"/>
+                  </a:lnTo>
+                  <a:lnTo>
+                    <a:pt x="4187976" y="3411301"/>
+                  </a:lnTo>
+                  <a:lnTo>
+                    <a:pt x="4110342" y="3379408"/>
+                  </a:lnTo>
+                  <a:lnTo>
+                    <a:pt x="4032708" y="3343301"/>
+                  </a:lnTo>
+                  <a:lnTo>
+                    <a:pt x="3955074" y="3302422"/>
+                  </a:lnTo>
+                  <a:lnTo>
+                    <a:pt x="3877440" y="3256141"/>
+                  </a:lnTo>
+                  <a:lnTo>
+                    <a:pt x="3799806" y="3203743"/>
+                  </a:lnTo>
+                  <a:lnTo>
+                    <a:pt x="3722172" y="3144422"/>
+                  </a:lnTo>
+                  <a:lnTo>
+                    <a:pt x="3644538" y="3077262"/>
+                  </a:lnTo>
+                  <a:lnTo>
+                    <a:pt x="3566904" y="3001226"/>
+                  </a:lnTo>
+                  <a:lnTo>
+                    <a:pt x="3489270" y="2915142"/>
+                  </a:lnTo>
+                  <a:lnTo>
+                    <a:pt x="3411636" y="2817683"/>
+                  </a:lnTo>
+                  <a:lnTo>
+                    <a:pt x="3334002" y="2799909"/>
+                  </a:lnTo>
+                  <a:lnTo>
+                    <a:pt x="3256368" y="2824520"/>
+                  </a:lnTo>
+                  <a:lnTo>
+                    <a:pt x="3178734" y="2848421"/>
+                  </a:lnTo>
+                  <a:lnTo>
+                    <a:pt x="3101100" y="2871631"/>
+                  </a:lnTo>
+                  <a:lnTo>
+                    <a:pt x="3023466" y="2894173"/>
+                  </a:lnTo>
+                  <a:lnTo>
+                    <a:pt x="2945832" y="2916063"/>
+                  </a:lnTo>
+                  <a:lnTo>
+                    <a:pt x="2868198" y="2937322"/>
+                  </a:lnTo>
+                  <a:lnTo>
+                    <a:pt x="2790564" y="2957967"/>
+                  </a:lnTo>
+                  <a:lnTo>
+                    <a:pt x="2712930" y="2978016"/>
+                  </a:lnTo>
+                  <a:lnTo>
+                    <a:pt x="2635295" y="2997487"/>
+                  </a:lnTo>
+                  <a:lnTo>
+                    <a:pt x="2557661" y="3016395"/>
+                  </a:lnTo>
+                  <a:lnTo>
+                    <a:pt x="2480027" y="3034758"/>
+                  </a:lnTo>
+                  <a:lnTo>
+                    <a:pt x="2402393" y="3052591"/>
+                  </a:lnTo>
+                  <a:lnTo>
+                    <a:pt x="2324759" y="3069910"/>
+                  </a:lnTo>
+                  <a:lnTo>
+                    <a:pt x="2247125" y="3086728"/>
+                  </a:lnTo>
+                  <a:lnTo>
+                    <a:pt x="2169491" y="3103061"/>
+                  </a:lnTo>
+                  <a:lnTo>
+                    <a:pt x="2091857" y="3118923"/>
+                  </a:lnTo>
+                  <a:lnTo>
+                    <a:pt x="2014223" y="3134327"/>
+                  </a:lnTo>
+                  <a:lnTo>
+                    <a:pt x="1936589" y="3149286"/>
+                  </a:lnTo>
+                  <a:lnTo>
+                    <a:pt x="1858955" y="3163814"/>
+                  </a:lnTo>
+                  <a:lnTo>
+                    <a:pt x="1781321" y="3177922"/>
+                  </a:lnTo>
+                  <a:lnTo>
+                    <a:pt x="1703687" y="3191623"/>
+                  </a:lnTo>
+                  <a:lnTo>
+                    <a:pt x="1626053" y="3204929"/>
+                  </a:lnTo>
+                  <a:lnTo>
+                    <a:pt x="1548419" y="3217850"/>
+                  </a:lnTo>
+                  <a:lnTo>
+                    <a:pt x="1470785" y="3230399"/>
+                  </a:lnTo>
+                  <a:lnTo>
+                    <a:pt x="1393151" y="3242585"/>
+                  </a:lnTo>
+                  <a:lnTo>
+                    <a:pt x="1315517" y="3254420"/>
+                  </a:lnTo>
+                  <a:lnTo>
+                    <a:pt x="1237883" y="3265913"/>
+                  </a:lnTo>
+                  <a:lnTo>
+                    <a:pt x="1160249" y="3277075"/>
+                  </a:lnTo>
+                  <a:lnTo>
+                    <a:pt x="1082615" y="3287914"/>
+                  </a:lnTo>
+                  <a:lnTo>
+                    <a:pt x="1004981" y="3298441"/>
+                  </a:lnTo>
+                  <a:lnTo>
+                    <a:pt x="927346" y="3308664"/>
+                  </a:lnTo>
+                  <a:lnTo>
+                    <a:pt x="849712" y="3318591"/>
+                  </a:lnTo>
+                  <a:lnTo>
+                    <a:pt x="772078" y="3328233"/>
+                  </a:lnTo>
+                  <a:lnTo>
+                    <a:pt x="694444" y="3337596"/>
+                  </a:lnTo>
+                  <a:lnTo>
+                    <a:pt x="616810" y="3346688"/>
+                  </a:lnTo>
+                  <a:lnTo>
+                    <a:pt x="539176" y="3355518"/>
+                  </a:lnTo>
+                  <a:lnTo>
+                    <a:pt x="461542" y="3364094"/>
+                  </a:lnTo>
+                  <a:lnTo>
+                    <a:pt x="383908" y="3372422"/>
+                  </a:lnTo>
+                  <a:lnTo>
+                    <a:pt x="306274" y="3380509"/>
+                  </a:lnTo>
+                  <a:lnTo>
+                    <a:pt x="228640" y="3388364"/>
+                  </a:lnTo>
+                  <a:lnTo>
+                    <a:pt x="151006" y="3395991"/>
+                  </a:lnTo>
+                  <a:lnTo>
+                    <a:pt x="73372" y="3403398"/>
+                  </a:lnTo>
+                  <a:lnTo>
+                    <a:pt x="0" y="3410197"/>
                   </a:lnTo>
                   <a:close/>
                 </a:path>
@@ -3474,162 +3510,198 @@
           </p:nvSpPr>
           <p:spPr>
             <a:xfrm>
-              <a:off x="3120309" y="1896563"/>
-              <a:ext cx="3735711" cy="2770894"/>
+              <a:off x="3306517" y="1896563"/>
+              <a:ext cx="4701161" cy="2774566"/>
             </a:xfrm>
             <a:custGeom>
               <a:avLst/>
               <a:pathLst>
-                <a:path w="3735711" h="2770894">
+                <a:path w="4701161" h="2774566">
                   <a:moveTo>
                     <a:pt x="0" y="0"/>
                   </a:moveTo>
                   <a:lnTo>
-                    <a:pt x="21968" y="108538"/>
-                  </a:lnTo>
-                  <a:lnTo>
-                    <a:pt x="99602" y="454645"/>
-                  </a:lnTo>
-                  <a:lnTo>
-                    <a:pt x="177236" y="766951"/>
-                  </a:lnTo>
-                  <a:lnTo>
-                    <a:pt x="254870" y="1048759"/>
-                  </a:lnTo>
-                  <a:lnTo>
-                    <a:pt x="332504" y="1303047"/>
-                  </a:lnTo>
-                  <a:lnTo>
-                    <a:pt x="410138" y="1532501"/>
-                  </a:lnTo>
-                  <a:lnTo>
-                    <a:pt x="487772" y="1739548"/>
-                  </a:lnTo>
-                  <a:lnTo>
-                    <a:pt x="565406" y="1926375"/>
-                  </a:lnTo>
-                  <a:lnTo>
-                    <a:pt x="643040" y="2094957"/>
-                  </a:lnTo>
-                  <a:lnTo>
-                    <a:pt x="720674" y="2247076"/>
-                  </a:lnTo>
-                  <a:lnTo>
-                    <a:pt x="798308" y="2384339"/>
-                  </a:lnTo>
-                  <a:lnTo>
-                    <a:pt x="875942" y="2508198"/>
-                  </a:lnTo>
-                  <a:lnTo>
-                    <a:pt x="953576" y="2619961"/>
-                  </a:lnTo>
-                  <a:lnTo>
-                    <a:pt x="1031210" y="2720810"/>
-                  </a:lnTo>
-                  <a:lnTo>
-                    <a:pt x="1108845" y="2770894"/>
-                  </a:lnTo>
-                  <a:lnTo>
-                    <a:pt x="1186479" y="2733071"/>
-                  </a:lnTo>
-                  <a:lnTo>
-                    <a:pt x="1264113" y="2693625"/>
-                  </a:lnTo>
-                  <a:lnTo>
-                    <a:pt x="1341747" y="2652487"/>
-                  </a:lnTo>
-                  <a:lnTo>
-                    <a:pt x="1419381" y="2609584"/>
-                  </a:lnTo>
-                  <a:lnTo>
-                    <a:pt x="1497015" y="2564841"/>
-                  </a:lnTo>
-                  <a:lnTo>
-                    <a:pt x="1574649" y="2518179"/>
-                  </a:lnTo>
-                  <a:lnTo>
-                    <a:pt x="1652283" y="2469515"/>
-                  </a:lnTo>
-                  <a:lnTo>
-                    <a:pt x="1729917" y="2418764"/>
-                  </a:lnTo>
-                  <a:lnTo>
-                    <a:pt x="1807551" y="2365836"/>
-                  </a:lnTo>
-                  <a:lnTo>
-                    <a:pt x="1885185" y="2310637"/>
-                  </a:lnTo>
-                  <a:lnTo>
-                    <a:pt x="1962819" y="2253070"/>
-                  </a:lnTo>
-                  <a:lnTo>
-                    <a:pt x="2040453" y="2193035"/>
-                  </a:lnTo>
-                  <a:lnTo>
-                    <a:pt x="2118087" y="2130423"/>
-                  </a:lnTo>
-                  <a:lnTo>
-                    <a:pt x="2195721" y="2065126"/>
-                  </a:lnTo>
-                  <a:lnTo>
-                    <a:pt x="2273355" y="1997029"/>
-                  </a:lnTo>
-                  <a:lnTo>
-                    <a:pt x="2350989" y="1926010"/>
-                  </a:lnTo>
-                  <a:lnTo>
-                    <a:pt x="2428623" y="1851944"/>
-                  </a:lnTo>
-                  <a:lnTo>
-                    <a:pt x="2506257" y="1774702"/>
-                  </a:lnTo>
-                  <a:lnTo>
-                    <a:pt x="2583891" y="1694146"/>
-                  </a:lnTo>
-                  <a:lnTo>
-                    <a:pt x="2661525" y="1610134"/>
-                  </a:lnTo>
-                  <a:lnTo>
-                    <a:pt x="2739159" y="1522519"/>
-                  </a:lnTo>
-                  <a:lnTo>
-                    <a:pt x="2816793" y="1431145"/>
-                  </a:lnTo>
-                  <a:lnTo>
-                    <a:pt x="2894428" y="1335852"/>
-                  </a:lnTo>
-                  <a:lnTo>
-                    <a:pt x="2972062" y="1236472"/>
-                  </a:lnTo>
-                  <a:lnTo>
-                    <a:pt x="3049696" y="1132828"/>
-                  </a:lnTo>
-                  <a:lnTo>
-                    <a:pt x="3127330" y="1024738"/>
-                  </a:lnTo>
-                  <a:lnTo>
-                    <a:pt x="3204964" y="912012"/>
-                  </a:lnTo>
-                  <a:lnTo>
-                    <a:pt x="3282598" y="794450"/>
-                  </a:lnTo>
-                  <a:lnTo>
-                    <a:pt x="3360232" y="671845"/>
-                  </a:lnTo>
-                  <a:lnTo>
-                    <a:pt x="3437866" y="543981"/>
-                  </a:lnTo>
-                  <a:lnTo>
-                    <a:pt x="3515500" y="410633"/>
-                  </a:lnTo>
-                  <a:lnTo>
-                    <a:pt x="3593134" y="271564"/>
-                  </a:lnTo>
-                  <a:lnTo>
-                    <a:pt x="3670768" y="126529"/>
-                  </a:lnTo>
-                  <a:lnTo>
-                    <a:pt x="3735711" y="0"/>
+                    <a:pt x="68662" y="382235"/>
+                  </a:lnTo>
+                  <a:lnTo>
+                    <a:pt x="146296" y="763969"/>
+                  </a:lnTo>
+                  <a:lnTo>
+                    <a:pt x="223930" y="1101145"/>
+                  </a:lnTo>
+                  <a:lnTo>
+                    <a:pt x="301564" y="1398964"/>
+                  </a:lnTo>
+                  <a:lnTo>
+                    <a:pt x="379198" y="1662021"/>
+                  </a:lnTo>
+                  <a:lnTo>
+                    <a:pt x="456832" y="1894373"/>
+                  </a:lnTo>
+                  <a:lnTo>
+                    <a:pt x="534466" y="2099605"/>
+                  </a:lnTo>
+                  <a:lnTo>
+                    <a:pt x="612100" y="2280881"/>
+                  </a:lnTo>
+                  <a:lnTo>
+                    <a:pt x="689734" y="2440997"/>
+                  </a:lnTo>
+                  <a:lnTo>
+                    <a:pt x="767369" y="2582425"/>
+                  </a:lnTo>
+                  <a:lnTo>
+                    <a:pt x="845003" y="2707344"/>
+                  </a:lnTo>
+                  <a:lnTo>
+                    <a:pt x="922637" y="2774566"/>
+                  </a:lnTo>
+                  <a:lnTo>
+                    <a:pt x="1000271" y="2748471"/>
+                  </a:lnTo>
+                  <a:lnTo>
+                    <a:pt x="1077905" y="2721600"/>
+                  </a:lnTo>
+                  <a:lnTo>
+                    <a:pt x="1155539" y="2693930"/>
+                  </a:lnTo>
+                  <a:lnTo>
+                    <a:pt x="1233173" y="2665438"/>
+                  </a:lnTo>
+                  <a:lnTo>
+                    <a:pt x="1310807" y="2636099"/>
+                  </a:lnTo>
+                  <a:lnTo>
+                    <a:pt x="1388441" y="2605888"/>
+                  </a:lnTo>
+                  <a:lnTo>
+                    <a:pt x="1466075" y="2574780"/>
+                  </a:lnTo>
+                  <a:lnTo>
+                    <a:pt x="1543709" y="2542747"/>
+                  </a:lnTo>
+                  <a:lnTo>
+                    <a:pt x="1621343" y="2509762"/>
+                  </a:lnTo>
+                  <a:lnTo>
+                    <a:pt x="1698977" y="2475796"/>
+                  </a:lnTo>
+                  <a:lnTo>
+                    <a:pt x="1776611" y="2440821"/>
+                  </a:lnTo>
+                  <a:lnTo>
+                    <a:pt x="1854245" y="2404807"/>
+                  </a:lnTo>
+                  <a:lnTo>
+                    <a:pt x="1931879" y="2367723"/>
+                  </a:lnTo>
+                  <a:lnTo>
+                    <a:pt x="2009513" y="2329536"/>
+                  </a:lnTo>
+                  <a:lnTo>
+                    <a:pt x="2087147" y="2290215"/>
+                  </a:lnTo>
+                  <a:lnTo>
+                    <a:pt x="2164781" y="2249724"/>
+                  </a:lnTo>
+                  <a:lnTo>
+                    <a:pt x="2242415" y="2208031"/>
+                  </a:lnTo>
+                  <a:lnTo>
+                    <a:pt x="2320049" y="2165099"/>
+                  </a:lnTo>
+                  <a:lnTo>
+                    <a:pt x="2397683" y="2120890"/>
+                  </a:lnTo>
+                  <a:lnTo>
+                    <a:pt x="2475318" y="2075368"/>
+                  </a:lnTo>
+                  <a:lnTo>
+                    <a:pt x="2552952" y="2028493"/>
+                  </a:lnTo>
+                  <a:lnTo>
+                    <a:pt x="2630586" y="1980225"/>
+                  </a:lnTo>
+                  <a:lnTo>
+                    <a:pt x="2708220" y="1930522"/>
+                  </a:lnTo>
+                  <a:lnTo>
+                    <a:pt x="2785854" y="1879342"/>
+                  </a:lnTo>
+                  <a:lnTo>
+                    <a:pt x="2863488" y="1826641"/>
+                  </a:lnTo>
+                  <a:lnTo>
+                    <a:pt x="2941122" y="1772374"/>
+                  </a:lnTo>
+                  <a:lnTo>
+                    <a:pt x="3018756" y="1716494"/>
+                  </a:lnTo>
+                  <a:lnTo>
+                    <a:pt x="3096390" y="1658954"/>
+                  </a:lnTo>
+                  <a:lnTo>
+                    <a:pt x="3174024" y="1599703"/>
+                  </a:lnTo>
+                  <a:lnTo>
+                    <a:pt x="3251658" y="1538692"/>
+                  </a:lnTo>
+                  <a:lnTo>
+                    <a:pt x="3329292" y="1475867"/>
+                  </a:lnTo>
+                  <a:lnTo>
+                    <a:pt x="3406926" y="1411176"/>
+                  </a:lnTo>
+                  <a:lnTo>
+                    <a:pt x="3484560" y="1344561"/>
+                  </a:lnTo>
+                  <a:lnTo>
+                    <a:pt x="3562194" y="1275967"/>
+                  </a:lnTo>
+                  <a:lnTo>
+                    <a:pt x="3639828" y="1205335"/>
+                  </a:lnTo>
+                  <a:lnTo>
+                    <a:pt x="3717462" y="1132603"/>
+                  </a:lnTo>
+                  <a:lnTo>
+                    <a:pt x="3795096" y="1057710"/>
+                  </a:lnTo>
+                  <a:lnTo>
+                    <a:pt x="3872730" y="980591"/>
+                  </a:lnTo>
+                  <a:lnTo>
+                    <a:pt x="3950364" y="901180"/>
+                  </a:lnTo>
+                  <a:lnTo>
+                    <a:pt x="4027998" y="819409"/>
+                  </a:lnTo>
+                  <a:lnTo>
+                    <a:pt x="4105632" y="735208"/>
+                  </a:lnTo>
+                  <a:lnTo>
+                    <a:pt x="4183267" y="648505"/>
+                  </a:lnTo>
+                  <a:lnTo>
+                    <a:pt x="4260901" y="559224"/>
+                  </a:lnTo>
+                  <a:lnTo>
+                    <a:pt x="4338535" y="467291"/>
+                  </a:lnTo>
+                  <a:lnTo>
+                    <a:pt x="4416169" y="372625"/>
+                  </a:lnTo>
+                  <a:lnTo>
+                    <a:pt x="4493803" y="275146"/>
+                  </a:lnTo>
+                  <a:lnTo>
+                    <a:pt x="4571437" y="174770"/>
+                  </a:lnTo>
+                  <a:lnTo>
+                    <a:pt x="4649071" y="71411"/>
+                  </a:lnTo>
+                  <a:lnTo>
+                    <a:pt x="4701161" y="0"/>
                   </a:lnTo>
                 </a:path>
               </a:pathLst>
@@ -3649,300 +3721,300 @@
           </p:nvSpPr>
           <p:spPr>
             <a:xfrm>
-              <a:off x="817517" y="4703725"/>
-              <a:ext cx="7370972" cy="841028"/>
+              <a:off x="817517" y="4696472"/>
+              <a:ext cx="7370972" cy="851246"/>
             </a:xfrm>
             <a:custGeom>
               <a:avLst/>
               <a:pathLst>
-                <a:path w="7370972" h="841028">
+                <a:path w="7370972" h="851246">
                   <a:moveTo>
-                    <a:pt x="7370972" y="841028"/>
+                    <a:pt x="7370972" y="851246"/>
                   </a:moveTo>
                   <a:lnTo>
-                    <a:pt x="7293338" y="840546"/>
-                  </a:lnTo>
-                  <a:lnTo>
-                    <a:pt x="7215704" y="840012"/>
-                  </a:lnTo>
-                  <a:lnTo>
-                    <a:pt x="7138070" y="839420"/>
-                  </a:lnTo>
-                  <a:lnTo>
-                    <a:pt x="7060436" y="838764"/>
-                  </a:lnTo>
-                  <a:lnTo>
-                    <a:pt x="6982802" y="838037"/>
-                  </a:lnTo>
-                  <a:lnTo>
-                    <a:pt x="6905168" y="837231"/>
-                  </a:lnTo>
-                  <a:lnTo>
-                    <a:pt x="6827534" y="836339"/>
-                  </a:lnTo>
-                  <a:lnTo>
-                    <a:pt x="6749900" y="835349"/>
-                  </a:lnTo>
-                  <a:lnTo>
-                    <a:pt x="6672266" y="834253"/>
-                  </a:lnTo>
-                  <a:lnTo>
-                    <a:pt x="6594632" y="833037"/>
-                  </a:lnTo>
-                  <a:lnTo>
-                    <a:pt x="6516998" y="831691"/>
-                  </a:lnTo>
-                  <a:lnTo>
-                    <a:pt x="6439364" y="830198"/>
-                  </a:lnTo>
-                  <a:lnTo>
-                    <a:pt x="6361730" y="828544"/>
-                  </a:lnTo>
-                  <a:lnTo>
-                    <a:pt x="6284096" y="826711"/>
-                  </a:lnTo>
-                  <a:lnTo>
-                    <a:pt x="6206462" y="824680"/>
-                  </a:lnTo>
-                  <a:lnTo>
-                    <a:pt x="6128827" y="822429"/>
-                  </a:lnTo>
-                  <a:lnTo>
-                    <a:pt x="6051193" y="819934"/>
-                  </a:lnTo>
-                  <a:lnTo>
-                    <a:pt x="5973559" y="817169"/>
-                  </a:lnTo>
-                  <a:lnTo>
-                    <a:pt x="5895925" y="814105"/>
-                  </a:lnTo>
-                  <a:lnTo>
-                    <a:pt x="5818291" y="810709"/>
-                  </a:lnTo>
-                  <a:lnTo>
-                    <a:pt x="5740657" y="806946"/>
-                  </a:lnTo>
-                  <a:lnTo>
-                    <a:pt x="5663023" y="802775"/>
-                  </a:lnTo>
-                  <a:lnTo>
-                    <a:pt x="5585389" y="798153"/>
-                  </a:lnTo>
-                  <a:lnTo>
-                    <a:pt x="5507755" y="793031"/>
-                  </a:lnTo>
-                  <a:lnTo>
-                    <a:pt x="5430121" y="787355"/>
-                  </a:lnTo>
-                  <a:lnTo>
-                    <a:pt x="5352487" y="781064"/>
-                  </a:lnTo>
-                  <a:lnTo>
-                    <a:pt x="5274853" y="774092"/>
-                  </a:lnTo>
-                  <a:lnTo>
-                    <a:pt x="5197219" y="766366"/>
-                  </a:lnTo>
-                  <a:lnTo>
-                    <a:pt x="5119585" y="757804"/>
-                  </a:lnTo>
-                  <a:lnTo>
-                    <a:pt x="5041951" y="748315"/>
-                  </a:lnTo>
-                  <a:lnTo>
-                    <a:pt x="4964317" y="737799"/>
-                  </a:lnTo>
-                  <a:lnTo>
-                    <a:pt x="4886683" y="726145"/>
-                  </a:lnTo>
-                  <a:lnTo>
-                    <a:pt x="4809049" y="713230"/>
-                  </a:lnTo>
-                  <a:lnTo>
-                    <a:pt x="4731415" y="698917"/>
-                  </a:lnTo>
-                  <a:lnTo>
-                    <a:pt x="4653781" y="683055"/>
-                  </a:lnTo>
-                  <a:lnTo>
-                    <a:pt x="4576147" y="665476"/>
-                  </a:lnTo>
-                  <a:lnTo>
-                    <a:pt x="4498513" y="645995"/>
-                  </a:lnTo>
-                  <a:lnTo>
-                    <a:pt x="4420879" y="624405"/>
-                  </a:lnTo>
-                  <a:lnTo>
-                    <a:pt x="4343244" y="600479"/>
-                  </a:lnTo>
-                  <a:lnTo>
-                    <a:pt x="4265610" y="573963"/>
-                  </a:lnTo>
-                  <a:lnTo>
-                    <a:pt x="4187976" y="544578"/>
-                  </a:lnTo>
-                  <a:lnTo>
-                    <a:pt x="4110342" y="512012"/>
-                  </a:lnTo>
-                  <a:lnTo>
-                    <a:pt x="4032708" y="475922"/>
-                  </a:lnTo>
-                  <a:lnTo>
-                    <a:pt x="3955074" y="435926"/>
-                  </a:lnTo>
-                  <a:lnTo>
-                    <a:pt x="3877440" y="391602"/>
-                  </a:lnTo>
-                  <a:lnTo>
-                    <a:pt x="3799806" y="342481"/>
-                  </a:lnTo>
-                  <a:lnTo>
-                    <a:pt x="3722172" y="288043"/>
-                  </a:lnTo>
-                  <a:lnTo>
-                    <a:pt x="3644538" y="227713"/>
-                  </a:lnTo>
-                  <a:lnTo>
-                    <a:pt x="3566904" y="160855"/>
-                  </a:lnTo>
-                  <a:lnTo>
-                    <a:pt x="3489270" y="86761"/>
-                  </a:lnTo>
-                  <a:lnTo>
-                    <a:pt x="3411636" y="4647"/>
+                    <a:pt x="7293338" y="851049"/>
+                  </a:lnTo>
+                  <a:lnTo>
+                    <a:pt x="7215704" y="850827"/>
+                  </a:lnTo>
+                  <a:lnTo>
+                    <a:pt x="7138070" y="850575"/>
+                  </a:lnTo>
+                  <a:lnTo>
+                    <a:pt x="7060436" y="850289"/>
+                  </a:lnTo>
+                  <a:lnTo>
+                    <a:pt x="6982802" y="849966"/>
+                  </a:lnTo>
+                  <a:lnTo>
+                    <a:pt x="6905168" y="849601"/>
+                  </a:lnTo>
+                  <a:lnTo>
+                    <a:pt x="6827534" y="849187"/>
+                  </a:lnTo>
+                  <a:lnTo>
+                    <a:pt x="6749900" y="848718"/>
+                  </a:lnTo>
+                  <a:lnTo>
+                    <a:pt x="6672266" y="848187"/>
+                  </a:lnTo>
+                  <a:lnTo>
+                    <a:pt x="6594632" y="847586"/>
+                  </a:lnTo>
+                  <a:lnTo>
+                    <a:pt x="6516998" y="846906"/>
+                  </a:lnTo>
+                  <a:lnTo>
+                    <a:pt x="6439364" y="846136"/>
+                  </a:lnTo>
+                  <a:lnTo>
+                    <a:pt x="6361730" y="845264"/>
+                  </a:lnTo>
+                  <a:lnTo>
+                    <a:pt x="6284096" y="844276"/>
+                  </a:lnTo>
+                  <a:lnTo>
+                    <a:pt x="6206462" y="843159"/>
+                  </a:lnTo>
+                  <a:lnTo>
+                    <a:pt x="6128827" y="841893"/>
+                  </a:lnTo>
+                  <a:lnTo>
+                    <a:pt x="6051193" y="840461"/>
+                  </a:lnTo>
+                  <a:lnTo>
+                    <a:pt x="5973559" y="838839"/>
+                  </a:lnTo>
+                  <a:lnTo>
+                    <a:pt x="5895925" y="837003"/>
+                  </a:lnTo>
+                  <a:lnTo>
+                    <a:pt x="5818291" y="834924"/>
+                  </a:lnTo>
+                  <a:lnTo>
+                    <a:pt x="5740657" y="832570"/>
+                  </a:lnTo>
+                  <a:lnTo>
+                    <a:pt x="5663023" y="829906"/>
+                  </a:lnTo>
+                  <a:lnTo>
+                    <a:pt x="5585389" y="826889"/>
+                  </a:lnTo>
+                  <a:lnTo>
+                    <a:pt x="5507755" y="823474"/>
+                  </a:lnTo>
+                  <a:lnTo>
+                    <a:pt x="5430121" y="819607"/>
+                  </a:lnTo>
+                  <a:lnTo>
+                    <a:pt x="5352487" y="815229"/>
+                  </a:lnTo>
+                  <a:lnTo>
+                    <a:pt x="5274853" y="810273"/>
+                  </a:lnTo>
+                  <a:lnTo>
+                    <a:pt x="5197219" y="804662"/>
+                  </a:lnTo>
+                  <a:lnTo>
+                    <a:pt x="5119585" y="798310"/>
+                  </a:lnTo>
+                  <a:lnTo>
+                    <a:pt x="5041951" y="791118"/>
+                  </a:lnTo>
+                  <a:lnTo>
+                    <a:pt x="4964317" y="782975"/>
+                  </a:lnTo>
+                  <a:lnTo>
+                    <a:pt x="4886683" y="773756"/>
+                  </a:lnTo>
+                  <a:lnTo>
+                    <a:pt x="4809049" y="763320"/>
+                  </a:lnTo>
+                  <a:lnTo>
+                    <a:pt x="4731415" y="751504"/>
+                  </a:lnTo>
+                  <a:lnTo>
+                    <a:pt x="4653781" y="738126"/>
+                  </a:lnTo>
+                  <a:lnTo>
+                    <a:pt x="4576147" y="722981"/>
+                  </a:lnTo>
+                  <a:lnTo>
+                    <a:pt x="4498513" y="705835"/>
+                  </a:lnTo>
+                  <a:lnTo>
+                    <a:pt x="4420879" y="686422"/>
+                  </a:lnTo>
+                  <a:lnTo>
+                    <a:pt x="4343244" y="664444"/>
+                  </a:lnTo>
+                  <a:lnTo>
+                    <a:pt x="4265610" y="639562"/>
+                  </a:lnTo>
+                  <a:lnTo>
+                    <a:pt x="4187976" y="611392"/>
+                  </a:lnTo>
+                  <a:lnTo>
+                    <a:pt x="4110342" y="579499"/>
+                  </a:lnTo>
+                  <a:lnTo>
+                    <a:pt x="4032708" y="543392"/>
+                  </a:lnTo>
+                  <a:lnTo>
+                    <a:pt x="3955074" y="502512"/>
+                  </a:lnTo>
+                  <a:lnTo>
+                    <a:pt x="3877440" y="456231"/>
+                  </a:lnTo>
+                  <a:lnTo>
+                    <a:pt x="3799806" y="403834"/>
+                  </a:lnTo>
+                  <a:lnTo>
+                    <a:pt x="3722172" y="344513"/>
+                  </a:lnTo>
+                  <a:lnTo>
+                    <a:pt x="3644538" y="277352"/>
+                  </a:lnTo>
+                  <a:lnTo>
+                    <a:pt x="3566904" y="201317"/>
+                  </a:lnTo>
+                  <a:lnTo>
+                    <a:pt x="3489270" y="115233"/>
+                  </a:lnTo>
+                  <a:lnTo>
+                    <a:pt x="3411636" y="17774"/>
                   </a:lnTo>
                   <a:lnTo>
                     <a:pt x="3334002" y="0"/>
                   </a:lnTo>
                   <a:lnTo>
-                    <a:pt x="3256368" y="34775"/>
-                  </a:lnTo>
-                  <a:lnTo>
-                    <a:pt x="3178734" y="68121"/>
-                  </a:lnTo>
-                  <a:lnTo>
-                    <a:pt x="3101100" y="100095"/>
-                  </a:lnTo>
-                  <a:lnTo>
-                    <a:pt x="3023466" y="130754"/>
-                  </a:lnTo>
-                  <a:lnTo>
-                    <a:pt x="2945832" y="160152"/>
-                  </a:lnTo>
-                  <a:lnTo>
-                    <a:pt x="2868198" y="188340"/>
-                  </a:lnTo>
-                  <a:lnTo>
-                    <a:pt x="2790564" y="215369"/>
-                  </a:lnTo>
-                  <a:lnTo>
-                    <a:pt x="2712930" y="241287"/>
-                  </a:lnTo>
-                  <a:lnTo>
-                    <a:pt x="2635295" y="266138"/>
-                  </a:lnTo>
-                  <a:lnTo>
-                    <a:pt x="2557661" y="289967"/>
-                  </a:lnTo>
-                  <a:lnTo>
-                    <a:pt x="2480027" y="312817"/>
-                  </a:lnTo>
-                  <a:lnTo>
-                    <a:pt x="2402393" y="334726"/>
-                  </a:lnTo>
-                  <a:lnTo>
-                    <a:pt x="2324759" y="355734"/>
-                  </a:lnTo>
-                  <a:lnTo>
-                    <a:pt x="2247125" y="375878"/>
-                  </a:lnTo>
-                  <a:lnTo>
-                    <a:pt x="2169491" y="395194"/>
-                  </a:lnTo>
-                  <a:lnTo>
-                    <a:pt x="2091857" y="413715"/>
-                  </a:lnTo>
-                  <a:lnTo>
-                    <a:pt x="2014223" y="431474"/>
-                  </a:lnTo>
-                  <a:lnTo>
-                    <a:pt x="1936589" y="448502"/>
-                  </a:lnTo>
-                  <a:lnTo>
-                    <a:pt x="1858955" y="464831"/>
-                  </a:lnTo>
-                  <a:lnTo>
-                    <a:pt x="1781321" y="480487"/>
-                  </a:lnTo>
-                  <a:lnTo>
-                    <a:pt x="1703687" y="495500"/>
-                  </a:lnTo>
-                  <a:lnTo>
-                    <a:pt x="1626053" y="509895"/>
-                  </a:lnTo>
-                  <a:lnTo>
-                    <a:pt x="1548419" y="523699"/>
-                  </a:lnTo>
-                  <a:lnTo>
-                    <a:pt x="1470785" y="536934"/>
-                  </a:lnTo>
-                  <a:lnTo>
-                    <a:pt x="1393151" y="549625"/>
-                  </a:lnTo>
-                  <a:lnTo>
-                    <a:pt x="1315517" y="561794"/>
-                  </a:lnTo>
-                  <a:lnTo>
-                    <a:pt x="1237883" y="573462"/>
-                  </a:lnTo>
-                  <a:lnTo>
-                    <a:pt x="1160249" y="584651"/>
-                  </a:lnTo>
-                  <a:lnTo>
-                    <a:pt x="1082615" y="595379"/>
-                  </a:lnTo>
-                  <a:lnTo>
-                    <a:pt x="1004981" y="605666"/>
-                  </a:lnTo>
-                  <a:lnTo>
-                    <a:pt x="927346" y="615530"/>
-                  </a:lnTo>
-                  <a:lnTo>
-                    <a:pt x="849712" y="624989"/>
-                  </a:lnTo>
-                  <a:lnTo>
-                    <a:pt x="772078" y="634058"/>
-                  </a:lnTo>
-                  <a:lnTo>
-                    <a:pt x="694444" y="642754"/>
-                  </a:lnTo>
-                  <a:lnTo>
-                    <a:pt x="616810" y="651092"/>
-                  </a:lnTo>
-                  <a:lnTo>
-                    <a:pt x="539176" y="659088"/>
-                  </a:lnTo>
-                  <a:lnTo>
-                    <a:pt x="461542" y="666754"/>
-                  </a:lnTo>
-                  <a:lnTo>
-                    <a:pt x="383908" y="674106"/>
-                  </a:lnTo>
-                  <a:lnTo>
-                    <a:pt x="306274" y="681155"/>
-                  </a:lnTo>
-                  <a:lnTo>
-                    <a:pt x="228640" y="687914"/>
-                  </a:lnTo>
-                  <a:lnTo>
-                    <a:pt x="151006" y="694395"/>
-                  </a:lnTo>
-                  <a:lnTo>
-                    <a:pt x="73372" y="700609"/>
-                  </a:lnTo>
-                  <a:lnTo>
-                    <a:pt x="0" y="706241"/>
+                    <a:pt x="3256368" y="24611"/>
+                  </a:lnTo>
+                  <a:lnTo>
+                    <a:pt x="3178734" y="48511"/>
+                  </a:lnTo>
+                  <a:lnTo>
+                    <a:pt x="3101100" y="71722"/>
+                  </a:lnTo>
+                  <a:lnTo>
+                    <a:pt x="3023466" y="94263"/>
+                  </a:lnTo>
+                  <a:lnTo>
+                    <a:pt x="2945832" y="116154"/>
+                  </a:lnTo>
+                  <a:lnTo>
+                    <a:pt x="2868198" y="137412"/>
+                  </a:lnTo>
+                  <a:lnTo>
+                    <a:pt x="2790564" y="158058"/>
+                  </a:lnTo>
+                  <a:lnTo>
+                    <a:pt x="2712930" y="178107"/>
+                  </a:lnTo>
+                  <a:lnTo>
+                    <a:pt x="2635295" y="197577"/>
+                  </a:lnTo>
+                  <a:lnTo>
+                    <a:pt x="2557661" y="216486"/>
+                  </a:lnTo>
+                  <a:lnTo>
+                    <a:pt x="2480027" y="234849"/>
+                  </a:lnTo>
+                  <a:lnTo>
+                    <a:pt x="2402393" y="252682"/>
+                  </a:lnTo>
+                  <a:lnTo>
+                    <a:pt x="2324759" y="270000"/>
+                  </a:lnTo>
+                  <a:lnTo>
+                    <a:pt x="2247125" y="286819"/>
+                  </a:lnTo>
+                  <a:lnTo>
+                    <a:pt x="2169491" y="303152"/>
+                  </a:lnTo>
+                  <a:lnTo>
+                    <a:pt x="2091857" y="319014"/>
+                  </a:lnTo>
+                  <a:lnTo>
+                    <a:pt x="2014223" y="334417"/>
+                  </a:lnTo>
+                  <a:lnTo>
+                    <a:pt x="1936589" y="349377"/>
+                  </a:lnTo>
+                  <a:lnTo>
+                    <a:pt x="1858955" y="363904"/>
+                  </a:lnTo>
+                  <a:lnTo>
+                    <a:pt x="1781321" y="378013"/>
+                  </a:lnTo>
+                  <a:lnTo>
+                    <a:pt x="1703687" y="391714"/>
+                  </a:lnTo>
+                  <a:lnTo>
+                    <a:pt x="1626053" y="405019"/>
+                  </a:lnTo>
+                  <a:lnTo>
+                    <a:pt x="1548419" y="417941"/>
+                  </a:lnTo>
+                  <a:lnTo>
+                    <a:pt x="1470785" y="430490"/>
+                  </a:lnTo>
+                  <a:lnTo>
+                    <a:pt x="1393151" y="442676"/>
+                  </a:lnTo>
+                  <a:lnTo>
+                    <a:pt x="1315517" y="454511"/>
+                  </a:lnTo>
+                  <a:lnTo>
+                    <a:pt x="1237883" y="466004"/>
+                  </a:lnTo>
+                  <a:lnTo>
+                    <a:pt x="1160249" y="477166"/>
+                  </a:lnTo>
+                  <a:lnTo>
+                    <a:pt x="1082615" y="488005"/>
+                  </a:lnTo>
+                  <a:lnTo>
+                    <a:pt x="1004981" y="498532"/>
+                  </a:lnTo>
+                  <a:lnTo>
+                    <a:pt x="927346" y="508754"/>
+                  </a:lnTo>
+                  <a:lnTo>
+                    <a:pt x="849712" y="518682"/>
+                  </a:lnTo>
+                  <a:lnTo>
+                    <a:pt x="772078" y="528323"/>
+                  </a:lnTo>
+                  <a:lnTo>
+                    <a:pt x="694444" y="537686"/>
+                  </a:lnTo>
+                  <a:lnTo>
+                    <a:pt x="616810" y="546779"/>
+                  </a:lnTo>
+                  <a:lnTo>
+                    <a:pt x="539176" y="555609"/>
+                  </a:lnTo>
+                  <a:lnTo>
+                    <a:pt x="461542" y="564185"/>
+                  </a:lnTo>
+                  <a:lnTo>
+                    <a:pt x="383908" y="572513"/>
+                  </a:lnTo>
+                  <a:lnTo>
+                    <a:pt x="306274" y="580600"/>
+                  </a:lnTo>
+                  <a:lnTo>
+                    <a:pt x="228640" y="588454"/>
+                  </a:lnTo>
+                  <a:lnTo>
+                    <a:pt x="151006" y="596082"/>
+                  </a:lnTo>
+                  <a:lnTo>
+                    <a:pt x="73372" y="603489"/>
+                  </a:lnTo>
+                  <a:lnTo>
+                    <a:pt x="0" y="610288"/>
                   </a:lnTo>
                 </a:path>
               </a:pathLst>
@@ -3962,300 +4034,261 @@
           </p:nvSpPr>
           <p:spPr>
             <a:xfrm>
-              <a:off x="817517" y="2277036"/>
-              <a:ext cx="7370972" cy="3089297"/>
+              <a:off x="1854431" y="1896563"/>
+              <a:ext cx="6334059" cy="3576366"/>
             </a:xfrm>
             <a:custGeom>
               <a:avLst/>
               <a:pathLst>
-                <a:path w="7370972" h="3089297">
+                <a:path w="6334059" h="3576366">
                   <a:moveTo>
                     <a:pt x="0" y="0"/>
                   </a:moveTo>
                   <a:lnTo>
-                    <a:pt x="73372" y="92689"/>
-                  </a:lnTo>
-                  <a:lnTo>
-                    <a:pt x="151006" y="187828"/>
-                  </a:lnTo>
-                  <a:lnTo>
-                    <a:pt x="228640" y="280120"/>
-                  </a:lnTo>
-                  <a:lnTo>
-                    <a:pt x="306274" y="369651"/>
-                  </a:lnTo>
-                  <a:lnTo>
-                    <a:pt x="383908" y="456502"/>
-                  </a:lnTo>
-                  <a:lnTo>
-                    <a:pt x="461542" y="540755"/>
-                  </a:lnTo>
-                  <a:lnTo>
-                    <a:pt x="539176" y="622486"/>
-                  </a:lnTo>
-                  <a:lnTo>
-                    <a:pt x="616810" y="701772"/>
-                  </a:lnTo>
-                  <a:lnTo>
-                    <a:pt x="694444" y="778686"/>
-                  </a:lnTo>
-                  <a:lnTo>
-                    <a:pt x="772078" y="853298"/>
-                  </a:lnTo>
-                  <a:lnTo>
-                    <a:pt x="849712" y="925677"/>
-                  </a:lnTo>
-                  <a:lnTo>
-                    <a:pt x="927346" y="995891"/>
-                  </a:lnTo>
-                  <a:lnTo>
-                    <a:pt x="1004981" y="1064003"/>
-                  </a:lnTo>
-                  <a:lnTo>
-                    <a:pt x="1082615" y="1130078"/>
-                  </a:lnTo>
-                  <a:lnTo>
-                    <a:pt x="1160249" y="1194175"/>
-                  </a:lnTo>
-                  <a:lnTo>
-                    <a:pt x="1237883" y="1256354"/>
-                  </a:lnTo>
-                  <a:lnTo>
-                    <a:pt x="1315517" y="1316673"/>
-                  </a:lnTo>
-                  <a:lnTo>
-                    <a:pt x="1393151" y="1375187"/>
-                  </a:lnTo>
-                  <a:lnTo>
-                    <a:pt x="1470785" y="1431950"/>
-                  </a:lnTo>
-                  <a:lnTo>
-                    <a:pt x="1548419" y="1487014"/>
-                  </a:lnTo>
-                  <a:lnTo>
-                    <a:pt x="1626053" y="1540431"/>
-                  </a:lnTo>
-                  <a:lnTo>
-                    <a:pt x="1703687" y="1592250"/>
-                  </a:lnTo>
-                  <a:lnTo>
-                    <a:pt x="1781321" y="1642518"/>
-                  </a:lnTo>
-                  <a:lnTo>
-                    <a:pt x="1858955" y="1691281"/>
-                  </a:lnTo>
-                  <a:lnTo>
-                    <a:pt x="1936589" y="1738586"/>
-                  </a:lnTo>
-                  <a:lnTo>
-                    <a:pt x="2014223" y="1784475"/>
-                  </a:lnTo>
-                  <a:lnTo>
-                    <a:pt x="2091857" y="1828991"/>
-                  </a:lnTo>
-                  <a:lnTo>
-                    <a:pt x="2169491" y="1872175"/>
-                  </a:lnTo>
-                  <a:lnTo>
-                    <a:pt x="2247125" y="1914067"/>
-                  </a:lnTo>
-                  <a:lnTo>
-                    <a:pt x="2324759" y="1954705"/>
-                  </a:lnTo>
-                  <a:lnTo>
-                    <a:pt x="2402393" y="1994127"/>
-                  </a:lnTo>
-                  <a:lnTo>
-                    <a:pt x="2480027" y="2032370"/>
-                  </a:lnTo>
-                  <a:lnTo>
-                    <a:pt x="2557661" y="2069468"/>
-                  </a:lnTo>
-                  <a:lnTo>
-                    <a:pt x="2635295" y="2105456"/>
-                  </a:lnTo>
-                  <a:lnTo>
-                    <a:pt x="2712930" y="2140367"/>
-                  </a:lnTo>
-                  <a:lnTo>
-                    <a:pt x="2790564" y="2174234"/>
-                  </a:lnTo>
-                  <a:lnTo>
-                    <a:pt x="2868198" y="2207087"/>
-                  </a:lnTo>
-                  <a:lnTo>
-                    <a:pt x="2945832" y="2238958"/>
-                  </a:lnTo>
-                  <a:lnTo>
-                    <a:pt x="3023466" y="2269874"/>
-                  </a:lnTo>
-                  <a:lnTo>
-                    <a:pt x="3101100" y="2299866"/>
-                  </a:lnTo>
-                  <a:lnTo>
-                    <a:pt x="3178734" y="2328960"/>
-                  </a:lnTo>
-                  <a:lnTo>
-                    <a:pt x="3256368" y="2357183"/>
-                  </a:lnTo>
-                  <a:lnTo>
-                    <a:pt x="3334002" y="2384562"/>
-                  </a:lnTo>
-                  <a:lnTo>
-                    <a:pt x="3411636" y="2411122"/>
-                  </a:lnTo>
-                  <a:lnTo>
-                    <a:pt x="3489270" y="2436887"/>
-                  </a:lnTo>
-                  <a:lnTo>
-                    <a:pt x="3566904" y="2461881"/>
-                  </a:lnTo>
-                  <a:lnTo>
-                    <a:pt x="3644538" y="2486127"/>
-                  </a:lnTo>
-                  <a:lnTo>
-                    <a:pt x="3722172" y="2509647"/>
-                  </a:lnTo>
-                  <a:lnTo>
-                    <a:pt x="3799806" y="2532464"/>
-                  </a:lnTo>
-                  <a:lnTo>
-                    <a:pt x="3877440" y="2554598"/>
-                  </a:lnTo>
-                  <a:lnTo>
-                    <a:pt x="3955074" y="2576070"/>
-                  </a:lnTo>
-                  <a:lnTo>
-                    <a:pt x="4032708" y="2596899"/>
-                  </a:lnTo>
-                  <a:lnTo>
-                    <a:pt x="4110342" y="2617105"/>
-                  </a:lnTo>
-                  <a:lnTo>
-                    <a:pt x="4187976" y="2636707"/>
-                  </a:lnTo>
-                  <a:lnTo>
-                    <a:pt x="4265610" y="2655721"/>
-                  </a:lnTo>
-                  <a:lnTo>
-                    <a:pt x="4343244" y="2674167"/>
-                  </a:lnTo>
-                  <a:lnTo>
-                    <a:pt x="4420879" y="2692061"/>
-                  </a:lnTo>
-                  <a:lnTo>
-                    <a:pt x="4498513" y="2709420"/>
-                  </a:lnTo>
-                  <a:lnTo>
-                    <a:pt x="4576147" y="2726259"/>
-                  </a:lnTo>
-                  <a:lnTo>
-                    <a:pt x="4653781" y="2742594"/>
-                  </a:lnTo>
-                  <a:lnTo>
-                    <a:pt x="4731415" y="2758440"/>
-                  </a:lnTo>
-                  <a:lnTo>
-                    <a:pt x="4809049" y="2773812"/>
-                  </a:lnTo>
-                  <a:lnTo>
-                    <a:pt x="4886683" y="2788725"/>
-                  </a:lnTo>
-                  <a:lnTo>
-                    <a:pt x="4964317" y="2803191"/>
-                  </a:lnTo>
-                  <a:lnTo>
-                    <a:pt x="5041951" y="2817224"/>
-                  </a:lnTo>
-                  <a:lnTo>
-                    <a:pt x="5119585" y="2830837"/>
-                  </a:lnTo>
-                  <a:lnTo>
-                    <a:pt x="5197219" y="2844043"/>
-                  </a:lnTo>
-                  <a:lnTo>
-                    <a:pt x="5274853" y="2856854"/>
-                  </a:lnTo>
-                  <a:lnTo>
-                    <a:pt x="5352487" y="2869281"/>
-                  </a:lnTo>
-                  <a:lnTo>
-                    <a:pt x="5430121" y="2881337"/>
-                  </a:lnTo>
-                  <a:lnTo>
-                    <a:pt x="5507755" y="2893032"/>
-                  </a:lnTo>
-                  <a:lnTo>
-                    <a:pt x="5585389" y="2904376"/>
-                  </a:lnTo>
-                  <a:lnTo>
-                    <a:pt x="5663023" y="2915382"/>
-                  </a:lnTo>
-                  <a:lnTo>
-                    <a:pt x="5740657" y="2926058"/>
-                  </a:lnTo>
-                  <a:lnTo>
-                    <a:pt x="5818291" y="2936415"/>
-                  </a:lnTo>
-                  <a:lnTo>
-                    <a:pt x="5895925" y="2946461"/>
-                  </a:lnTo>
-                  <a:lnTo>
-                    <a:pt x="5973559" y="2956207"/>
-                  </a:lnTo>
-                  <a:lnTo>
-                    <a:pt x="6051193" y="2965662"/>
-                  </a:lnTo>
-                  <a:lnTo>
-                    <a:pt x="6128827" y="2974833"/>
-                  </a:lnTo>
-                  <a:lnTo>
-                    <a:pt x="6206462" y="2983731"/>
-                  </a:lnTo>
-                  <a:lnTo>
-                    <a:pt x="6284096" y="2992362"/>
-                  </a:lnTo>
-                  <a:lnTo>
-                    <a:pt x="6361730" y="3000734"/>
-                  </a:lnTo>
-                  <a:lnTo>
-                    <a:pt x="6439364" y="3008856"/>
-                  </a:lnTo>
-                  <a:lnTo>
-                    <a:pt x="6516998" y="3016735"/>
-                  </a:lnTo>
-                  <a:lnTo>
-                    <a:pt x="6594632" y="3024379"/>
-                  </a:lnTo>
-                  <a:lnTo>
-                    <a:pt x="6672266" y="3031793"/>
-                  </a:lnTo>
-                  <a:lnTo>
-                    <a:pt x="6749900" y="3038986"/>
-                  </a:lnTo>
-                  <a:lnTo>
-                    <a:pt x="6827534" y="3045964"/>
-                  </a:lnTo>
-                  <a:lnTo>
-                    <a:pt x="6905168" y="3052732"/>
-                  </a:lnTo>
-                  <a:lnTo>
-                    <a:pt x="6982802" y="3059298"/>
-                  </a:lnTo>
-                  <a:lnTo>
-                    <a:pt x="7060436" y="3065668"/>
-                  </a:lnTo>
-                  <a:lnTo>
-                    <a:pt x="7138070" y="3071847"/>
-                  </a:lnTo>
-                  <a:lnTo>
-                    <a:pt x="7215704" y="3077842"/>
-                  </a:lnTo>
-                  <a:lnTo>
-                    <a:pt x="7293338" y="3083656"/>
-                  </a:lnTo>
-                  <a:lnTo>
-                    <a:pt x="7370972" y="3089297"/>
+                    <a:pt x="45701" y="101508"/>
+                  </a:lnTo>
+                  <a:lnTo>
+                    <a:pt x="123335" y="265957"/>
+                  </a:lnTo>
+                  <a:lnTo>
+                    <a:pt x="200969" y="422791"/>
+                  </a:lnTo>
+                  <a:lnTo>
+                    <a:pt x="278603" y="572362"/>
+                  </a:lnTo>
+                  <a:lnTo>
+                    <a:pt x="356237" y="715006"/>
+                  </a:lnTo>
+                  <a:lnTo>
+                    <a:pt x="433871" y="851045"/>
+                  </a:lnTo>
+                  <a:lnTo>
+                    <a:pt x="511505" y="980784"/>
+                  </a:lnTo>
+                  <a:lnTo>
+                    <a:pt x="589139" y="1104515"/>
+                  </a:lnTo>
+                  <a:lnTo>
+                    <a:pt x="666773" y="1222516"/>
+                  </a:lnTo>
+                  <a:lnTo>
+                    <a:pt x="744407" y="1335052"/>
+                  </a:lnTo>
+                  <a:lnTo>
+                    <a:pt x="822042" y="1442377"/>
+                  </a:lnTo>
+                  <a:lnTo>
+                    <a:pt x="899676" y="1544732"/>
+                  </a:lnTo>
+                  <a:lnTo>
+                    <a:pt x="977310" y="1642347"/>
+                  </a:lnTo>
+                  <a:lnTo>
+                    <a:pt x="1054944" y="1735442"/>
+                  </a:lnTo>
+                  <a:lnTo>
+                    <a:pt x="1132578" y="1824225"/>
+                  </a:lnTo>
+                  <a:lnTo>
+                    <a:pt x="1210212" y="1908897"/>
+                  </a:lnTo>
+                  <a:lnTo>
+                    <a:pt x="1287846" y="1989648"/>
+                  </a:lnTo>
+                  <a:lnTo>
+                    <a:pt x="1365480" y="2066660"/>
+                  </a:lnTo>
+                  <a:lnTo>
+                    <a:pt x="1443114" y="2140105"/>
+                  </a:lnTo>
+                  <a:lnTo>
+                    <a:pt x="1520748" y="2210149"/>
+                  </a:lnTo>
+                  <a:lnTo>
+                    <a:pt x="1598382" y="2276949"/>
+                  </a:lnTo>
+                  <a:lnTo>
+                    <a:pt x="1676016" y="2340656"/>
+                  </a:lnTo>
+                  <a:lnTo>
+                    <a:pt x="1753650" y="2401413"/>
+                  </a:lnTo>
+                  <a:lnTo>
+                    <a:pt x="1831284" y="2459356"/>
+                  </a:lnTo>
+                  <a:lnTo>
+                    <a:pt x="1908918" y="2514616"/>
+                  </a:lnTo>
+                  <a:lnTo>
+                    <a:pt x="1986552" y="2567316"/>
+                  </a:lnTo>
+                  <a:lnTo>
+                    <a:pt x="2064186" y="2617577"/>
+                  </a:lnTo>
+                  <a:lnTo>
+                    <a:pt x="2141820" y="2665510"/>
+                  </a:lnTo>
+                  <a:lnTo>
+                    <a:pt x="2219454" y="2711223"/>
+                  </a:lnTo>
+                  <a:lnTo>
+                    <a:pt x="2297088" y="2754819"/>
+                  </a:lnTo>
+                  <a:lnTo>
+                    <a:pt x="2374722" y="2796396"/>
+                  </a:lnTo>
+                  <a:lnTo>
+                    <a:pt x="2452356" y="2836048"/>
+                  </a:lnTo>
+                  <a:lnTo>
+                    <a:pt x="2529991" y="2873863"/>
+                  </a:lnTo>
+                  <a:lnTo>
+                    <a:pt x="2607625" y="2909928"/>
+                  </a:lnTo>
+                  <a:lnTo>
+                    <a:pt x="2685259" y="2944322"/>
+                  </a:lnTo>
+                  <a:lnTo>
+                    <a:pt x="2762893" y="2977124"/>
+                  </a:lnTo>
+                  <a:lnTo>
+                    <a:pt x="2840527" y="3008406"/>
+                  </a:lnTo>
+                  <a:lnTo>
+                    <a:pt x="2918161" y="3038240"/>
+                  </a:lnTo>
+                  <a:lnTo>
+                    <a:pt x="2995795" y="3066693"/>
+                  </a:lnTo>
+                  <a:lnTo>
+                    <a:pt x="3073429" y="3093827"/>
+                  </a:lnTo>
+                  <a:lnTo>
+                    <a:pt x="3151063" y="3119705"/>
+                  </a:lnTo>
+                  <a:lnTo>
+                    <a:pt x="3228697" y="3144385"/>
+                  </a:lnTo>
+                  <a:lnTo>
+                    <a:pt x="3306331" y="3167922"/>
+                  </a:lnTo>
+                  <a:lnTo>
+                    <a:pt x="3383965" y="3190369"/>
+                  </a:lnTo>
+                  <a:lnTo>
+                    <a:pt x="3461599" y="3211776"/>
+                  </a:lnTo>
+                  <a:lnTo>
+                    <a:pt x="3539233" y="3232192"/>
+                  </a:lnTo>
+                  <a:lnTo>
+                    <a:pt x="3616867" y="3251663"/>
+                  </a:lnTo>
+                  <a:lnTo>
+                    <a:pt x="3694501" y="3270232"/>
+                  </a:lnTo>
+                  <a:lnTo>
+                    <a:pt x="3772135" y="3287941"/>
+                  </a:lnTo>
+                  <a:lnTo>
+                    <a:pt x="3849769" y="3304830"/>
+                  </a:lnTo>
+                  <a:lnTo>
+                    <a:pt x="3927403" y="3320937"/>
+                  </a:lnTo>
+                  <a:lnTo>
+                    <a:pt x="4005037" y="3336298"/>
+                  </a:lnTo>
+                  <a:lnTo>
+                    <a:pt x="4082671" y="3350947"/>
+                  </a:lnTo>
+                  <a:lnTo>
+                    <a:pt x="4160305" y="3364919"/>
+                  </a:lnTo>
+                  <a:lnTo>
+                    <a:pt x="4237940" y="3378243"/>
+                  </a:lnTo>
+                  <a:lnTo>
+                    <a:pt x="4315574" y="3390950"/>
+                  </a:lnTo>
+                  <a:lnTo>
+                    <a:pt x="4393208" y="3403069"/>
+                  </a:lnTo>
+                  <a:lnTo>
+                    <a:pt x="4470842" y="3414626"/>
+                  </a:lnTo>
+                  <a:lnTo>
+                    <a:pt x="4548476" y="3425649"/>
+                  </a:lnTo>
+                  <a:lnTo>
+                    <a:pt x="4626110" y="3436160"/>
+                  </a:lnTo>
+                  <a:lnTo>
+                    <a:pt x="4703744" y="3446186"/>
+                  </a:lnTo>
+                  <a:lnTo>
+                    <a:pt x="4781378" y="3455746"/>
+                  </a:lnTo>
+                  <a:lnTo>
+                    <a:pt x="4859012" y="3464864"/>
+                  </a:lnTo>
+                  <a:lnTo>
+                    <a:pt x="4936646" y="3473560"/>
+                  </a:lnTo>
+                  <a:lnTo>
+                    <a:pt x="5014280" y="3481853"/>
+                  </a:lnTo>
+                  <a:lnTo>
+                    <a:pt x="5091914" y="3489762"/>
+                  </a:lnTo>
+                  <a:lnTo>
+                    <a:pt x="5169548" y="3497305"/>
+                  </a:lnTo>
+                  <a:lnTo>
+                    <a:pt x="5247182" y="3504499"/>
+                  </a:lnTo>
+                  <a:lnTo>
+                    <a:pt x="5324816" y="3511359"/>
+                  </a:lnTo>
+                  <a:lnTo>
+                    <a:pt x="5402450" y="3517902"/>
+                  </a:lnTo>
+                  <a:lnTo>
+                    <a:pt x="5480084" y="3524142"/>
+                  </a:lnTo>
+                  <a:lnTo>
+                    <a:pt x="5557718" y="3530092"/>
+                  </a:lnTo>
+                  <a:lnTo>
+                    <a:pt x="5635352" y="3535768"/>
+                  </a:lnTo>
+                  <a:lnTo>
+                    <a:pt x="5712986" y="3541180"/>
+                  </a:lnTo>
+                  <a:lnTo>
+                    <a:pt x="5790620" y="3546342"/>
+                  </a:lnTo>
+                  <a:lnTo>
+                    <a:pt x="5868254" y="3551264"/>
+                  </a:lnTo>
+                  <a:lnTo>
+                    <a:pt x="5945888" y="3555959"/>
+                  </a:lnTo>
+                  <a:lnTo>
+                    <a:pt x="6023523" y="3560437"/>
+                  </a:lnTo>
+                  <a:lnTo>
+                    <a:pt x="6101157" y="3564707"/>
+                  </a:lnTo>
+                  <a:lnTo>
+                    <a:pt x="6178791" y="3568779"/>
+                  </a:lnTo>
+                  <a:lnTo>
+                    <a:pt x="6256425" y="3572662"/>
+                  </a:lnTo>
+                  <a:lnTo>
+                    <a:pt x="6334059" y="3576366"/>
                   </a:lnTo>
                 </a:path>
               </a:pathLst>

--- a/docs/plots/carbo/jx_carbo_linsubhr_ratio_hosp6.pptx
+++ b/docs/plots/carbo/jx_carbo_linsubhr_ratio_hosp6.pptx
@@ -3019,7 +3019,7 @@
                     <a:pt x="2635295" y="763969"/>
                   </a:lnTo>
                   <a:lnTo>
-                    <a:pt x="2712930" y="1101145"/>
+                    <a:pt x="2712930" y="1101144"/>
                   </a:lnTo>
                   <a:lnTo>
                     <a:pt x="2790564" y="1398964"/>
@@ -3094,7 +3094,7 @@
                     <a:pt x="4576147" y="2290215"/>
                   </a:lnTo>
                   <a:lnTo>
-                    <a:pt x="4653781" y="2249724"/>
+                    <a:pt x="4653781" y="2249725"/>
                   </a:lnTo>
                   <a:lnTo>
                     <a:pt x="4731415" y="2208031"/>
@@ -3175,22 +3175,22 @@
                     <a:pt x="6672266" y="648505"/>
                   </a:lnTo>
                   <a:lnTo>
-                    <a:pt x="6749900" y="559224"/>
+                    <a:pt x="6749900" y="559225"/>
                   </a:lnTo>
                   <a:lnTo>
                     <a:pt x="6827534" y="467291"/>
                   </a:lnTo>
                   <a:lnTo>
-                    <a:pt x="6905168" y="372625"/>
-                  </a:lnTo>
-                  <a:lnTo>
-                    <a:pt x="6982802" y="275146"/>
-                  </a:lnTo>
-                  <a:lnTo>
-                    <a:pt x="7060436" y="174770"/>
-                  </a:lnTo>
-                  <a:lnTo>
-                    <a:pt x="7138070" y="71411"/>
+                    <a:pt x="6905168" y="372626"/>
+                  </a:lnTo>
+                  <a:lnTo>
+                    <a:pt x="6982802" y="275147"/>
+                  </a:lnTo>
+                  <a:lnTo>
+                    <a:pt x="7060436" y="174771"/>
+                  </a:lnTo>
+                  <a:lnTo>
+                    <a:pt x="7138070" y="71412"/>
                   </a:lnTo>
                   <a:lnTo>
                     <a:pt x="7190160" y="0"/>
@@ -3457,7 +3457,7 @@
                     <a:pt x="772078" y="3328233"/>
                   </a:lnTo>
                   <a:lnTo>
-                    <a:pt x="694444" y="3337596"/>
+                    <a:pt x="694444" y="3337595"/>
                   </a:lnTo>
                   <a:lnTo>
                     <a:pt x="616810" y="3346688"/>
@@ -3475,7 +3475,7 @@
                     <a:pt x="306274" y="3380509"/>
                   </a:lnTo>
                   <a:lnTo>
-                    <a:pt x="228640" y="3388364"/>
+                    <a:pt x="228640" y="3388363"/>
                   </a:lnTo>
                   <a:lnTo>
                     <a:pt x="151006" y="3395991"/>
@@ -3527,7 +3527,7 @@
                     <a:pt x="146296" y="763969"/>
                   </a:lnTo>
                   <a:lnTo>
-                    <a:pt x="223930" y="1101145"/>
+                    <a:pt x="223930" y="1101144"/>
                   </a:lnTo>
                   <a:lnTo>
                     <a:pt x="301564" y="1398964"/>
@@ -3602,7 +3602,7 @@
                     <a:pt x="2087147" y="2290215"/>
                   </a:lnTo>
                   <a:lnTo>
-                    <a:pt x="2164781" y="2249724"/>
+                    <a:pt x="2164781" y="2249725"/>
                   </a:lnTo>
                   <a:lnTo>
                     <a:pt x="2242415" y="2208031"/>
@@ -3683,22 +3683,22 @@
                     <a:pt x="4183267" y="648505"/>
                   </a:lnTo>
                   <a:lnTo>
-                    <a:pt x="4260901" y="559224"/>
+                    <a:pt x="4260901" y="559225"/>
                   </a:lnTo>
                   <a:lnTo>
                     <a:pt x="4338535" y="467291"/>
                   </a:lnTo>
                   <a:lnTo>
-                    <a:pt x="4416169" y="372625"/>
-                  </a:lnTo>
-                  <a:lnTo>
-                    <a:pt x="4493803" y="275146"/>
-                  </a:lnTo>
-                  <a:lnTo>
-                    <a:pt x="4571437" y="174770"/>
-                  </a:lnTo>
-                  <a:lnTo>
-                    <a:pt x="4649071" y="71411"/>
+                    <a:pt x="4416169" y="372626"/>
+                  </a:lnTo>
+                  <a:lnTo>
+                    <a:pt x="4493803" y="275147"/>
+                  </a:lnTo>
+                  <a:lnTo>
+                    <a:pt x="4571437" y="174771"/>
+                  </a:lnTo>
+                  <a:lnTo>
+                    <a:pt x="4649071" y="71412"/>
                   </a:lnTo>
                   <a:lnTo>
                     <a:pt x="4701161" y="0"/>
@@ -3933,7 +3933,7 @@
                     <a:pt x="2169491" y="303152"/>
                   </a:lnTo>
                   <a:lnTo>
-                    <a:pt x="2091857" y="319014"/>
+                    <a:pt x="2091857" y="319013"/>
                   </a:lnTo>
                   <a:lnTo>
                     <a:pt x="2014223" y="334417"/>
@@ -4075,7 +4075,7 @@
                     <a:pt x="744407" y="1335052"/>
                   </a:lnTo>
                   <a:lnTo>
-                    <a:pt x="822042" y="1442377"/>
+                    <a:pt x="822041" y="1442377"/>
                   </a:lnTo>
                   <a:lnTo>
                     <a:pt x="899676" y="1544732"/>
@@ -4141,7 +4141,7 @@
                     <a:pt x="2452356" y="2836048"/>
                   </a:lnTo>
                   <a:lnTo>
-                    <a:pt x="2529991" y="2873863"/>
+                    <a:pt x="2529990" y="2873863"/>
                   </a:lnTo>
                   <a:lnTo>
                     <a:pt x="2607625" y="2909928"/>
@@ -4207,7 +4207,7 @@
                     <a:pt x="4160305" y="3364919"/>
                   </a:lnTo>
                   <a:lnTo>
-                    <a:pt x="4237940" y="3378243"/>
+                    <a:pt x="4237939" y="3378243"/>
                   </a:lnTo>
                   <a:lnTo>
                     <a:pt x="4315574" y="3390950"/>
@@ -4240,7 +4240,7 @@
                     <a:pt x="5014280" y="3481853"/>
                   </a:lnTo>
                   <a:lnTo>
-                    <a:pt x="5091914" y="3489762"/>
+                    <a:pt x="5091914" y="3489763"/>
                   </a:lnTo>
                   <a:lnTo>
                     <a:pt x="5169548" y="3497305"/>
@@ -4276,7 +4276,7 @@
                     <a:pt x="5945888" y="3555959"/>
                   </a:lnTo>
                   <a:lnTo>
-                    <a:pt x="6023523" y="3560437"/>
+                    <a:pt x="6023522" y="3560437"/>
                   </a:lnTo>
                   <a:lnTo>
                     <a:pt x="6101157" y="3564707"/>

--- a/docs/plots/carbo/jx_carbo_linsubhr_ratio_hosp6.pptx
+++ b/docs/plots/carbo/jx_carbo_linsubhr_ratio_hosp6.pptx
@@ -2271,7 +2271,7 @@
           </p:nvSpPr>
           <p:spPr>
             <a:xfrm>
-              <a:off x="817517" y="5114368"/>
+              <a:off x="817517" y="5142518"/>
               <a:ext cx="7799693" cy="0"/>
             </a:xfrm>
             <a:custGeom>
@@ -2314,7 +2314,7 @@
           </p:nvSpPr>
           <p:spPr>
             <a:xfrm>
-              <a:off x="817517" y="4244691"/>
+              <a:off x="817517" y="4313054"/>
               <a:ext cx="7799693" cy="0"/>
             </a:xfrm>
             <a:custGeom>
@@ -2357,7 +2357,7 @@
           </p:nvSpPr>
           <p:spPr>
             <a:xfrm>
-              <a:off x="817517" y="3375014"/>
+              <a:off x="817517" y="3483591"/>
               <a:ext cx="7799693" cy="0"/>
             </a:xfrm>
             <a:custGeom>
@@ -2400,7 +2400,7 @@
           </p:nvSpPr>
           <p:spPr>
             <a:xfrm>
-              <a:off x="817517" y="2505337"/>
+              <a:off x="817517" y="2654127"/>
               <a:ext cx="7799693" cy="0"/>
             </a:xfrm>
             <a:custGeom>
@@ -2443,15 +2443,15 @@
           </p:nvSpPr>
           <p:spPr>
             <a:xfrm>
-              <a:off x="1615213" y="1896563"/>
-              <a:ext cx="0" cy="3826579"/>
+              <a:off x="1615213" y="2073503"/>
+              <a:ext cx="0" cy="3649639"/>
             </a:xfrm>
             <a:custGeom>
               <a:avLst/>
               <a:pathLst>
-                <a:path w="0" h="3826579">
+                <a:path w="0" h="3649639">
                   <a:moveTo>
-                    <a:pt x="0" y="3826579"/>
+                    <a:pt x="0" y="3649639"/>
                   </a:moveTo>
                   <a:lnTo>
                     <a:pt x="0" y="0"/>
@@ -2486,15 +2486,15 @@
           </p:nvSpPr>
           <p:spPr>
             <a:xfrm>
-              <a:off x="3387871" y="1896563"/>
-              <a:ext cx="0" cy="3826579"/>
+              <a:off x="3387871" y="2073503"/>
+              <a:ext cx="0" cy="3649639"/>
             </a:xfrm>
             <a:custGeom>
               <a:avLst/>
               <a:pathLst>
-                <a:path w="0" h="3826579">
+                <a:path w="0" h="3649639">
                   <a:moveTo>
-                    <a:pt x="0" y="3826579"/>
+                    <a:pt x="0" y="3649639"/>
                   </a:moveTo>
                   <a:lnTo>
                     <a:pt x="0" y="0"/>
@@ -2529,15 +2529,15 @@
           </p:nvSpPr>
           <p:spPr>
             <a:xfrm>
-              <a:off x="5160528" y="1896563"/>
-              <a:ext cx="0" cy="3826579"/>
+              <a:off x="5160528" y="2073503"/>
+              <a:ext cx="0" cy="3649639"/>
             </a:xfrm>
             <a:custGeom>
               <a:avLst/>
               <a:pathLst>
-                <a:path w="0" h="3826579">
+                <a:path w="0" h="3649639">
                   <a:moveTo>
-                    <a:pt x="0" y="3826579"/>
+                    <a:pt x="0" y="3649639"/>
                   </a:moveTo>
                   <a:lnTo>
                     <a:pt x="0" y="0"/>
@@ -2572,15 +2572,15 @@
           </p:nvSpPr>
           <p:spPr>
             <a:xfrm>
-              <a:off x="6933186" y="1896563"/>
-              <a:ext cx="0" cy="3826579"/>
+              <a:off x="6933186" y="2073503"/>
+              <a:ext cx="0" cy="3649639"/>
             </a:xfrm>
             <a:custGeom>
               <a:avLst/>
               <a:pathLst>
-                <a:path w="0" h="3826579">
+                <a:path w="0" h="3649639">
                   <a:moveTo>
-                    <a:pt x="0" y="3826579"/>
+                    <a:pt x="0" y="3649639"/>
                   </a:moveTo>
                   <a:lnTo>
                     <a:pt x="0" y="0"/>
@@ -2615,7 +2615,7 @@
           </p:nvSpPr>
           <p:spPr>
             <a:xfrm>
-              <a:off x="817517" y="5549207"/>
+              <a:off x="817517" y="5557249"/>
               <a:ext cx="7799693" cy="0"/>
             </a:xfrm>
             <a:custGeom>
@@ -2658,7 +2658,7 @@
           </p:nvSpPr>
           <p:spPr>
             <a:xfrm>
-              <a:off x="817517" y="4679530"/>
+              <a:off x="817517" y="4727786"/>
               <a:ext cx="7799693" cy="0"/>
             </a:xfrm>
             <a:custGeom>
@@ -2701,7 +2701,7 @@
           </p:nvSpPr>
           <p:spPr>
             <a:xfrm>
-              <a:off x="817517" y="3809853"/>
+              <a:off x="817517" y="3898322"/>
               <a:ext cx="7799693" cy="0"/>
             </a:xfrm>
             <a:custGeom>
@@ -2744,7 +2744,7 @@
           </p:nvSpPr>
           <p:spPr>
             <a:xfrm>
-              <a:off x="817517" y="2940175"/>
+              <a:off x="817517" y="3068859"/>
               <a:ext cx="7799693" cy="0"/>
             </a:xfrm>
             <a:custGeom>
@@ -2787,7 +2787,7 @@
           </p:nvSpPr>
           <p:spPr>
             <a:xfrm>
-              <a:off x="817517" y="2070498"/>
+              <a:off x="817517" y="2239395"/>
               <a:ext cx="7799693" cy="0"/>
             </a:xfrm>
             <a:custGeom>
@@ -2830,15 +2830,15 @@
           </p:nvSpPr>
           <p:spPr>
             <a:xfrm>
-              <a:off x="2501542" y="1896563"/>
-              <a:ext cx="0" cy="3826579"/>
+              <a:off x="2501542" y="2073503"/>
+              <a:ext cx="0" cy="3649639"/>
             </a:xfrm>
             <a:custGeom>
               <a:avLst/>
               <a:pathLst>
-                <a:path w="0" h="3826579">
+                <a:path w="0" h="3649639">
                   <a:moveTo>
-                    <a:pt x="0" y="3826579"/>
+                    <a:pt x="0" y="3649639"/>
                   </a:moveTo>
                   <a:lnTo>
                     <a:pt x="0" y="0"/>
@@ -2873,15 +2873,15 @@
           </p:nvSpPr>
           <p:spPr>
             <a:xfrm>
-              <a:off x="4274200" y="1896563"/>
-              <a:ext cx="0" cy="3826579"/>
+              <a:off x="4274200" y="2073503"/>
+              <a:ext cx="0" cy="3649639"/>
             </a:xfrm>
             <a:custGeom>
               <a:avLst/>
               <a:pathLst>
-                <a:path w="0" h="3826579">
+                <a:path w="0" h="3649639">
                   <a:moveTo>
-                    <a:pt x="0" y="3826579"/>
+                    <a:pt x="0" y="3649639"/>
                   </a:moveTo>
                   <a:lnTo>
                     <a:pt x="0" y="0"/>
@@ -2916,15 +2916,15 @@
           </p:nvSpPr>
           <p:spPr>
             <a:xfrm>
-              <a:off x="6046857" y="1896563"/>
-              <a:ext cx="0" cy="3826579"/>
+              <a:off x="6046857" y="2073503"/>
+              <a:ext cx="0" cy="3649639"/>
             </a:xfrm>
             <a:custGeom>
               <a:avLst/>
               <a:pathLst>
-                <a:path w="0" h="3826579">
+                <a:path w="0" h="3649639">
                   <a:moveTo>
-                    <a:pt x="0" y="3826579"/>
+                    <a:pt x="0" y="3649639"/>
                   </a:moveTo>
                   <a:lnTo>
                     <a:pt x="0" y="0"/>
@@ -2959,15 +2959,15 @@
           </p:nvSpPr>
           <p:spPr>
             <a:xfrm>
-              <a:off x="7819515" y="1896563"/>
-              <a:ext cx="0" cy="3826579"/>
+              <a:off x="7819515" y="2073503"/>
+              <a:ext cx="0" cy="3649639"/>
             </a:xfrm>
             <a:custGeom>
               <a:avLst/>
               <a:pathLst>
-                <a:path w="0" h="3826579">
+                <a:path w="0" h="3649639">
                   <a:moveTo>
-                    <a:pt x="0" y="3826579"/>
+                    <a:pt x="0" y="3649639"/>
                   </a:moveTo>
                   <a:lnTo>
                     <a:pt x="0" y="0"/>
@@ -3002,195 +3002,195 @@
           </p:nvSpPr>
           <p:spPr>
             <a:xfrm>
-              <a:off x="817517" y="1896563"/>
-              <a:ext cx="7370972" cy="3651155"/>
+              <a:off x="817517" y="2073503"/>
+              <a:ext cx="7370972" cy="3482327"/>
             </a:xfrm>
             <a:custGeom>
               <a:avLst/>
               <a:pathLst>
-                <a:path w="7370972" h="3651155">
+                <a:path w="7370972" h="3482327">
                   <a:moveTo>
                     <a:pt x="2488999" y="0"/>
                   </a:moveTo>
                   <a:lnTo>
-                    <a:pt x="2557661" y="382235"/>
-                  </a:lnTo>
-                  <a:lnTo>
-                    <a:pt x="2635295" y="763969"/>
-                  </a:lnTo>
-                  <a:lnTo>
-                    <a:pt x="2712930" y="1101144"/>
-                  </a:lnTo>
-                  <a:lnTo>
-                    <a:pt x="2790564" y="1398964"/>
-                  </a:lnTo>
-                  <a:lnTo>
-                    <a:pt x="2868198" y="1662021"/>
-                  </a:lnTo>
-                  <a:lnTo>
-                    <a:pt x="2945832" y="1894373"/>
-                  </a:lnTo>
-                  <a:lnTo>
-                    <a:pt x="3023466" y="2099605"/>
-                  </a:lnTo>
-                  <a:lnTo>
-                    <a:pt x="3101100" y="2280881"/>
-                  </a:lnTo>
-                  <a:lnTo>
-                    <a:pt x="3178734" y="2440997"/>
-                  </a:lnTo>
-                  <a:lnTo>
-                    <a:pt x="3256368" y="2582425"/>
-                  </a:lnTo>
-                  <a:lnTo>
-                    <a:pt x="3334002" y="2707344"/>
-                  </a:lnTo>
-                  <a:lnTo>
-                    <a:pt x="3411636" y="2774566"/>
-                  </a:lnTo>
-                  <a:lnTo>
-                    <a:pt x="3489270" y="2748471"/>
-                  </a:lnTo>
-                  <a:lnTo>
-                    <a:pt x="3566904" y="2721600"/>
-                  </a:lnTo>
-                  <a:lnTo>
-                    <a:pt x="3644538" y="2693930"/>
-                  </a:lnTo>
-                  <a:lnTo>
-                    <a:pt x="3722172" y="2665438"/>
-                  </a:lnTo>
-                  <a:lnTo>
-                    <a:pt x="3799806" y="2636099"/>
-                  </a:lnTo>
-                  <a:lnTo>
-                    <a:pt x="3877440" y="2605888"/>
-                  </a:lnTo>
-                  <a:lnTo>
-                    <a:pt x="3955074" y="2574780"/>
-                  </a:lnTo>
-                  <a:lnTo>
-                    <a:pt x="4032708" y="2542747"/>
-                  </a:lnTo>
-                  <a:lnTo>
-                    <a:pt x="4110342" y="2509762"/>
-                  </a:lnTo>
-                  <a:lnTo>
-                    <a:pt x="4187976" y="2475796"/>
-                  </a:lnTo>
-                  <a:lnTo>
-                    <a:pt x="4265610" y="2440821"/>
-                  </a:lnTo>
-                  <a:lnTo>
-                    <a:pt x="4343244" y="2404807"/>
-                  </a:lnTo>
-                  <a:lnTo>
-                    <a:pt x="4420879" y="2367723"/>
-                  </a:lnTo>
-                  <a:lnTo>
-                    <a:pt x="4498513" y="2329536"/>
-                  </a:lnTo>
-                  <a:lnTo>
-                    <a:pt x="4576147" y="2290215"/>
-                  </a:lnTo>
-                  <a:lnTo>
-                    <a:pt x="4653781" y="2249725"/>
-                  </a:lnTo>
-                  <a:lnTo>
-                    <a:pt x="4731415" y="2208031"/>
-                  </a:lnTo>
-                  <a:lnTo>
-                    <a:pt x="4809049" y="2165099"/>
-                  </a:lnTo>
-                  <a:lnTo>
-                    <a:pt x="4886683" y="2120890"/>
-                  </a:lnTo>
-                  <a:lnTo>
-                    <a:pt x="4964317" y="2075368"/>
-                  </a:lnTo>
-                  <a:lnTo>
-                    <a:pt x="5041951" y="2028493"/>
-                  </a:lnTo>
-                  <a:lnTo>
-                    <a:pt x="5119585" y="1980225"/>
-                  </a:lnTo>
-                  <a:lnTo>
-                    <a:pt x="5197219" y="1930522"/>
-                  </a:lnTo>
-                  <a:lnTo>
-                    <a:pt x="5274853" y="1879342"/>
-                  </a:lnTo>
-                  <a:lnTo>
-                    <a:pt x="5352487" y="1826641"/>
-                  </a:lnTo>
-                  <a:lnTo>
-                    <a:pt x="5430121" y="1772374"/>
-                  </a:lnTo>
-                  <a:lnTo>
-                    <a:pt x="5507755" y="1716494"/>
-                  </a:lnTo>
-                  <a:lnTo>
-                    <a:pt x="5585389" y="1658954"/>
-                  </a:lnTo>
-                  <a:lnTo>
-                    <a:pt x="5663023" y="1599703"/>
-                  </a:lnTo>
-                  <a:lnTo>
-                    <a:pt x="5740657" y="1538692"/>
-                  </a:lnTo>
-                  <a:lnTo>
-                    <a:pt x="5818291" y="1475867"/>
-                  </a:lnTo>
-                  <a:lnTo>
-                    <a:pt x="5895925" y="1411176"/>
-                  </a:lnTo>
-                  <a:lnTo>
-                    <a:pt x="5973559" y="1344561"/>
-                  </a:lnTo>
-                  <a:lnTo>
-                    <a:pt x="6051193" y="1275967"/>
-                  </a:lnTo>
-                  <a:lnTo>
-                    <a:pt x="6128827" y="1205335"/>
-                  </a:lnTo>
-                  <a:lnTo>
-                    <a:pt x="6206462" y="1132603"/>
-                  </a:lnTo>
-                  <a:lnTo>
-                    <a:pt x="6284096" y="1057710"/>
-                  </a:lnTo>
-                  <a:lnTo>
-                    <a:pt x="6361730" y="980591"/>
-                  </a:lnTo>
-                  <a:lnTo>
-                    <a:pt x="6439364" y="901180"/>
-                  </a:lnTo>
-                  <a:lnTo>
-                    <a:pt x="6516998" y="819409"/>
-                  </a:lnTo>
-                  <a:lnTo>
-                    <a:pt x="6594632" y="735208"/>
-                  </a:lnTo>
-                  <a:lnTo>
-                    <a:pt x="6672266" y="648505"/>
-                  </a:lnTo>
-                  <a:lnTo>
-                    <a:pt x="6749900" y="559225"/>
-                  </a:lnTo>
-                  <a:lnTo>
-                    <a:pt x="6827534" y="467291"/>
-                  </a:lnTo>
-                  <a:lnTo>
-                    <a:pt x="6905168" y="372626"/>
-                  </a:lnTo>
-                  <a:lnTo>
-                    <a:pt x="6982802" y="275147"/>
-                  </a:lnTo>
-                  <a:lnTo>
-                    <a:pt x="7060436" y="174771"/>
-                  </a:lnTo>
-                  <a:lnTo>
-                    <a:pt x="7138070" y="71412"/>
+                    <a:pt x="2557661" y="364561"/>
+                  </a:lnTo>
+                  <a:lnTo>
+                    <a:pt x="2635295" y="728643"/>
+                  </a:lnTo>
+                  <a:lnTo>
+                    <a:pt x="2712930" y="1050228"/>
+                  </a:lnTo>
+                  <a:lnTo>
+                    <a:pt x="2790564" y="1334277"/>
+                  </a:lnTo>
+                  <a:lnTo>
+                    <a:pt x="2868198" y="1585170"/>
+                  </a:lnTo>
+                  <a:lnTo>
+                    <a:pt x="2945832" y="1806778"/>
+                  </a:lnTo>
+                  <a:lnTo>
+                    <a:pt x="3023466" y="2002520"/>
+                  </a:lnTo>
+                  <a:lnTo>
+                    <a:pt x="3101100" y="2175414"/>
+                  </a:lnTo>
+                  <a:lnTo>
+                    <a:pt x="3178734" y="2328127"/>
+                  </a:lnTo>
+                  <a:lnTo>
+                    <a:pt x="3256368" y="2463015"/>
+                  </a:lnTo>
+                  <a:lnTo>
+                    <a:pt x="3334002" y="2582158"/>
+                  </a:lnTo>
+                  <a:lnTo>
+                    <a:pt x="3411636" y="2646271"/>
+                  </a:lnTo>
+                  <a:lnTo>
+                    <a:pt x="3489270" y="2621382"/>
+                  </a:lnTo>
+                  <a:lnTo>
+                    <a:pt x="3566904" y="2595754"/>
+                  </a:lnTo>
+                  <a:lnTo>
+                    <a:pt x="3644538" y="2569363"/>
+                  </a:lnTo>
+                  <a:lnTo>
+                    <a:pt x="3722172" y="2542189"/>
+                  </a:lnTo>
+                  <a:lnTo>
+                    <a:pt x="3799806" y="2514207"/>
+                  </a:lnTo>
+                  <a:lnTo>
+                    <a:pt x="3877440" y="2485393"/>
+                  </a:lnTo>
+                  <a:lnTo>
+                    <a:pt x="3955074" y="2455723"/>
+                  </a:lnTo>
+                  <a:lnTo>
+                    <a:pt x="4032708" y="2425171"/>
+                  </a:lnTo>
+                  <a:lnTo>
+                    <a:pt x="4110342" y="2393711"/>
+                  </a:lnTo>
+                  <a:lnTo>
+                    <a:pt x="4187976" y="2361316"/>
+                  </a:lnTo>
+                  <a:lnTo>
+                    <a:pt x="4265610" y="2327959"/>
+                  </a:lnTo>
+                  <a:lnTo>
+                    <a:pt x="4343244" y="2293610"/>
+                  </a:lnTo>
+                  <a:lnTo>
+                    <a:pt x="4420879" y="2258240"/>
+                  </a:lnTo>
+                  <a:lnTo>
+                    <a:pt x="4498513" y="2221819"/>
+                  </a:lnTo>
+                  <a:lnTo>
+                    <a:pt x="4576147" y="2184316"/>
+                  </a:lnTo>
+                  <a:lnTo>
+                    <a:pt x="4653781" y="2145698"/>
+                  </a:lnTo>
+                  <a:lnTo>
+                    <a:pt x="4731415" y="2105933"/>
+                  </a:lnTo>
+                  <a:lnTo>
+                    <a:pt x="4809049" y="2064985"/>
+                  </a:lnTo>
+                  <a:lnTo>
+                    <a:pt x="4886683" y="2022821"/>
+                  </a:lnTo>
+                  <a:lnTo>
+                    <a:pt x="4964317" y="1979404"/>
+                  </a:lnTo>
+                  <a:lnTo>
+                    <a:pt x="5041951" y="1934696"/>
+                  </a:lnTo>
+                  <a:lnTo>
+                    <a:pt x="5119585" y="1888660"/>
+                  </a:lnTo>
+                  <a:lnTo>
+                    <a:pt x="5197219" y="1841255"/>
+                  </a:lnTo>
+                  <a:lnTo>
+                    <a:pt x="5274853" y="1792442"/>
+                  </a:lnTo>
+                  <a:lnTo>
+                    <a:pt x="5352487" y="1742178"/>
+                  </a:lnTo>
+                  <a:lnTo>
+                    <a:pt x="5430121" y="1690420"/>
+                  </a:lnTo>
+                  <a:lnTo>
+                    <a:pt x="5507755" y="1637124"/>
+                  </a:lnTo>
+                  <a:lnTo>
+                    <a:pt x="5585389" y="1582245"/>
+                  </a:lnTo>
+                  <a:lnTo>
+                    <a:pt x="5663023" y="1525734"/>
+                  </a:lnTo>
+                  <a:lnTo>
+                    <a:pt x="5740657" y="1467543"/>
+                  </a:lnTo>
+                  <a:lnTo>
+                    <a:pt x="5818291" y="1407624"/>
+                  </a:lnTo>
+                  <a:lnTo>
+                    <a:pt x="5895925" y="1345923"/>
+                  </a:lnTo>
+                  <a:lnTo>
+                    <a:pt x="5973559" y="1282389"/>
+                  </a:lnTo>
+                  <a:lnTo>
+                    <a:pt x="6051193" y="1216967"/>
+                  </a:lnTo>
+                  <a:lnTo>
+                    <a:pt x="6128827" y="1149601"/>
+                  </a:lnTo>
+                  <a:lnTo>
+                    <a:pt x="6206462" y="1080232"/>
+                  </a:lnTo>
+                  <a:lnTo>
+                    <a:pt x="6284096" y="1008802"/>
+                  </a:lnTo>
+                  <a:lnTo>
+                    <a:pt x="6361730" y="935249"/>
+                  </a:lnTo>
+                  <a:lnTo>
+                    <a:pt x="6439364" y="859510"/>
+                  </a:lnTo>
+                  <a:lnTo>
+                    <a:pt x="6516998" y="781520"/>
+                  </a:lnTo>
+                  <a:lnTo>
+                    <a:pt x="6594632" y="701212"/>
+                  </a:lnTo>
+                  <a:lnTo>
+                    <a:pt x="6672266" y="618518"/>
+                  </a:lnTo>
+                  <a:lnTo>
+                    <a:pt x="6749900" y="533366"/>
+                  </a:lnTo>
+                  <a:lnTo>
+                    <a:pt x="6827534" y="445684"/>
+                  </a:lnTo>
+                  <a:lnTo>
+                    <a:pt x="6905168" y="355396"/>
+                  </a:lnTo>
+                  <a:lnTo>
+                    <a:pt x="6982802" y="262424"/>
+                  </a:lnTo>
+                  <a:lnTo>
+                    <a:pt x="7060436" y="166689"/>
+                  </a:lnTo>
+                  <a:lnTo>
+                    <a:pt x="7138070" y="68110"/>
                   </a:lnTo>
                   <a:lnTo>
                     <a:pt x="7190160" y="0"/>
@@ -3199,292 +3199,292 @@
                     <a:pt x="7370972" y="0"/>
                   </a:lnTo>
                   <a:lnTo>
-                    <a:pt x="7370972" y="3651155"/>
-                  </a:lnTo>
-                  <a:lnTo>
-                    <a:pt x="7293338" y="3650959"/>
-                  </a:lnTo>
-                  <a:lnTo>
-                    <a:pt x="7215704" y="3650736"/>
-                  </a:lnTo>
-                  <a:lnTo>
-                    <a:pt x="7138070" y="3650484"/>
-                  </a:lnTo>
-                  <a:lnTo>
-                    <a:pt x="7060436" y="3650199"/>
-                  </a:lnTo>
-                  <a:lnTo>
-                    <a:pt x="6982802" y="3649876"/>
-                  </a:lnTo>
-                  <a:lnTo>
-                    <a:pt x="6905168" y="3649510"/>
-                  </a:lnTo>
-                  <a:lnTo>
-                    <a:pt x="6827534" y="3649096"/>
-                  </a:lnTo>
-                  <a:lnTo>
-                    <a:pt x="6749900" y="3648627"/>
-                  </a:lnTo>
-                  <a:lnTo>
-                    <a:pt x="6672266" y="3648096"/>
-                  </a:lnTo>
-                  <a:lnTo>
-                    <a:pt x="6594632" y="3647495"/>
-                  </a:lnTo>
-                  <a:lnTo>
-                    <a:pt x="6516998" y="3646815"/>
-                  </a:lnTo>
-                  <a:lnTo>
-                    <a:pt x="6439364" y="3646045"/>
-                  </a:lnTo>
-                  <a:lnTo>
-                    <a:pt x="6361730" y="3645173"/>
-                  </a:lnTo>
-                  <a:lnTo>
-                    <a:pt x="6284096" y="3644186"/>
-                  </a:lnTo>
-                  <a:lnTo>
-                    <a:pt x="6206462" y="3643068"/>
-                  </a:lnTo>
-                  <a:lnTo>
-                    <a:pt x="6128827" y="3641803"/>
-                  </a:lnTo>
-                  <a:lnTo>
-                    <a:pt x="6051193" y="3640370"/>
-                  </a:lnTo>
-                  <a:lnTo>
-                    <a:pt x="5973559" y="3638748"/>
-                  </a:lnTo>
-                  <a:lnTo>
-                    <a:pt x="5895925" y="3636912"/>
-                  </a:lnTo>
-                  <a:lnTo>
-                    <a:pt x="5818291" y="3634833"/>
-                  </a:lnTo>
-                  <a:lnTo>
-                    <a:pt x="5740657" y="3632480"/>
-                  </a:lnTo>
-                  <a:lnTo>
-                    <a:pt x="5663023" y="3629815"/>
-                  </a:lnTo>
-                  <a:lnTo>
-                    <a:pt x="5585389" y="3626798"/>
-                  </a:lnTo>
-                  <a:lnTo>
-                    <a:pt x="5507755" y="3623383"/>
-                  </a:lnTo>
-                  <a:lnTo>
-                    <a:pt x="5430121" y="3619516"/>
-                  </a:lnTo>
-                  <a:lnTo>
-                    <a:pt x="5352487" y="3615139"/>
-                  </a:lnTo>
-                  <a:lnTo>
-                    <a:pt x="5274853" y="3610183"/>
-                  </a:lnTo>
-                  <a:lnTo>
-                    <a:pt x="5197219" y="3604571"/>
-                  </a:lnTo>
-                  <a:lnTo>
-                    <a:pt x="5119585" y="3598219"/>
-                  </a:lnTo>
-                  <a:lnTo>
-                    <a:pt x="5041951" y="3591027"/>
-                  </a:lnTo>
-                  <a:lnTo>
-                    <a:pt x="4964317" y="3582884"/>
-                  </a:lnTo>
-                  <a:lnTo>
-                    <a:pt x="4886683" y="3573666"/>
-                  </a:lnTo>
-                  <a:lnTo>
-                    <a:pt x="4809049" y="3563229"/>
-                  </a:lnTo>
-                  <a:lnTo>
-                    <a:pt x="4731415" y="3551413"/>
-                  </a:lnTo>
-                  <a:lnTo>
-                    <a:pt x="4653781" y="3538036"/>
-                  </a:lnTo>
-                  <a:lnTo>
-                    <a:pt x="4576147" y="3522891"/>
-                  </a:lnTo>
-                  <a:lnTo>
-                    <a:pt x="4498513" y="3505744"/>
-                  </a:lnTo>
-                  <a:lnTo>
-                    <a:pt x="4420879" y="3486331"/>
-                  </a:lnTo>
-                  <a:lnTo>
-                    <a:pt x="4343244" y="3464354"/>
-                  </a:lnTo>
-                  <a:lnTo>
-                    <a:pt x="4265610" y="3439471"/>
-                  </a:lnTo>
-                  <a:lnTo>
-                    <a:pt x="4187976" y="3411301"/>
-                  </a:lnTo>
-                  <a:lnTo>
-                    <a:pt x="4110342" y="3379408"/>
-                  </a:lnTo>
-                  <a:lnTo>
-                    <a:pt x="4032708" y="3343301"/>
-                  </a:lnTo>
-                  <a:lnTo>
-                    <a:pt x="3955074" y="3302422"/>
-                  </a:lnTo>
-                  <a:lnTo>
-                    <a:pt x="3877440" y="3256141"/>
-                  </a:lnTo>
-                  <a:lnTo>
-                    <a:pt x="3799806" y="3203743"/>
-                  </a:lnTo>
-                  <a:lnTo>
-                    <a:pt x="3722172" y="3144422"/>
-                  </a:lnTo>
-                  <a:lnTo>
-                    <a:pt x="3644538" y="3077262"/>
-                  </a:lnTo>
-                  <a:lnTo>
-                    <a:pt x="3566904" y="3001226"/>
-                  </a:lnTo>
-                  <a:lnTo>
-                    <a:pt x="3489270" y="2915142"/>
-                  </a:lnTo>
-                  <a:lnTo>
-                    <a:pt x="3411636" y="2817683"/>
-                  </a:lnTo>
-                  <a:lnTo>
-                    <a:pt x="3334002" y="2799909"/>
-                  </a:lnTo>
-                  <a:lnTo>
-                    <a:pt x="3256368" y="2824520"/>
-                  </a:lnTo>
-                  <a:lnTo>
-                    <a:pt x="3178734" y="2848421"/>
-                  </a:lnTo>
-                  <a:lnTo>
-                    <a:pt x="3101100" y="2871631"/>
-                  </a:lnTo>
-                  <a:lnTo>
-                    <a:pt x="3023466" y="2894173"/>
-                  </a:lnTo>
-                  <a:lnTo>
-                    <a:pt x="2945832" y="2916063"/>
-                  </a:lnTo>
-                  <a:lnTo>
-                    <a:pt x="2868198" y="2937322"/>
-                  </a:lnTo>
-                  <a:lnTo>
-                    <a:pt x="2790564" y="2957967"/>
-                  </a:lnTo>
-                  <a:lnTo>
-                    <a:pt x="2712930" y="2978016"/>
-                  </a:lnTo>
-                  <a:lnTo>
-                    <a:pt x="2635295" y="2997487"/>
-                  </a:lnTo>
-                  <a:lnTo>
-                    <a:pt x="2557661" y="3016395"/>
-                  </a:lnTo>
-                  <a:lnTo>
-                    <a:pt x="2480027" y="3034758"/>
-                  </a:lnTo>
-                  <a:lnTo>
-                    <a:pt x="2402393" y="3052591"/>
-                  </a:lnTo>
-                  <a:lnTo>
-                    <a:pt x="2324759" y="3069910"/>
-                  </a:lnTo>
-                  <a:lnTo>
-                    <a:pt x="2247125" y="3086728"/>
-                  </a:lnTo>
-                  <a:lnTo>
-                    <a:pt x="2169491" y="3103061"/>
-                  </a:lnTo>
-                  <a:lnTo>
-                    <a:pt x="2091857" y="3118923"/>
-                  </a:lnTo>
-                  <a:lnTo>
-                    <a:pt x="2014223" y="3134327"/>
-                  </a:lnTo>
-                  <a:lnTo>
-                    <a:pt x="1936589" y="3149286"/>
-                  </a:lnTo>
-                  <a:lnTo>
-                    <a:pt x="1858955" y="3163814"/>
-                  </a:lnTo>
-                  <a:lnTo>
-                    <a:pt x="1781321" y="3177922"/>
-                  </a:lnTo>
-                  <a:lnTo>
-                    <a:pt x="1703687" y="3191623"/>
-                  </a:lnTo>
-                  <a:lnTo>
-                    <a:pt x="1626053" y="3204929"/>
-                  </a:lnTo>
-                  <a:lnTo>
-                    <a:pt x="1548419" y="3217850"/>
-                  </a:lnTo>
-                  <a:lnTo>
-                    <a:pt x="1470785" y="3230399"/>
-                  </a:lnTo>
-                  <a:lnTo>
-                    <a:pt x="1393151" y="3242585"/>
-                  </a:lnTo>
-                  <a:lnTo>
-                    <a:pt x="1315517" y="3254420"/>
-                  </a:lnTo>
-                  <a:lnTo>
-                    <a:pt x="1237883" y="3265913"/>
-                  </a:lnTo>
-                  <a:lnTo>
-                    <a:pt x="1160249" y="3277075"/>
-                  </a:lnTo>
-                  <a:lnTo>
-                    <a:pt x="1082615" y="3287914"/>
-                  </a:lnTo>
-                  <a:lnTo>
-                    <a:pt x="1004981" y="3298441"/>
-                  </a:lnTo>
-                  <a:lnTo>
-                    <a:pt x="927346" y="3308664"/>
-                  </a:lnTo>
-                  <a:lnTo>
-                    <a:pt x="849712" y="3318591"/>
-                  </a:lnTo>
-                  <a:lnTo>
-                    <a:pt x="772078" y="3328233"/>
-                  </a:lnTo>
-                  <a:lnTo>
-                    <a:pt x="694444" y="3337595"/>
-                  </a:lnTo>
-                  <a:lnTo>
-                    <a:pt x="616810" y="3346688"/>
-                  </a:lnTo>
-                  <a:lnTo>
-                    <a:pt x="539176" y="3355518"/>
-                  </a:lnTo>
-                  <a:lnTo>
-                    <a:pt x="461542" y="3364094"/>
-                  </a:lnTo>
-                  <a:lnTo>
-                    <a:pt x="383908" y="3372422"/>
-                  </a:lnTo>
-                  <a:lnTo>
-                    <a:pt x="306274" y="3380509"/>
-                  </a:lnTo>
-                  <a:lnTo>
-                    <a:pt x="228640" y="3388363"/>
-                  </a:lnTo>
-                  <a:lnTo>
-                    <a:pt x="151006" y="3395991"/>
-                  </a:lnTo>
-                  <a:lnTo>
-                    <a:pt x="73372" y="3403398"/>
-                  </a:lnTo>
-                  <a:lnTo>
-                    <a:pt x="0" y="3410197"/>
+                    <a:pt x="7370972" y="3482327"/>
+                  </a:lnTo>
+                  <a:lnTo>
+                    <a:pt x="7293338" y="3482140"/>
+                  </a:lnTo>
+                  <a:lnTo>
+                    <a:pt x="7215704" y="3481927"/>
+                  </a:lnTo>
+                  <a:lnTo>
+                    <a:pt x="7138070" y="3481687"/>
+                  </a:lnTo>
+                  <a:lnTo>
+                    <a:pt x="7060436" y="3481415"/>
+                  </a:lnTo>
+                  <a:lnTo>
+                    <a:pt x="6982802" y="3481107"/>
+                  </a:lnTo>
+                  <a:lnTo>
+                    <a:pt x="6905168" y="3480758"/>
+                  </a:lnTo>
+                  <a:lnTo>
+                    <a:pt x="6827534" y="3480363"/>
+                  </a:lnTo>
+                  <a:lnTo>
+                    <a:pt x="6749900" y="3479916"/>
+                  </a:lnTo>
+                  <a:lnTo>
+                    <a:pt x="6672266" y="3479410"/>
+                  </a:lnTo>
+                  <a:lnTo>
+                    <a:pt x="6594632" y="3478837"/>
+                  </a:lnTo>
+                  <a:lnTo>
+                    <a:pt x="6516998" y="3478188"/>
+                  </a:lnTo>
+                  <a:lnTo>
+                    <a:pt x="6439364" y="3477453"/>
+                  </a:lnTo>
+                  <a:lnTo>
+                    <a:pt x="6361730" y="3476621"/>
+                  </a:lnTo>
+                  <a:lnTo>
+                    <a:pt x="6284096" y="3475680"/>
+                  </a:lnTo>
+                  <a:lnTo>
+                    <a:pt x="6206462" y="3474614"/>
+                  </a:lnTo>
+                  <a:lnTo>
+                    <a:pt x="6128827" y="3473407"/>
+                  </a:lnTo>
+                  <a:lnTo>
+                    <a:pt x="6051193" y="3472041"/>
+                  </a:lnTo>
+                  <a:lnTo>
+                    <a:pt x="5973559" y="3470494"/>
+                  </a:lnTo>
+                  <a:lnTo>
+                    <a:pt x="5895925" y="3468743"/>
+                  </a:lnTo>
+                  <a:lnTo>
+                    <a:pt x="5818291" y="3466760"/>
+                  </a:lnTo>
+                  <a:lnTo>
+                    <a:pt x="5740657" y="3464515"/>
+                  </a:lnTo>
+                  <a:lnTo>
+                    <a:pt x="5663023" y="3461974"/>
+                  </a:lnTo>
+                  <a:lnTo>
+                    <a:pt x="5585389" y="3459097"/>
+                  </a:lnTo>
+                  <a:lnTo>
+                    <a:pt x="5507755" y="3455839"/>
+                  </a:lnTo>
+                  <a:lnTo>
+                    <a:pt x="5430121" y="3452151"/>
+                  </a:lnTo>
+                  <a:lnTo>
+                    <a:pt x="5352487" y="3447976"/>
+                  </a:lnTo>
+                  <a:lnTo>
+                    <a:pt x="5274853" y="3443249"/>
+                  </a:lnTo>
+                  <a:lnTo>
+                    <a:pt x="5197219" y="3437897"/>
+                  </a:lnTo>
+                  <a:lnTo>
+                    <a:pt x="5119585" y="3431839"/>
+                  </a:lnTo>
+                  <a:lnTo>
+                    <a:pt x="5041951" y="3424979"/>
+                  </a:lnTo>
+                  <a:lnTo>
+                    <a:pt x="4964317" y="3417213"/>
+                  </a:lnTo>
+                  <a:lnTo>
+                    <a:pt x="4886683" y="3408421"/>
+                  </a:lnTo>
+                  <a:lnTo>
+                    <a:pt x="4809049" y="3398467"/>
+                  </a:lnTo>
+                  <a:lnTo>
+                    <a:pt x="4731415" y="3387197"/>
+                  </a:lnTo>
+                  <a:lnTo>
+                    <a:pt x="4653781" y="3374438"/>
+                  </a:lnTo>
+                  <a:lnTo>
+                    <a:pt x="4576147" y="3359993"/>
+                  </a:lnTo>
+                  <a:lnTo>
+                    <a:pt x="4498513" y="3343640"/>
+                  </a:lnTo>
+                  <a:lnTo>
+                    <a:pt x="4420879" y="3325125"/>
+                  </a:lnTo>
+                  <a:lnTo>
+                    <a:pt x="4343244" y="3304163"/>
+                  </a:lnTo>
+                  <a:lnTo>
+                    <a:pt x="4265610" y="3280432"/>
+                  </a:lnTo>
+                  <a:lnTo>
+                    <a:pt x="4187976" y="3253564"/>
+                  </a:lnTo>
+                  <a:lnTo>
+                    <a:pt x="4110342" y="3223146"/>
+                  </a:lnTo>
+                  <a:lnTo>
+                    <a:pt x="4032708" y="3188708"/>
+                  </a:lnTo>
+                  <a:lnTo>
+                    <a:pt x="3955074" y="3149719"/>
+                  </a:lnTo>
+                  <a:lnTo>
+                    <a:pt x="3877440" y="3105578"/>
+                  </a:lnTo>
+                  <a:lnTo>
+                    <a:pt x="3799806" y="3055604"/>
+                  </a:lnTo>
+                  <a:lnTo>
+                    <a:pt x="3722172" y="2999025"/>
+                  </a:lnTo>
+                  <a:lnTo>
+                    <a:pt x="3644538" y="2934970"/>
+                  </a:lnTo>
+                  <a:lnTo>
+                    <a:pt x="3566904" y="2862450"/>
+                  </a:lnTo>
+                  <a:lnTo>
+                    <a:pt x="3489270" y="2780347"/>
+                  </a:lnTo>
+                  <a:lnTo>
+                    <a:pt x="3411636" y="2687394"/>
+                  </a:lnTo>
+                  <a:lnTo>
+                    <a:pt x="3334002" y="2670442"/>
+                  </a:lnTo>
+                  <a:lnTo>
+                    <a:pt x="3256368" y="2693915"/>
+                  </a:lnTo>
+                  <a:lnTo>
+                    <a:pt x="3178734" y="2716711"/>
+                  </a:lnTo>
+                  <a:lnTo>
+                    <a:pt x="3101100" y="2738848"/>
+                  </a:lnTo>
+                  <a:lnTo>
+                    <a:pt x="3023466" y="2760347"/>
+                  </a:lnTo>
+                  <a:lnTo>
+                    <a:pt x="2945832" y="2781225"/>
+                  </a:lnTo>
+                  <a:lnTo>
+                    <a:pt x="2868198" y="2801501"/>
+                  </a:lnTo>
+                  <a:lnTo>
+                    <a:pt x="2790564" y="2821191"/>
+                  </a:lnTo>
+                  <a:lnTo>
+                    <a:pt x="2712930" y="2840314"/>
+                  </a:lnTo>
+                  <a:lnTo>
+                    <a:pt x="2635295" y="2858884"/>
+                  </a:lnTo>
+                  <a:lnTo>
+                    <a:pt x="2557661" y="2876918"/>
+                  </a:lnTo>
+                  <a:lnTo>
+                    <a:pt x="2480027" y="2894432"/>
+                  </a:lnTo>
+                  <a:lnTo>
+                    <a:pt x="2402393" y="2911441"/>
+                  </a:lnTo>
+                  <a:lnTo>
+                    <a:pt x="2324759" y="2927958"/>
+                  </a:lnTo>
+                  <a:lnTo>
+                    <a:pt x="2247125" y="2943999"/>
+                  </a:lnTo>
+                  <a:lnTo>
+                    <a:pt x="2169491" y="2959577"/>
+                  </a:lnTo>
+                  <a:lnTo>
+                    <a:pt x="2091857" y="2974705"/>
+                  </a:lnTo>
+                  <a:lnTo>
+                    <a:pt x="2014223" y="2989397"/>
+                  </a:lnTo>
+                  <a:lnTo>
+                    <a:pt x="1936589" y="3003664"/>
+                  </a:lnTo>
+                  <a:lnTo>
+                    <a:pt x="1858955" y="3017520"/>
+                  </a:lnTo>
+                  <a:lnTo>
+                    <a:pt x="1781321" y="3030976"/>
+                  </a:lnTo>
+                  <a:lnTo>
+                    <a:pt x="1703687" y="3044043"/>
+                  </a:lnTo>
+                  <a:lnTo>
+                    <a:pt x="1626053" y="3056734"/>
+                  </a:lnTo>
+                  <a:lnTo>
+                    <a:pt x="1548419" y="3069058"/>
+                  </a:lnTo>
+                  <a:lnTo>
+                    <a:pt x="1470785" y="3081026"/>
+                  </a:lnTo>
+                  <a:lnTo>
+                    <a:pt x="1393151" y="3092649"/>
+                  </a:lnTo>
+                  <a:lnTo>
+                    <a:pt x="1315517" y="3103937"/>
+                  </a:lnTo>
+                  <a:lnTo>
+                    <a:pt x="1237883" y="3114899"/>
+                  </a:lnTo>
+                  <a:lnTo>
+                    <a:pt x="1160249" y="3125544"/>
+                  </a:lnTo>
+                  <a:lnTo>
+                    <a:pt x="1082615" y="3135882"/>
+                  </a:lnTo>
+                  <a:lnTo>
+                    <a:pt x="1004981" y="3145922"/>
+                  </a:lnTo>
+                  <a:lnTo>
+                    <a:pt x="927346" y="3155672"/>
+                  </a:lnTo>
+                  <a:lnTo>
+                    <a:pt x="849712" y="3165141"/>
+                  </a:lnTo>
+                  <a:lnTo>
+                    <a:pt x="772078" y="3174336"/>
+                  </a:lnTo>
+                  <a:lnTo>
+                    <a:pt x="694444" y="3183266"/>
+                  </a:lnTo>
+                  <a:lnTo>
+                    <a:pt x="616810" y="3191939"/>
+                  </a:lnTo>
+                  <a:lnTo>
+                    <a:pt x="539176" y="3200361"/>
+                  </a:lnTo>
+                  <a:lnTo>
+                    <a:pt x="461542" y="3208539"/>
+                  </a:lnTo>
+                  <a:lnTo>
+                    <a:pt x="383908" y="3216482"/>
+                  </a:lnTo>
+                  <a:lnTo>
+                    <a:pt x="306274" y="3224196"/>
+                  </a:lnTo>
+                  <a:lnTo>
+                    <a:pt x="228640" y="3231687"/>
+                  </a:lnTo>
+                  <a:lnTo>
+                    <a:pt x="151006" y="3238962"/>
+                  </a:lnTo>
+                  <a:lnTo>
+                    <a:pt x="73372" y="3246026"/>
+                  </a:lnTo>
+                  <a:lnTo>
+                    <a:pt x="0" y="3252511"/>
                   </a:lnTo>
                   <a:close/>
                 </a:path>
@@ -3510,195 +3510,195 @@
           </p:nvSpPr>
           <p:spPr>
             <a:xfrm>
-              <a:off x="3306517" y="1896563"/>
-              <a:ext cx="4701161" cy="2774566"/>
+              <a:off x="3306517" y="2073503"/>
+              <a:ext cx="4701161" cy="2646271"/>
             </a:xfrm>
             <a:custGeom>
               <a:avLst/>
               <a:pathLst>
-                <a:path w="4701161" h="2774566">
+                <a:path w="4701161" h="2646271">
                   <a:moveTo>
                     <a:pt x="0" y="0"/>
                   </a:moveTo>
                   <a:lnTo>
-                    <a:pt x="68662" y="382235"/>
-                  </a:lnTo>
-                  <a:lnTo>
-                    <a:pt x="146296" y="763969"/>
-                  </a:lnTo>
-                  <a:lnTo>
-                    <a:pt x="223930" y="1101144"/>
-                  </a:lnTo>
-                  <a:lnTo>
-                    <a:pt x="301564" y="1398964"/>
-                  </a:lnTo>
-                  <a:lnTo>
-                    <a:pt x="379198" y="1662021"/>
-                  </a:lnTo>
-                  <a:lnTo>
-                    <a:pt x="456832" y="1894373"/>
-                  </a:lnTo>
-                  <a:lnTo>
-                    <a:pt x="534466" y="2099605"/>
-                  </a:lnTo>
-                  <a:lnTo>
-                    <a:pt x="612100" y="2280881"/>
-                  </a:lnTo>
-                  <a:lnTo>
-                    <a:pt x="689734" y="2440997"/>
-                  </a:lnTo>
-                  <a:lnTo>
-                    <a:pt x="767369" y="2582425"/>
-                  </a:lnTo>
-                  <a:lnTo>
-                    <a:pt x="845003" y="2707344"/>
-                  </a:lnTo>
-                  <a:lnTo>
-                    <a:pt x="922637" y="2774566"/>
-                  </a:lnTo>
-                  <a:lnTo>
-                    <a:pt x="1000271" y="2748471"/>
-                  </a:lnTo>
-                  <a:lnTo>
-                    <a:pt x="1077905" y="2721600"/>
-                  </a:lnTo>
-                  <a:lnTo>
-                    <a:pt x="1155539" y="2693930"/>
-                  </a:lnTo>
-                  <a:lnTo>
-                    <a:pt x="1233173" y="2665438"/>
-                  </a:lnTo>
-                  <a:lnTo>
-                    <a:pt x="1310807" y="2636099"/>
-                  </a:lnTo>
-                  <a:lnTo>
-                    <a:pt x="1388441" y="2605888"/>
-                  </a:lnTo>
-                  <a:lnTo>
-                    <a:pt x="1466075" y="2574780"/>
-                  </a:lnTo>
-                  <a:lnTo>
-                    <a:pt x="1543709" y="2542747"/>
-                  </a:lnTo>
-                  <a:lnTo>
-                    <a:pt x="1621343" y="2509762"/>
-                  </a:lnTo>
-                  <a:lnTo>
-                    <a:pt x="1698977" y="2475796"/>
-                  </a:lnTo>
-                  <a:lnTo>
-                    <a:pt x="1776611" y="2440821"/>
-                  </a:lnTo>
-                  <a:lnTo>
-                    <a:pt x="1854245" y="2404807"/>
-                  </a:lnTo>
-                  <a:lnTo>
-                    <a:pt x="1931879" y="2367723"/>
-                  </a:lnTo>
-                  <a:lnTo>
-                    <a:pt x="2009513" y="2329536"/>
-                  </a:lnTo>
-                  <a:lnTo>
-                    <a:pt x="2087147" y="2290215"/>
-                  </a:lnTo>
-                  <a:lnTo>
-                    <a:pt x="2164781" y="2249725"/>
-                  </a:lnTo>
-                  <a:lnTo>
-                    <a:pt x="2242415" y="2208031"/>
-                  </a:lnTo>
-                  <a:lnTo>
-                    <a:pt x="2320049" y="2165099"/>
-                  </a:lnTo>
-                  <a:lnTo>
-                    <a:pt x="2397683" y="2120890"/>
-                  </a:lnTo>
-                  <a:lnTo>
-                    <a:pt x="2475318" y="2075368"/>
-                  </a:lnTo>
-                  <a:lnTo>
-                    <a:pt x="2552952" y="2028493"/>
-                  </a:lnTo>
-                  <a:lnTo>
-                    <a:pt x="2630586" y="1980225"/>
-                  </a:lnTo>
-                  <a:lnTo>
-                    <a:pt x="2708220" y="1930522"/>
-                  </a:lnTo>
-                  <a:lnTo>
-                    <a:pt x="2785854" y="1879342"/>
-                  </a:lnTo>
-                  <a:lnTo>
-                    <a:pt x="2863488" y="1826641"/>
-                  </a:lnTo>
-                  <a:lnTo>
-                    <a:pt x="2941122" y="1772374"/>
-                  </a:lnTo>
-                  <a:lnTo>
-                    <a:pt x="3018756" y="1716494"/>
-                  </a:lnTo>
-                  <a:lnTo>
-                    <a:pt x="3096390" y="1658954"/>
-                  </a:lnTo>
-                  <a:lnTo>
-                    <a:pt x="3174024" y="1599703"/>
-                  </a:lnTo>
-                  <a:lnTo>
-                    <a:pt x="3251658" y="1538692"/>
-                  </a:lnTo>
-                  <a:lnTo>
-                    <a:pt x="3329292" y="1475867"/>
-                  </a:lnTo>
-                  <a:lnTo>
-                    <a:pt x="3406926" y="1411176"/>
-                  </a:lnTo>
-                  <a:lnTo>
-                    <a:pt x="3484560" y="1344561"/>
-                  </a:lnTo>
-                  <a:lnTo>
-                    <a:pt x="3562194" y="1275967"/>
-                  </a:lnTo>
-                  <a:lnTo>
-                    <a:pt x="3639828" y="1205335"/>
-                  </a:lnTo>
-                  <a:lnTo>
-                    <a:pt x="3717462" y="1132603"/>
-                  </a:lnTo>
-                  <a:lnTo>
-                    <a:pt x="3795096" y="1057710"/>
-                  </a:lnTo>
-                  <a:lnTo>
-                    <a:pt x="3872730" y="980591"/>
-                  </a:lnTo>
-                  <a:lnTo>
-                    <a:pt x="3950364" y="901180"/>
-                  </a:lnTo>
-                  <a:lnTo>
-                    <a:pt x="4027998" y="819409"/>
-                  </a:lnTo>
-                  <a:lnTo>
-                    <a:pt x="4105632" y="735208"/>
-                  </a:lnTo>
-                  <a:lnTo>
-                    <a:pt x="4183267" y="648505"/>
-                  </a:lnTo>
-                  <a:lnTo>
-                    <a:pt x="4260901" y="559225"/>
-                  </a:lnTo>
-                  <a:lnTo>
-                    <a:pt x="4338535" y="467291"/>
-                  </a:lnTo>
-                  <a:lnTo>
-                    <a:pt x="4416169" y="372626"/>
-                  </a:lnTo>
-                  <a:lnTo>
-                    <a:pt x="4493803" y="275147"/>
-                  </a:lnTo>
-                  <a:lnTo>
-                    <a:pt x="4571437" y="174771"/>
-                  </a:lnTo>
-                  <a:lnTo>
-                    <a:pt x="4649071" y="71412"/>
+                    <a:pt x="68662" y="364561"/>
+                  </a:lnTo>
+                  <a:lnTo>
+                    <a:pt x="146296" y="728643"/>
+                  </a:lnTo>
+                  <a:lnTo>
+                    <a:pt x="223930" y="1050228"/>
+                  </a:lnTo>
+                  <a:lnTo>
+                    <a:pt x="301564" y="1334277"/>
+                  </a:lnTo>
+                  <a:lnTo>
+                    <a:pt x="379198" y="1585170"/>
+                  </a:lnTo>
+                  <a:lnTo>
+                    <a:pt x="456832" y="1806778"/>
+                  </a:lnTo>
+                  <a:lnTo>
+                    <a:pt x="534466" y="2002520"/>
+                  </a:lnTo>
+                  <a:lnTo>
+                    <a:pt x="612100" y="2175414"/>
+                  </a:lnTo>
+                  <a:lnTo>
+                    <a:pt x="689734" y="2328127"/>
+                  </a:lnTo>
+                  <a:lnTo>
+                    <a:pt x="767369" y="2463015"/>
+                  </a:lnTo>
+                  <a:lnTo>
+                    <a:pt x="845003" y="2582158"/>
+                  </a:lnTo>
+                  <a:lnTo>
+                    <a:pt x="922637" y="2646271"/>
+                  </a:lnTo>
+                  <a:lnTo>
+                    <a:pt x="1000271" y="2621382"/>
+                  </a:lnTo>
+                  <a:lnTo>
+                    <a:pt x="1077905" y="2595754"/>
+                  </a:lnTo>
+                  <a:lnTo>
+                    <a:pt x="1155539" y="2569363"/>
+                  </a:lnTo>
+                  <a:lnTo>
+                    <a:pt x="1233173" y="2542189"/>
+                  </a:lnTo>
+                  <a:lnTo>
+                    <a:pt x="1310807" y="2514207"/>
+                  </a:lnTo>
+                  <a:lnTo>
+                    <a:pt x="1388441" y="2485393"/>
+                  </a:lnTo>
+                  <a:lnTo>
+                    <a:pt x="1466075" y="2455723"/>
+                  </a:lnTo>
+                  <a:lnTo>
+                    <a:pt x="1543709" y="2425171"/>
+                  </a:lnTo>
+                  <a:lnTo>
+                    <a:pt x="1621343" y="2393711"/>
+                  </a:lnTo>
+                  <a:lnTo>
+                    <a:pt x="1698977" y="2361316"/>
+                  </a:lnTo>
+                  <a:lnTo>
+                    <a:pt x="1776611" y="2327959"/>
+                  </a:lnTo>
+                  <a:lnTo>
+                    <a:pt x="1854245" y="2293610"/>
+                  </a:lnTo>
+                  <a:lnTo>
+                    <a:pt x="1931879" y="2258240"/>
+                  </a:lnTo>
+                  <a:lnTo>
+                    <a:pt x="2009513" y="2221819"/>
+                  </a:lnTo>
+                  <a:lnTo>
+                    <a:pt x="2087147" y="2184316"/>
+                  </a:lnTo>
+                  <a:lnTo>
+                    <a:pt x="2164781" y="2145698"/>
+                  </a:lnTo>
+                  <a:lnTo>
+                    <a:pt x="2242415" y="2105933"/>
+                  </a:lnTo>
+                  <a:lnTo>
+                    <a:pt x="2320049" y="2064985"/>
+                  </a:lnTo>
+                  <a:lnTo>
+                    <a:pt x="2397683" y="2022821"/>
+                  </a:lnTo>
+                  <a:lnTo>
+                    <a:pt x="2475318" y="1979404"/>
+                  </a:lnTo>
+                  <a:lnTo>
+                    <a:pt x="2552952" y="1934696"/>
+                  </a:lnTo>
+                  <a:lnTo>
+                    <a:pt x="2630586" y="1888660"/>
+                  </a:lnTo>
+                  <a:lnTo>
+                    <a:pt x="2708220" y="1841255"/>
+                  </a:lnTo>
+                  <a:lnTo>
+                    <a:pt x="2785854" y="1792442"/>
+                  </a:lnTo>
+                  <a:lnTo>
+                    <a:pt x="2863488" y="1742178"/>
+                  </a:lnTo>
+                  <a:lnTo>
+                    <a:pt x="2941122" y="1690420"/>
+                  </a:lnTo>
+                  <a:lnTo>
+                    <a:pt x="3018756" y="1637124"/>
+                  </a:lnTo>
+                  <a:lnTo>
+                    <a:pt x="3096390" y="1582245"/>
+                  </a:lnTo>
+                  <a:lnTo>
+                    <a:pt x="3174024" y="1525734"/>
+                  </a:lnTo>
+                  <a:lnTo>
+                    <a:pt x="3251658" y="1467543"/>
+                  </a:lnTo>
+                  <a:lnTo>
+                    <a:pt x="3329292" y="1407624"/>
+                  </a:lnTo>
+                  <a:lnTo>
+                    <a:pt x="3406926" y="1345923"/>
+                  </a:lnTo>
+                  <a:lnTo>
+                    <a:pt x="3484560" y="1282389"/>
+                  </a:lnTo>
+                  <a:lnTo>
+                    <a:pt x="3562194" y="1216967"/>
+                  </a:lnTo>
+                  <a:lnTo>
+                    <a:pt x="3639828" y="1149601"/>
+                  </a:lnTo>
+                  <a:lnTo>
+                    <a:pt x="3717462" y="1080232"/>
+                  </a:lnTo>
+                  <a:lnTo>
+                    <a:pt x="3795096" y="1008802"/>
+                  </a:lnTo>
+                  <a:lnTo>
+                    <a:pt x="3872730" y="935249"/>
+                  </a:lnTo>
+                  <a:lnTo>
+                    <a:pt x="3950364" y="859510"/>
+                  </a:lnTo>
+                  <a:lnTo>
+                    <a:pt x="4027998" y="781520"/>
+                  </a:lnTo>
+                  <a:lnTo>
+                    <a:pt x="4105632" y="701212"/>
+                  </a:lnTo>
+                  <a:lnTo>
+                    <a:pt x="4183267" y="618518"/>
+                  </a:lnTo>
+                  <a:lnTo>
+                    <a:pt x="4260901" y="533366"/>
+                  </a:lnTo>
+                  <a:lnTo>
+                    <a:pt x="4338535" y="445684"/>
+                  </a:lnTo>
+                  <a:lnTo>
+                    <a:pt x="4416169" y="355396"/>
+                  </a:lnTo>
+                  <a:lnTo>
+                    <a:pt x="4493803" y="262424"/>
+                  </a:lnTo>
+                  <a:lnTo>
+                    <a:pt x="4571437" y="166689"/>
+                  </a:lnTo>
+                  <a:lnTo>
+                    <a:pt x="4649071" y="68110"/>
                   </a:lnTo>
                   <a:lnTo>
                     <a:pt x="4701161" y="0"/>
@@ -3721,300 +3721,300 @@
           </p:nvSpPr>
           <p:spPr>
             <a:xfrm>
-              <a:off x="817517" y="4696472"/>
-              <a:ext cx="7370972" cy="851246"/>
+              <a:off x="817517" y="4743945"/>
+              <a:ext cx="7370972" cy="811885"/>
             </a:xfrm>
             <a:custGeom>
               <a:avLst/>
               <a:pathLst>
-                <a:path w="7370972" h="851246">
+                <a:path w="7370972" h="811885">
                   <a:moveTo>
-                    <a:pt x="7370972" y="851246"/>
+                    <a:pt x="7370972" y="811885"/>
                   </a:moveTo>
                   <a:lnTo>
-                    <a:pt x="7293338" y="851049"/>
-                  </a:lnTo>
-                  <a:lnTo>
-                    <a:pt x="7215704" y="850827"/>
-                  </a:lnTo>
-                  <a:lnTo>
-                    <a:pt x="7138070" y="850575"/>
-                  </a:lnTo>
-                  <a:lnTo>
-                    <a:pt x="7060436" y="850289"/>
-                  </a:lnTo>
-                  <a:lnTo>
-                    <a:pt x="6982802" y="849966"/>
-                  </a:lnTo>
-                  <a:lnTo>
-                    <a:pt x="6905168" y="849601"/>
-                  </a:lnTo>
-                  <a:lnTo>
-                    <a:pt x="6827534" y="849187"/>
-                  </a:lnTo>
-                  <a:lnTo>
-                    <a:pt x="6749900" y="848718"/>
-                  </a:lnTo>
-                  <a:lnTo>
-                    <a:pt x="6672266" y="848187"/>
-                  </a:lnTo>
-                  <a:lnTo>
-                    <a:pt x="6594632" y="847586"/>
-                  </a:lnTo>
-                  <a:lnTo>
-                    <a:pt x="6516998" y="846906"/>
-                  </a:lnTo>
-                  <a:lnTo>
-                    <a:pt x="6439364" y="846136"/>
-                  </a:lnTo>
-                  <a:lnTo>
-                    <a:pt x="6361730" y="845264"/>
-                  </a:lnTo>
-                  <a:lnTo>
-                    <a:pt x="6284096" y="844276"/>
-                  </a:lnTo>
-                  <a:lnTo>
-                    <a:pt x="6206462" y="843159"/>
-                  </a:lnTo>
-                  <a:lnTo>
-                    <a:pt x="6128827" y="841893"/>
-                  </a:lnTo>
-                  <a:lnTo>
-                    <a:pt x="6051193" y="840461"/>
-                  </a:lnTo>
-                  <a:lnTo>
-                    <a:pt x="5973559" y="838839"/>
-                  </a:lnTo>
-                  <a:lnTo>
-                    <a:pt x="5895925" y="837003"/>
-                  </a:lnTo>
-                  <a:lnTo>
-                    <a:pt x="5818291" y="834924"/>
-                  </a:lnTo>
-                  <a:lnTo>
-                    <a:pt x="5740657" y="832570"/>
-                  </a:lnTo>
-                  <a:lnTo>
-                    <a:pt x="5663023" y="829906"/>
-                  </a:lnTo>
-                  <a:lnTo>
-                    <a:pt x="5585389" y="826889"/>
-                  </a:lnTo>
-                  <a:lnTo>
-                    <a:pt x="5507755" y="823474"/>
-                  </a:lnTo>
-                  <a:lnTo>
-                    <a:pt x="5430121" y="819607"/>
-                  </a:lnTo>
-                  <a:lnTo>
-                    <a:pt x="5352487" y="815229"/>
-                  </a:lnTo>
-                  <a:lnTo>
-                    <a:pt x="5274853" y="810273"/>
-                  </a:lnTo>
-                  <a:lnTo>
-                    <a:pt x="5197219" y="804662"/>
-                  </a:lnTo>
-                  <a:lnTo>
-                    <a:pt x="5119585" y="798310"/>
-                  </a:lnTo>
-                  <a:lnTo>
-                    <a:pt x="5041951" y="791118"/>
-                  </a:lnTo>
-                  <a:lnTo>
-                    <a:pt x="4964317" y="782975"/>
-                  </a:lnTo>
-                  <a:lnTo>
-                    <a:pt x="4886683" y="773756"/>
-                  </a:lnTo>
-                  <a:lnTo>
-                    <a:pt x="4809049" y="763320"/>
-                  </a:lnTo>
-                  <a:lnTo>
-                    <a:pt x="4731415" y="751504"/>
-                  </a:lnTo>
-                  <a:lnTo>
-                    <a:pt x="4653781" y="738126"/>
-                  </a:lnTo>
-                  <a:lnTo>
-                    <a:pt x="4576147" y="722981"/>
-                  </a:lnTo>
-                  <a:lnTo>
-                    <a:pt x="4498513" y="705835"/>
-                  </a:lnTo>
-                  <a:lnTo>
-                    <a:pt x="4420879" y="686422"/>
-                  </a:lnTo>
-                  <a:lnTo>
-                    <a:pt x="4343244" y="664444"/>
-                  </a:lnTo>
-                  <a:lnTo>
-                    <a:pt x="4265610" y="639562"/>
-                  </a:lnTo>
-                  <a:lnTo>
-                    <a:pt x="4187976" y="611392"/>
-                  </a:lnTo>
-                  <a:lnTo>
-                    <a:pt x="4110342" y="579499"/>
-                  </a:lnTo>
-                  <a:lnTo>
-                    <a:pt x="4032708" y="543392"/>
-                  </a:lnTo>
-                  <a:lnTo>
-                    <a:pt x="3955074" y="502512"/>
-                  </a:lnTo>
-                  <a:lnTo>
-                    <a:pt x="3877440" y="456231"/>
-                  </a:lnTo>
-                  <a:lnTo>
-                    <a:pt x="3799806" y="403834"/>
-                  </a:lnTo>
-                  <a:lnTo>
-                    <a:pt x="3722172" y="344513"/>
-                  </a:lnTo>
-                  <a:lnTo>
-                    <a:pt x="3644538" y="277352"/>
-                  </a:lnTo>
-                  <a:lnTo>
-                    <a:pt x="3566904" y="201317"/>
-                  </a:lnTo>
-                  <a:lnTo>
-                    <a:pt x="3489270" y="115233"/>
-                  </a:lnTo>
-                  <a:lnTo>
-                    <a:pt x="3411636" y="17774"/>
+                    <a:pt x="7293338" y="811697"/>
+                  </a:lnTo>
+                  <a:lnTo>
+                    <a:pt x="7215704" y="811485"/>
+                  </a:lnTo>
+                  <a:lnTo>
+                    <a:pt x="7138070" y="811244"/>
+                  </a:lnTo>
+                  <a:lnTo>
+                    <a:pt x="7060436" y="810972"/>
+                  </a:lnTo>
+                  <a:lnTo>
+                    <a:pt x="6982802" y="810664"/>
+                  </a:lnTo>
+                  <a:lnTo>
+                    <a:pt x="6905168" y="810315"/>
+                  </a:lnTo>
+                  <a:lnTo>
+                    <a:pt x="6827534" y="809920"/>
+                  </a:lnTo>
+                  <a:lnTo>
+                    <a:pt x="6749900" y="809473"/>
+                  </a:lnTo>
+                  <a:lnTo>
+                    <a:pt x="6672266" y="808967"/>
+                  </a:lnTo>
+                  <a:lnTo>
+                    <a:pt x="6594632" y="808394"/>
+                  </a:lnTo>
+                  <a:lnTo>
+                    <a:pt x="6516998" y="807745"/>
+                  </a:lnTo>
+                  <a:lnTo>
+                    <a:pt x="6439364" y="807011"/>
+                  </a:lnTo>
+                  <a:lnTo>
+                    <a:pt x="6361730" y="806179"/>
+                  </a:lnTo>
+                  <a:lnTo>
+                    <a:pt x="6284096" y="805237"/>
+                  </a:lnTo>
+                  <a:lnTo>
+                    <a:pt x="6206462" y="804171"/>
+                  </a:lnTo>
+                  <a:lnTo>
+                    <a:pt x="6128827" y="802965"/>
+                  </a:lnTo>
+                  <a:lnTo>
+                    <a:pt x="6051193" y="801598"/>
+                  </a:lnTo>
+                  <a:lnTo>
+                    <a:pt x="5973559" y="800051"/>
+                  </a:lnTo>
+                  <a:lnTo>
+                    <a:pt x="5895925" y="798300"/>
+                  </a:lnTo>
+                  <a:lnTo>
+                    <a:pt x="5818291" y="796317"/>
+                  </a:lnTo>
+                  <a:lnTo>
+                    <a:pt x="5740657" y="794073"/>
+                  </a:lnTo>
+                  <a:lnTo>
+                    <a:pt x="5663023" y="791531"/>
+                  </a:lnTo>
+                  <a:lnTo>
+                    <a:pt x="5585389" y="788654"/>
+                  </a:lnTo>
+                  <a:lnTo>
+                    <a:pt x="5507755" y="785397"/>
+                  </a:lnTo>
+                  <a:lnTo>
+                    <a:pt x="5430121" y="781709"/>
+                  </a:lnTo>
+                  <a:lnTo>
+                    <a:pt x="5352487" y="777534"/>
+                  </a:lnTo>
+                  <a:lnTo>
+                    <a:pt x="5274853" y="772807"/>
+                  </a:lnTo>
+                  <a:lnTo>
+                    <a:pt x="5197219" y="767455"/>
+                  </a:lnTo>
+                  <a:lnTo>
+                    <a:pt x="5119585" y="761396"/>
+                  </a:lnTo>
+                  <a:lnTo>
+                    <a:pt x="5041951" y="754537"/>
+                  </a:lnTo>
+                  <a:lnTo>
+                    <a:pt x="4964317" y="746771"/>
+                  </a:lnTo>
+                  <a:lnTo>
+                    <a:pt x="4886683" y="737978"/>
+                  </a:lnTo>
+                  <a:lnTo>
+                    <a:pt x="4809049" y="728024"/>
+                  </a:lnTo>
+                  <a:lnTo>
+                    <a:pt x="4731415" y="716755"/>
+                  </a:lnTo>
+                  <a:lnTo>
+                    <a:pt x="4653781" y="703996"/>
+                  </a:lnTo>
+                  <a:lnTo>
+                    <a:pt x="4576147" y="689551"/>
+                  </a:lnTo>
+                  <a:lnTo>
+                    <a:pt x="4498513" y="673197"/>
+                  </a:lnTo>
+                  <a:lnTo>
+                    <a:pt x="4420879" y="654682"/>
+                  </a:lnTo>
+                  <a:lnTo>
+                    <a:pt x="4343244" y="633721"/>
+                  </a:lnTo>
+                  <a:lnTo>
+                    <a:pt x="4265610" y="609989"/>
+                  </a:lnTo>
+                  <a:lnTo>
+                    <a:pt x="4187976" y="583121"/>
+                  </a:lnTo>
+                  <a:lnTo>
+                    <a:pt x="4110342" y="552703"/>
+                  </a:lnTo>
+                  <a:lnTo>
+                    <a:pt x="4032708" y="518265"/>
+                  </a:lnTo>
+                  <a:lnTo>
+                    <a:pt x="3955074" y="479276"/>
+                  </a:lnTo>
+                  <a:lnTo>
+                    <a:pt x="3877440" y="435135"/>
+                  </a:lnTo>
+                  <a:lnTo>
+                    <a:pt x="3799806" y="385161"/>
+                  </a:lnTo>
+                  <a:lnTo>
+                    <a:pt x="3722172" y="328583"/>
+                  </a:lnTo>
+                  <a:lnTo>
+                    <a:pt x="3644538" y="264528"/>
+                  </a:lnTo>
+                  <a:lnTo>
+                    <a:pt x="3566904" y="192008"/>
+                  </a:lnTo>
+                  <a:lnTo>
+                    <a:pt x="3489270" y="109905"/>
+                  </a:lnTo>
+                  <a:lnTo>
+                    <a:pt x="3411636" y="16952"/>
                   </a:lnTo>
                   <a:lnTo>
                     <a:pt x="3334002" y="0"/>
                   </a:lnTo>
                   <a:lnTo>
-                    <a:pt x="3256368" y="24611"/>
-                  </a:lnTo>
-                  <a:lnTo>
-                    <a:pt x="3178734" y="48511"/>
-                  </a:lnTo>
-                  <a:lnTo>
-                    <a:pt x="3101100" y="71722"/>
-                  </a:lnTo>
-                  <a:lnTo>
-                    <a:pt x="3023466" y="94263"/>
-                  </a:lnTo>
-                  <a:lnTo>
-                    <a:pt x="2945832" y="116154"/>
-                  </a:lnTo>
-                  <a:lnTo>
-                    <a:pt x="2868198" y="137412"/>
-                  </a:lnTo>
-                  <a:lnTo>
-                    <a:pt x="2790564" y="158058"/>
-                  </a:lnTo>
-                  <a:lnTo>
-                    <a:pt x="2712930" y="178107"/>
-                  </a:lnTo>
-                  <a:lnTo>
-                    <a:pt x="2635295" y="197577"/>
-                  </a:lnTo>
-                  <a:lnTo>
-                    <a:pt x="2557661" y="216486"/>
-                  </a:lnTo>
-                  <a:lnTo>
-                    <a:pt x="2480027" y="234849"/>
-                  </a:lnTo>
-                  <a:lnTo>
-                    <a:pt x="2402393" y="252682"/>
-                  </a:lnTo>
-                  <a:lnTo>
-                    <a:pt x="2324759" y="270000"/>
-                  </a:lnTo>
-                  <a:lnTo>
-                    <a:pt x="2247125" y="286819"/>
-                  </a:lnTo>
-                  <a:lnTo>
-                    <a:pt x="2169491" y="303152"/>
-                  </a:lnTo>
-                  <a:lnTo>
-                    <a:pt x="2091857" y="319013"/>
-                  </a:lnTo>
-                  <a:lnTo>
-                    <a:pt x="2014223" y="334417"/>
-                  </a:lnTo>
-                  <a:lnTo>
-                    <a:pt x="1936589" y="349377"/>
-                  </a:lnTo>
-                  <a:lnTo>
-                    <a:pt x="1858955" y="363904"/>
-                  </a:lnTo>
-                  <a:lnTo>
-                    <a:pt x="1781321" y="378013"/>
-                  </a:lnTo>
-                  <a:lnTo>
-                    <a:pt x="1703687" y="391714"/>
-                  </a:lnTo>
-                  <a:lnTo>
-                    <a:pt x="1626053" y="405019"/>
-                  </a:lnTo>
-                  <a:lnTo>
-                    <a:pt x="1548419" y="417941"/>
-                  </a:lnTo>
-                  <a:lnTo>
-                    <a:pt x="1470785" y="430490"/>
-                  </a:lnTo>
-                  <a:lnTo>
-                    <a:pt x="1393151" y="442676"/>
-                  </a:lnTo>
-                  <a:lnTo>
-                    <a:pt x="1315517" y="454511"/>
-                  </a:lnTo>
-                  <a:lnTo>
-                    <a:pt x="1237883" y="466004"/>
-                  </a:lnTo>
-                  <a:lnTo>
-                    <a:pt x="1160249" y="477166"/>
-                  </a:lnTo>
-                  <a:lnTo>
-                    <a:pt x="1082615" y="488005"/>
-                  </a:lnTo>
-                  <a:lnTo>
-                    <a:pt x="1004981" y="498532"/>
-                  </a:lnTo>
-                  <a:lnTo>
-                    <a:pt x="927346" y="508754"/>
-                  </a:lnTo>
-                  <a:lnTo>
-                    <a:pt x="849712" y="518682"/>
-                  </a:lnTo>
-                  <a:lnTo>
-                    <a:pt x="772078" y="528323"/>
-                  </a:lnTo>
-                  <a:lnTo>
-                    <a:pt x="694444" y="537686"/>
-                  </a:lnTo>
-                  <a:lnTo>
-                    <a:pt x="616810" y="546779"/>
-                  </a:lnTo>
-                  <a:lnTo>
-                    <a:pt x="539176" y="555609"/>
-                  </a:lnTo>
-                  <a:lnTo>
-                    <a:pt x="461542" y="564185"/>
-                  </a:lnTo>
-                  <a:lnTo>
-                    <a:pt x="383908" y="572513"/>
-                  </a:lnTo>
-                  <a:lnTo>
-                    <a:pt x="306274" y="580600"/>
-                  </a:lnTo>
-                  <a:lnTo>
-                    <a:pt x="228640" y="588454"/>
-                  </a:lnTo>
-                  <a:lnTo>
-                    <a:pt x="151006" y="596082"/>
-                  </a:lnTo>
-                  <a:lnTo>
-                    <a:pt x="73372" y="603489"/>
-                  </a:lnTo>
-                  <a:lnTo>
-                    <a:pt x="0" y="610288"/>
+                    <a:pt x="3256368" y="23473"/>
+                  </a:lnTo>
+                  <a:lnTo>
+                    <a:pt x="3178734" y="46268"/>
+                  </a:lnTo>
+                  <a:lnTo>
+                    <a:pt x="3101100" y="68406"/>
+                  </a:lnTo>
+                  <a:lnTo>
+                    <a:pt x="3023466" y="89905"/>
+                  </a:lnTo>
+                  <a:lnTo>
+                    <a:pt x="2945832" y="110783"/>
+                  </a:lnTo>
+                  <a:lnTo>
+                    <a:pt x="2868198" y="131058"/>
+                  </a:lnTo>
+                  <a:lnTo>
+                    <a:pt x="2790564" y="150749"/>
+                  </a:lnTo>
+                  <a:lnTo>
+                    <a:pt x="2712930" y="169871"/>
+                  </a:lnTo>
+                  <a:lnTo>
+                    <a:pt x="2635295" y="188441"/>
+                  </a:lnTo>
+                  <a:lnTo>
+                    <a:pt x="2557661" y="206476"/>
+                  </a:lnTo>
+                  <a:lnTo>
+                    <a:pt x="2480027" y="223990"/>
+                  </a:lnTo>
+                  <a:lnTo>
+                    <a:pt x="2402393" y="240998"/>
+                  </a:lnTo>
+                  <a:lnTo>
+                    <a:pt x="2324759" y="257516"/>
+                  </a:lnTo>
+                  <a:lnTo>
+                    <a:pt x="2247125" y="273556"/>
+                  </a:lnTo>
+                  <a:lnTo>
+                    <a:pt x="2169491" y="289134"/>
+                  </a:lnTo>
+                  <a:lnTo>
+                    <a:pt x="2091857" y="304262"/>
+                  </a:lnTo>
+                  <a:lnTo>
+                    <a:pt x="2014223" y="318954"/>
+                  </a:lnTo>
+                  <a:lnTo>
+                    <a:pt x="1936589" y="333222"/>
+                  </a:lnTo>
+                  <a:lnTo>
+                    <a:pt x="1858955" y="347077"/>
+                  </a:lnTo>
+                  <a:lnTo>
+                    <a:pt x="1781321" y="360533"/>
+                  </a:lnTo>
+                  <a:lnTo>
+                    <a:pt x="1703687" y="373601"/>
+                  </a:lnTo>
+                  <a:lnTo>
+                    <a:pt x="1626053" y="386291"/>
+                  </a:lnTo>
+                  <a:lnTo>
+                    <a:pt x="1548419" y="398615"/>
+                  </a:lnTo>
+                  <a:lnTo>
+                    <a:pt x="1470785" y="410584"/>
+                  </a:lnTo>
+                  <a:lnTo>
+                    <a:pt x="1393151" y="422207"/>
+                  </a:lnTo>
+                  <a:lnTo>
+                    <a:pt x="1315517" y="433494"/>
+                  </a:lnTo>
+                  <a:lnTo>
+                    <a:pt x="1237883" y="444456"/>
+                  </a:lnTo>
+                  <a:lnTo>
+                    <a:pt x="1160249" y="455102"/>
+                  </a:lnTo>
+                  <a:lnTo>
+                    <a:pt x="1082615" y="465440"/>
+                  </a:lnTo>
+                  <a:lnTo>
+                    <a:pt x="1004981" y="475480"/>
+                  </a:lnTo>
+                  <a:lnTo>
+                    <a:pt x="927346" y="485230"/>
+                  </a:lnTo>
+                  <a:lnTo>
+                    <a:pt x="849712" y="494698"/>
+                  </a:lnTo>
+                  <a:lnTo>
+                    <a:pt x="772078" y="503894"/>
+                  </a:lnTo>
+                  <a:lnTo>
+                    <a:pt x="694444" y="512824"/>
+                  </a:lnTo>
+                  <a:lnTo>
+                    <a:pt x="616810" y="521496"/>
+                  </a:lnTo>
+                  <a:lnTo>
+                    <a:pt x="539176" y="529918"/>
+                  </a:lnTo>
+                  <a:lnTo>
+                    <a:pt x="461542" y="538097"/>
+                  </a:lnTo>
+                  <a:lnTo>
+                    <a:pt x="383908" y="546040"/>
+                  </a:lnTo>
+                  <a:lnTo>
+                    <a:pt x="306274" y="553753"/>
+                  </a:lnTo>
+                  <a:lnTo>
+                    <a:pt x="228640" y="561244"/>
+                  </a:lnTo>
+                  <a:lnTo>
+                    <a:pt x="151006" y="568519"/>
+                  </a:lnTo>
+                  <a:lnTo>
+                    <a:pt x="73372" y="575584"/>
+                  </a:lnTo>
+                  <a:lnTo>
+                    <a:pt x="0" y="582068"/>
                   </a:lnTo>
                 </a:path>
               </a:pathLst>
@@ -4034,261 +4034,261 @@
           </p:nvSpPr>
           <p:spPr>
             <a:xfrm>
-              <a:off x="1854431" y="1896563"/>
-              <a:ext cx="6334059" cy="3576366"/>
+              <a:off x="1854431" y="2073503"/>
+              <a:ext cx="6334059" cy="3410996"/>
             </a:xfrm>
             <a:custGeom>
               <a:avLst/>
               <a:pathLst>
-                <a:path w="6334059" h="3576366">
+                <a:path w="6334059" h="3410996">
                   <a:moveTo>
                     <a:pt x="0" y="0"/>
                   </a:moveTo>
                   <a:lnTo>
-                    <a:pt x="45701" y="101508"/>
-                  </a:lnTo>
-                  <a:lnTo>
-                    <a:pt x="123335" y="265957"/>
-                  </a:lnTo>
-                  <a:lnTo>
-                    <a:pt x="200969" y="422791"/>
-                  </a:lnTo>
-                  <a:lnTo>
-                    <a:pt x="278603" y="572362"/>
-                  </a:lnTo>
-                  <a:lnTo>
-                    <a:pt x="356237" y="715006"/>
-                  </a:lnTo>
-                  <a:lnTo>
-                    <a:pt x="433871" y="851045"/>
-                  </a:lnTo>
-                  <a:lnTo>
-                    <a:pt x="511505" y="980784"/>
-                  </a:lnTo>
-                  <a:lnTo>
-                    <a:pt x="589139" y="1104515"/>
-                  </a:lnTo>
-                  <a:lnTo>
-                    <a:pt x="666773" y="1222516"/>
-                  </a:lnTo>
-                  <a:lnTo>
-                    <a:pt x="744407" y="1335052"/>
-                  </a:lnTo>
-                  <a:lnTo>
-                    <a:pt x="822041" y="1442377"/>
-                  </a:lnTo>
-                  <a:lnTo>
-                    <a:pt x="899676" y="1544732"/>
-                  </a:lnTo>
-                  <a:lnTo>
-                    <a:pt x="977310" y="1642347"/>
-                  </a:lnTo>
-                  <a:lnTo>
-                    <a:pt x="1054944" y="1735442"/>
-                  </a:lnTo>
-                  <a:lnTo>
-                    <a:pt x="1132578" y="1824225"/>
-                  </a:lnTo>
-                  <a:lnTo>
-                    <a:pt x="1210212" y="1908897"/>
-                  </a:lnTo>
-                  <a:lnTo>
-                    <a:pt x="1287846" y="1989648"/>
-                  </a:lnTo>
-                  <a:lnTo>
-                    <a:pt x="1365480" y="2066660"/>
-                  </a:lnTo>
-                  <a:lnTo>
-                    <a:pt x="1443114" y="2140105"/>
-                  </a:lnTo>
-                  <a:lnTo>
-                    <a:pt x="1520748" y="2210149"/>
-                  </a:lnTo>
-                  <a:lnTo>
-                    <a:pt x="1598382" y="2276949"/>
-                  </a:lnTo>
-                  <a:lnTo>
-                    <a:pt x="1676016" y="2340656"/>
-                  </a:lnTo>
-                  <a:lnTo>
-                    <a:pt x="1753650" y="2401413"/>
-                  </a:lnTo>
-                  <a:lnTo>
-                    <a:pt x="1831284" y="2459356"/>
-                  </a:lnTo>
-                  <a:lnTo>
-                    <a:pt x="1908918" y="2514616"/>
-                  </a:lnTo>
-                  <a:lnTo>
-                    <a:pt x="1986552" y="2567316"/>
-                  </a:lnTo>
-                  <a:lnTo>
-                    <a:pt x="2064186" y="2617577"/>
-                  </a:lnTo>
-                  <a:lnTo>
-                    <a:pt x="2141820" y="2665510"/>
-                  </a:lnTo>
-                  <a:lnTo>
-                    <a:pt x="2219454" y="2711223"/>
-                  </a:lnTo>
-                  <a:lnTo>
-                    <a:pt x="2297088" y="2754819"/>
-                  </a:lnTo>
-                  <a:lnTo>
-                    <a:pt x="2374722" y="2796396"/>
-                  </a:lnTo>
-                  <a:lnTo>
-                    <a:pt x="2452356" y="2836048"/>
-                  </a:lnTo>
-                  <a:lnTo>
-                    <a:pt x="2529990" y="2873863"/>
-                  </a:lnTo>
-                  <a:lnTo>
-                    <a:pt x="2607625" y="2909928"/>
-                  </a:lnTo>
-                  <a:lnTo>
-                    <a:pt x="2685259" y="2944322"/>
-                  </a:lnTo>
-                  <a:lnTo>
-                    <a:pt x="2762893" y="2977124"/>
-                  </a:lnTo>
-                  <a:lnTo>
-                    <a:pt x="2840527" y="3008406"/>
-                  </a:lnTo>
-                  <a:lnTo>
-                    <a:pt x="2918161" y="3038240"/>
-                  </a:lnTo>
-                  <a:lnTo>
-                    <a:pt x="2995795" y="3066693"/>
-                  </a:lnTo>
-                  <a:lnTo>
-                    <a:pt x="3073429" y="3093827"/>
-                  </a:lnTo>
-                  <a:lnTo>
-                    <a:pt x="3151063" y="3119705"/>
-                  </a:lnTo>
-                  <a:lnTo>
-                    <a:pt x="3228697" y="3144385"/>
-                  </a:lnTo>
-                  <a:lnTo>
-                    <a:pt x="3306331" y="3167922"/>
-                  </a:lnTo>
-                  <a:lnTo>
-                    <a:pt x="3383965" y="3190369"/>
-                  </a:lnTo>
-                  <a:lnTo>
-                    <a:pt x="3461599" y="3211776"/>
-                  </a:lnTo>
-                  <a:lnTo>
-                    <a:pt x="3539233" y="3232192"/>
-                  </a:lnTo>
-                  <a:lnTo>
-                    <a:pt x="3616867" y="3251663"/>
-                  </a:lnTo>
-                  <a:lnTo>
-                    <a:pt x="3694501" y="3270232"/>
-                  </a:lnTo>
-                  <a:lnTo>
-                    <a:pt x="3772135" y="3287941"/>
-                  </a:lnTo>
-                  <a:lnTo>
-                    <a:pt x="3849769" y="3304830"/>
-                  </a:lnTo>
-                  <a:lnTo>
-                    <a:pt x="3927403" y="3320937"/>
-                  </a:lnTo>
-                  <a:lnTo>
-                    <a:pt x="4005037" y="3336298"/>
-                  </a:lnTo>
-                  <a:lnTo>
-                    <a:pt x="4082671" y="3350947"/>
-                  </a:lnTo>
-                  <a:lnTo>
-                    <a:pt x="4160305" y="3364919"/>
-                  </a:lnTo>
-                  <a:lnTo>
-                    <a:pt x="4237939" y="3378243"/>
-                  </a:lnTo>
-                  <a:lnTo>
-                    <a:pt x="4315574" y="3390950"/>
-                  </a:lnTo>
-                  <a:lnTo>
-                    <a:pt x="4393208" y="3403069"/>
-                  </a:lnTo>
-                  <a:lnTo>
-                    <a:pt x="4470842" y="3414626"/>
-                  </a:lnTo>
-                  <a:lnTo>
-                    <a:pt x="4548476" y="3425649"/>
-                  </a:lnTo>
-                  <a:lnTo>
-                    <a:pt x="4626110" y="3436160"/>
-                  </a:lnTo>
-                  <a:lnTo>
-                    <a:pt x="4703744" y="3446186"/>
-                  </a:lnTo>
-                  <a:lnTo>
-                    <a:pt x="4781378" y="3455746"/>
-                  </a:lnTo>
-                  <a:lnTo>
-                    <a:pt x="4859012" y="3464864"/>
-                  </a:lnTo>
-                  <a:lnTo>
-                    <a:pt x="4936646" y="3473560"/>
-                  </a:lnTo>
-                  <a:lnTo>
-                    <a:pt x="5014280" y="3481853"/>
-                  </a:lnTo>
-                  <a:lnTo>
-                    <a:pt x="5091914" y="3489763"/>
-                  </a:lnTo>
-                  <a:lnTo>
-                    <a:pt x="5169548" y="3497305"/>
-                  </a:lnTo>
-                  <a:lnTo>
-                    <a:pt x="5247182" y="3504499"/>
-                  </a:lnTo>
-                  <a:lnTo>
-                    <a:pt x="5324816" y="3511359"/>
-                  </a:lnTo>
-                  <a:lnTo>
-                    <a:pt x="5402450" y="3517902"/>
-                  </a:lnTo>
-                  <a:lnTo>
-                    <a:pt x="5480084" y="3524142"/>
-                  </a:lnTo>
-                  <a:lnTo>
-                    <a:pt x="5557718" y="3530092"/>
-                  </a:lnTo>
-                  <a:lnTo>
-                    <a:pt x="5635352" y="3535768"/>
-                  </a:lnTo>
-                  <a:lnTo>
-                    <a:pt x="5712986" y="3541180"/>
-                  </a:lnTo>
-                  <a:lnTo>
-                    <a:pt x="5790620" y="3546342"/>
-                  </a:lnTo>
-                  <a:lnTo>
-                    <a:pt x="5868254" y="3551264"/>
-                  </a:lnTo>
-                  <a:lnTo>
-                    <a:pt x="5945888" y="3555959"/>
-                  </a:lnTo>
-                  <a:lnTo>
-                    <a:pt x="6023522" y="3560437"/>
-                  </a:lnTo>
-                  <a:lnTo>
-                    <a:pt x="6101157" y="3564707"/>
-                  </a:lnTo>
-                  <a:lnTo>
-                    <a:pt x="6178791" y="3568779"/>
-                  </a:lnTo>
-                  <a:lnTo>
-                    <a:pt x="6256425" y="3572662"/>
-                  </a:lnTo>
-                  <a:lnTo>
-                    <a:pt x="6334059" y="3576366"/>
+                    <a:pt x="45701" y="96814"/>
+                  </a:lnTo>
+                  <a:lnTo>
+                    <a:pt x="123335" y="253659"/>
+                  </a:lnTo>
+                  <a:lnTo>
+                    <a:pt x="200969" y="403241"/>
+                  </a:lnTo>
+                  <a:lnTo>
+                    <a:pt x="278603" y="545896"/>
+                  </a:lnTo>
+                  <a:lnTo>
+                    <a:pt x="356237" y="681945"/>
+                  </a:lnTo>
+                  <a:lnTo>
+                    <a:pt x="433871" y="811693"/>
+                  </a:lnTo>
+                  <a:lnTo>
+                    <a:pt x="511505" y="935433"/>
+                  </a:lnTo>
+                  <a:lnTo>
+                    <a:pt x="589139" y="1053442"/>
+                  </a:lnTo>
+                  <a:lnTo>
+                    <a:pt x="666773" y="1165987"/>
+                  </a:lnTo>
+                  <a:lnTo>
+                    <a:pt x="744407" y="1273320"/>
+                  </a:lnTo>
+                  <a:lnTo>
+                    <a:pt x="822041" y="1375682"/>
+                  </a:lnTo>
+                  <a:lnTo>
+                    <a:pt x="899676" y="1473304"/>
+                  </a:lnTo>
+                  <a:lnTo>
+                    <a:pt x="977310" y="1566406"/>
+                  </a:lnTo>
+                  <a:lnTo>
+                    <a:pt x="1054944" y="1655196"/>
+                  </a:lnTo>
+                  <a:lnTo>
+                    <a:pt x="1132578" y="1739874"/>
+                  </a:lnTo>
+                  <a:lnTo>
+                    <a:pt x="1210212" y="1820631"/>
+                  </a:lnTo>
+                  <a:lnTo>
+                    <a:pt x="1287846" y="1897648"/>
+                  </a:lnTo>
+                  <a:lnTo>
+                    <a:pt x="1365480" y="1971098"/>
+                  </a:lnTo>
+                  <a:lnTo>
+                    <a:pt x="1443114" y="2041147"/>
+                  </a:lnTo>
+                  <a:lnTo>
+                    <a:pt x="1520748" y="2107952"/>
+                  </a:lnTo>
+                  <a:lnTo>
+                    <a:pt x="1598382" y="2171664"/>
+                  </a:lnTo>
+                  <a:lnTo>
+                    <a:pt x="1676016" y="2232425"/>
+                  </a:lnTo>
+                  <a:lnTo>
+                    <a:pt x="1753650" y="2290372"/>
+                  </a:lnTo>
+                  <a:lnTo>
+                    <a:pt x="1831284" y="2345636"/>
+                  </a:lnTo>
+                  <a:lnTo>
+                    <a:pt x="1908918" y="2398341"/>
+                  </a:lnTo>
+                  <a:lnTo>
+                    <a:pt x="1986552" y="2448605"/>
+                  </a:lnTo>
+                  <a:lnTo>
+                    <a:pt x="2064186" y="2496541"/>
+                  </a:lnTo>
+                  <a:lnTo>
+                    <a:pt x="2141820" y="2542257"/>
+                  </a:lnTo>
+                  <a:lnTo>
+                    <a:pt x="2219454" y="2585857"/>
+                  </a:lnTo>
+                  <a:lnTo>
+                    <a:pt x="2297088" y="2627437"/>
+                  </a:lnTo>
+                  <a:lnTo>
+                    <a:pt x="2374722" y="2667092"/>
+                  </a:lnTo>
+                  <a:lnTo>
+                    <a:pt x="2452356" y="2704910"/>
+                  </a:lnTo>
+                  <a:lnTo>
+                    <a:pt x="2529990" y="2740977"/>
+                  </a:lnTo>
+                  <a:lnTo>
+                    <a:pt x="2607625" y="2775374"/>
+                  </a:lnTo>
+                  <a:lnTo>
+                    <a:pt x="2685259" y="2808178"/>
+                  </a:lnTo>
+                  <a:lnTo>
+                    <a:pt x="2762893" y="2839463"/>
+                  </a:lnTo>
+                  <a:lnTo>
+                    <a:pt x="2840527" y="2869299"/>
+                  </a:lnTo>
+                  <a:lnTo>
+                    <a:pt x="2918161" y="2897753"/>
+                  </a:lnTo>
+                  <a:lnTo>
+                    <a:pt x="2995795" y="2924890"/>
+                  </a:lnTo>
+                  <a:lnTo>
+                    <a:pt x="3073429" y="2950770"/>
+                  </a:lnTo>
+                  <a:lnTo>
+                    <a:pt x="3151063" y="2975451"/>
+                  </a:lnTo>
+                  <a:lnTo>
+                    <a:pt x="3228697" y="2998990"/>
+                  </a:lnTo>
+                  <a:lnTo>
+                    <a:pt x="3306331" y="3021439"/>
+                  </a:lnTo>
+                  <a:lnTo>
+                    <a:pt x="3383965" y="3042847"/>
+                  </a:lnTo>
+                  <a:lnTo>
+                    <a:pt x="3461599" y="3063265"/>
+                  </a:lnTo>
+                  <a:lnTo>
+                    <a:pt x="3539233" y="3082737"/>
+                  </a:lnTo>
+                  <a:lnTo>
+                    <a:pt x="3616867" y="3101307"/>
+                  </a:lnTo>
+                  <a:lnTo>
+                    <a:pt x="3694501" y="3119018"/>
+                  </a:lnTo>
+                  <a:lnTo>
+                    <a:pt x="3772135" y="3135908"/>
+                  </a:lnTo>
+                  <a:lnTo>
+                    <a:pt x="3849769" y="3152016"/>
+                  </a:lnTo>
+                  <a:lnTo>
+                    <a:pt x="3927403" y="3167378"/>
+                  </a:lnTo>
+                  <a:lnTo>
+                    <a:pt x="4005037" y="3182029"/>
+                  </a:lnTo>
+                  <a:lnTo>
+                    <a:pt x="4082671" y="3196001"/>
+                  </a:lnTo>
+                  <a:lnTo>
+                    <a:pt x="4160305" y="3209326"/>
+                  </a:lnTo>
+                  <a:lnTo>
+                    <a:pt x="4237939" y="3222034"/>
+                  </a:lnTo>
+                  <a:lnTo>
+                    <a:pt x="4315574" y="3234154"/>
+                  </a:lnTo>
+                  <a:lnTo>
+                    <a:pt x="4393208" y="3245712"/>
+                  </a:lnTo>
+                  <a:lnTo>
+                    <a:pt x="4470842" y="3256735"/>
+                  </a:lnTo>
+                  <a:lnTo>
+                    <a:pt x="4548476" y="3267248"/>
+                  </a:lnTo>
+                  <a:lnTo>
+                    <a:pt x="4626110" y="3277274"/>
+                  </a:lnTo>
+                  <a:lnTo>
+                    <a:pt x="4703744" y="3286835"/>
+                  </a:lnTo>
+                  <a:lnTo>
+                    <a:pt x="4781378" y="3295954"/>
+                  </a:lnTo>
+                  <a:lnTo>
+                    <a:pt x="4859012" y="3304650"/>
+                  </a:lnTo>
+                  <a:lnTo>
+                    <a:pt x="4936646" y="3312944"/>
+                  </a:lnTo>
+                  <a:lnTo>
+                    <a:pt x="5014280" y="3320854"/>
+                  </a:lnTo>
+                  <a:lnTo>
+                    <a:pt x="5091914" y="3328397"/>
+                  </a:lnTo>
+                  <a:lnTo>
+                    <a:pt x="5169548" y="3335591"/>
+                  </a:lnTo>
+                  <a:lnTo>
+                    <a:pt x="5247182" y="3342452"/>
+                  </a:lnTo>
+                  <a:lnTo>
+                    <a:pt x="5324816" y="3348995"/>
+                  </a:lnTo>
+                  <a:lnTo>
+                    <a:pt x="5402450" y="3355235"/>
+                  </a:lnTo>
+                  <a:lnTo>
+                    <a:pt x="5480084" y="3361187"/>
+                  </a:lnTo>
+                  <a:lnTo>
+                    <a:pt x="5557718" y="3366862"/>
+                  </a:lnTo>
+                  <a:lnTo>
+                    <a:pt x="5635352" y="3372275"/>
+                  </a:lnTo>
+                  <a:lnTo>
+                    <a:pt x="5712986" y="3377437"/>
+                  </a:lnTo>
+                  <a:lnTo>
+                    <a:pt x="5790620" y="3382360"/>
+                  </a:lnTo>
+                  <a:lnTo>
+                    <a:pt x="5868254" y="3387055"/>
+                  </a:lnTo>
+                  <a:lnTo>
+                    <a:pt x="5945888" y="3391533"/>
+                  </a:lnTo>
+                  <a:lnTo>
+                    <a:pt x="6023522" y="3395803"/>
+                  </a:lnTo>
+                  <a:lnTo>
+                    <a:pt x="6101157" y="3399876"/>
+                  </a:lnTo>
+                  <a:lnTo>
+                    <a:pt x="6178791" y="3403760"/>
+                  </a:lnTo>
+                  <a:lnTo>
+                    <a:pt x="6256425" y="3407464"/>
+                  </a:lnTo>
+                  <a:lnTo>
+                    <a:pt x="6334059" y="3410996"/>
                   </a:lnTo>
                 </a:path>
               </a:pathLst>
@@ -4317,7 +4317,7 @@
           </p:nvSpPr>
           <p:spPr>
             <a:xfrm>
-              <a:off x="817517" y="4679530"/>
+              <a:off x="817517" y="4727786"/>
               <a:ext cx="7799693" cy="0"/>
             </a:xfrm>
             <a:custGeom>
@@ -4360,15 +4360,15 @@
           </p:nvSpPr>
           <p:spPr>
             <a:xfrm>
-              <a:off x="4203673" y="1896563"/>
-              <a:ext cx="0" cy="3826579"/>
+              <a:off x="4203673" y="2073503"/>
+              <a:ext cx="0" cy="3649639"/>
             </a:xfrm>
             <a:custGeom>
               <a:avLst/>
               <a:pathLst>
-                <a:path w="0" h="3826579">
+                <a:path w="0" h="3649639">
                   <a:moveTo>
-                    <a:pt x="0" y="3826579"/>
+                    <a:pt x="0" y="3649639"/>
                   </a:moveTo>
                   <a:lnTo>
                     <a:pt x="0" y="0"/>
@@ -4403,7 +4403,7 @@
           </p:nvSpPr>
           <p:spPr>
             <a:xfrm>
-              <a:off x="692708" y="5509156"/>
+              <a:off x="692708" y="5517199"/>
               <a:ext cx="62179" cy="80101"/>
             </a:xfrm>
             <a:prstGeom prst="rect">
@@ -4449,7 +4449,7 @@
           </p:nvSpPr>
           <p:spPr>
             <a:xfrm>
-              <a:off x="692708" y="4639479"/>
+              <a:off x="692708" y="4687735"/>
               <a:ext cx="62179" cy="80101"/>
             </a:xfrm>
             <a:prstGeom prst="rect">
@@ -4495,7 +4495,7 @@
           </p:nvSpPr>
           <p:spPr>
             <a:xfrm>
-              <a:off x="692708" y="3769802"/>
+              <a:off x="692708" y="3858272"/>
               <a:ext cx="62179" cy="80101"/>
             </a:xfrm>
             <a:prstGeom prst="rect">
@@ -4541,7 +4541,7 @@
           </p:nvSpPr>
           <p:spPr>
             <a:xfrm>
-              <a:off x="692708" y="2900125"/>
+              <a:off x="692708" y="3028808"/>
               <a:ext cx="62179" cy="80101"/>
             </a:xfrm>
             <a:prstGeom prst="rect">
@@ -4587,7 +4587,7 @@
           </p:nvSpPr>
           <p:spPr>
             <a:xfrm>
-              <a:off x="692708" y="2030448"/>
+              <a:off x="692708" y="2199345"/>
               <a:ext cx="62179" cy="80101"/>
             </a:xfrm>
             <a:prstGeom prst="rect">
@@ -4863,7 +4863,7 @@
           </p:nvSpPr>
           <p:spPr>
             <a:xfrm rot="-5400000">
-              <a:off x="68446" y="3759743"/>
+              <a:off x="68446" y="3848213"/>
               <a:ext cx="1016904" cy="100218"/>
             </a:xfrm>
             <a:prstGeom prst="rect">
@@ -4904,6 +4904,52 @@
         <p:sp>
           <p:nvSpPr>
             <p:cNvPr id="38" name="tx38"/>
+            <p:cNvSpPr/>
+            <p:nvPr/>
+          </p:nvSpPr>
+          <p:spPr>
+            <a:xfrm>
+              <a:off x="817517" y="1896563"/>
+              <a:ext cx="4166463" cy="82021"/>
+            </a:xfrm>
+            <a:prstGeom prst="rect">
+              <a:avLst/>
+            </a:prstGeom>
+            <a:noFill/>
+          </p:spPr>
+          <p:txBody>
+            <a:bodyPr lIns="0" rIns="0" tIns="0" bIns="0" anchorCtr="1" anchor="ctr" wrap="none"/>
+            <a:lstStyle/>
+            <a:p>
+              <a:pPr algn="l" marL="0" marR="0" indent="0">
+                <a:lnSpc>
+                  <a:spcPts val="900"/>
+                </a:lnSpc>
+                <a:spcBef>
+                  <a:spcPts val="0"/>
+                </a:spcBef>
+                <a:spcAft>
+                  <a:spcPts val="0"/>
+                </a:spcAft>
+              </a:pPr>
+              <a:r>
+                <a:rPr sz="900">
+                  <a:solidFill>
+                    <a:srgbClr val="404040">
+                      <a:alpha val="100000"/>
+                    </a:srgbClr>
+                  </a:solidFill>
+                  <a:latin typeface="Helvetica"/>
+                  <a:cs typeface="Helvetica"/>
+                </a:rPr>
+                <a:t>subHR = 0.58 (95% CI 0.24-1.40), p = 0.226   (per 0.1-unit increase in eGFR ratio)</a:t>
+              </a:r>
+            </a:p>
+          </p:txBody>
+        </p:sp>
+        <p:sp>
+          <p:nvSpPr>
+            <p:cNvPr id="39" name="tx39"/>
             <p:cNvSpPr/>
             <p:nvPr/>
           </p:nvSpPr>

--- a/docs/plots/carbo/jx_carbo_linsubhr_ratio_hosp6.pptx
+++ b/docs/plots/carbo/jx_carbo_linsubhr_ratio_hosp6.pptx
@@ -2271,26 +2271,26 @@
           </p:nvSpPr>
           <p:spPr>
             <a:xfrm>
-              <a:off x="817517" y="5142518"/>
-              <a:ext cx="7799693" cy="0"/>
+              <a:off x="915645" y="5071743"/>
+              <a:ext cx="7682587" cy="0"/>
             </a:xfrm>
             <a:custGeom>
               <a:avLst/>
               <a:pathLst>
-                <a:path w="7799693" h="0">
+                <a:path w="7682587" h="0">
                   <a:moveTo>
                     <a:pt x="0" y="0"/>
                   </a:moveTo>
                   <a:lnTo>
-                    <a:pt x="7799693" y="0"/>
-                  </a:lnTo>
-                  <a:lnTo>
-                    <a:pt x="7799693" y="0"/>
+                    <a:pt x="7682587" y="0"/>
+                  </a:lnTo>
+                  <a:lnTo>
+                    <a:pt x="7682587" y="0"/>
                   </a:lnTo>
                 </a:path>
               </a:pathLst>
             </a:custGeom>
-            <a:ln w="6775" cap="flat">
+            <a:ln w="8623" cap="flat">
               <a:solidFill>
                 <a:srgbClr val="EBEBEB">
                   <a:alpha val="100000"/>
@@ -2314,26 +2314,26 @@
           </p:nvSpPr>
           <p:spPr>
             <a:xfrm>
-              <a:off x="817517" y="4313054"/>
-              <a:ext cx="7799693" cy="0"/>
+              <a:off x="915645" y="4298074"/>
+              <a:ext cx="7682587" cy="0"/>
             </a:xfrm>
             <a:custGeom>
               <a:avLst/>
               <a:pathLst>
-                <a:path w="7799693" h="0">
+                <a:path w="7682587" h="0">
                   <a:moveTo>
                     <a:pt x="0" y="0"/>
                   </a:moveTo>
                   <a:lnTo>
-                    <a:pt x="7799693" y="0"/>
-                  </a:lnTo>
-                  <a:lnTo>
-                    <a:pt x="7799693" y="0"/>
+                    <a:pt x="7682587" y="0"/>
+                  </a:lnTo>
+                  <a:lnTo>
+                    <a:pt x="7682587" y="0"/>
                   </a:lnTo>
                 </a:path>
               </a:pathLst>
             </a:custGeom>
-            <a:ln w="6775" cap="flat">
+            <a:ln w="8623" cap="flat">
               <a:solidFill>
                 <a:srgbClr val="EBEBEB">
                   <a:alpha val="100000"/>
@@ -2357,26 +2357,26 @@
           </p:nvSpPr>
           <p:spPr>
             <a:xfrm>
-              <a:off x="817517" y="3483591"/>
-              <a:ext cx="7799693" cy="0"/>
+              <a:off x="915645" y="3524405"/>
+              <a:ext cx="7682587" cy="0"/>
             </a:xfrm>
             <a:custGeom>
               <a:avLst/>
               <a:pathLst>
-                <a:path w="7799693" h="0">
+                <a:path w="7682587" h="0">
                   <a:moveTo>
                     <a:pt x="0" y="0"/>
                   </a:moveTo>
                   <a:lnTo>
-                    <a:pt x="7799693" y="0"/>
-                  </a:lnTo>
-                  <a:lnTo>
-                    <a:pt x="7799693" y="0"/>
+                    <a:pt x="7682587" y="0"/>
+                  </a:lnTo>
+                  <a:lnTo>
+                    <a:pt x="7682587" y="0"/>
                   </a:lnTo>
                 </a:path>
               </a:pathLst>
             </a:custGeom>
-            <a:ln w="6775" cap="flat">
+            <a:ln w="8623" cap="flat">
               <a:solidFill>
                 <a:srgbClr val="EBEBEB">
                   <a:alpha val="100000"/>
@@ -2400,26 +2400,26 @@
           </p:nvSpPr>
           <p:spPr>
             <a:xfrm>
-              <a:off x="817517" y="2654127"/>
-              <a:ext cx="7799693" cy="0"/>
+              <a:off x="915645" y="2750737"/>
+              <a:ext cx="7682587" cy="0"/>
             </a:xfrm>
             <a:custGeom>
               <a:avLst/>
               <a:pathLst>
-                <a:path w="7799693" h="0">
+                <a:path w="7682587" h="0">
                   <a:moveTo>
                     <a:pt x="0" y="0"/>
                   </a:moveTo>
                   <a:lnTo>
-                    <a:pt x="7799693" y="0"/>
-                  </a:lnTo>
-                  <a:lnTo>
-                    <a:pt x="7799693" y="0"/>
+                    <a:pt x="7682587" y="0"/>
+                  </a:lnTo>
+                  <a:lnTo>
+                    <a:pt x="7682587" y="0"/>
                   </a:lnTo>
                 </a:path>
               </a:pathLst>
             </a:custGeom>
-            <a:ln w="6775" cap="flat">
+            <a:ln w="8623" cap="flat">
               <a:solidFill>
                 <a:srgbClr val="EBEBEB">
                   <a:alpha val="100000"/>
@@ -2443,15 +2443,15 @@
           </p:nvSpPr>
           <p:spPr>
             <a:xfrm>
-              <a:off x="1615213" y="2073503"/>
-              <a:ext cx="0" cy="3649639"/>
+              <a:off x="1701364" y="2209169"/>
+              <a:ext cx="0" cy="3404141"/>
             </a:xfrm>
             <a:custGeom>
               <a:avLst/>
               <a:pathLst>
-                <a:path w="0" h="3649639">
+                <a:path w="0" h="3404141">
                   <a:moveTo>
-                    <a:pt x="0" y="3649639"/>
+                    <a:pt x="0" y="3404141"/>
                   </a:moveTo>
                   <a:lnTo>
                     <a:pt x="0" y="0"/>
@@ -2462,7 +2462,7 @@
                 </a:path>
               </a:pathLst>
             </a:custGeom>
-            <a:ln w="6775" cap="flat">
+            <a:ln w="8623" cap="flat">
               <a:solidFill>
                 <a:srgbClr val="EBEBEB">
                   <a:alpha val="100000"/>
@@ -2486,15 +2486,15 @@
           </p:nvSpPr>
           <p:spPr>
             <a:xfrm>
-              <a:off x="3387871" y="2073503"/>
-              <a:ext cx="0" cy="3649639"/>
+              <a:off x="3447406" y="2209169"/>
+              <a:ext cx="0" cy="3404141"/>
             </a:xfrm>
             <a:custGeom>
               <a:avLst/>
               <a:pathLst>
-                <a:path w="0" h="3649639">
+                <a:path w="0" h="3404141">
                   <a:moveTo>
-                    <a:pt x="0" y="3649639"/>
+                    <a:pt x="0" y="3404141"/>
                   </a:moveTo>
                   <a:lnTo>
                     <a:pt x="0" y="0"/>
@@ -2505,7 +2505,7 @@
                 </a:path>
               </a:pathLst>
             </a:custGeom>
-            <a:ln w="6775" cap="flat">
+            <a:ln w="8623" cap="flat">
               <a:solidFill>
                 <a:srgbClr val="EBEBEB">
                   <a:alpha val="100000"/>
@@ -2529,15 +2529,15 @@
           </p:nvSpPr>
           <p:spPr>
             <a:xfrm>
-              <a:off x="5160528" y="2073503"/>
-              <a:ext cx="0" cy="3649639"/>
+              <a:off x="5193449" y="2209169"/>
+              <a:ext cx="0" cy="3404141"/>
             </a:xfrm>
             <a:custGeom>
               <a:avLst/>
               <a:pathLst>
-                <a:path w="0" h="3649639">
+                <a:path w="0" h="3404141">
                   <a:moveTo>
-                    <a:pt x="0" y="3649639"/>
+                    <a:pt x="0" y="3404141"/>
                   </a:moveTo>
                   <a:lnTo>
                     <a:pt x="0" y="0"/>
@@ -2548,7 +2548,7 @@
                 </a:path>
               </a:pathLst>
             </a:custGeom>
-            <a:ln w="6775" cap="flat">
+            <a:ln w="8623" cap="flat">
               <a:solidFill>
                 <a:srgbClr val="EBEBEB">
                   <a:alpha val="100000"/>
@@ -2572,15 +2572,15 @@
           </p:nvSpPr>
           <p:spPr>
             <a:xfrm>
-              <a:off x="6933186" y="2073503"/>
-              <a:ext cx="0" cy="3649639"/>
+              <a:off x="6939491" y="2209169"/>
+              <a:ext cx="0" cy="3404141"/>
             </a:xfrm>
             <a:custGeom>
               <a:avLst/>
               <a:pathLst>
-                <a:path w="0" h="3649639">
+                <a:path w="0" h="3404141">
                   <a:moveTo>
-                    <a:pt x="0" y="3649639"/>
+                    <a:pt x="0" y="3404141"/>
                   </a:moveTo>
                   <a:lnTo>
                     <a:pt x="0" y="0"/>
@@ -2591,7 +2591,7 @@
                 </a:path>
               </a:pathLst>
             </a:custGeom>
-            <a:ln w="6775" cap="flat">
+            <a:ln w="8623" cap="flat">
               <a:solidFill>
                 <a:srgbClr val="EBEBEB">
                   <a:alpha val="100000"/>
@@ -2615,26 +2615,26 @@
           </p:nvSpPr>
           <p:spPr>
             <a:xfrm>
-              <a:off x="817517" y="5557249"/>
-              <a:ext cx="7799693" cy="0"/>
+              <a:off x="915645" y="5458577"/>
+              <a:ext cx="7682587" cy="0"/>
             </a:xfrm>
             <a:custGeom>
               <a:avLst/>
               <a:pathLst>
-                <a:path w="7799693" h="0">
+                <a:path w="7682587" h="0">
                   <a:moveTo>
                     <a:pt x="0" y="0"/>
                   </a:moveTo>
                   <a:lnTo>
-                    <a:pt x="7799693" y="0"/>
-                  </a:lnTo>
-                  <a:lnTo>
-                    <a:pt x="7799693" y="0"/>
+                    <a:pt x="7682587" y="0"/>
+                  </a:lnTo>
+                  <a:lnTo>
+                    <a:pt x="7682587" y="0"/>
                   </a:lnTo>
                 </a:path>
               </a:pathLst>
             </a:custGeom>
-            <a:ln w="13550" cap="flat">
+            <a:ln w="17246" cap="flat">
               <a:solidFill>
                 <a:srgbClr val="EBEBEB">
                   <a:alpha val="100000"/>
@@ -2658,26 +2658,26 @@
           </p:nvSpPr>
           <p:spPr>
             <a:xfrm>
-              <a:off x="817517" y="4727786"/>
-              <a:ext cx="7799693" cy="0"/>
+              <a:off x="915645" y="4684908"/>
+              <a:ext cx="7682587" cy="0"/>
             </a:xfrm>
             <a:custGeom>
               <a:avLst/>
               <a:pathLst>
-                <a:path w="7799693" h="0">
+                <a:path w="7682587" h="0">
                   <a:moveTo>
                     <a:pt x="0" y="0"/>
                   </a:moveTo>
                   <a:lnTo>
-                    <a:pt x="7799693" y="0"/>
-                  </a:lnTo>
-                  <a:lnTo>
-                    <a:pt x="7799693" y="0"/>
+                    <a:pt x="7682587" y="0"/>
+                  </a:lnTo>
+                  <a:lnTo>
+                    <a:pt x="7682587" y="0"/>
                   </a:lnTo>
                 </a:path>
               </a:pathLst>
             </a:custGeom>
-            <a:ln w="13550" cap="flat">
+            <a:ln w="17246" cap="flat">
               <a:solidFill>
                 <a:srgbClr val="EBEBEB">
                   <a:alpha val="100000"/>
@@ -2701,26 +2701,26 @@
           </p:nvSpPr>
           <p:spPr>
             <a:xfrm>
-              <a:off x="817517" y="3898322"/>
-              <a:ext cx="7799693" cy="0"/>
+              <a:off x="915645" y="3911240"/>
+              <a:ext cx="7682587" cy="0"/>
             </a:xfrm>
             <a:custGeom>
               <a:avLst/>
               <a:pathLst>
-                <a:path w="7799693" h="0">
+                <a:path w="7682587" h="0">
                   <a:moveTo>
                     <a:pt x="0" y="0"/>
                   </a:moveTo>
                   <a:lnTo>
-                    <a:pt x="7799693" y="0"/>
-                  </a:lnTo>
-                  <a:lnTo>
-                    <a:pt x="7799693" y="0"/>
+                    <a:pt x="7682587" y="0"/>
+                  </a:lnTo>
+                  <a:lnTo>
+                    <a:pt x="7682587" y="0"/>
                   </a:lnTo>
                 </a:path>
               </a:pathLst>
             </a:custGeom>
-            <a:ln w="13550" cap="flat">
+            <a:ln w="17246" cap="flat">
               <a:solidFill>
                 <a:srgbClr val="EBEBEB">
                   <a:alpha val="100000"/>
@@ -2744,26 +2744,26 @@
           </p:nvSpPr>
           <p:spPr>
             <a:xfrm>
-              <a:off x="817517" y="3068859"/>
-              <a:ext cx="7799693" cy="0"/>
+              <a:off x="915645" y="3137571"/>
+              <a:ext cx="7682587" cy="0"/>
             </a:xfrm>
             <a:custGeom>
               <a:avLst/>
               <a:pathLst>
-                <a:path w="7799693" h="0">
+                <a:path w="7682587" h="0">
                   <a:moveTo>
                     <a:pt x="0" y="0"/>
                   </a:moveTo>
                   <a:lnTo>
-                    <a:pt x="7799693" y="0"/>
-                  </a:lnTo>
-                  <a:lnTo>
-                    <a:pt x="7799693" y="0"/>
+                    <a:pt x="7682587" y="0"/>
+                  </a:lnTo>
+                  <a:lnTo>
+                    <a:pt x="7682587" y="0"/>
                   </a:lnTo>
                 </a:path>
               </a:pathLst>
             </a:custGeom>
-            <a:ln w="13550" cap="flat">
+            <a:ln w="17246" cap="flat">
               <a:solidFill>
                 <a:srgbClr val="EBEBEB">
                   <a:alpha val="100000"/>
@@ -2787,26 +2787,26 @@
           </p:nvSpPr>
           <p:spPr>
             <a:xfrm>
-              <a:off x="817517" y="2239395"/>
-              <a:ext cx="7799693" cy="0"/>
+              <a:off x="915645" y="2363903"/>
+              <a:ext cx="7682587" cy="0"/>
             </a:xfrm>
             <a:custGeom>
               <a:avLst/>
               <a:pathLst>
-                <a:path w="7799693" h="0">
+                <a:path w="7682587" h="0">
                   <a:moveTo>
                     <a:pt x="0" y="0"/>
                   </a:moveTo>
                   <a:lnTo>
-                    <a:pt x="7799693" y="0"/>
-                  </a:lnTo>
-                  <a:lnTo>
-                    <a:pt x="7799693" y="0"/>
+                    <a:pt x="7682587" y="0"/>
+                  </a:lnTo>
+                  <a:lnTo>
+                    <a:pt x="7682587" y="0"/>
                   </a:lnTo>
                 </a:path>
               </a:pathLst>
             </a:custGeom>
-            <a:ln w="13550" cap="flat">
+            <a:ln w="17246" cap="flat">
               <a:solidFill>
                 <a:srgbClr val="EBEBEB">
                   <a:alpha val="100000"/>
@@ -2830,15 +2830,15 @@
           </p:nvSpPr>
           <p:spPr>
             <a:xfrm>
-              <a:off x="2501542" y="2073503"/>
-              <a:ext cx="0" cy="3649639"/>
+              <a:off x="2574385" y="2209169"/>
+              <a:ext cx="0" cy="3404141"/>
             </a:xfrm>
             <a:custGeom>
               <a:avLst/>
               <a:pathLst>
-                <a:path w="0" h="3649639">
+                <a:path w="0" h="3404141">
                   <a:moveTo>
-                    <a:pt x="0" y="3649639"/>
+                    <a:pt x="0" y="3404141"/>
                   </a:moveTo>
                   <a:lnTo>
                     <a:pt x="0" y="0"/>
@@ -2849,7 +2849,7 @@
                 </a:path>
               </a:pathLst>
             </a:custGeom>
-            <a:ln w="13550" cap="flat">
+            <a:ln w="17246" cap="flat">
               <a:solidFill>
                 <a:srgbClr val="EBEBEB">
                   <a:alpha val="100000"/>
@@ -2873,15 +2873,15 @@
           </p:nvSpPr>
           <p:spPr>
             <a:xfrm>
-              <a:off x="4274200" y="2073503"/>
-              <a:ext cx="0" cy="3649639"/>
+              <a:off x="4320427" y="2209169"/>
+              <a:ext cx="0" cy="3404141"/>
             </a:xfrm>
             <a:custGeom>
               <a:avLst/>
               <a:pathLst>
-                <a:path w="0" h="3649639">
+                <a:path w="0" h="3404141">
                   <a:moveTo>
-                    <a:pt x="0" y="3649639"/>
+                    <a:pt x="0" y="3404141"/>
                   </a:moveTo>
                   <a:lnTo>
                     <a:pt x="0" y="0"/>
@@ -2892,7 +2892,7 @@
                 </a:path>
               </a:pathLst>
             </a:custGeom>
-            <a:ln w="13550" cap="flat">
+            <a:ln w="17246" cap="flat">
               <a:solidFill>
                 <a:srgbClr val="EBEBEB">
                   <a:alpha val="100000"/>
@@ -2916,15 +2916,15 @@
           </p:nvSpPr>
           <p:spPr>
             <a:xfrm>
-              <a:off x="6046857" y="2073503"/>
-              <a:ext cx="0" cy="3649639"/>
+              <a:off x="6066470" y="2209169"/>
+              <a:ext cx="0" cy="3404141"/>
             </a:xfrm>
             <a:custGeom>
               <a:avLst/>
               <a:pathLst>
-                <a:path w="0" h="3649639">
+                <a:path w="0" h="3404141">
                   <a:moveTo>
-                    <a:pt x="0" y="3649639"/>
+                    <a:pt x="0" y="3404141"/>
                   </a:moveTo>
                   <a:lnTo>
                     <a:pt x="0" y="0"/>
@@ -2935,7 +2935,7 @@
                 </a:path>
               </a:pathLst>
             </a:custGeom>
-            <a:ln w="13550" cap="flat">
+            <a:ln w="17246" cap="flat">
               <a:solidFill>
                 <a:srgbClr val="EBEBEB">
                   <a:alpha val="100000"/>
@@ -2959,15 +2959,15 @@
           </p:nvSpPr>
           <p:spPr>
             <a:xfrm>
-              <a:off x="7819515" y="2073503"/>
-              <a:ext cx="0" cy="3649639"/>
+              <a:off x="7812512" y="2209169"/>
+              <a:ext cx="0" cy="3404141"/>
             </a:xfrm>
             <a:custGeom>
               <a:avLst/>
               <a:pathLst>
-                <a:path w="0" h="3649639">
+                <a:path w="0" h="3404141">
                   <a:moveTo>
-                    <a:pt x="0" y="3649639"/>
+                    <a:pt x="0" y="3404141"/>
                   </a:moveTo>
                   <a:lnTo>
                     <a:pt x="0" y="0"/>
@@ -2978,7 +2978,7 @@
                 </a:path>
               </a:pathLst>
             </a:custGeom>
-            <a:ln w="13550" cap="flat">
+            <a:ln w="17246" cap="flat">
               <a:solidFill>
                 <a:srgbClr val="EBEBEB">
                   <a:alpha val="100000"/>
@@ -3002,489 +3002,489 @@
           </p:nvSpPr>
           <p:spPr>
             <a:xfrm>
-              <a:off x="817517" y="2073503"/>
-              <a:ext cx="7370972" cy="3482327"/>
+              <a:off x="915645" y="2209169"/>
+              <a:ext cx="7260303" cy="3248084"/>
             </a:xfrm>
             <a:custGeom>
               <a:avLst/>
               <a:pathLst>
-                <a:path w="7370972" h="3482327">
+                <a:path w="7260303" h="3248084">
                   <a:moveTo>
-                    <a:pt x="2488999" y="0"/>
+                    <a:pt x="2451629" y="0"/>
                   </a:moveTo>
                   <a:lnTo>
-                    <a:pt x="2557661" y="364561"/>
-                  </a:lnTo>
-                  <a:lnTo>
-                    <a:pt x="2635295" y="728643"/>
-                  </a:lnTo>
-                  <a:lnTo>
-                    <a:pt x="2712930" y="1050228"/>
-                  </a:lnTo>
-                  <a:lnTo>
-                    <a:pt x="2790564" y="1334277"/>
-                  </a:lnTo>
-                  <a:lnTo>
-                    <a:pt x="2868198" y="1585170"/>
-                  </a:lnTo>
-                  <a:lnTo>
-                    <a:pt x="2945832" y="1806778"/>
-                  </a:lnTo>
-                  <a:lnTo>
-                    <a:pt x="3023466" y="2002520"/>
-                  </a:lnTo>
-                  <a:lnTo>
-                    <a:pt x="3101100" y="2175414"/>
-                  </a:lnTo>
-                  <a:lnTo>
-                    <a:pt x="3178734" y="2328127"/>
-                  </a:lnTo>
-                  <a:lnTo>
-                    <a:pt x="3256368" y="2463015"/>
-                  </a:lnTo>
-                  <a:lnTo>
-                    <a:pt x="3334002" y="2582158"/>
-                  </a:lnTo>
-                  <a:lnTo>
-                    <a:pt x="3411636" y="2646271"/>
-                  </a:lnTo>
-                  <a:lnTo>
-                    <a:pt x="3489270" y="2621382"/>
-                  </a:lnTo>
-                  <a:lnTo>
-                    <a:pt x="3566904" y="2595754"/>
-                  </a:lnTo>
-                  <a:lnTo>
-                    <a:pt x="3644538" y="2569363"/>
-                  </a:lnTo>
-                  <a:lnTo>
-                    <a:pt x="3722172" y="2542189"/>
-                  </a:lnTo>
-                  <a:lnTo>
-                    <a:pt x="3799806" y="2514207"/>
-                  </a:lnTo>
-                  <a:lnTo>
-                    <a:pt x="3877440" y="2485393"/>
-                  </a:lnTo>
-                  <a:lnTo>
-                    <a:pt x="3955074" y="2455723"/>
-                  </a:lnTo>
-                  <a:lnTo>
-                    <a:pt x="4032708" y="2425171"/>
-                  </a:lnTo>
-                  <a:lnTo>
-                    <a:pt x="4110342" y="2393711"/>
-                  </a:lnTo>
-                  <a:lnTo>
-                    <a:pt x="4187976" y="2361316"/>
-                  </a:lnTo>
-                  <a:lnTo>
-                    <a:pt x="4265610" y="2327959"/>
-                  </a:lnTo>
-                  <a:lnTo>
-                    <a:pt x="4343244" y="2293610"/>
-                  </a:lnTo>
-                  <a:lnTo>
-                    <a:pt x="4420879" y="2258240"/>
-                  </a:lnTo>
-                  <a:lnTo>
-                    <a:pt x="4498513" y="2221819"/>
-                  </a:lnTo>
-                  <a:lnTo>
-                    <a:pt x="4576147" y="2184316"/>
-                  </a:lnTo>
-                  <a:lnTo>
-                    <a:pt x="4653781" y="2145698"/>
-                  </a:lnTo>
-                  <a:lnTo>
-                    <a:pt x="4731415" y="2105933"/>
-                  </a:lnTo>
-                  <a:lnTo>
-                    <a:pt x="4809049" y="2064985"/>
-                  </a:lnTo>
-                  <a:lnTo>
-                    <a:pt x="4886683" y="2022821"/>
-                  </a:lnTo>
-                  <a:lnTo>
-                    <a:pt x="4964317" y="1979404"/>
-                  </a:lnTo>
-                  <a:lnTo>
-                    <a:pt x="5041951" y="1934696"/>
-                  </a:lnTo>
-                  <a:lnTo>
-                    <a:pt x="5119585" y="1888660"/>
-                  </a:lnTo>
-                  <a:lnTo>
-                    <a:pt x="5197219" y="1841255"/>
-                  </a:lnTo>
-                  <a:lnTo>
-                    <a:pt x="5274853" y="1792442"/>
-                  </a:lnTo>
-                  <a:lnTo>
-                    <a:pt x="5352487" y="1742178"/>
-                  </a:lnTo>
-                  <a:lnTo>
-                    <a:pt x="5430121" y="1690420"/>
-                  </a:lnTo>
-                  <a:lnTo>
-                    <a:pt x="5507755" y="1637124"/>
-                  </a:lnTo>
-                  <a:lnTo>
-                    <a:pt x="5585389" y="1582245"/>
-                  </a:lnTo>
-                  <a:lnTo>
-                    <a:pt x="5663023" y="1525734"/>
-                  </a:lnTo>
-                  <a:lnTo>
-                    <a:pt x="5740657" y="1467543"/>
-                  </a:lnTo>
-                  <a:lnTo>
-                    <a:pt x="5818291" y="1407624"/>
-                  </a:lnTo>
-                  <a:lnTo>
-                    <a:pt x="5895925" y="1345923"/>
-                  </a:lnTo>
-                  <a:lnTo>
-                    <a:pt x="5973559" y="1282389"/>
-                  </a:lnTo>
-                  <a:lnTo>
-                    <a:pt x="6051193" y="1216967"/>
-                  </a:lnTo>
-                  <a:lnTo>
-                    <a:pt x="6128827" y="1149601"/>
-                  </a:lnTo>
-                  <a:lnTo>
-                    <a:pt x="6206462" y="1080232"/>
-                  </a:lnTo>
-                  <a:lnTo>
-                    <a:pt x="6284096" y="1008802"/>
-                  </a:lnTo>
-                  <a:lnTo>
-                    <a:pt x="6361730" y="935249"/>
-                  </a:lnTo>
-                  <a:lnTo>
-                    <a:pt x="6439364" y="859510"/>
-                  </a:lnTo>
-                  <a:lnTo>
-                    <a:pt x="6516998" y="781520"/>
-                  </a:lnTo>
-                  <a:lnTo>
-                    <a:pt x="6594632" y="701212"/>
-                  </a:lnTo>
-                  <a:lnTo>
-                    <a:pt x="6672266" y="618518"/>
-                  </a:lnTo>
-                  <a:lnTo>
-                    <a:pt x="6749900" y="533366"/>
-                  </a:lnTo>
-                  <a:lnTo>
-                    <a:pt x="6827534" y="445684"/>
-                  </a:lnTo>
-                  <a:lnTo>
-                    <a:pt x="6905168" y="355396"/>
-                  </a:lnTo>
-                  <a:lnTo>
-                    <a:pt x="6982802" y="262424"/>
-                  </a:lnTo>
-                  <a:lnTo>
-                    <a:pt x="7060436" y="166689"/>
-                  </a:lnTo>
-                  <a:lnTo>
-                    <a:pt x="7138070" y="68110"/>
-                  </a:lnTo>
-                  <a:lnTo>
-                    <a:pt x="7190160" y="0"/>
-                  </a:lnTo>
-                  <a:lnTo>
-                    <a:pt x="7370972" y="0"/>
-                  </a:lnTo>
-                  <a:lnTo>
-                    <a:pt x="7370972" y="3482327"/>
-                  </a:lnTo>
-                  <a:lnTo>
-                    <a:pt x="7293338" y="3482140"/>
-                  </a:lnTo>
-                  <a:lnTo>
-                    <a:pt x="7215704" y="3481927"/>
-                  </a:lnTo>
-                  <a:lnTo>
-                    <a:pt x="7138070" y="3481687"/>
-                  </a:lnTo>
-                  <a:lnTo>
-                    <a:pt x="7060436" y="3481415"/>
-                  </a:lnTo>
-                  <a:lnTo>
-                    <a:pt x="6982802" y="3481107"/>
-                  </a:lnTo>
-                  <a:lnTo>
-                    <a:pt x="6905168" y="3480758"/>
-                  </a:lnTo>
-                  <a:lnTo>
-                    <a:pt x="6827534" y="3480363"/>
-                  </a:lnTo>
-                  <a:lnTo>
-                    <a:pt x="6749900" y="3479916"/>
-                  </a:lnTo>
-                  <a:lnTo>
-                    <a:pt x="6672266" y="3479410"/>
-                  </a:lnTo>
-                  <a:lnTo>
-                    <a:pt x="6594632" y="3478837"/>
-                  </a:lnTo>
-                  <a:lnTo>
-                    <a:pt x="6516998" y="3478188"/>
-                  </a:lnTo>
-                  <a:lnTo>
-                    <a:pt x="6439364" y="3477453"/>
-                  </a:lnTo>
-                  <a:lnTo>
-                    <a:pt x="6361730" y="3476621"/>
-                  </a:lnTo>
-                  <a:lnTo>
-                    <a:pt x="6284096" y="3475680"/>
-                  </a:lnTo>
-                  <a:lnTo>
-                    <a:pt x="6206462" y="3474614"/>
-                  </a:lnTo>
-                  <a:lnTo>
-                    <a:pt x="6128827" y="3473407"/>
-                  </a:lnTo>
-                  <a:lnTo>
-                    <a:pt x="6051193" y="3472041"/>
-                  </a:lnTo>
-                  <a:lnTo>
-                    <a:pt x="5973559" y="3470494"/>
-                  </a:lnTo>
-                  <a:lnTo>
-                    <a:pt x="5895925" y="3468743"/>
-                  </a:lnTo>
-                  <a:lnTo>
-                    <a:pt x="5818291" y="3466760"/>
-                  </a:lnTo>
-                  <a:lnTo>
-                    <a:pt x="5740657" y="3464515"/>
-                  </a:lnTo>
-                  <a:lnTo>
-                    <a:pt x="5663023" y="3461974"/>
-                  </a:lnTo>
-                  <a:lnTo>
-                    <a:pt x="5585389" y="3459097"/>
-                  </a:lnTo>
-                  <a:lnTo>
-                    <a:pt x="5507755" y="3455839"/>
-                  </a:lnTo>
-                  <a:lnTo>
-                    <a:pt x="5430121" y="3452151"/>
-                  </a:lnTo>
-                  <a:lnTo>
-                    <a:pt x="5352487" y="3447976"/>
-                  </a:lnTo>
-                  <a:lnTo>
-                    <a:pt x="5274853" y="3443249"/>
-                  </a:lnTo>
-                  <a:lnTo>
-                    <a:pt x="5197219" y="3437897"/>
-                  </a:lnTo>
-                  <a:lnTo>
-                    <a:pt x="5119585" y="3431839"/>
-                  </a:lnTo>
-                  <a:lnTo>
-                    <a:pt x="5041951" y="3424979"/>
-                  </a:lnTo>
-                  <a:lnTo>
-                    <a:pt x="4964317" y="3417213"/>
-                  </a:lnTo>
-                  <a:lnTo>
-                    <a:pt x="4886683" y="3408421"/>
-                  </a:lnTo>
-                  <a:lnTo>
-                    <a:pt x="4809049" y="3398467"/>
-                  </a:lnTo>
-                  <a:lnTo>
-                    <a:pt x="4731415" y="3387197"/>
-                  </a:lnTo>
-                  <a:lnTo>
-                    <a:pt x="4653781" y="3374438"/>
-                  </a:lnTo>
-                  <a:lnTo>
-                    <a:pt x="4576147" y="3359993"/>
-                  </a:lnTo>
-                  <a:lnTo>
-                    <a:pt x="4498513" y="3343640"/>
-                  </a:lnTo>
-                  <a:lnTo>
-                    <a:pt x="4420879" y="3325125"/>
-                  </a:lnTo>
-                  <a:lnTo>
-                    <a:pt x="4343244" y="3304163"/>
-                  </a:lnTo>
-                  <a:lnTo>
-                    <a:pt x="4265610" y="3280432"/>
-                  </a:lnTo>
-                  <a:lnTo>
-                    <a:pt x="4187976" y="3253564"/>
-                  </a:lnTo>
-                  <a:lnTo>
-                    <a:pt x="4110342" y="3223146"/>
-                  </a:lnTo>
-                  <a:lnTo>
-                    <a:pt x="4032708" y="3188708"/>
-                  </a:lnTo>
-                  <a:lnTo>
-                    <a:pt x="3955074" y="3149719"/>
-                  </a:lnTo>
-                  <a:lnTo>
-                    <a:pt x="3877440" y="3105578"/>
-                  </a:lnTo>
-                  <a:lnTo>
-                    <a:pt x="3799806" y="3055604"/>
-                  </a:lnTo>
-                  <a:lnTo>
-                    <a:pt x="3722172" y="2999025"/>
-                  </a:lnTo>
-                  <a:lnTo>
-                    <a:pt x="3644538" y="2934970"/>
-                  </a:lnTo>
-                  <a:lnTo>
-                    <a:pt x="3566904" y="2862450"/>
-                  </a:lnTo>
-                  <a:lnTo>
-                    <a:pt x="3489270" y="2780347"/>
-                  </a:lnTo>
-                  <a:lnTo>
-                    <a:pt x="3411636" y="2687394"/>
-                  </a:lnTo>
-                  <a:lnTo>
-                    <a:pt x="3334002" y="2670442"/>
-                  </a:lnTo>
-                  <a:lnTo>
-                    <a:pt x="3256368" y="2693915"/>
-                  </a:lnTo>
-                  <a:lnTo>
-                    <a:pt x="3178734" y="2716711"/>
-                  </a:lnTo>
-                  <a:lnTo>
-                    <a:pt x="3101100" y="2738848"/>
-                  </a:lnTo>
-                  <a:lnTo>
-                    <a:pt x="3023466" y="2760347"/>
-                  </a:lnTo>
-                  <a:lnTo>
-                    <a:pt x="2945832" y="2781225"/>
-                  </a:lnTo>
-                  <a:lnTo>
-                    <a:pt x="2868198" y="2801501"/>
-                  </a:lnTo>
-                  <a:lnTo>
-                    <a:pt x="2790564" y="2821191"/>
-                  </a:lnTo>
-                  <a:lnTo>
-                    <a:pt x="2712930" y="2840314"/>
-                  </a:lnTo>
-                  <a:lnTo>
-                    <a:pt x="2635295" y="2858884"/>
-                  </a:lnTo>
-                  <a:lnTo>
-                    <a:pt x="2557661" y="2876918"/>
-                  </a:lnTo>
-                  <a:lnTo>
-                    <a:pt x="2480027" y="2894432"/>
-                  </a:lnTo>
-                  <a:lnTo>
-                    <a:pt x="2402393" y="2911441"/>
-                  </a:lnTo>
-                  <a:lnTo>
-                    <a:pt x="2324759" y="2927958"/>
-                  </a:lnTo>
-                  <a:lnTo>
-                    <a:pt x="2247125" y="2943999"/>
-                  </a:lnTo>
-                  <a:lnTo>
-                    <a:pt x="2169491" y="2959577"/>
-                  </a:lnTo>
-                  <a:lnTo>
-                    <a:pt x="2091857" y="2974705"/>
-                  </a:lnTo>
-                  <a:lnTo>
-                    <a:pt x="2014223" y="2989397"/>
-                  </a:lnTo>
-                  <a:lnTo>
-                    <a:pt x="1936589" y="3003664"/>
-                  </a:lnTo>
-                  <a:lnTo>
-                    <a:pt x="1858955" y="3017520"/>
-                  </a:lnTo>
-                  <a:lnTo>
-                    <a:pt x="1781321" y="3030976"/>
-                  </a:lnTo>
-                  <a:lnTo>
-                    <a:pt x="1703687" y="3044043"/>
-                  </a:lnTo>
-                  <a:lnTo>
-                    <a:pt x="1626053" y="3056734"/>
-                  </a:lnTo>
-                  <a:lnTo>
-                    <a:pt x="1548419" y="3069058"/>
-                  </a:lnTo>
-                  <a:lnTo>
-                    <a:pt x="1470785" y="3081026"/>
-                  </a:lnTo>
-                  <a:lnTo>
-                    <a:pt x="1393151" y="3092649"/>
-                  </a:lnTo>
-                  <a:lnTo>
-                    <a:pt x="1315517" y="3103937"/>
-                  </a:lnTo>
-                  <a:lnTo>
-                    <a:pt x="1237883" y="3114899"/>
-                  </a:lnTo>
-                  <a:lnTo>
-                    <a:pt x="1160249" y="3125544"/>
-                  </a:lnTo>
-                  <a:lnTo>
-                    <a:pt x="1082615" y="3135882"/>
-                  </a:lnTo>
-                  <a:lnTo>
-                    <a:pt x="1004981" y="3145922"/>
-                  </a:lnTo>
-                  <a:lnTo>
-                    <a:pt x="927346" y="3155672"/>
-                  </a:lnTo>
-                  <a:lnTo>
-                    <a:pt x="849712" y="3165141"/>
-                  </a:lnTo>
-                  <a:lnTo>
-                    <a:pt x="772078" y="3174336"/>
-                  </a:lnTo>
-                  <a:lnTo>
-                    <a:pt x="694444" y="3183266"/>
-                  </a:lnTo>
-                  <a:lnTo>
-                    <a:pt x="616810" y="3191939"/>
-                  </a:lnTo>
-                  <a:lnTo>
-                    <a:pt x="539176" y="3200361"/>
-                  </a:lnTo>
-                  <a:lnTo>
-                    <a:pt x="461542" y="3208539"/>
-                  </a:lnTo>
-                  <a:lnTo>
-                    <a:pt x="383908" y="3216482"/>
-                  </a:lnTo>
-                  <a:lnTo>
-                    <a:pt x="306274" y="3224196"/>
-                  </a:lnTo>
-                  <a:lnTo>
-                    <a:pt x="228640" y="3231687"/>
-                  </a:lnTo>
-                  <a:lnTo>
-                    <a:pt x="151006" y="3238962"/>
-                  </a:lnTo>
-                  <a:lnTo>
-                    <a:pt x="73372" y="3246026"/>
-                  </a:lnTo>
-                  <a:lnTo>
-                    <a:pt x="0" y="3252511"/>
+                    <a:pt x="2519260" y="340038"/>
+                  </a:lnTo>
+                  <a:lnTo>
+                    <a:pt x="2595729" y="679630"/>
+                  </a:lnTo>
+                  <a:lnTo>
+                    <a:pt x="2672197" y="979583"/>
+                  </a:lnTo>
+                  <a:lnTo>
+                    <a:pt x="2748666" y="1244525"/>
+                  </a:lnTo>
+                  <a:lnTo>
+                    <a:pt x="2825134" y="1478541"/>
+                  </a:lnTo>
+                  <a:lnTo>
+                    <a:pt x="2901602" y="1685243"/>
+                  </a:lnTo>
+                  <a:lnTo>
+                    <a:pt x="2978071" y="1867818"/>
+                  </a:lnTo>
+                  <a:lnTo>
+                    <a:pt x="3054539" y="2029081"/>
+                  </a:lnTo>
+                  <a:lnTo>
+                    <a:pt x="3131008" y="2171522"/>
+                  </a:lnTo>
+                  <a:lnTo>
+                    <a:pt x="3207476" y="2297337"/>
+                  </a:lnTo>
+                  <a:lnTo>
+                    <a:pt x="3283945" y="2408466"/>
+                  </a:lnTo>
+                  <a:lnTo>
+                    <a:pt x="3360413" y="2468266"/>
+                  </a:lnTo>
+                  <a:lnTo>
+                    <a:pt x="3436881" y="2445052"/>
+                  </a:lnTo>
+                  <a:lnTo>
+                    <a:pt x="3513350" y="2421147"/>
+                  </a:lnTo>
+                  <a:lnTo>
+                    <a:pt x="3589818" y="2396532"/>
+                  </a:lnTo>
+                  <a:lnTo>
+                    <a:pt x="3666287" y="2371185"/>
+                  </a:lnTo>
+                  <a:lnTo>
+                    <a:pt x="3742755" y="2345085"/>
+                  </a:lnTo>
+                  <a:lnTo>
+                    <a:pt x="3819224" y="2318210"/>
+                  </a:lnTo>
+                  <a:lnTo>
+                    <a:pt x="3895692" y="2290535"/>
+                  </a:lnTo>
+                  <a:lnTo>
+                    <a:pt x="3972160" y="2262039"/>
+                  </a:lnTo>
+                  <a:lnTo>
+                    <a:pt x="4048629" y="2232695"/>
+                  </a:lnTo>
+                  <a:lnTo>
+                    <a:pt x="4125097" y="2202479"/>
+                  </a:lnTo>
+                  <a:lnTo>
+                    <a:pt x="4201566" y="2171365"/>
+                  </a:lnTo>
+                  <a:lnTo>
+                    <a:pt x="4278034" y="2139327"/>
+                  </a:lnTo>
+                  <a:lnTo>
+                    <a:pt x="4354503" y="2106337"/>
+                  </a:lnTo>
+                  <a:lnTo>
+                    <a:pt x="4430971" y="2072366"/>
+                  </a:lnTo>
+                  <a:lnTo>
+                    <a:pt x="4507439" y="2037385"/>
+                  </a:lnTo>
+                  <a:lnTo>
+                    <a:pt x="4583908" y="2001365"/>
+                  </a:lnTo>
+                  <a:lnTo>
+                    <a:pt x="4660376" y="1964274"/>
+                  </a:lnTo>
+                  <a:lnTo>
+                    <a:pt x="4736845" y="1926081"/>
+                  </a:lnTo>
+                  <a:lnTo>
+                    <a:pt x="4813313" y="1886753"/>
+                  </a:lnTo>
+                  <a:lnTo>
+                    <a:pt x="4889782" y="1846256"/>
+                  </a:lnTo>
+                  <a:lnTo>
+                    <a:pt x="4966250" y="1804556"/>
+                  </a:lnTo>
+                  <a:lnTo>
+                    <a:pt x="5042719" y="1761617"/>
+                  </a:lnTo>
+                  <a:lnTo>
+                    <a:pt x="5119187" y="1717401"/>
+                  </a:lnTo>
+                  <a:lnTo>
+                    <a:pt x="5195655" y="1671871"/>
+                  </a:lnTo>
+                  <a:lnTo>
+                    <a:pt x="5272124" y="1624988"/>
+                  </a:lnTo>
+                  <a:lnTo>
+                    <a:pt x="5348592" y="1576712"/>
+                  </a:lnTo>
+                  <a:lnTo>
+                    <a:pt x="5425061" y="1527001"/>
+                  </a:lnTo>
+                  <a:lnTo>
+                    <a:pt x="5501529" y="1475813"/>
+                  </a:lnTo>
+                  <a:lnTo>
+                    <a:pt x="5577998" y="1423103"/>
+                  </a:lnTo>
+                  <a:lnTo>
+                    <a:pt x="5654466" y="1368827"/>
+                  </a:lnTo>
+                  <a:lnTo>
+                    <a:pt x="5730934" y="1312938"/>
+                  </a:lnTo>
+                  <a:lnTo>
+                    <a:pt x="5807403" y="1255388"/>
+                  </a:lnTo>
+                  <a:lnTo>
+                    <a:pt x="5883871" y="1196128"/>
+                  </a:lnTo>
+                  <a:lnTo>
+                    <a:pt x="5960340" y="1135106"/>
+                  </a:lnTo>
+                  <a:lnTo>
+                    <a:pt x="6036808" y="1072271"/>
+                  </a:lnTo>
+                  <a:lnTo>
+                    <a:pt x="6113277" y="1007569"/>
+                  </a:lnTo>
+                  <a:lnTo>
+                    <a:pt x="6189745" y="940943"/>
+                  </a:lnTo>
+                  <a:lnTo>
+                    <a:pt x="6266213" y="872338"/>
+                  </a:lnTo>
+                  <a:lnTo>
+                    <a:pt x="6342682" y="801694"/>
+                  </a:lnTo>
+                  <a:lnTo>
+                    <a:pt x="6419150" y="728950"/>
+                  </a:lnTo>
+                  <a:lnTo>
+                    <a:pt x="6495619" y="654044"/>
+                  </a:lnTo>
+                  <a:lnTo>
+                    <a:pt x="6572087" y="576913"/>
+                  </a:lnTo>
+                  <a:lnTo>
+                    <a:pt x="6648556" y="497489"/>
+                  </a:lnTo>
+                  <a:lnTo>
+                    <a:pt x="6725024" y="415704"/>
+                  </a:lnTo>
+                  <a:lnTo>
+                    <a:pt x="6801492" y="331489"/>
+                  </a:lnTo>
+                  <a:lnTo>
+                    <a:pt x="6877961" y="244772"/>
+                  </a:lnTo>
+                  <a:lnTo>
+                    <a:pt x="6954429" y="155477"/>
+                  </a:lnTo>
+                  <a:lnTo>
+                    <a:pt x="7030898" y="63528"/>
+                  </a:lnTo>
+                  <a:lnTo>
+                    <a:pt x="7082206" y="0"/>
+                  </a:lnTo>
+                  <a:lnTo>
+                    <a:pt x="7260303" y="0"/>
+                  </a:lnTo>
+                  <a:lnTo>
+                    <a:pt x="7260303" y="3248084"/>
+                  </a:lnTo>
+                  <a:lnTo>
+                    <a:pt x="7183835" y="3247909"/>
+                  </a:lnTo>
+                  <a:lnTo>
+                    <a:pt x="7107366" y="3247711"/>
+                  </a:lnTo>
+                  <a:lnTo>
+                    <a:pt x="7030898" y="3247487"/>
+                  </a:lnTo>
+                  <a:lnTo>
+                    <a:pt x="6954429" y="3247233"/>
+                  </a:lnTo>
+                  <a:lnTo>
+                    <a:pt x="6877961" y="3246945"/>
+                  </a:lnTo>
+                  <a:lnTo>
+                    <a:pt x="6801492" y="3246620"/>
+                  </a:lnTo>
+                  <a:lnTo>
+                    <a:pt x="6725024" y="3246252"/>
+                  </a:lnTo>
+                  <a:lnTo>
+                    <a:pt x="6648556" y="3245835"/>
+                  </a:lnTo>
+                  <a:lnTo>
+                    <a:pt x="6572087" y="3245363"/>
+                  </a:lnTo>
+                  <a:lnTo>
+                    <a:pt x="6495619" y="3244828"/>
+                  </a:lnTo>
+                  <a:lnTo>
+                    <a:pt x="6419150" y="3244223"/>
+                  </a:lnTo>
+                  <a:lnTo>
+                    <a:pt x="6342682" y="3243538"/>
+                  </a:lnTo>
+                  <a:lnTo>
+                    <a:pt x="6266213" y="3242762"/>
+                  </a:lnTo>
+                  <a:lnTo>
+                    <a:pt x="6189745" y="3241884"/>
+                  </a:lnTo>
+                  <a:lnTo>
+                    <a:pt x="6113277" y="3240889"/>
+                  </a:lnTo>
+                  <a:lnTo>
+                    <a:pt x="6036808" y="3239764"/>
+                  </a:lnTo>
+                  <a:lnTo>
+                    <a:pt x="5960340" y="3238489"/>
+                  </a:lnTo>
+                  <a:lnTo>
+                    <a:pt x="5883871" y="3237047"/>
+                  </a:lnTo>
+                  <a:lnTo>
+                    <a:pt x="5807403" y="3235413"/>
+                  </a:lnTo>
+                  <a:lnTo>
+                    <a:pt x="5730934" y="3233564"/>
+                  </a:lnTo>
+                  <a:lnTo>
+                    <a:pt x="5654466" y="3231470"/>
+                  </a:lnTo>
+                  <a:lnTo>
+                    <a:pt x="5577998" y="3229100"/>
+                  </a:lnTo>
+                  <a:lnTo>
+                    <a:pt x="5501529" y="3226416"/>
+                  </a:lnTo>
+                  <a:lnTo>
+                    <a:pt x="5425061" y="3223378"/>
+                  </a:lnTo>
+                  <a:lnTo>
+                    <a:pt x="5348592" y="3219938"/>
+                  </a:lnTo>
+                  <a:lnTo>
+                    <a:pt x="5272124" y="3216043"/>
+                  </a:lnTo>
+                  <a:lnTo>
+                    <a:pt x="5195655" y="3211634"/>
+                  </a:lnTo>
+                  <a:lnTo>
+                    <a:pt x="5119187" y="3206643"/>
+                  </a:lnTo>
+                  <a:lnTo>
+                    <a:pt x="5042719" y="3200991"/>
+                  </a:lnTo>
+                  <a:lnTo>
+                    <a:pt x="4966250" y="3194593"/>
+                  </a:lnTo>
+                  <a:lnTo>
+                    <a:pt x="4889782" y="3187350"/>
+                  </a:lnTo>
+                  <a:lnTo>
+                    <a:pt x="4813313" y="3179149"/>
+                  </a:lnTo>
+                  <a:lnTo>
+                    <a:pt x="4736845" y="3169864"/>
+                  </a:lnTo>
+                  <a:lnTo>
+                    <a:pt x="4660376" y="3159353"/>
+                  </a:lnTo>
+                  <a:lnTo>
+                    <a:pt x="4583908" y="3147452"/>
+                  </a:lnTo>
+                  <a:lnTo>
+                    <a:pt x="4507439" y="3133979"/>
+                  </a:lnTo>
+                  <a:lnTo>
+                    <a:pt x="4430971" y="3118725"/>
+                  </a:lnTo>
+                  <a:lnTo>
+                    <a:pt x="4354503" y="3101456"/>
+                  </a:lnTo>
+                  <a:lnTo>
+                    <a:pt x="4278034" y="3081904"/>
+                  </a:lnTo>
+                  <a:lnTo>
+                    <a:pt x="4201566" y="3059769"/>
+                  </a:lnTo>
+                  <a:lnTo>
+                    <a:pt x="4125097" y="3034709"/>
+                  </a:lnTo>
+                  <a:lnTo>
+                    <a:pt x="4048629" y="3006336"/>
+                  </a:lnTo>
+                  <a:lnTo>
+                    <a:pt x="3972160" y="2974215"/>
+                  </a:lnTo>
+                  <a:lnTo>
+                    <a:pt x="3895692" y="2937849"/>
+                  </a:lnTo>
+                  <a:lnTo>
+                    <a:pt x="3819224" y="2896677"/>
+                  </a:lnTo>
+                  <a:lnTo>
+                    <a:pt x="3742755" y="2850064"/>
+                  </a:lnTo>
+                  <a:lnTo>
+                    <a:pt x="3666287" y="2797292"/>
+                  </a:lnTo>
+                  <a:lnTo>
+                    <a:pt x="3589818" y="2737545"/>
+                  </a:lnTo>
+                  <a:lnTo>
+                    <a:pt x="3513350" y="2669904"/>
+                  </a:lnTo>
+                  <a:lnTo>
+                    <a:pt x="3436881" y="2593323"/>
+                  </a:lnTo>
+                  <a:lnTo>
+                    <a:pt x="3360413" y="2506623"/>
+                  </a:lnTo>
+                  <a:lnTo>
+                    <a:pt x="3283945" y="2490811"/>
+                  </a:lnTo>
+                  <a:lnTo>
+                    <a:pt x="3207476" y="2512705"/>
+                  </a:lnTo>
+                  <a:lnTo>
+                    <a:pt x="3131008" y="2533967"/>
+                  </a:lnTo>
+                  <a:lnTo>
+                    <a:pt x="3054539" y="2554616"/>
+                  </a:lnTo>
+                  <a:lnTo>
+                    <a:pt x="2978071" y="2574669"/>
+                  </a:lnTo>
+                  <a:lnTo>
+                    <a:pt x="2901602" y="2594142"/>
+                  </a:lnTo>
+                  <a:lnTo>
+                    <a:pt x="2825134" y="2613054"/>
+                  </a:lnTo>
+                  <a:lnTo>
+                    <a:pt x="2748666" y="2631420"/>
+                  </a:lnTo>
+                  <a:lnTo>
+                    <a:pt x="2672197" y="2649256"/>
+                  </a:lnTo>
+                  <a:lnTo>
+                    <a:pt x="2595729" y="2666577"/>
+                  </a:lnTo>
+                  <a:lnTo>
+                    <a:pt x="2519260" y="2683399"/>
+                  </a:lnTo>
+                  <a:lnTo>
+                    <a:pt x="2442792" y="2699734"/>
+                  </a:lnTo>
+                  <a:lnTo>
+                    <a:pt x="2366323" y="2715599"/>
+                  </a:lnTo>
+                  <a:lnTo>
+                    <a:pt x="2289855" y="2731005"/>
+                  </a:lnTo>
+                  <a:lnTo>
+                    <a:pt x="2213386" y="2745967"/>
+                  </a:lnTo>
+                  <a:lnTo>
+                    <a:pt x="2136918" y="2760497"/>
+                  </a:lnTo>
+                  <a:lnTo>
+                    <a:pt x="2060450" y="2774607"/>
+                  </a:lnTo>
+                  <a:lnTo>
+                    <a:pt x="1983981" y="2788311"/>
+                  </a:lnTo>
+                  <a:lnTo>
+                    <a:pt x="1907513" y="2801619"/>
+                  </a:lnTo>
+                  <a:lnTo>
+                    <a:pt x="1831044" y="2814542"/>
+                  </a:lnTo>
+                  <a:lnTo>
+                    <a:pt x="1754576" y="2827093"/>
+                  </a:lnTo>
+                  <a:lnTo>
+                    <a:pt x="1678107" y="2839282"/>
+                  </a:lnTo>
+                  <a:lnTo>
+                    <a:pt x="1601639" y="2851119"/>
+                  </a:lnTo>
+                  <a:lnTo>
+                    <a:pt x="1525171" y="2862614"/>
+                  </a:lnTo>
+                  <a:lnTo>
+                    <a:pt x="1448702" y="2873777"/>
+                  </a:lnTo>
+                  <a:lnTo>
+                    <a:pt x="1372234" y="2884618"/>
+                  </a:lnTo>
+                  <a:lnTo>
+                    <a:pt x="1295765" y="2895147"/>
+                  </a:lnTo>
+                  <a:lnTo>
+                    <a:pt x="1219297" y="2905371"/>
+                  </a:lnTo>
+                  <a:lnTo>
+                    <a:pt x="1142828" y="2915300"/>
+                  </a:lnTo>
+                  <a:lnTo>
+                    <a:pt x="1066360" y="2924943"/>
+                  </a:lnTo>
+                  <a:lnTo>
+                    <a:pt x="989892" y="2934308"/>
+                  </a:lnTo>
+                  <a:lnTo>
+                    <a:pt x="913423" y="2943402"/>
+                  </a:lnTo>
+                  <a:lnTo>
+                    <a:pt x="836955" y="2952234"/>
+                  </a:lnTo>
+                  <a:lnTo>
+                    <a:pt x="760486" y="2960810"/>
+                  </a:lnTo>
+                  <a:lnTo>
+                    <a:pt x="684018" y="2969140"/>
+                  </a:lnTo>
+                  <a:lnTo>
+                    <a:pt x="607549" y="2977229"/>
+                  </a:lnTo>
+                  <a:lnTo>
+                    <a:pt x="531081" y="2985084"/>
+                  </a:lnTo>
+                  <a:lnTo>
+                    <a:pt x="454613" y="2992713"/>
+                  </a:lnTo>
+                  <a:lnTo>
+                    <a:pt x="378144" y="3000121"/>
+                  </a:lnTo>
+                  <a:lnTo>
+                    <a:pt x="301676" y="3007316"/>
+                  </a:lnTo>
+                  <a:lnTo>
+                    <a:pt x="225207" y="3014303"/>
+                  </a:lnTo>
+                  <a:lnTo>
+                    <a:pt x="148739" y="3021089"/>
+                  </a:lnTo>
+                  <a:lnTo>
+                    <a:pt x="72270" y="3027678"/>
+                  </a:lnTo>
+                  <a:lnTo>
+                    <a:pt x="0" y="3033726"/>
                   </a:lnTo>
                   <a:close/>
                 </a:path>
@@ -3510,198 +3510,198 @@
           </p:nvSpPr>
           <p:spPr>
             <a:xfrm>
-              <a:off x="3306517" y="2073503"/>
-              <a:ext cx="4701161" cy="2646271"/>
+              <a:off x="3367274" y="2209169"/>
+              <a:ext cx="4630577" cy="2468266"/>
             </a:xfrm>
             <a:custGeom>
               <a:avLst/>
               <a:pathLst>
-                <a:path w="4701161" h="2646271">
+                <a:path w="4630577" h="2468266">
                   <a:moveTo>
                     <a:pt x="0" y="0"/>
                   </a:moveTo>
                   <a:lnTo>
-                    <a:pt x="68662" y="364561"/>
-                  </a:lnTo>
-                  <a:lnTo>
-                    <a:pt x="146296" y="728643"/>
-                  </a:lnTo>
-                  <a:lnTo>
-                    <a:pt x="223930" y="1050228"/>
-                  </a:lnTo>
-                  <a:lnTo>
-                    <a:pt x="301564" y="1334277"/>
-                  </a:lnTo>
-                  <a:lnTo>
-                    <a:pt x="379198" y="1585170"/>
-                  </a:lnTo>
-                  <a:lnTo>
-                    <a:pt x="456832" y="1806778"/>
-                  </a:lnTo>
-                  <a:lnTo>
-                    <a:pt x="534466" y="2002520"/>
-                  </a:lnTo>
-                  <a:lnTo>
-                    <a:pt x="612100" y="2175414"/>
-                  </a:lnTo>
-                  <a:lnTo>
-                    <a:pt x="689734" y="2328127"/>
-                  </a:lnTo>
-                  <a:lnTo>
-                    <a:pt x="767369" y="2463015"/>
-                  </a:lnTo>
-                  <a:lnTo>
-                    <a:pt x="845003" y="2582158"/>
-                  </a:lnTo>
-                  <a:lnTo>
-                    <a:pt x="922637" y="2646271"/>
-                  </a:lnTo>
-                  <a:lnTo>
-                    <a:pt x="1000271" y="2621382"/>
-                  </a:lnTo>
-                  <a:lnTo>
-                    <a:pt x="1077905" y="2595754"/>
-                  </a:lnTo>
-                  <a:lnTo>
-                    <a:pt x="1155539" y="2569363"/>
-                  </a:lnTo>
-                  <a:lnTo>
-                    <a:pt x="1233173" y="2542189"/>
-                  </a:lnTo>
-                  <a:lnTo>
-                    <a:pt x="1310807" y="2514207"/>
-                  </a:lnTo>
-                  <a:lnTo>
-                    <a:pt x="1388441" y="2485393"/>
-                  </a:lnTo>
-                  <a:lnTo>
-                    <a:pt x="1466075" y="2455723"/>
-                  </a:lnTo>
-                  <a:lnTo>
-                    <a:pt x="1543709" y="2425171"/>
-                  </a:lnTo>
-                  <a:lnTo>
-                    <a:pt x="1621343" y="2393711"/>
-                  </a:lnTo>
-                  <a:lnTo>
-                    <a:pt x="1698977" y="2361316"/>
-                  </a:lnTo>
-                  <a:lnTo>
-                    <a:pt x="1776611" y="2327959"/>
-                  </a:lnTo>
-                  <a:lnTo>
-                    <a:pt x="1854245" y="2293610"/>
-                  </a:lnTo>
-                  <a:lnTo>
-                    <a:pt x="1931879" y="2258240"/>
-                  </a:lnTo>
-                  <a:lnTo>
-                    <a:pt x="2009513" y="2221819"/>
-                  </a:lnTo>
-                  <a:lnTo>
-                    <a:pt x="2087147" y="2184316"/>
-                  </a:lnTo>
-                  <a:lnTo>
-                    <a:pt x="2164781" y="2145698"/>
-                  </a:lnTo>
-                  <a:lnTo>
-                    <a:pt x="2242415" y="2105933"/>
-                  </a:lnTo>
-                  <a:lnTo>
-                    <a:pt x="2320049" y="2064985"/>
-                  </a:lnTo>
-                  <a:lnTo>
-                    <a:pt x="2397683" y="2022821"/>
-                  </a:lnTo>
-                  <a:lnTo>
-                    <a:pt x="2475318" y="1979404"/>
-                  </a:lnTo>
-                  <a:lnTo>
-                    <a:pt x="2552952" y="1934696"/>
-                  </a:lnTo>
-                  <a:lnTo>
-                    <a:pt x="2630586" y="1888660"/>
-                  </a:lnTo>
-                  <a:lnTo>
-                    <a:pt x="2708220" y="1841255"/>
-                  </a:lnTo>
-                  <a:lnTo>
-                    <a:pt x="2785854" y="1792442"/>
-                  </a:lnTo>
-                  <a:lnTo>
-                    <a:pt x="2863488" y="1742178"/>
-                  </a:lnTo>
-                  <a:lnTo>
-                    <a:pt x="2941122" y="1690420"/>
-                  </a:lnTo>
-                  <a:lnTo>
-                    <a:pt x="3018756" y="1637124"/>
-                  </a:lnTo>
-                  <a:lnTo>
-                    <a:pt x="3096390" y="1582245"/>
-                  </a:lnTo>
-                  <a:lnTo>
-                    <a:pt x="3174024" y="1525734"/>
-                  </a:lnTo>
-                  <a:lnTo>
-                    <a:pt x="3251658" y="1467543"/>
-                  </a:lnTo>
-                  <a:lnTo>
-                    <a:pt x="3329292" y="1407624"/>
-                  </a:lnTo>
-                  <a:lnTo>
-                    <a:pt x="3406926" y="1345923"/>
-                  </a:lnTo>
-                  <a:lnTo>
-                    <a:pt x="3484560" y="1282389"/>
-                  </a:lnTo>
-                  <a:lnTo>
-                    <a:pt x="3562194" y="1216967"/>
-                  </a:lnTo>
-                  <a:lnTo>
-                    <a:pt x="3639828" y="1149601"/>
-                  </a:lnTo>
-                  <a:lnTo>
-                    <a:pt x="3717462" y="1080232"/>
-                  </a:lnTo>
-                  <a:lnTo>
-                    <a:pt x="3795096" y="1008802"/>
-                  </a:lnTo>
-                  <a:lnTo>
-                    <a:pt x="3872730" y="935249"/>
-                  </a:lnTo>
-                  <a:lnTo>
-                    <a:pt x="3950364" y="859510"/>
-                  </a:lnTo>
-                  <a:lnTo>
-                    <a:pt x="4027998" y="781520"/>
-                  </a:lnTo>
-                  <a:lnTo>
-                    <a:pt x="4105632" y="701212"/>
-                  </a:lnTo>
-                  <a:lnTo>
-                    <a:pt x="4183267" y="618518"/>
-                  </a:lnTo>
-                  <a:lnTo>
-                    <a:pt x="4260901" y="533366"/>
-                  </a:lnTo>
-                  <a:lnTo>
-                    <a:pt x="4338535" y="445684"/>
-                  </a:lnTo>
-                  <a:lnTo>
-                    <a:pt x="4416169" y="355396"/>
-                  </a:lnTo>
-                  <a:lnTo>
-                    <a:pt x="4493803" y="262424"/>
-                  </a:lnTo>
-                  <a:lnTo>
-                    <a:pt x="4571437" y="166689"/>
-                  </a:lnTo>
-                  <a:lnTo>
-                    <a:pt x="4649071" y="68110"/>
-                  </a:lnTo>
-                  <a:lnTo>
-                    <a:pt x="4701161" y="0"/>
+                    <a:pt x="67631" y="340038"/>
+                  </a:lnTo>
+                  <a:lnTo>
+                    <a:pt x="144100" y="679630"/>
+                  </a:lnTo>
+                  <a:lnTo>
+                    <a:pt x="220568" y="979583"/>
+                  </a:lnTo>
+                  <a:lnTo>
+                    <a:pt x="297037" y="1244525"/>
+                  </a:lnTo>
+                  <a:lnTo>
+                    <a:pt x="373505" y="1478541"/>
+                  </a:lnTo>
+                  <a:lnTo>
+                    <a:pt x="449973" y="1685243"/>
+                  </a:lnTo>
+                  <a:lnTo>
+                    <a:pt x="526442" y="1867818"/>
+                  </a:lnTo>
+                  <a:lnTo>
+                    <a:pt x="602910" y="2029081"/>
+                  </a:lnTo>
+                  <a:lnTo>
+                    <a:pt x="679379" y="2171522"/>
+                  </a:lnTo>
+                  <a:lnTo>
+                    <a:pt x="755847" y="2297337"/>
+                  </a:lnTo>
+                  <a:lnTo>
+                    <a:pt x="832316" y="2408466"/>
+                  </a:lnTo>
+                  <a:lnTo>
+                    <a:pt x="908784" y="2468266"/>
+                  </a:lnTo>
+                  <a:lnTo>
+                    <a:pt x="985252" y="2445052"/>
+                  </a:lnTo>
+                  <a:lnTo>
+                    <a:pt x="1061721" y="2421147"/>
+                  </a:lnTo>
+                  <a:lnTo>
+                    <a:pt x="1138189" y="2396532"/>
+                  </a:lnTo>
+                  <a:lnTo>
+                    <a:pt x="1214658" y="2371185"/>
+                  </a:lnTo>
+                  <a:lnTo>
+                    <a:pt x="1291126" y="2345085"/>
+                  </a:lnTo>
+                  <a:lnTo>
+                    <a:pt x="1367595" y="2318210"/>
+                  </a:lnTo>
+                  <a:lnTo>
+                    <a:pt x="1444063" y="2290535"/>
+                  </a:lnTo>
+                  <a:lnTo>
+                    <a:pt x="1520531" y="2262039"/>
+                  </a:lnTo>
+                  <a:lnTo>
+                    <a:pt x="1597000" y="2232695"/>
+                  </a:lnTo>
+                  <a:lnTo>
+                    <a:pt x="1673468" y="2202479"/>
+                  </a:lnTo>
+                  <a:lnTo>
+                    <a:pt x="1749937" y="2171365"/>
+                  </a:lnTo>
+                  <a:lnTo>
+                    <a:pt x="1826405" y="2139327"/>
+                  </a:lnTo>
+                  <a:lnTo>
+                    <a:pt x="1902874" y="2106337"/>
+                  </a:lnTo>
+                  <a:lnTo>
+                    <a:pt x="1979342" y="2072366"/>
+                  </a:lnTo>
+                  <a:lnTo>
+                    <a:pt x="2055810" y="2037385"/>
+                  </a:lnTo>
+                  <a:lnTo>
+                    <a:pt x="2132279" y="2001365"/>
+                  </a:lnTo>
+                  <a:lnTo>
+                    <a:pt x="2208747" y="1964274"/>
+                  </a:lnTo>
+                  <a:lnTo>
+                    <a:pt x="2285216" y="1926081"/>
+                  </a:lnTo>
+                  <a:lnTo>
+                    <a:pt x="2361684" y="1886753"/>
+                  </a:lnTo>
+                  <a:lnTo>
+                    <a:pt x="2438153" y="1846256"/>
+                  </a:lnTo>
+                  <a:lnTo>
+                    <a:pt x="2514621" y="1804556"/>
+                  </a:lnTo>
+                  <a:lnTo>
+                    <a:pt x="2591090" y="1761617"/>
+                  </a:lnTo>
+                  <a:lnTo>
+                    <a:pt x="2667558" y="1717401"/>
+                  </a:lnTo>
+                  <a:lnTo>
+                    <a:pt x="2744026" y="1671871"/>
+                  </a:lnTo>
+                  <a:lnTo>
+                    <a:pt x="2820495" y="1624988"/>
+                  </a:lnTo>
+                  <a:lnTo>
+                    <a:pt x="2896963" y="1576712"/>
+                  </a:lnTo>
+                  <a:lnTo>
+                    <a:pt x="2973432" y="1527001"/>
+                  </a:lnTo>
+                  <a:lnTo>
+                    <a:pt x="3049900" y="1475813"/>
+                  </a:lnTo>
+                  <a:lnTo>
+                    <a:pt x="3126369" y="1423103"/>
+                  </a:lnTo>
+                  <a:lnTo>
+                    <a:pt x="3202837" y="1368827"/>
+                  </a:lnTo>
+                  <a:lnTo>
+                    <a:pt x="3279305" y="1312938"/>
+                  </a:lnTo>
+                  <a:lnTo>
+                    <a:pt x="3355774" y="1255388"/>
+                  </a:lnTo>
+                  <a:lnTo>
+                    <a:pt x="3432242" y="1196128"/>
+                  </a:lnTo>
+                  <a:lnTo>
+                    <a:pt x="3508711" y="1135106"/>
+                  </a:lnTo>
+                  <a:lnTo>
+                    <a:pt x="3585179" y="1072271"/>
+                  </a:lnTo>
+                  <a:lnTo>
+                    <a:pt x="3661648" y="1007569"/>
+                  </a:lnTo>
+                  <a:lnTo>
+                    <a:pt x="3738116" y="940943"/>
+                  </a:lnTo>
+                  <a:lnTo>
+                    <a:pt x="3814584" y="872338"/>
+                  </a:lnTo>
+                  <a:lnTo>
+                    <a:pt x="3891053" y="801694"/>
+                  </a:lnTo>
+                  <a:lnTo>
+                    <a:pt x="3967521" y="728950"/>
+                  </a:lnTo>
+                  <a:lnTo>
+                    <a:pt x="4043990" y="654044"/>
+                  </a:lnTo>
+                  <a:lnTo>
+                    <a:pt x="4120458" y="576913"/>
+                  </a:lnTo>
+                  <a:lnTo>
+                    <a:pt x="4196927" y="497489"/>
+                  </a:lnTo>
+                  <a:lnTo>
+                    <a:pt x="4273395" y="415704"/>
+                  </a:lnTo>
+                  <a:lnTo>
+                    <a:pt x="4349863" y="331489"/>
+                  </a:lnTo>
+                  <a:lnTo>
+                    <a:pt x="4426332" y="244772"/>
+                  </a:lnTo>
+                  <a:lnTo>
+                    <a:pt x="4502800" y="155477"/>
+                  </a:lnTo>
+                  <a:lnTo>
+                    <a:pt x="4579269" y="63528"/>
+                  </a:lnTo>
+                  <a:lnTo>
+                    <a:pt x="4630577" y="0"/>
                   </a:lnTo>
                 </a:path>
               </a:pathLst>
@@ -3721,300 +3721,300 @@
           </p:nvSpPr>
           <p:spPr>
             <a:xfrm>
-              <a:off x="817517" y="4743945"/>
-              <a:ext cx="7370972" cy="811885"/>
+              <a:off x="915645" y="4699981"/>
+              <a:ext cx="7260303" cy="757272"/>
             </a:xfrm>
             <a:custGeom>
               <a:avLst/>
               <a:pathLst>
-                <a:path w="7370972" h="811885">
+                <a:path w="7260303" h="757272">
                   <a:moveTo>
-                    <a:pt x="7370972" y="811885"/>
+                    <a:pt x="7260303" y="757272"/>
                   </a:moveTo>
                   <a:lnTo>
-                    <a:pt x="7293338" y="811697"/>
-                  </a:lnTo>
-                  <a:lnTo>
-                    <a:pt x="7215704" y="811485"/>
-                  </a:lnTo>
-                  <a:lnTo>
-                    <a:pt x="7138070" y="811244"/>
-                  </a:lnTo>
-                  <a:lnTo>
-                    <a:pt x="7060436" y="810972"/>
-                  </a:lnTo>
-                  <a:lnTo>
-                    <a:pt x="6982802" y="810664"/>
-                  </a:lnTo>
-                  <a:lnTo>
-                    <a:pt x="6905168" y="810315"/>
-                  </a:lnTo>
-                  <a:lnTo>
-                    <a:pt x="6827534" y="809920"/>
-                  </a:lnTo>
-                  <a:lnTo>
-                    <a:pt x="6749900" y="809473"/>
-                  </a:lnTo>
-                  <a:lnTo>
-                    <a:pt x="6672266" y="808967"/>
-                  </a:lnTo>
-                  <a:lnTo>
-                    <a:pt x="6594632" y="808394"/>
-                  </a:lnTo>
-                  <a:lnTo>
-                    <a:pt x="6516998" y="807745"/>
-                  </a:lnTo>
-                  <a:lnTo>
-                    <a:pt x="6439364" y="807011"/>
-                  </a:lnTo>
-                  <a:lnTo>
-                    <a:pt x="6361730" y="806179"/>
-                  </a:lnTo>
-                  <a:lnTo>
-                    <a:pt x="6284096" y="805237"/>
-                  </a:lnTo>
-                  <a:lnTo>
-                    <a:pt x="6206462" y="804171"/>
-                  </a:lnTo>
-                  <a:lnTo>
-                    <a:pt x="6128827" y="802965"/>
-                  </a:lnTo>
-                  <a:lnTo>
-                    <a:pt x="6051193" y="801598"/>
-                  </a:lnTo>
-                  <a:lnTo>
-                    <a:pt x="5973559" y="800051"/>
-                  </a:lnTo>
-                  <a:lnTo>
-                    <a:pt x="5895925" y="798300"/>
-                  </a:lnTo>
-                  <a:lnTo>
-                    <a:pt x="5818291" y="796317"/>
-                  </a:lnTo>
-                  <a:lnTo>
-                    <a:pt x="5740657" y="794073"/>
-                  </a:lnTo>
-                  <a:lnTo>
-                    <a:pt x="5663023" y="791531"/>
-                  </a:lnTo>
-                  <a:lnTo>
-                    <a:pt x="5585389" y="788654"/>
-                  </a:lnTo>
-                  <a:lnTo>
-                    <a:pt x="5507755" y="785397"/>
-                  </a:lnTo>
-                  <a:lnTo>
-                    <a:pt x="5430121" y="781709"/>
-                  </a:lnTo>
-                  <a:lnTo>
-                    <a:pt x="5352487" y="777534"/>
-                  </a:lnTo>
-                  <a:lnTo>
-                    <a:pt x="5274853" y="772807"/>
-                  </a:lnTo>
-                  <a:lnTo>
-                    <a:pt x="5197219" y="767455"/>
-                  </a:lnTo>
-                  <a:lnTo>
-                    <a:pt x="5119585" y="761396"/>
-                  </a:lnTo>
-                  <a:lnTo>
-                    <a:pt x="5041951" y="754537"/>
-                  </a:lnTo>
-                  <a:lnTo>
-                    <a:pt x="4964317" y="746771"/>
-                  </a:lnTo>
-                  <a:lnTo>
-                    <a:pt x="4886683" y="737978"/>
-                  </a:lnTo>
-                  <a:lnTo>
-                    <a:pt x="4809049" y="728024"/>
-                  </a:lnTo>
-                  <a:lnTo>
-                    <a:pt x="4731415" y="716755"/>
-                  </a:lnTo>
-                  <a:lnTo>
-                    <a:pt x="4653781" y="703996"/>
-                  </a:lnTo>
-                  <a:lnTo>
-                    <a:pt x="4576147" y="689551"/>
-                  </a:lnTo>
-                  <a:lnTo>
-                    <a:pt x="4498513" y="673197"/>
-                  </a:lnTo>
-                  <a:lnTo>
-                    <a:pt x="4420879" y="654682"/>
-                  </a:lnTo>
-                  <a:lnTo>
-                    <a:pt x="4343244" y="633721"/>
-                  </a:lnTo>
-                  <a:lnTo>
-                    <a:pt x="4265610" y="609989"/>
-                  </a:lnTo>
-                  <a:lnTo>
-                    <a:pt x="4187976" y="583121"/>
-                  </a:lnTo>
-                  <a:lnTo>
-                    <a:pt x="4110342" y="552703"/>
-                  </a:lnTo>
-                  <a:lnTo>
-                    <a:pt x="4032708" y="518265"/>
-                  </a:lnTo>
-                  <a:lnTo>
-                    <a:pt x="3955074" y="479276"/>
-                  </a:lnTo>
-                  <a:lnTo>
-                    <a:pt x="3877440" y="435135"/>
-                  </a:lnTo>
-                  <a:lnTo>
-                    <a:pt x="3799806" y="385161"/>
-                  </a:lnTo>
-                  <a:lnTo>
-                    <a:pt x="3722172" y="328583"/>
-                  </a:lnTo>
-                  <a:lnTo>
-                    <a:pt x="3644538" y="264528"/>
-                  </a:lnTo>
-                  <a:lnTo>
-                    <a:pt x="3566904" y="192008"/>
-                  </a:lnTo>
-                  <a:lnTo>
-                    <a:pt x="3489270" y="109905"/>
-                  </a:lnTo>
-                  <a:lnTo>
-                    <a:pt x="3411636" y="16952"/>
-                  </a:lnTo>
-                  <a:lnTo>
-                    <a:pt x="3334002" y="0"/>
-                  </a:lnTo>
-                  <a:lnTo>
-                    <a:pt x="3256368" y="23473"/>
-                  </a:lnTo>
-                  <a:lnTo>
-                    <a:pt x="3178734" y="46268"/>
-                  </a:lnTo>
-                  <a:lnTo>
-                    <a:pt x="3101100" y="68406"/>
-                  </a:lnTo>
-                  <a:lnTo>
-                    <a:pt x="3023466" y="89905"/>
-                  </a:lnTo>
-                  <a:lnTo>
-                    <a:pt x="2945832" y="110783"/>
-                  </a:lnTo>
-                  <a:lnTo>
-                    <a:pt x="2868198" y="131058"/>
-                  </a:lnTo>
-                  <a:lnTo>
-                    <a:pt x="2790564" y="150749"/>
-                  </a:lnTo>
-                  <a:lnTo>
-                    <a:pt x="2712930" y="169871"/>
-                  </a:lnTo>
-                  <a:lnTo>
-                    <a:pt x="2635295" y="188441"/>
-                  </a:lnTo>
-                  <a:lnTo>
-                    <a:pt x="2557661" y="206476"/>
-                  </a:lnTo>
-                  <a:lnTo>
-                    <a:pt x="2480027" y="223990"/>
-                  </a:lnTo>
-                  <a:lnTo>
-                    <a:pt x="2402393" y="240998"/>
-                  </a:lnTo>
-                  <a:lnTo>
-                    <a:pt x="2324759" y="257516"/>
-                  </a:lnTo>
-                  <a:lnTo>
-                    <a:pt x="2247125" y="273556"/>
-                  </a:lnTo>
-                  <a:lnTo>
-                    <a:pt x="2169491" y="289134"/>
-                  </a:lnTo>
-                  <a:lnTo>
-                    <a:pt x="2091857" y="304262"/>
-                  </a:lnTo>
-                  <a:lnTo>
-                    <a:pt x="2014223" y="318954"/>
-                  </a:lnTo>
-                  <a:lnTo>
-                    <a:pt x="1936589" y="333222"/>
-                  </a:lnTo>
-                  <a:lnTo>
-                    <a:pt x="1858955" y="347077"/>
-                  </a:lnTo>
-                  <a:lnTo>
-                    <a:pt x="1781321" y="360533"/>
-                  </a:lnTo>
-                  <a:lnTo>
-                    <a:pt x="1703687" y="373601"/>
-                  </a:lnTo>
-                  <a:lnTo>
-                    <a:pt x="1626053" y="386291"/>
-                  </a:lnTo>
-                  <a:lnTo>
-                    <a:pt x="1548419" y="398615"/>
-                  </a:lnTo>
-                  <a:lnTo>
-                    <a:pt x="1470785" y="410584"/>
-                  </a:lnTo>
-                  <a:lnTo>
-                    <a:pt x="1393151" y="422207"/>
-                  </a:lnTo>
-                  <a:lnTo>
-                    <a:pt x="1315517" y="433494"/>
-                  </a:lnTo>
-                  <a:lnTo>
-                    <a:pt x="1237883" y="444456"/>
-                  </a:lnTo>
-                  <a:lnTo>
-                    <a:pt x="1160249" y="455102"/>
-                  </a:lnTo>
-                  <a:lnTo>
-                    <a:pt x="1082615" y="465440"/>
-                  </a:lnTo>
-                  <a:lnTo>
-                    <a:pt x="1004981" y="475480"/>
-                  </a:lnTo>
-                  <a:lnTo>
-                    <a:pt x="927346" y="485230"/>
-                  </a:lnTo>
-                  <a:lnTo>
-                    <a:pt x="849712" y="494698"/>
-                  </a:lnTo>
-                  <a:lnTo>
-                    <a:pt x="772078" y="503894"/>
-                  </a:lnTo>
-                  <a:lnTo>
-                    <a:pt x="694444" y="512824"/>
-                  </a:lnTo>
-                  <a:lnTo>
-                    <a:pt x="616810" y="521496"/>
-                  </a:lnTo>
-                  <a:lnTo>
-                    <a:pt x="539176" y="529918"/>
-                  </a:lnTo>
-                  <a:lnTo>
-                    <a:pt x="461542" y="538097"/>
-                  </a:lnTo>
-                  <a:lnTo>
-                    <a:pt x="383908" y="546040"/>
-                  </a:lnTo>
-                  <a:lnTo>
-                    <a:pt x="306274" y="553753"/>
-                  </a:lnTo>
-                  <a:lnTo>
-                    <a:pt x="228640" y="561244"/>
-                  </a:lnTo>
-                  <a:lnTo>
-                    <a:pt x="151006" y="568519"/>
-                  </a:lnTo>
-                  <a:lnTo>
-                    <a:pt x="73372" y="575584"/>
-                  </a:lnTo>
-                  <a:lnTo>
-                    <a:pt x="0" y="582068"/>
+                    <a:pt x="7183835" y="757097"/>
+                  </a:lnTo>
+                  <a:lnTo>
+                    <a:pt x="7107366" y="756899"/>
+                  </a:lnTo>
+                  <a:lnTo>
+                    <a:pt x="7030898" y="756675"/>
+                  </a:lnTo>
+                  <a:lnTo>
+                    <a:pt x="6954429" y="756421"/>
+                  </a:lnTo>
+                  <a:lnTo>
+                    <a:pt x="6877961" y="756134"/>
+                  </a:lnTo>
+                  <a:lnTo>
+                    <a:pt x="6801492" y="755808"/>
+                  </a:lnTo>
+                  <a:lnTo>
+                    <a:pt x="6725024" y="755440"/>
+                  </a:lnTo>
+                  <a:lnTo>
+                    <a:pt x="6648556" y="755023"/>
+                  </a:lnTo>
+                  <a:lnTo>
+                    <a:pt x="6572087" y="754551"/>
+                  </a:lnTo>
+                  <a:lnTo>
+                    <a:pt x="6495619" y="754016"/>
+                  </a:lnTo>
+                  <a:lnTo>
+                    <a:pt x="6419150" y="753411"/>
+                  </a:lnTo>
+                  <a:lnTo>
+                    <a:pt x="6342682" y="752726"/>
+                  </a:lnTo>
+                  <a:lnTo>
+                    <a:pt x="6266213" y="751950"/>
+                  </a:lnTo>
+                  <a:lnTo>
+                    <a:pt x="6189745" y="751072"/>
+                  </a:lnTo>
+                  <a:lnTo>
+                    <a:pt x="6113277" y="750078"/>
+                  </a:lnTo>
+                  <a:lnTo>
+                    <a:pt x="6036808" y="748952"/>
+                  </a:lnTo>
+                  <a:lnTo>
+                    <a:pt x="5960340" y="747678"/>
+                  </a:lnTo>
+                  <a:lnTo>
+                    <a:pt x="5883871" y="746235"/>
+                  </a:lnTo>
+                  <a:lnTo>
+                    <a:pt x="5807403" y="744601"/>
+                  </a:lnTo>
+                  <a:lnTo>
+                    <a:pt x="5730934" y="742752"/>
+                  </a:lnTo>
+                  <a:lnTo>
+                    <a:pt x="5654466" y="740658"/>
+                  </a:lnTo>
+                  <a:lnTo>
+                    <a:pt x="5577998" y="738288"/>
+                  </a:lnTo>
+                  <a:lnTo>
+                    <a:pt x="5501529" y="735604"/>
+                  </a:lnTo>
+                  <a:lnTo>
+                    <a:pt x="5425061" y="732566"/>
+                  </a:lnTo>
+                  <a:lnTo>
+                    <a:pt x="5348592" y="729126"/>
+                  </a:lnTo>
+                  <a:lnTo>
+                    <a:pt x="5272124" y="725232"/>
+                  </a:lnTo>
+                  <a:lnTo>
+                    <a:pt x="5195655" y="720823"/>
+                  </a:lnTo>
+                  <a:lnTo>
+                    <a:pt x="5119187" y="715831"/>
+                  </a:lnTo>
+                  <a:lnTo>
+                    <a:pt x="5042719" y="710180"/>
+                  </a:lnTo>
+                  <a:lnTo>
+                    <a:pt x="4966250" y="703782"/>
+                  </a:lnTo>
+                  <a:lnTo>
+                    <a:pt x="4889782" y="696538"/>
+                  </a:lnTo>
+                  <a:lnTo>
+                    <a:pt x="4813313" y="688337"/>
+                  </a:lnTo>
+                  <a:lnTo>
+                    <a:pt x="4736845" y="679053"/>
+                  </a:lnTo>
+                  <a:lnTo>
+                    <a:pt x="4660376" y="668541"/>
+                  </a:lnTo>
+                  <a:lnTo>
+                    <a:pt x="4583908" y="656640"/>
+                  </a:lnTo>
+                  <a:lnTo>
+                    <a:pt x="4507439" y="643167"/>
+                  </a:lnTo>
+                  <a:lnTo>
+                    <a:pt x="4430971" y="627914"/>
+                  </a:lnTo>
+                  <a:lnTo>
+                    <a:pt x="4354503" y="610644"/>
+                  </a:lnTo>
+                  <a:lnTo>
+                    <a:pt x="4278034" y="591093"/>
+                  </a:lnTo>
+                  <a:lnTo>
+                    <a:pt x="4201566" y="568957"/>
+                  </a:lnTo>
+                  <a:lnTo>
+                    <a:pt x="4125097" y="543897"/>
+                  </a:lnTo>
+                  <a:lnTo>
+                    <a:pt x="4048629" y="515525"/>
+                  </a:lnTo>
+                  <a:lnTo>
+                    <a:pt x="3972160" y="483403"/>
+                  </a:lnTo>
+                  <a:lnTo>
+                    <a:pt x="3895692" y="447037"/>
+                  </a:lnTo>
+                  <a:lnTo>
+                    <a:pt x="3819224" y="405865"/>
+                  </a:lnTo>
+                  <a:lnTo>
+                    <a:pt x="3742755" y="359253"/>
+                  </a:lnTo>
+                  <a:lnTo>
+                    <a:pt x="3666287" y="306480"/>
+                  </a:lnTo>
+                  <a:lnTo>
+                    <a:pt x="3589818" y="246734"/>
+                  </a:lnTo>
+                  <a:lnTo>
+                    <a:pt x="3513350" y="179092"/>
+                  </a:lnTo>
+                  <a:lnTo>
+                    <a:pt x="3436881" y="102512"/>
+                  </a:lnTo>
+                  <a:lnTo>
+                    <a:pt x="3360413" y="15811"/>
+                  </a:lnTo>
+                  <a:lnTo>
+                    <a:pt x="3283945" y="0"/>
+                  </a:lnTo>
+                  <a:lnTo>
+                    <a:pt x="3207476" y="21894"/>
+                  </a:lnTo>
+                  <a:lnTo>
+                    <a:pt x="3131008" y="43156"/>
+                  </a:lnTo>
+                  <a:lnTo>
+                    <a:pt x="3054539" y="63804"/>
+                  </a:lnTo>
+                  <a:lnTo>
+                    <a:pt x="2978071" y="83857"/>
+                  </a:lnTo>
+                  <a:lnTo>
+                    <a:pt x="2901602" y="103331"/>
+                  </a:lnTo>
+                  <a:lnTo>
+                    <a:pt x="2825134" y="122243"/>
+                  </a:lnTo>
+                  <a:lnTo>
+                    <a:pt x="2748666" y="140609"/>
+                  </a:lnTo>
+                  <a:lnTo>
+                    <a:pt x="2672197" y="158445"/>
+                  </a:lnTo>
+                  <a:lnTo>
+                    <a:pt x="2595729" y="175766"/>
+                  </a:lnTo>
+                  <a:lnTo>
+                    <a:pt x="2519260" y="192587"/>
+                  </a:lnTo>
+                  <a:lnTo>
+                    <a:pt x="2442792" y="208923"/>
+                  </a:lnTo>
+                  <a:lnTo>
+                    <a:pt x="2366323" y="224787"/>
+                  </a:lnTo>
+                  <a:lnTo>
+                    <a:pt x="2289855" y="240193"/>
+                  </a:lnTo>
+                  <a:lnTo>
+                    <a:pt x="2213386" y="255155"/>
+                  </a:lnTo>
+                  <a:lnTo>
+                    <a:pt x="2136918" y="269685"/>
+                  </a:lnTo>
+                  <a:lnTo>
+                    <a:pt x="2060450" y="283796"/>
+                  </a:lnTo>
+                  <a:lnTo>
+                    <a:pt x="1983981" y="297499"/>
+                  </a:lnTo>
+                  <a:lnTo>
+                    <a:pt x="1907513" y="310807"/>
+                  </a:lnTo>
+                  <a:lnTo>
+                    <a:pt x="1831044" y="323731"/>
+                  </a:lnTo>
+                  <a:lnTo>
+                    <a:pt x="1754576" y="336282"/>
+                  </a:lnTo>
+                  <a:lnTo>
+                    <a:pt x="1678107" y="348470"/>
+                  </a:lnTo>
+                  <a:lnTo>
+                    <a:pt x="1601639" y="360307"/>
+                  </a:lnTo>
+                  <a:lnTo>
+                    <a:pt x="1525171" y="371802"/>
+                  </a:lnTo>
+                  <a:lnTo>
+                    <a:pt x="1448702" y="382965"/>
+                  </a:lnTo>
+                  <a:lnTo>
+                    <a:pt x="1372234" y="393807"/>
+                  </a:lnTo>
+                  <a:lnTo>
+                    <a:pt x="1295765" y="404335"/>
+                  </a:lnTo>
+                  <a:lnTo>
+                    <a:pt x="1219297" y="414559"/>
+                  </a:lnTo>
+                  <a:lnTo>
+                    <a:pt x="1142828" y="424489"/>
+                  </a:lnTo>
+                  <a:lnTo>
+                    <a:pt x="1066360" y="434131"/>
+                  </a:lnTo>
+                  <a:lnTo>
+                    <a:pt x="989892" y="443496"/>
+                  </a:lnTo>
+                  <a:lnTo>
+                    <a:pt x="913423" y="452590"/>
+                  </a:lnTo>
+                  <a:lnTo>
+                    <a:pt x="836955" y="461422"/>
+                  </a:lnTo>
+                  <a:lnTo>
+                    <a:pt x="760486" y="469999"/>
+                  </a:lnTo>
+                  <a:lnTo>
+                    <a:pt x="684018" y="478328"/>
+                  </a:lnTo>
+                  <a:lnTo>
+                    <a:pt x="607549" y="486417"/>
+                  </a:lnTo>
+                  <a:lnTo>
+                    <a:pt x="531081" y="494272"/>
+                  </a:lnTo>
+                  <a:lnTo>
+                    <a:pt x="454613" y="501901"/>
+                  </a:lnTo>
+                  <a:lnTo>
+                    <a:pt x="378144" y="509310"/>
+                  </a:lnTo>
+                  <a:lnTo>
+                    <a:pt x="301676" y="516504"/>
+                  </a:lnTo>
+                  <a:lnTo>
+                    <a:pt x="225207" y="523491"/>
+                  </a:lnTo>
+                  <a:lnTo>
+                    <a:pt x="148739" y="530277"/>
+                  </a:lnTo>
+                  <a:lnTo>
+                    <a:pt x="72270" y="536866"/>
+                  </a:lnTo>
+                  <a:lnTo>
+                    <a:pt x="0" y="542915"/>
                   </a:lnTo>
                 </a:path>
               </a:pathLst>
@@ -4034,261 +4034,261 @@
           </p:nvSpPr>
           <p:spPr>
             <a:xfrm>
-              <a:off x="1854431" y="2073503"/>
-              <a:ext cx="6334059" cy="3410996"/>
+              <a:off x="1936990" y="2209169"/>
+              <a:ext cx="6238958" cy="3181551"/>
             </a:xfrm>
             <a:custGeom>
               <a:avLst/>
               <a:pathLst>
-                <a:path w="6334059" h="3410996">
+                <a:path w="6238958" h="3181551">
                   <a:moveTo>
                     <a:pt x="0" y="0"/>
                   </a:moveTo>
                   <a:lnTo>
-                    <a:pt x="45701" y="96814"/>
-                  </a:lnTo>
-                  <a:lnTo>
-                    <a:pt x="123335" y="253659"/>
-                  </a:lnTo>
-                  <a:lnTo>
-                    <a:pt x="200969" y="403241"/>
-                  </a:lnTo>
-                  <a:lnTo>
-                    <a:pt x="278603" y="545896"/>
-                  </a:lnTo>
-                  <a:lnTo>
-                    <a:pt x="356237" y="681945"/>
-                  </a:lnTo>
-                  <a:lnTo>
-                    <a:pt x="433871" y="811693"/>
-                  </a:lnTo>
-                  <a:lnTo>
-                    <a:pt x="511505" y="935433"/>
-                  </a:lnTo>
-                  <a:lnTo>
-                    <a:pt x="589139" y="1053442"/>
-                  </a:lnTo>
-                  <a:lnTo>
-                    <a:pt x="666773" y="1165987"/>
-                  </a:lnTo>
-                  <a:lnTo>
-                    <a:pt x="744407" y="1273320"/>
-                  </a:lnTo>
-                  <a:lnTo>
-                    <a:pt x="822041" y="1375682"/>
-                  </a:lnTo>
-                  <a:lnTo>
-                    <a:pt x="899676" y="1473304"/>
-                  </a:lnTo>
-                  <a:lnTo>
-                    <a:pt x="977310" y="1566406"/>
-                  </a:lnTo>
-                  <a:lnTo>
-                    <a:pt x="1054944" y="1655196"/>
-                  </a:lnTo>
-                  <a:lnTo>
-                    <a:pt x="1132578" y="1739874"/>
-                  </a:lnTo>
-                  <a:lnTo>
-                    <a:pt x="1210212" y="1820631"/>
-                  </a:lnTo>
-                  <a:lnTo>
-                    <a:pt x="1287846" y="1897648"/>
-                  </a:lnTo>
-                  <a:lnTo>
-                    <a:pt x="1365480" y="1971098"/>
-                  </a:lnTo>
-                  <a:lnTo>
-                    <a:pt x="1443114" y="2041147"/>
-                  </a:lnTo>
-                  <a:lnTo>
-                    <a:pt x="1520748" y="2107952"/>
-                  </a:lnTo>
-                  <a:lnTo>
-                    <a:pt x="1598382" y="2171664"/>
-                  </a:lnTo>
-                  <a:lnTo>
-                    <a:pt x="1676016" y="2232425"/>
-                  </a:lnTo>
-                  <a:lnTo>
-                    <a:pt x="1753650" y="2290372"/>
-                  </a:lnTo>
-                  <a:lnTo>
-                    <a:pt x="1831284" y="2345636"/>
-                  </a:lnTo>
-                  <a:lnTo>
-                    <a:pt x="1908918" y="2398341"/>
-                  </a:lnTo>
-                  <a:lnTo>
-                    <a:pt x="1986552" y="2448605"/>
-                  </a:lnTo>
-                  <a:lnTo>
-                    <a:pt x="2064186" y="2496541"/>
-                  </a:lnTo>
-                  <a:lnTo>
-                    <a:pt x="2141820" y="2542257"/>
-                  </a:lnTo>
-                  <a:lnTo>
-                    <a:pt x="2219454" y="2585857"/>
-                  </a:lnTo>
-                  <a:lnTo>
-                    <a:pt x="2297088" y="2627437"/>
-                  </a:lnTo>
-                  <a:lnTo>
-                    <a:pt x="2374722" y="2667092"/>
-                  </a:lnTo>
-                  <a:lnTo>
-                    <a:pt x="2452356" y="2704910"/>
-                  </a:lnTo>
-                  <a:lnTo>
-                    <a:pt x="2529990" y="2740977"/>
-                  </a:lnTo>
-                  <a:lnTo>
-                    <a:pt x="2607625" y="2775374"/>
-                  </a:lnTo>
-                  <a:lnTo>
-                    <a:pt x="2685259" y="2808178"/>
-                  </a:lnTo>
-                  <a:lnTo>
-                    <a:pt x="2762893" y="2839463"/>
-                  </a:lnTo>
-                  <a:lnTo>
-                    <a:pt x="2840527" y="2869299"/>
-                  </a:lnTo>
-                  <a:lnTo>
-                    <a:pt x="2918161" y="2897753"/>
-                  </a:lnTo>
-                  <a:lnTo>
-                    <a:pt x="2995795" y="2924890"/>
-                  </a:lnTo>
-                  <a:lnTo>
-                    <a:pt x="3073429" y="2950770"/>
-                  </a:lnTo>
-                  <a:lnTo>
-                    <a:pt x="3151063" y="2975451"/>
-                  </a:lnTo>
-                  <a:lnTo>
-                    <a:pt x="3228697" y="2998990"/>
-                  </a:lnTo>
-                  <a:lnTo>
-                    <a:pt x="3306331" y="3021439"/>
-                  </a:lnTo>
-                  <a:lnTo>
-                    <a:pt x="3383965" y="3042847"/>
-                  </a:lnTo>
-                  <a:lnTo>
-                    <a:pt x="3461599" y="3063265"/>
-                  </a:lnTo>
-                  <a:lnTo>
-                    <a:pt x="3539233" y="3082737"/>
-                  </a:lnTo>
-                  <a:lnTo>
-                    <a:pt x="3616867" y="3101307"/>
-                  </a:lnTo>
-                  <a:lnTo>
-                    <a:pt x="3694501" y="3119018"/>
-                  </a:lnTo>
-                  <a:lnTo>
-                    <a:pt x="3772135" y="3135908"/>
-                  </a:lnTo>
-                  <a:lnTo>
-                    <a:pt x="3849769" y="3152016"/>
-                  </a:lnTo>
-                  <a:lnTo>
-                    <a:pt x="3927403" y="3167378"/>
-                  </a:lnTo>
-                  <a:lnTo>
-                    <a:pt x="4005037" y="3182029"/>
-                  </a:lnTo>
-                  <a:lnTo>
-                    <a:pt x="4082671" y="3196001"/>
-                  </a:lnTo>
-                  <a:lnTo>
-                    <a:pt x="4160305" y="3209326"/>
-                  </a:lnTo>
-                  <a:lnTo>
-                    <a:pt x="4237939" y="3222034"/>
-                  </a:lnTo>
-                  <a:lnTo>
-                    <a:pt x="4315574" y="3234154"/>
-                  </a:lnTo>
-                  <a:lnTo>
-                    <a:pt x="4393208" y="3245712"/>
-                  </a:lnTo>
-                  <a:lnTo>
-                    <a:pt x="4470842" y="3256735"/>
-                  </a:lnTo>
-                  <a:lnTo>
-                    <a:pt x="4548476" y="3267248"/>
-                  </a:lnTo>
-                  <a:lnTo>
-                    <a:pt x="4626110" y="3277274"/>
-                  </a:lnTo>
-                  <a:lnTo>
-                    <a:pt x="4703744" y="3286835"/>
-                  </a:lnTo>
-                  <a:lnTo>
-                    <a:pt x="4781378" y="3295954"/>
-                  </a:lnTo>
-                  <a:lnTo>
-                    <a:pt x="4859012" y="3304650"/>
-                  </a:lnTo>
-                  <a:lnTo>
-                    <a:pt x="4936646" y="3312944"/>
-                  </a:lnTo>
-                  <a:lnTo>
-                    <a:pt x="5014280" y="3320854"/>
-                  </a:lnTo>
-                  <a:lnTo>
-                    <a:pt x="5091914" y="3328397"/>
-                  </a:lnTo>
-                  <a:lnTo>
-                    <a:pt x="5169548" y="3335591"/>
-                  </a:lnTo>
-                  <a:lnTo>
-                    <a:pt x="5247182" y="3342452"/>
-                  </a:lnTo>
-                  <a:lnTo>
-                    <a:pt x="5324816" y="3348995"/>
-                  </a:lnTo>
-                  <a:lnTo>
-                    <a:pt x="5402450" y="3355235"/>
-                  </a:lnTo>
-                  <a:lnTo>
-                    <a:pt x="5480084" y="3361187"/>
-                  </a:lnTo>
-                  <a:lnTo>
-                    <a:pt x="5557718" y="3366862"/>
-                  </a:lnTo>
-                  <a:lnTo>
-                    <a:pt x="5635352" y="3372275"/>
-                  </a:lnTo>
-                  <a:lnTo>
-                    <a:pt x="5712986" y="3377437"/>
-                  </a:lnTo>
-                  <a:lnTo>
-                    <a:pt x="5790620" y="3382360"/>
-                  </a:lnTo>
-                  <a:lnTo>
-                    <a:pt x="5868254" y="3387055"/>
-                  </a:lnTo>
-                  <a:lnTo>
-                    <a:pt x="5945888" y="3391533"/>
-                  </a:lnTo>
-                  <a:lnTo>
-                    <a:pt x="6023522" y="3395803"/>
-                  </a:lnTo>
-                  <a:lnTo>
-                    <a:pt x="6101157" y="3399876"/>
-                  </a:lnTo>
-                  <a:lnTo>
-                    <a:pt x="6178791" y="3403760"/>
-                  </a:lnTo>
-                  <a:lnTo>
-                    <a:pt x="6256425" y="3407464"/>
-                  </a:lnTo>
-                  <a:lnTo>
-                    <a:pt x="6334059" y="3410996"/>
+                    <a:pt x="45015" y="90302"/>
+                  </a:lnTo>
+                  <a:lnTo>
+                    <a:pt x="121483" y="236597"/>
+                  </a:lnTo>
+                  <a:lnTo>
+                    <a:pt x="197952" y="376117"/>
+                  </a:lnTo>
+                  <a:lnTo>
+                    <a:pt x="274420" y="509175"/>
+                  </a:lnTo>
+                  <a:lnTo>
+                    <a:pt x="350889" y="636073"/>
+                  </a:lnTo>
+                  <a:lnTo>
+                    <a:pt x="427357" y="757093"/>
+                  </a:lnTo>
+                  <a:lnTo>
+                    <a:pt x="503825" y="872510"/>
+                  </a:lnTo>
+                  <a:lnTo>
+                    <a:pt x="580294" y="982581"/>
+                  </a:lnTo>
+                  <a:lnTo>
+                    <a:pt x="656762" y="1087555"/>
+                  </a:lnTo>
+                  <a:lnTo>
+                    <a:pt x="733231" y="1187668"/>
+                  </a:lnTo>
+                  <a:lnTo>
+                    <a:pt x="809699" y="1283145"/>
+                  </a:lnTo>
+                  <a:lnTo>
+                    <a:pt x="886168" y="1374201"/>
+                  </a:lnTo>
+                  <a:lnTo>
+                    <a:pt x="962636" y="1461039"/>
+                  </a:lnTo>
+                  <a:lnTo>
+                    <a:pt x="1039104" y="1543857"/>
+                  </a:lnTo>
+                  <a:lnTo>
+                    <a:pt x="1115573" y="1622839"/>
+                  </a:lnTo>
+                  <a:lnTo>
+                    <a:pt x="1192041" y="1698163"/>
+                  </a:lnTo>
+                  <a:lnTo>
+                    <a:pt x="1268510" y="1770000"/>
+                  </a:lnTo>
+                  <a:lnTo>
+                    <a:pt x="1344978" y="1838510"/>
+                  </a:lnTo>
+                  <a:lnTo>
+                    <a:pt x="1421447" y="1903847"/>
+                  </a:lnTo>
+                  <a:lnTo>
+                    <a:pt x="1497915" y="1966158"/>
+                  </a:lnTo>
+                  <a:lnTo>
+                    <a:pt x="1574384" y="2025584"/>
+                  </a:lnTo>
+                  <a:lnTo>
+                    <a:pt x="1650852" y="2082258"/>
+                  </a:lnTo>
+                  <a:lnTo>
+                    <a:pt x="1727320" y="2136307"/>
+                  </a:lnTo>
+                  <a:lnTo>
+                    <a:pt x="1803789" y="2187854"/>
+                  </a:lnTo>
+                  <a:lnTo>
+                    <a:pt x="1880257" y="2237013"/>
+                  </a:lnTo>
+                  <a:lnTo>
+                    <a:pt x="1956726" y="2283896"/>
+                  </a:lnTo>
+                  <a:lnTo>
+                    <a:pt x="2033194" y="2328608"/>
+                  </a:lnTo>
+                  <a:lnTo>
+                    <a:pt x="2109663" y="2371249"/>
+                  </a:lnTo>
+                  <a:lnTo>
+                    <a:pt x="2186131" y="2411916"/>
+                  </a:lnTo>
+                  <a:lnTo>
+                    <a:pt x="2262599" y="2450699"/>
+                  </a:lnTo>
+                  <a:lnTo>
+                    <a:pt x="2339068" y="2487686"/>
+                  </a:lnTo>
+                  <a:lnTo>
+                    <a:pt x="2415536" y="2522961"/>
+                  </a:lnTo>
+                  <a:lnTo>
+                    <a:pt x="2492005" y="2556602"/>
+                  </a:lnTo>
+                  <a:lnTo>
+                    <a:pt x="2568473" y="2588685"/>
+                  </a:lnTo>
+                  <a:lnTo>
+                    <a:pt x="2644942" y="2619282"/>
+                  </a:lnTo>
+                  <a:lnTo>
+                    <a:pt x="2721410" y="2648462"/>
+                  </a:lnTo>
+                  <a:lnTo>
+                    <a:pt x="2797878" y="2676292"/>
+                  </a:lnTo>
+                  <a:lnTo>
+                    <a:pt x="2874347" y="2702832"/>
+                  </a:lnTo>
+                  <a:lnTo>
+                    <a:pt x="2950815" y="2728143"/>
+                  </a:lnTo>
+                  <a:lnTo>
+                    <a:pt x="3027284" y="2752282"/>
+                  </a:lnTo>
+                  <a:lnTo>
+                    <a:pt x="3103752" y="2775304"/>
+                  </a:lnTo>
+                  <a:lnTo>
+                    <a:pt x="3180221" y="2797259"/>
+                  </a:lnTo>
+                  <a:lnTo>
+                    <a:pt x="3256689" y="2818197"/>
+                  </a:lnTo>
+                  <a:lnTo>
+                    <a:pt x="3333157" y="2838166"/>
+                  </a:lnTo>
+                  <a:lnTo>
+                    <a:pt x="3409626" y="2857210"/>
+                  </a:lnTo>
+                  <a:lnTo>
+                    <a:pt x="3486094" y="2875373"/>
+                  </a:lnTo>
+                  <a:lnTo>
+                    <a:pt x="3562563" y="2892694"/>
+                  </a:lnTo>
+                  <a:lnTo>
+                    <a:pt x="3639031" y="2909213"/>
+                  </a:lnTo>
+                  <a:lnTo>
+                    <a:pt x="3715500" y="2924967"/>
+                  </a:lnTo>
+                  <a:lnTo>
+                    <a:pt x="3791968" y="2939991"/>
+                  </a:lnTo>
+                  <a:lnTo>
+                    <a:pt x="3868437" y="2954320"/>
+                  </a:lnTo>
+                  <a:lnTo>
+                    <a:pt x="3944905" y="2967985"/>
+                  </a:lnTo>
+                  <a:lnTo>
+                    <a:pt x="4021373" y="2981018"/>
+                  </a:lnTo>
+                  <a:lnTo>
+                    <a:pt x="4097842" y="2993446"/>
+                  </a:lnTo>
+                  <a:lnTo>
+                    <a:pt x="4174310" y="3005300"/>
+                  </a:lnTo>
+                  <a:lnTo>
+                    <a:pt x="4250779" y="3016604"/>
+                  </a:lnTo>
+                  <a:lnTo>
+                    <a:pt x="4327247" y="3027385"/>
+                  </a:lnTo>
+                  <a:lnTo>
+                    <a:pt x="4403716" y="3037667"/>
+                  </a:lnTo>
+                  <a:lnTo>
+                    <a:pt x="4480184" y="3047472"/>
+                  </a:lnTo>
+                  <a:lnTo>
+                    <a:pt x="4556652" y="3056823"/>
+                  </a:lnTo>
+                  <a:lnTo>
+                    <a:pt x="4633121" y="3065742"/>
+                  </a:lnTo>
+                  <a:lnTo>
+                    <a:pt x="4709589" y="3074247"/>
+                  </a:lnTo>
+                  <a:lnTo>
+                    <a:pt x="4786058" y="3082359"/>
+                  </a:lnTo>
+                  <a:lnTo>
+                    <a:pt x="4862526" y="3090095"/>
+                  </a:lnTo>
+                  <a:lnTo>
+                    <a:pt x="4938995" y="3097472"/>
+                  </a:lnTo>
+                  <a:lnTo>
+                    <a:pt x="5015463" y="3104508"/>
+                  </a:lnTo>
+                  <a:lnTo>
+                    <a:pt x="5091931" y="3111218"/>
+                  </a:lnTo>
+                  <a:lnTo>
+                    <a:pt x="5168400" y="3117618"/>
+                  </a:lnTo>
+                  <a:lnTo>
+                    <a:pt x="5244868" y="3123721"/>
+                  </a:lnTo>
+                  <a:lnTo>
+                    <a:pt x="5321337" y="3129541"/>
+                  </a:lnTo>
+                  <a:lnTo>
+                    <a:pt x="5397805" y="3135092"/>
+                  </a:lnTo>
+                  <a:lnTo>
+                    <a:pt x="5474274" y="3140386"/>
+                  </a:lnTo>
+                  <a:lnTo>
+                    <a:pt x="5550742" y="3145434"/>
+                  </a:lnTo>
+                  <a:lnTo>
+                    <a:pt x="5627210" y="3150249"/>
+                  </a:lnTo>
+                  <a:lnTo>
+                    <a:pt x="5703679" y="3154841"/>
+                  </a:lnTo>
+                  <a:lnTo>
+                    <a:pt x="5780147" y="3159221"/>
+                  </a:lnTo>
+                  <a:lnTo>
+                    <a:pt x="5856616" y="3163397"/>
+                  </a:lnTo>
+                  <a:lnTo>
+                    <a:pt x="5933084" y="3167380"/>
+                  </a:lnTo>
+                  <a:lnTo>
+                    <a:pt x="6009553" y="3171179"/>
+                  </a:lnTo>
+                  <a:lnTo>
+                    <a:pt x="6086021" y="3174801"/>
+                  </a:lnTo>
+                  <a:lnTo>
+                    <a:pt x="6162490" y="3178256"/>
+                  </a:lnTo>
+                  <a:lnTo>
+                    <a:pt x="6238958" y="3181551"/>
                   </a:lnTo>
                 </a:path>
               </a:pathLst>
@@ -4317,21 +4317,21 @@
           </p:nvSpPr>
           <p:spPr>
             <a:xfrm>
-              <a:off x="817517" y="4727786"/>
-              <a:ext cx="7799693" cy="0"/>
+              <a:off x="915645" y="4684908"/>
+              <a:ext cx="7682587" cy="0"/>
             </a:xfrm>
             <a:custGeom>
               <a:avLst/>
               <a:pathLst>
-                <a:path w="7799693" h="0">
+                <a:path w="7682587" h="0">
                   <a:moveTo>
                     <a:pt x="0" y="0"/>
                   </a:moveTo>
                   <a:lnTo>
-                    <a:pt x="7799693" y="0"/>
-                  </a:lnTo>
-                  <a:lnTo>
-                    <a:pt x="7799693" y="0"/>
+                    <a:pt x="7682587" y="0"/>
+                  </a:lnTo>
+                  <a:lnTo>
+                    <a:pt x="7682587" y="0"/>
                   </a:lnTo>
                 </a:path>
               </a:pathLst>
@@ -4360,15 +4360,15 @@
           </p:nvSpPr>
           <p:spPr>
             <a:xfrm>
-              <a:off x="4203673" y="2073503"/>
-              <a:ext cx="0" cy="3649639"/>
+              <a:off x="4250960" y="2209169"/>
+              <a:ext cx="0" cy="3404141"/>
             </a:xfrm>
             <a:custGeom>
               <a:avLst/>
               <a:pathLst>
-                <a:path w="0" h="3649639">
+                <a:path w="0" h="3404141">
                   <a:moveTo>
-                    <a:pt x="0" y="3649639"/>
+                    <a:pt x="0" y="3404141"/>
                   </a:moveTo>
                   <a:lnTo>
                     <a:pt x="0" y="0"/>
@@ -4403,8 +4403,8 @@
           </p:nvSpPr>
           <p:spPr>
             <a:xfrm>
-              <a:off x="692708" y="5517199"/>
-              <a:ext cx="62179" cy="80101"/>
+              <a:off x="756929" y="5407599"/>
+              <a:ext cx="79004" cy="101955"/>
             </a:xfrm>
             <a:prstGeom prst="rect">
               <a:avLst/>
@@ -4417,7 +4417,7 @@
             <a:p>
               <a:pPr algn="l" marL="0" marR="0" indent="0">
                 <a:lnSpc>
-                  <a:spcPts val="880"/>
+                  <a:spcPts val="1120"/>
                 </a:lnSpc>
                 <a:spcBef>
                   <a:spcPts val="0"/>
@@ -4427,7 +4427,7 @@
                 </a:spcAft>
               </a:pPr>
               <a:r>
-                <a:rPr sz="880">
+                <a:rPr sz="1120">
                   <a:solidFill>
                     <a:srgbClr val="4D4D4D">
                       <a:alpha val="100000"/>
@@ -4449,8 +4449,8 @@
           </p:nvSpPr>
           <p:spPr>
             <a:xfrm>
-              <a:off x="692708" y="4687735"/>
-              <a:ext cx="62179" cy="80101"/>
+              <a:off x="756929" y="4633931"/>
+              <a:ext cx="79004" cy="101955"/>
             </a:xfrm>
             <a:prstGeom prst="rect">
               <a:avLst/>
@@ -4463,7 +4463,7 @@
             <a:p>
               <a:pPr algn="l" marL="0" marR="0" indent="0">
                 <a:lnSpc>
-                  <a:spcPts val="880"/>
+                  <a:spcPts val="1120"/>
                 </a:lnSpc>
                 <a:spcBef>
                   <a:spcPts val="0"/>
@@ -4473,7 +4473,7 @@
                 </a:spcAft>
               </a:pPr>
               <a:r>
-                <a:rPr sz="880">
+                <a:rPr sz="1120">
                   <a:solidFill>
                     <a:srgbClr val="4D4D4D">
                       <a:alpha val="100000"/>
@@ -4495,8 +4495,8 @@
           </p:nvSpPr>
           <p:spPr>
             <a:xfrm>
-              <a:off x="692708" y="3858272"/>
-              <a:ext cx="62179" cy="80101"/>
+              <a:off x="756929" y="3860262"/>
+              <a:ext cx="79004" cy="101955"/>
             </a:xfrm>
             <a:prstGeom prst="rect">
               <a:avLst/>
@@ -4509,7 +4509,7 @@
             <a:p>
               <a:pPr algn="l" marL="0" marR="0" indent="0">
                 <a:lnSpc>
-                  <a:spcPts val="880"/>
+                  <a:spcPts val="1120"/>
                 </a:lnSpc>
                 <a:spcBef>
                   <a:spcPts val="0"/>
@@ -4519,7 +4519,7 @@
                 </a:spcAft>
               </a:pPr>
               <a:r>
-                <a:rPr sz="880">
+                <a:rPr sz="1120">
                   <a:solidFill>
                     <a:srgbClr val="4D4D4D">
                       <a:alpha val="100000"/>
@@ -4541,8 +4541,8 @@
           </p:nvSpPr>
           <p:spPr>
             <a:xfrm>
-              <a:off x="692708" y="3028808"/>
-              <a:ext cx="62179" cy="80101"/>
+              <a:off x="756929" y="3086593"/>
+              <a:ext cx="79004" cy="101955"/>
             </a:xfrm>
             <a:prstGeom prst="rect">
               <a:avLst/>
@@ -4555,7 +4555,7 @@
             <a:p>
               <a:pPr algn="l" marL="0" marR="0" indent="0">
                 <a:lnSpc>
-                  <a:spcPts val="880"/>
+                  <a:spcPts val="1120"/>
                 </a:lnSpc>
                 <a:spcBef>
                   <a:spcPts val="0"/>
@@ -4565,7 +4565,7 @@
                 </a:spcAft>
               </a:pPr>
               <a:r>
-                <a:rPr sz="880">
+                <a:rPr sz="1120">
                   <a:solidFill>
                     <a:srgbClr val="4D4D4D">
                       <a:alpha val="100000"/>
@@ -4587,8 +4587,8 @@
           </p:nvSpPr>
           <p:spPr>
             <a:xfrm>
-              <a:off x="692708" y="2199345"/>
-              <a:ext cx="62179" cy="80101"/>
+              <a:off x="756929" y="2312925"/>
+              <a:ext cx="79004" cy="101955"/>
             </a:xfrm>
             <a:prstGeom prst="rect">
               <a:avLst/>
@@ -4601,7 +4601,7 @@
             <a:p>
               <a:pPr algn="l" marL="0" marR="0" indent="0">
                 <a:lnSpc>
-                  <a:spcPts val="880"/>
+                  <a:spcPts val="1120"/>
                 </a:lnSpc>
                 <a:spcBef>
                   <a:spcPts val="0"/>
@@ -4611,7 +4611,7 @@
                 </a:spcAft>
               </a:pPr>
               <a:r>
-                <a:rPr sz="880">
+                <a:rPr sz="1120">
                   <a:solidFill>
                     <a:srgbClr val="4D4D4D">
                       <a:alpha val="100000"/>
@@ -4633,8 +4633,8 @@
           </p:nvSpPr>
           <p:spPr>
             <a:xfrm>
-              <a:off x="2423864" y="5785772"/>
-              <a:ext cx="155356" cy="80101"/>
+              <a:off x="2475630" y="5693022"/>
+              <a:ext cx="197510" cy="101955"/>
             </a:xfrm>
             <a:prstGeom prst="rect">
               <a:avLst/>
@@ -4647,7 +4647,7 @@
             <a:p>
               <a:pPr algn="l" marL="0" marR="0" indent="0">
                 <a:lnSpc>
-                  <a:spcPts val="880"/>
+                  <a:spcPts val="1120"/>
                 </a:lnSpc>
                 <a:spcBef>
                   <a:spcPts val="0"/>
@@ -4657,7 +4657,7 @@
                 </a:spcAft>
               </a:pPr>
               <a:r>
-                <a:rPr sz="880">
+                <a:rPr sz="1120">
                   <a:solidFill>
                     <a:srgbClr val="4D4D4D">
                       <a:alpha val="100000"/>
@@ -4679,8 +4679,8 @@
           </p:nvSpPr>
           <p:spPr>
             <a:xfrm>
-              <a:off x="4196521" y="5785772"/>
-              <a:ext cx="155356" cy="80101"/>
+              <a:off x="4221672" y="5693022"/>
+              <a:ext cx="197510" cy="101955"/>
             </a:xfrm>
             <a:prstGeom prst="rect">
               <a:avLst/>
@@ -4693,7 +4693,7 @@
             <a:p>
               <a:pPr algn="l" marL="0" marR="0" indent="0">
                 <a:lnSpc>
-                  <a:spcPts val="880"/>
+                  <a:spcPts val="1120"/>
                 </a:lnSpc>
                 <a:spcBef>
                   <a:spcPts val="0"/>
@@ -4703,7 +4703,7 @@
                 </a:spcAft>
               </a:pPr>
               <a:r>
-                <a:rPr sz="880">
+                <a:rPr sz="1120">
                   <a:solidFill>
                     <a:srgbClr val="4D4D4D">
                       <a:alpha val="100000"/>
@@ -4725,8 +4725,8 @@
           </p:nvSpPr>
           <p:spPr>
             <a:xfrm>
-              <a:off x="5969179" y="5785772"/>
-              <a:ext cx="155356" cy="80101"/>
+              <a:off x="5967715" y="5693022"/>
+              <a:ext cx="197510" cy="101955"/>
             </a:xfrm>
             <a:prstGeom prst="rect">
               <a:avLst/>
@@ -4739,7 +4739,7 @@
             <a:p>
               <a:pPr algn="l" marL="0" marR="0" indent="0">
                 <a:lnSpc>
-                  <a:spcPts val="880"/>
+                  <a:spcPts val="1120"/>
                 </a:lnSpc>
                 <a:spcBef>
                   <a:spcPts val="0"/>
@@ -4749,7 +4749,7 @@
                 </a:spcAft>
               </a:pPr>
               <a:r>
-                <a:rPr sz="880">
+                <a:rPr sz="1120">
                   <a:solidFill>
                     <a:srgbClr val="4D4D4D">
                       <a:alpha val="100000"/>
@@ -4771,8 +4771,8 @@
           </p:nvSpPr>
           <p:spPr>
             <a:xfrm>
-              <a:off x="7741836" y="5785772"/>
-              <a:ext cx="155356" cy="80101"/>
+              <a:off x="7713757" y="5693022"/>
+              <a:ext cx="197510" cy="101955"/>
             </a:xfrm>
             <a:prstGeom prst="rect">
               <a:avLst/>
@@ -4785,7 +4785,7 @@
             <a:p>
               <a:pPr algn="l" marL="0" marR="0" indent="0">
                 <a:lnSpc>
-                  <a:spcPts val="880"/>
+                  <a:spcPts val="1120"/>
                 </a:lnSpc>
                 <a:spcBef>
                   <a:spcPts val="0"/>
@@ -4795,7 +4795,7 @@
                 </a:spcAft>
               </a:pPr>
               <a:r>
-                <a:rPr sz="880">
+                <a:rPr sz="1120">
                   <a:solidFill>
                     <a:srgbClr val="4D4D4D">
                       <a:alpha val="100000"/>
@@ -4817,8 +4817,8 @@
           </p:nvSpPr>
           <p:spPr>
             <a:xfrm>
-              <a:off x="3879271" y="5925448"/>
-              <a:ext cx="1676186" cy="100218"/>
+              <a:off x="3690153" y="5870717"/>
+              <a:ext cx="2133569" cy="127558"/>
             </a:xfrm>
             <a:prstGeom prst="rect">
               <a:avLst/>
@@ -4831,7 +4831,7 @@
             <a:p>
               <a:pPr algn="l" marL="0" marR="0" indent="0">
                 <a:lnSpc>
-                  <a:spcPts val="1100"/>
+                  <a:spcPts val="1400"/>
                 </a:lnSpc>
                 <a:spcBef>
                   <a:spcPts val="0"/>
@@ -4841,7 +4841,7 @@
                 </a:spcAft>
               </a:pPr>
               <a:r>
-                <a:rPr sz="1100">
+                <a:rPr sz="1400">
                   <a:solidFill>
                     <a:srgbClr val="000000">
                       <a:alpha val="100000"/>
@@ -4863,8 +4863,8 @@
           </p:nvSpPr>
           <p:spPr>
             <a:xfrm rot="-5400000">
-              <a:off x="68446" y="3848213"/>
-              <a:ext cx="1016904" cy="100218"/>
+              <a:off x="-37527" y="3847460"/>
+              <a:ext cx="1294150" cy="127558"/>
             </a:xfrm>
             <a:prstGeom prst="rect">
               <a:avLst/>
@@ -4877,7 +4877,7 @@
             <a:p>
               <a:pPr algn="l" marL="0" marR="0" indent="0">
                 <a:lnSpc>
-                  <a:spcPts val="1100"/>
+                  <a:spcPts val="1400"/>
                 </a:lnSpc>
                 <a:spcBef>
                   <a:spcPts val="0"/>
@@ -4887,7 +4887,7 @@
                 </a:spcAft>
               </a:pPr>
               <a:r>
-                <a:rPr sz="1100">
+                <a:rPr sz="1400">
                   <a:solidFill>
                     <a:srgbClr val="000000">
                       <a:alpha val="100000"/>
@@ -4909,8 +4909,8 @@
           </p:nvSpPr>
           <p:spPr>
             <a:xfrm>
-              <a:off x="817517" y="1896563"/>
-              <a:ext cx="4166463" cy="82021"/>
+              <a:off x="915645" y="1977589"/>
+              <a:ext cx="5556900" cy="109362"/>
             </a:xfrm>
             <a:prstGeom prst="rect">
               <a:avLst/>
@@ -4923,7 +4923,7 @@
             <a:p>
               <a:pPr algn="l" marL="0" marR="0" indent="0">
                 <a:lnSpc>
-                  <a:spcPts val="900"/>
+                  <a:spcPts val="1200"/>
                 </a:lnSpc>
                 <a:spcBef>
                   <a:spcPts val="0"/>
@@ -4933,7 +4933,7 @@
                 </a:spcAft>
               </a:pPr>
               <a:r>
-                <a:rPr sz="900">
+                <a:rPr sz="1200">
                   <a:solidFill>
                     <a:srgbClr val="404040">
                       <a:alpha val="100000"/>
@@ -4955,8 +4955,8 @@
           </p:nvSpPr>
           <p:spPr>
             <a:xfrm>
-              <a:off x="817517" y="1669789"/>
-              <a:ext cx="2486253" cy="120152"/>
+              <a:off x="915645" y="1688767"/>
+              <a:ext cx="3165104" cy="153070"/>
             </a:xfrm>
             <a:prstGeom prst="rect">
               <a:avLst/>
@@ -4969,7 +4969,7 @@
             <a:p>
               <a:pPr algn="l" marL="0" marR="0" indent="0">
                 <a:lnSpc>
-                  <a:spcPts val="1320"/>
+                  <a:spcPts val="1680"/>
                 </a:lnSpc>
                 <a:spcBef>
                   <a:spcPts val="0"/>
@@ -4979,7 +4979,7 @@
                 </a:spcAft>
               </a:pPr>
               <a:r>
-                <a:rPr sz="1320">
+                <a:rPr sz="1680">
                   <a:solidFill>
                     <a:srgbClr val="000000">
                       <a:alpha val="100000"/>
